--- a/Werkplaats2_Groep3_Eindpresentatie.pptx
+++ b/Werkplaats2_Groep3_Eindpresentatie.pptx
@@ -3662,7 +3662,7 @@
                 </a:solidFill>
                 <a:latin typeface="Calibri"/>
               </a:rPr>
-              <a:t>We hebben 25 producten en indicatoren verzameld over de periode dec 2015 – heden.</a:t>
+              <a:t>We hebben 20 producten en indicatoren verzameld over de periode dec 2015 – mei 2026.</a:t>
             </a:r>
           </a:p>
           <a:p>
@@ -4103,7 +4103,7 @@
                 </a:solidFill>
                 <a:latin typeface="Calibri"/>
               </a:rPr>
-              <a:t>25 producten/indicatoren ingeladen via Yahoo Finance en FRED.</a:t>
+              <a:t>20 producten/indicatoren ingeladen via Yahoo Finance en FRED.</a:t>
             </a:r>
           </a:p>
           <a:p>

--- a/Werkplaats2_Groep3_Eindpresentatie.pptx
+++ b/Werkplaats2_Groep3_Eindpresentatie.pptx
@@ -3906,7 +3906,7 @@
         <p:spPr>
           <a:xfrm>
             <a:off x="548640" y="1097280"/>
-            <a:ext cx="2926080" cy="548640"/>
+            <a:ext cx="3017520" cy="548640"/>
           </a:xfrm>
           <a:prstGeom prst="rect">
             <a:avLst/>
@@ -3931,7 +3931,7 @@
                 </a:solidFill>
                 <a:latin typeface="Calibri"/>
               </a:rPr>
-              <a:t>Lesweek 1</a:t>
+              <a:t>Onderzoeksvraag 1</a:t>
             </a:r>
           </a:p>
         </p:txBody>
@@ -3944,8 +3944,8 @@
         </p:nvSpPr>
         <p:spPr>
           <a:xfrm>
-            <a:off x="548640" y="1737360"/>
-            <a:ext cx="3017520" cy="4114800"/>
+            <a:off x="548640" y="1828800"/>
+            <a:ext cx="3108960" cy="4389120"/>
           </a:xfrm>
           <a:prstGeom prst="rect">
             <a:avLst/>
@@ -3960,17 +3960,81 @@
           <a:p>
             <a:pPr algn="l">
               <a:lnSpc>
-                <a:spcPct val="105000"/>
-              </a:lnSpc>
-            </a:pPr>
-            <a:r>
-              <a:rPr sz="2800" b="1">
+                <a:spcPct val="130000"/>
+              </a:lnSpc>
+            </a:pPr>
+            <a:r>
+              <a:rPr sz="1400" b="1">
+                <a:solidFill>
+                  <a:srgbClr val="CADCFC"/>
+                </a:solidFill>
+                <a:latin typeface="Calibri"/>
+              </a:rPr>
+              <a:t>Stappen vooraf</a:t>
+            </a:r>
+          </a:p>
+          <a:p>
+            <a:pPr algn="l">
+              <a:lnSpc>
+                <a:spcPct val="130000"/>
+              </a:lnSpc>
+            </a:pPr>
+            <a:r>
+              <a:rPr sz="1400" b="0">
                 <a:solidFill>
                   <a:srgbClr val="FFFFFF"/>
                 </a:solidFill>
-                <a:latin typeface="Georgia"/>
-              </a:rPr>
-              <a:t>Portfolio &amp; data inladen</a:t>
+                <a:latin typeface="Calibri"/>
+              </a:rPr>
+              <a:t>1.  Relevante data geselecteerd</a:t>
+            </a:r>
+          </a:p>
+          <a:p>
+            <a:pPr algn="l">
+              <a:lnSpc>
+                <a:spcPct val="130000"/>
+              </a:lnSpc>
+            </a:pPr>
+            <a:r>
+              <a:rPr sz="1400" b="0">
+                <a:solidFill>
+                  <a:srgbClr val="FFFFFF"/>
+                </a:solidFill>
+                <a:latin typeface="Calibri"/>
+              </a:rPr>
+              <a:t>2.  Correlatie-heatmap gemaakt</a:t>
+            </a:r>
+          </a:p>
+          <a:p>
+            <a:pPr algn="l">
+              <a:lnSpc>
+                <a:spcPct val="130000"/>
+              </a:lnSpc>
+            </a:pPr>
+            <a:r>
+              <a:rPr sz="1400" b="0">
+                <a:solidFill>
+                  <a:srgbClr val="FFFFFF"/>
+                </a:solidFill>
+                <a:latin typeface="Calibri"/>
+              </a:rPr>
+              <a:t>3.  Bubble chart (GDP × Income × Coffee)</a:t>
+            </a:r>
+          </a:p>
+          <a:p>
+            <a:pPr algn="l">
+              <a:lnSpc>
+                <a:spcPct val="130000"/>
+              </a:lnSpc>
+            </a:pPr>
+            <a:r>
+              <a:rPr sz="1400" b="0">
+                <a:solidFill>
+                  <a:srgbClr val="FFFFFF"/>
+                </a:solidFill>
+                <a:latin typeface="Calibri"/>
+              </a:rPr>
+              <a:t>4.  Meervoudige regressie</a:t>
             </a:r>
           </a:p>
         </p:txBody>
@@ -3984,7 +4048,7 @@
         <p:spPr>
           <a:xfrm>
             <a:off x="4480560" y="822960"/>
-            <a:ext cx="7132320" cy="1280160"/>
+            <a:ext cx="7223760" cy="1463040"/>
           </a:xfrm>
           <a:prstGeom prst="rect">
             <a:avLst/>
@@ -4009,7 +4073,7 @@
                 </a:solidFill>
                 <a:latin typeface="Calibri"/>
               </a:rPr>
-              <a:t>Onderzoeksvraag / onderwerp</a:t>
+              <a:t>Vraag</a:t>
             </a:r>
           </a:p>
           <a:p>
@@ -4025,7 +4089,7 @@
                 </a:solidFill>
                 <a:latin typeface="Calibri"/>
               </a:rPr>
-              <a:t>Welke producten en macro-economische data nemen we op en hoe voegen we deze samen tot één dataset?</a:t>
+              <a:t>Wat is het verband tussen GDP, persoonlijk inkomen en de koffieprijs?</a:t>
             </a:r>
           </a:p>
         </p:txBody>
@@ -4038,8 +4102,8 @@
         </p:nvSpPr>
         <p:spPr>
           <a:xfrm>
-            <a:off x="4480560" y="2468880"/>
-            <a:ext cx="7132320" cy="457200"/>
+            <a:off x="4480560" y="2651760"/>
+            <a:ext cx="7223760" cy="822960"/>
           </a:xfrm>
           <a:prstGeom prst="rect">
             <a:avLst/>
@@ -4054,7 +4118,7 @@
           <a:p>
             <a:pPr algn="l">
               <a:lnSpc>
-                <a:spcPct val="110000"/>
+                <a:spcPct val="115000"/>
               </a:lnSpc>
             </a:pPr>
             <a:r>
@@ -4064,7 +4128,23 @@
                 </a:solidFill>
                 <a:latin typeface="Calibri"/>
               </a:rPr>
-              <a:t>Belangrijkste conclusie</a:t>
+              <a:t>Resultaat regressie</a:t>
+            </a:r>
+          </a:p>
+          <a:p>
+            <a:pPr algn="l">
+              <a:lnSpc>
+                <a:spcPct val="115000"/>
+              </a:lnSpc>
+            </a:pPr>
+            <a:r>
+              <a:rPr sz="1600" b="0">
+                <a:solidFill>
+                  <a:srgbClr val="21295C"/>
+                </a:solidFill>
+                <a:latin typeface="Calibri"/>
+              </a:rPr>
+              <a:t>GDP +0,0160  ·  Income −0,0064  ·  R² = 0,80  (p &lt; 0,05)</a:t>
             </a:r>
           </a:p>
         </p:txBody>
@@ -4077,8 +4157,8 @@
         </p:nvSpPr>
         <p:spPr>
           <a:xfrm>
-            <a:off x="4480560" y="2971800"/>
-            <a:ext cx="7223760" cy="3291840"/>
+            <a:off x="4480560" y="3931920"/>
+            <a:ext cx="7223760" cy="457200"/>
           </a:xfrm>
           <a:prstGeom prst="rect">
             <a:avLst/>
@@ -4093,6 +4173,45 @@
           <a:p>
             <a:pPr algn="l">
               <a:lnSpc>
+                <a:spcPct val="110000"/>
+              </a:lnSpc>
+            </a:pPr>
+            <a:r>
+              <a:rPr sz="1400" b="1">
+                <a:solidFill>
+                  <a:srgbClr val="02C39A"/>
+                </a:solidFill>
+                <a:latin typeface="Calibri"/>
+              </a:rPr>
+              <a:t>Conclusie</a:t>
+            </a:r>
+          </a:p>
+        </p:txBody>
+      </p:sp>
+      <p:sp>
+        <p:nvSpPr>
+          <p:cNvPr id="10" name="TextBox 9"/>
+          <p:cNvSpPr txBox="1"/>
+          <p:nvPr/>
+        </p:nvSpPr>
+        <p:spPr>
+          <a:xfrm>
+            <a:off x="4480560" y="4434840"/>
+            <a:ext cx="7223760" cy="2011680"/>
+          </a:xfrm>
+          <a:prstGeom prst="rect">
+            <a:avLst/>
+          </a:prstGeom>
+          <a:noFill/>
+        </p:spPr>
+        <p:txBody>
+          <a:bodyPr wrap="square" anchor="t" lIns="0" rIns="0">
+            <a:spAutoFit/>
+          </a:bodyPr>
+          <a:lstStyle/>
+          <a:p>
+            <a:pPr algn="l">
+              <a:lnSpc>
                 <a:spcPct val="125000"/>
               </a:lnSpc>
             </a:pPr>
@@ -4103,7 +4222,7 @@
                 </a:solidFill>
                 <a:latin typeface="Calibri"/>
               </a:rPr>
-              <a:t>20 producten/indicatoren ingeladen via Yahoo Finance en FRED.</a:t>
+              <a:t>Significant en matige correlatie.</a:t>
             </a:r>
           </a:p>
           <a:p>
@@ -4119,7 +4238,7 @@
                 </a:solidFill>
                 <a:latin typeface="Calibri"/>
               </a:rPr>
-              <a:t>Alle reeksen samengevoegd op datum tot één opgeschoonde dataset.</a:t>
+              <a:t>Door onderlinge samenhang van de X-variabelen is geen</a:t>
             </a:r>
           </a:p>
           <a:p>
@@ -4135,7 +4254,7 @@
                 </a:solidFill>
                 <a:latin typeface="Calibri"/>
               </a:rPr>
-              <a:t>Vormt de basis voor alle vervolganalyses.</a:t>
+              <a:t>zuivere oorzaak-gevolg-conclusie te trekken.</a:t>
             </a:r>
           </a:p>
         </p:txBody>
@@ -4299,7 +4418,7 @@
         <p:spPr>
           <a:xfrm>
             <a:off x="548640" y="1097280"/>
-            <a:ext cx="2926080" cy="548640"/>
+            <a:ext cx="3017520" cy="548640"/>
           </a:xfrm>
           <a:prstGeom prst="rect">
             <a:avLst/>
@@ -4324,7 +4443,7 @@
                 </a:solidFill>
                 <a:latin typeface="Calibri"/>
               </a:rPr>
-              <a:t>Lesweek 2</a:t>
+              <a:t>Onderzoeksvraag 2</a:t>
             </a:r>
           </a:p>
         </p:txBody>
@@ -4337,8 +4456,8 @@
         </p:nvSpPr>
         <p:spPr>
           <a:xfrm>
-            <a:off x="548640" y="1737360"/>
-            <a:ext cx="3017520" cy="4114800"/>
+            <a:off x="548640" y="1828800"/>
+            <a:ext cx="3108960" cy="4389120"/>
           </a:xfrm>
           <a:prstGeom prst="rect">
             <a:avLst/>
@@ -4353,17 +4472,81 @@
           <a:p>
             <a:pPr algn="l">
               <a:lnSpc>
-                <a:spcPct val="105000"/>
-              </a:lnSpc>
-            </a:pPr>
-            <a:r>
-              <a:rPr sz="2800" b="1">
+                <a:spcPct val="130000"/>
+              </a:lnSpc>
+            </a:pPr>
+            <a:r>
+              <a:rPr sz="1400" b="1">
+                <a:solidFill>
+                  <a:srgbClr val="CADCFC"/>
+                </a:solidFill>
+                <a:latin typeface="Calibri"/>
+              </a:rPr>
+              <a:t>Stappen vooraf</a:t>
+            </a:r>
+          </a:p>
+          <a:p>
+            <a:pPr algn="l">
+              <a:lnSpc>
+                <a:spcPct val="130000"/>
+              </a:lnSpc>
+            </a:pPr>
+            <a:r>
+              <a:rPr sz="1400" b="0">
                 <a:solidFill>
                   <a:srgbClr val="FFFFFF"/>
                 </a:solidFill>
-                <a:latin typeface="Georgia"/>
-              </a:rPr>
-              <a:t>Statistische analyse (.describe)</a:t>
+                <a:latin typeface="Calibri"/>
+              </a:rPr>
+              <a:t>1.  Data geselecteerd</a:t>
+            </a:r>
+          </a:p>
+          <a:p>
+            <a:pPr algn="l">
+              <a:lnSpc>
+                <a:spcPct val="130000"/>
+              </a:lnSpc>
+            </a:pPr>
+            <a:r>
+              <a:rPr sz="1400" b="0">
+                <a:solidFill>
+                  <a:srgbClr val="FFFFFF"/>
+                </a:solidFill>
+                <a:latin typeface="Calibri"/>
+              </a:rPr>
+              <a:t>2.  Heatmap bekeken</a:t>
+            </a:r>
+          </a:p>
+          <a:p>
+            <a:pPr algn="l">
+              <a:lnSpc>
+                <a:spcPct val="130000"/>
+              </a:lnSpc>
+            </a:pPr>
+            <a:r>
+              <a:rPr sz="1400" b="0">
+                <a:solidFill>
+                  <a:srgbClr val="FFFFFF"/>
+                </a:solidFill>
+                <a:latin typeface="Calibri"/>
+              </a:rPr>
+              <a:t>3.  Bubble chart (Broadcom × Coffee)</a:t>
+            </a:r>
+          </a:p>
+          <a:p>
+            <a:pPr algn="l">
+              <a:lnSpc>
+                <a:spcPct val="130000"/>
+              </a:lnSpc>
+            </a:pPr>
+            <a:r>
+              <a:rPr sz="1400" b="0">
+                <a:solidFill>
+                  <a:srgbClr val="FFFFFF"/>
+                </a:solidFill>
+                <a:latin typeface="Calibri"/>
+              </a:rPr>
+              <a:t>4.  Enkelvoudige regressie</a:t>
             </a:r>
           </a:p>
         </p:txBody>
@@ -4377,7 +4560,7 @@
         <p:spPr>
           <a:xfrm>
             <a:off x="4480560" y="822960"/>
-            <a:ext cx="7132320" cy="1280160"/>
+            <a:ext cx="7223760" cy="1463040"/>
           </a:xfrm>
           <a:prstGeom prst="rect">
             <a:avLst/>
@@ -4402,7 +4585,7 @@
                 </a:solidFill>
                 <a:latin typeface="Calibri"/>
               </a:rPr>
-              <a:t>Onderzoeksvraag / onderwerp</a:t>
+              <a:t>Vraag</a:t>
             </a:r>
           </a:p>
           <a:p>
@@ -4418,7 +4601,7 @@
                 </a:solidFill>
                 <a:latin typeface="Calibri"/>
               </a:rPr>
-              <a:t>Wat zijn de statistische kenmerken van de dagelijkse rendementen van de portfolio?</a:t>
+              <a:t>Wat is het verband van Broadcom op de koffieprijs?</a:t>
             </a:r>
           </a:p>
         </p:txBody>
@@ -4431,8 +4614,8 @@
         </p:nvSpPr>
         <p:spPr>
           <a:xfrm>
-            <a:off x="4480560" y="2468880"/>
-            <a:ext cx="7132320" cy="457200"/>
+            <a:off x="4480560" y="2651760"/>
+            <a:ext cx="7223760" cy="822960"/>
           </a:xfrm>
           <a:prstGeom prst="rect">
             <a:avLst/>
@@ -4447,7 +4630,7 @@
           <a:p>
             <a:pPr algn="l">
               <a:lnSpc>
-                <a:spcPct val="110000"/>
+                <a:spcPct val="115000"/>
               </a:lnSpc>
             </a:pPr>
             <a:r>
@@ -4457,7 +4640,23 @@
                 </a:solidFill>
                 <a:latin typeface="Calibri"/>
               </a:rPr>
-              <a:t>Belangrijkste conclusie</a:t>
+              <a:t>Resultaat regressie</a:t>
+            </a:r>
+          </a:p>
+          <a:p>
+            <a:pPr algn="l">
+              <a:lnSpc>
+                <a:spcPct val="115000"/>
+              </a:lnSpc>
+            </a:pPr>
+            <a:r>
+              <a:rPr sz="1600" b="0">
+                <a:solidFill>
+                  <a:srgbClr val="21295C"/>
+                </a:solidFill>
+                <a:latin typeface="Calibri"/>
+              </a:rPr>
+              <a:t>Broadcom +0,5205  ·  R² = 0,94  (p &lt; 0,05)</a:t>
             </a:r>
           </a:p>
         </p:txBody>
@@ -4470,8 +4669,8 @@
         </p:nvSpPr>
         <p:spPr>
           <a:xfrm>
-            <a:off x="4480560" y="2971800"/>
-            <a:ext cx="7223760" cy="3291840"/>
+            <a:off x="4480560" y="3931920"/>
+            <a:ext cx="7223760" cy="457200"/>
           </a:xfrm>
           <a:prstGeom prst="rect">
             <a:avLst/>
@@ -4486,6 +4685,45 @@
           <a:p>
             <a:pPr algn="l">
               <a:lnSpc>
+                <a:spcPct val="110000"/>
+              </a:lnSpc>
+            </a:pPr>
+            <a:r>
+              <a:rPr sz="1400" b="1">
+                <a:solidFill>
+                  <a:srgbClr val="02C39A"/>
+                </a:solidFill>
+                <a:latin typeface="Calibri"/>
+              </a:rPr>
+              <a:t>Conclusie</a:t>
+            </a:r>
+          </a:p>
+        </p:txBody>
+      </p:sp>
+      <p:sp>
+        <p:nvSpPr>
+          <p:cNvPr id="10" name="TextBox 9"/>
+          <p:cNvSpPr txBox="1"/>
+          <p:nvPr/>
+        </p:nvSpPr>
+        <p:spPr>
+          <a:xfrm>
+            <a:off x="4480560" y="4434840"/>
+            <a:ext cx="7223760" cy="2011680"/>
+          </a:xfrm>
+          <a:prstGeom prst="rect">
+            <a:avLst/>
+          </a:prstGeom>
+          <a:noFill/>
+        </p:spPr>
+        <p:txBody>
+          <a:bodyPr wrap="square" anchor="t" lIns="0" rIns="0">
+            <a:spAutoFit/>
+          </a:bodyPr>
+          <a:lstStyle/>
+          <a:p>
+            <a:pPr algn="l">
+              <a:lnSpc>
                 <a:spcPct val="125000"/>
               </a:lnSpc>
             </a:pPr>
@@ -4496,7 +4734,7 @@
                 </a:solidFill>
                 <a:latin typeface="Calibri"/>
               </a:rPr>
-              <a:t>Gemiddelde dagrendementen liggen dicht bij 0, met duidelijke verschillen in spreiding.</a:t>
+              <a:t>Statistisch sterk verband, maar inhoudelijk niet logisch.</a:t>
             </a:r>
           </a:p>
           <a:p>
@@ -4512,7 +4750,7 @@
                 </a:solidFill>
                 <a:latin typeface="Calibri"/>
               </a:rPr>
-              <a:t>Grondstoffen en crypto vertonen de hoogste volatiliteit (standaardafwijking).</a:t>
+              <a:t>Waarschijnlijk schijncorrelatie: beide stijgen over de tijd.</a:t>
             </a:r>
           </a:p>
           <a:p>
@@ -4528,7 +4766,7 @@
                 </a:solidFill>
                 <a:latin typeface="Calibri"/>
               </a:rPr>
-              <a:t>Extreme uitschieters (min/max) wijzen op staartrisico in 2020.</a:t>
+              <a:t>Geen betekenisvolle conclusie.</a:t>
             </a:r>
           </a:p>
         </p:txBody>
@@ -4692,7 +4930,7 @@
         <p:spPr>
           <a:xfrm>
             <a:off x="548640" y="1097280"/>
-            <a:ext cx="2926080" cy="548640"/>
+            <a:ext cx="3017520" cy="548640"/>
           </a:xfrm>
           <a:prstGeom prst="rect">
             <a:avLst/>
@@ -4717,7 +4955,7 @@
                 </a:solidFill>
                 <a:latin typeface="Calibri"/>
               </a:rPr>
-              <a:t>Lesweek 3</a:t>
+              <a:t>Onderzoeksvraag 3</a:t>
             </a:r>
           </a:p>
         </p:txBody>
@@ -4730,8 +4968,8 @@
         </p:nvSpPr>
         <p:spPr>
           <a:xfrm>
-            <a:off x="548640" y="1737360"/>
-            <a:ext cx="3017520" cy="4114800"/>
+            <a:off x="548640" y="1828800"/>
+            <a:ext cx="3108960" cy="4389120"/>
           </a:xfrm>
           <a:prstGeom prst="rect">
             <a:avLst/>
@@ -4746,17 +4984,81 @@
           <a:p>
             <a:pPr algn="l">
               <a:lnSpc>
-                <a:spcPct val="105000"/>
-              </a:lnSpc>
-            </a:pPr>
-            <a:r>
-              <a:rPr sz="2800" b="1">
+                <a:spcPct val="130000"/>
+              </a:lnSpc>
+            </a:pPr>
+            <a:r>
+              <a:rPr sz="1400" b="1">
+                <a:solidFill>
+                  <a:srgbClr val="CADCFC"/>
+                </a:solidFill>
+                <a:latin typeface="Calibri"/>
+              </a:rPr>
+              <a:t>Stappen vooraf</a:t>
+            </a:r>
+          </a:p>
+          <a:p>
+            <a:pPr algn="l">
+              <a:lnSpc>
+                <a:spcPct val="130000"/>
+              </a:lnSpc>
+            </a:pPr>
+            <a:r>
+              <a:rPr sz="1400" b="0">
                 <a:solidFill>
                   <a:srgbClr val="FFFFFF"/>
                 </a:solidFill>
-                <a:latin typeface="Georgia"/>
-              </a:rPr>
-              <a:t>Regressie-analyse</a:t>
+                <a:latin typeface="Calibri"/>
+              </a:rPr>
+              <a:t>1.  Data geselecteerd</a:t>
+            </a:r>
+          </a:p>
+          <a:p>
+            <a:pPr algn="l">
+              <a:lnSpc>
+                <a:spcPct val="130000"/>
+              </a:lnSpc>
+            </a:pPr>
+            <a:r>
+              <a:rPr sz="1400" b="0">
+                <a:solidFill>
+                  <a:srgbClr val="FFFFFF"/>
+                </a:solidFill>
+                <a:latin typeface="Calibri"/>
+              </a:rPr>
+              <a:t>2.  Heatmap bekeken</a:t>
+            </a:r>
+          </a:p>
+          <a:p>
+            <a:pPr algn="l">
+              <a:lnSpc>
+                <a:spcPct val="130000"/>
+              </a:lnSpc>
+            </a:pPr>
+            <a:r>
+              <a:rPr sz="1400" b="0">
+                <a:solidFill>
+                  <a:srgbClr val="FFFFFF"/>
+                </a:solidFill>
+                <a:latin typeface="Calibri"/>
+              </a:rPr>
+              <a:t>3.  Bubble chart (Copper × ASML)</a:t>
+            </a:r>
+          </a:p>
+          <a:p>
+            <a:pPr algn="l">
+              <a:lnSpc>
+                <a:spcPct val="130000"/>
+              </a:lnSpc>
+            </a:pPr>
+            <a:r>
+              <a:rPr sz="1400" b="0">
+                <a:solidFill>
+                  <a:srgbClr val="FFFFFF"/>
+                </a:solidFill>
+                <a:latin typeface="Calibri"/>
+              </a:rPr>
+              <a:t>4.  Enkelvoudige regressie</a:t>
             </a:r>
           </a:p>
         </p:txBody>
@@ -4770,7 +5072,7 @@
         <p:spPr>
           <a:xfrm>
             <a:off x="4480560" y="822960"/>
-            <a:ext cx="7132320" cy="1280160"/>
+            <a:ext cx="7223760" cy="1463040"/>
           </a:xfrm>
           <a:prstGeom prst="rect">
             <a:avLst/>
@@ -4795,7 +5097,7 @@
                 </a:solidFill>
                 <a:latin typeface="Calibri"/>
               </a:rPr>
-              <a:t>Onderzoeksvraag / onderwerp</a:t>
+              <a:t>Vraag</a:t>
             </a:r>
           </a:p>
           <a:p>
@@ -4811,7 +5113,7 @@
                 </a:solidFill>
                 <a:latin typeface="Calibri"/>
               </a:rPr>
-              <a:t>Wat is het verband tussen o.a. GDP, inkomen, Apple, koper en goud op koersen als Coffee en ASML?</a:t>
+              <a:t>Hoeveel invloed heeft de koperprijs op de koers van ASML?</a:t>
             </a:r>
           </a:p>
         </p:txBody>
@@ -4824,8 +5126,8 @@
         </p:nvSpPr>
         <p:spPr>
           <a:xfrm>
-            <a:off x="4480560" y="2468880"/>
-            <a:ext cx="7132320" cy="457200"/>
+            <a:off x="4480560" y="2651760"/>
+            <a:ext cx="7223760" cy="822960"/>
           </a:xfrm>
           <a:prstGeom prst="rect">
             <a:avLst/>
@@ -4840,7 +5142,7 @@
           <a:p>
             <a:pPr algn="l">
               <a:lnSpc>
-                <a:spcPct val="110000"/>
+                <a:spcPct val="115000"/>
               </a:lnSpc>
             </a:pPr>
             <a:r>
@@ -4850,7 +5152,23 @@
                 </a:solidFill>
                 <a:latin typeface="Calibri"/>
               </a:rPr>
-              <a:t>Belangrijkste conclusie</a:t>
+              <a:t>Resultaat regressie</a:t>
+            </a:r>
+          </a:p>
+          <a:p>
+            <a:pPr algn="l">
+              <a:lnSpc>
+                <a:spcPct val="115000"/>
+              </a:lnSpc>
+            </a:pPr>
+            <a:r>
+              <a:rPr sz="1600" b="0">
+                <a:solidFill>
+                  <a:srgbClr val="21295C"/>
+                </a:solidFill>
+                <a:latin typeface="Calibri"/>
+              </a:rPr>
+              <a:t>Copper +0,1560  ·  R² = 0,87  (p &lt; 0,05)</a:t>
             </a:r>
           </a:p>
         </p:txBody>
@@ -4863,8 +5181,8 @@
         </p:nvSpPr>
         <p:spPr>
           <a:xfrm>
-            <a:off x="4480560" y="2971800"/>
-            <a:ext cx="7223760" cy="3291840"/>
+            <a:off x="4480560" y="3931920"/>
+            <a:ext cx="7223760" cy="457200"/>
           </a:xfrm>
           <a:prstGeom prst="rect">
             <a:avLst/>
@@ -4879,6 +5197,45 @@
           <a:p>
             <a:pPr algn="l">
               <a:lnSpc>
+                <a:spcPct val="110000"/>
+              </a:lnSpc>
+            </a:pPr>
+            <a:r>
+              <a:rPr sz="1400" b="1">
+                <a:solidFill>
+                  <a:srgbClr val="02C39A"/>
+                </a:solidFill>
+                <a:latin typeface="Calibri"/>
+              </a:rPr>
+              <a:t>Conclusie</a:t>
+            </a:r>
+          </a:p>
+        </p:txBody>
+      </p:sp>
+      <p:sp>
+        <p:nvSpPr>
+          <p:cNvPr id="10" name="TextBox 9"/>
+          <p:cNvSpPr txBox="1"/>
+          <p:nvPr/>
+        </p:nvSpPr>
+        <p:spPr>
+          <a:xfrm>
+            <a:off x="4480560" y="4434840"/>
+            <a:ext cx="7223760" cy="2011680"/>
+          </a:xfrm>
+          <a:prstGeom prst="rect">
+            <a:avLst/>
+          </a:prstGeom>
+          <a:noFill/>
+        </p:spPr>
+        <p:txBody>
+          <a:bodyPr wrap="square" anchor="t" lIns="0" rIns="0">
+            <a:spAutoFit/>
+          </a:bodyPr>
+          <a:lstStyle/>
+          <a:p>
+            <a:pPr algn="l">
+              <a:lnSpc>
                 <a:spcPct val="125000"/>
               </a:lnSpc>
             </a:pPr>
@@ -4889,7 +5246,7 @@
                 </a:solidFill>
                 <a:latin typeface="Calibri"/>
               </a:rPr>
-              <a:t>Vraag 1: GDP + Income → Coffee is significant (p&lt;0,05), matige correlatie.</a:t>
+              <a:t>Significant en sterke correlatie.</a:t>
             </a:r>
           </a:p>
           <a:p>
@@ -4905,7 +5262,7 @@
                 </a:solidFill>
                 <a:latin typeface="Calibri"/>
               </a:rPr>
-              <a:t>Bij Apple als verklarende variabele: sterke correlatie (R² &gt; 0,8).</a:t>
+              <a:t>Logisch: meer vraag naar chips → ASML stijgt,</a:t>
             </a:r>
           </a:p>
           <a:p>
@@ -4921,7 +5278,7 @@
                 </a:solidFill>
                 <a:latin typeface="Calibri"/>
               </a:rPr>
-              <a:t>Hoogconjunctuur drijft Apple en koper omhoog; goud reageert juist zwakker.</a:t>
+              <a:t>en chips gebruiken veel koper → koperprijs stijgt mee.</a:t>
             </a:r>
           </a:p>
         </p:txBody>
@@ -5085,7 +5442,7 @@
         <p:spPr>
           <a:xfrm>
             <a:off x="548640" y="1097280"/>
-            <a:ext cx="2926080" cy="548640"/>
+            <a:ext cx="3017520" cy="548640"/>
           </a:xfrm>
           <a:prstGeom prst="rect">
             <a:avLst/>
@@ -5110,7 +5467,7 @@
                 </a:solidFill>
                 <a:latin typeface="Calibri"/>
               </a:rPr>
-              <a:t>Lesweek 4</a:t>
+              <a:t>Onderzoeksvraag 4</a:t>
             </a:r>
           </a:p>
         </p:txBody>
@@ -5123,8 +5480,8 @@
         </p:nvSpPr>
         <p:spPr>
           <a:xfrm>
-            <a:off x="548640" y="1737360"/>
-            <a:ext cx="3017520" cy="4114800"/>
+            <a:off x="548640" y="1828800"/>
+            <a:ext cx="3108960" cy="4389120"/>
           </a:xfrm>
           <a:prstGeom prst="rect">
             <a:avLst/>
@@ -5139,17 +5496,81 @@
           <a:p>
             <a:pPr algn="l">
               <a:lnSpc>
-                <a:spcPct val="105000"/>
-              </a:lnSpc>
-            </a:pPr>
-            <a:r>
-              <a:rPr sz="2800" b="1">
+                <a:spcPct val="130000"/>
+              </a:lnSpc>
+            </a:pPr>
+            <a:r>
+              <a:rPr sz="1400" b="1">
+                <a:solidFill>
+                  <a:srgbClr val="CADCFC"/>
+                </a:solidFill>
+                <a:latin typeface="Calibri"/>
+              </a:rPr>
+              <a:t>Stappen vooraf</a:t>
+            </a:r>
+          </a:p>
+          <a:p>
+            <a:pPr algn="l">
+              <a:lnSpc>
+                <a:spcPct val="130000"/>
+              </a:lnSpc>
+            </a:pPr>
+            <a:r>
+              <a:rPr sz="1400" b="0">
                 <a:solidFill>
                   <a:srgbClr val="FFFFFF"/>
                 </a:solidFill>
-                <a:latin typeface="Georgia"/>
-              </a:rPr>
-              <a:t>Tijdreeksanalyse (seasonal decompose)</a:t>
+                <a:latin typeface="Calibri"/>
+              </a:rPr>
+              <a:t>1.  Data geselecteerd</a:t>
+            </a:r>
+          </a:p>
+          <a:p>
+            <a:pPr algn="l">
+              <a:lnSpc>
+                <a:spcPct val="130000"/>
+              </a:lnSpc>
+            </a:pPr>
+            <a:r>
+              <a:rPr sz="1400" b="0">
+                <a:solidFill>
+                  <a:srgbClr val="FFFFFF"/>
+                </a:solidFill>
+                <a:latin typeface="Calibri"/>
+              </a:rPr>
+              <a:t>2.  Heatmap bekeken</a:t>
+            </a:r>
+          </a:p>
+          <a:p>
+            <a:pPr algn="l">
+              <a:lnSpc>
+                <a:spcPct val="130000"/>
+              </a:lnSpc>
+            </a:pPr>
+            <a:r>
+              <a:rPr sz="1400" b="0">
+                <a:solidFill>
+                  <a:srgbClr val="FFFFFF"/>
+                </a:solidFill>
+                <a:latin typeface="Calibri"/>
+              </a:rPr>
+              <a:t>3.  Bubble chart (Gasoline × Oil × Shell)</a:t>
+            </a:r>
+          </a:p>
+          <a:p>
+            <a:pPr algn="l">
+              <a:lnSpc>
+                <a:spcPct val="130000"/>
+              </a:lnSpc>
+            </a:pPr>
+            <a:r>
+              <a:rPr sz="1400" b="0">
+                <a:solidFill>
+                  <a:srgbClr val="FFFFFF"/>
+                </a:solidFill>
+                <a:latin typeface="Calibri"/>
+              </a:rPr>
+              <a:t>4.  Meervoudige regressie</a:t>
             </a:r>
           </a:p>
         </p:txBody>
@@ -5163,7 +5584,7 @@
         <p:spPr>
           <a:xfrm>
             <a:off x="4480560" y="822960"/>
-            <a:ext cx="7132320" cy="1280160"/>
+            <a:ext cx="7223760" cy="1463040"/>
           </a:xfrm>
           <a:prstGeom prst="rect">
             <a:avLst/>
@@ -5188,7 +5609,7 @@
                 </a:solidFill>
                 <a:latin typeface="Calibri"/>
               </a:rPr>
-              <a:t>Onderzoeksvraag / onderwerp</a:t>
+              <a:t>Vraag</a:t>
             </a:r>
           </a:p>
           <a:p>
@@ -5204,7 +5625,7 @@
                 </a:solidFill>
                 <a:latin typeface="Calibri"/>
               </a:rPr>
-              <a:t>Vertonen Shell, olie en GDP een trend, een seizoenspatroon of een random walk?</a:t>
+              <a:t>Waarom lijkt er minder verband tussen benzine, olie en de koers van Shell?</a:t>
             </a:r>
           </a:p>
         </p:txBody>
@@ -5217,8 +5638,8 @@
         </p:nvSpPr>
         <p:spPr>
           <a:xfrm>
-            <a:off x="4480560" y="2468880"/>
-            <a:ext cx="7132320" cy="457200"/>
+            <a:off x="4480560" y="2651760"/>
+            <a:ext cx="7223760" cy="822960"/>
           </a:xfrm>
           <a:prstGeom prst="rect">
             <a:avLst/>
@@ -5233,7 +5654,7 @@
           <a:p>
             <a:pPr algn="l">
               <a:lnSpc>
-                <a:spcPct val="110000"/>
+                <a:spcPct val="115000"/>
               </a:lnSpc>
             </a:pPr>
             <a:r>
@@ -5243,7 +5664,23 @@
                 </a:solidFill>
                 <a:latin typeface="Calibri"/>
               </a:rPr>
-              <a:t>Belangrijkste conclusie</a:t>
+              <a:t>Resultaat regressie</a:t>
+            </a:r>
+          </a:p>
+          <a:p>
+            <a:pPr algn="l">
+              <a:lnSpc>
+                <a:spcPct val="115000"/>
+              </a:lnSpc>
+            </a:pPr>
+            <a:r>
+              <a:rPr sz="1600" b="0">
+                <a:solidFill>
+                  <a:srgbClr val="21295C"/>
+                </a:solidFill>
+                <a:latin typeface="Calibri"/>
+              </a:rPr>
+              <a:t>Gasoline +11,6507  ·  Oil +0,0891  ·  R² = 0,36  (p &lt; 0,05)</a:t>
             </a:r>
           </a:p>
         </p:txBody>
@@ -5256,8 +5693,8 @@
         </p:nvSpPr>
         <p:spPr>
           <a:xfrm>
-            <a:off x="4480560" y="2971800"/>
-            <a:ext cx="7223760" cy="3291840"/>
+            <a:off x="4480560" y="3931920"/>
+            <a:ext cx="7223760" cy="457200"/>
           </a:xfrm>
           <a:prstGeom prst="rect">
             <a:avLst/>
@@ -5272,6 +5709,45 @@
           <a:p>
             <a:pPr algn="l">
               <a:lnSpc>
+                <a:spcPct val="110000"/>
+              </a:lnSpc>
+            </a:pPr>
+            <a:r>
+              <a:rPr sz="1400" b="1">
+                <a:solidFill>
+                  <a:srgbClr val="02C39A"/>
+                </a:solidFill>
+                <a:latin typeface="Calibri"/>
+              </a:rPr>
+              <a:t>Conclusie</a:t>
+            </a:r>
+          </a:p>
+        </p:txBody>
+      </p:sp>
+      <p:sp>
+        <p:nvSpPr>
+          <p:cNvPr id="10" name="TextBox 9"/>
+          <p:cNvSpPr txBox="1"/>
+          <p:nvPr/>
+        </p:nvSpPr>
+        <p:spPr>
+          <a:xfrm>
+            <a:off x="4480560" y="4434840"/>
+            <a:ext cx="7223760" cy="2011680"/>
+          </a:xfrm>
+          <a:prstGeom prst="rect">
+            <a:avLst/>
+          </a:prstGeom>
+          <a:noFill/>
+        </p:spPr>
+        <p:txBody>
+          <a:bodyPr wrap="square" anchor="t" lIns="0" rIns="0">
+            <a:spAutoFit/>
+          </a:bodyPr>
+          <a:lstStyle/>
+          <a:p>
+            <a:pPr algn="l">
+              <a:lnSpc>
                 <a:spcPct val="125000"/>
               </a:lnSpc>
             </a:pPr>
@@ -5282,7 +5758,7 @@
                 </a:solidFill>
                 <a:latin typeface="Calibri"/>
               </a:rPr>
-              <a:t>Shell en GDP tonen een positieve langetermijntrend.</a:t>
+              <a:t>Significant maar slechts matige correlatie.</a:t>
             </a:r>
           </a:p>
           <a:p>
@@ -5298,7 +5774,7 @@
                 </a:solidFill>
                 <a:latin typeface="Calibri"/>
               </a:rPr>
-              <a:t>Duidelijk terugkerend seizoenspatroon → geen random walk.</a:t>
+              <a:t>Shell reageert niet op de actuele, maar op de verwachte</a:t>
             </a:r>
           </a:p>
           <a:p>
@@ -5314,7 +5790,7 @@
                 </a:solidFill>
                 <a:latin typeface="Calibri"/>
               </a:rPr>
-              <a:t>Residuen nemen toe vanaf 2020 (hogere volatiliteit/onzekerheid).</a:t>
+              <a:t>langetermijnprijs → onderzocht met timeshift.</a:t>
             </a:r>
           </a:p>
         </p:txBody>
@@ -5478,7 +5954,7 @@
         <p:spPr>
           <a:xfrm>
             <a:off x="548640" y="1097280"/>
-            <a:ext cx="2926080" cy="548640"/>
+            <a:ext cx="3017520" cy="548640"/>
           </a:xfrm>
           <a:prstGeom prst="rect">
             <a:avLst/>
@@ -5503,7 +5979,7 @@
                 </a:solidFill>
                 <a:latin typeface="Calibri"/>
               </a:rPr>
-              <a:t>Lesweek 5</a:t>
+              <a:t>Onderzoeksvraag 5</a:t>
             </a:r>
           </a:p>
         </p:txBody>
@@ -5516,8 +5992,8 @@
         </p:nvSpPr>
         <p:spPr>
           <a:xfrm>
-            <a:off x="548640" y="1737360"/>
-            <a:ext cx="3017520" cy="4114800"/>
+            <a:off x="548640" y="1828800"/>
+            <a:ext cx="3108960" cy="4389120"/>
           </a:xfrm>
           <a:prstGeom prst="rect">
             <a:avLst/>
@@ -5532,17 +6008,81 @@
           <a:p>
             <a:pPr algn="l">
               <a:lnSpc>
-                <a:spcPct val="105000"/>
-              </a:lnSpc>
-            </a:pPr>
-            <a:r>
-              <a:rPr sz="2800" b="1">
+                <a:spcPct val="130000"/>
+              </a:lnSpc>
+            </a:pPr>
+            <a:r>
+              <a:rPr sz="1400" b="1">
+                <a:solidFill>
+                  <a:srgbClr val="CADCFC"/>
+                </a:solidFill>
+                <a:latin typeface="Calibri"/>
+              </a:rPr>
+              <a:t>Stappen vooraf</a:t>
+            </a:r>
+          </a:p>
+          <a:p>
+            <a:pPr algn="l">
+              <a:lnSpc>
+                <a:spcPct val="130000"/>
+              </a:lnSpc>
+            </a:pPr>
+            <a:r>
+              <a:rPr sz="1400" b="0">
                 <a:solidFill>
                   <a:srgbClr val="FFFFFF"/>
                 </a:solidFill>
-                <a:latin typeface="Georgia"/>
-              </a:rPr>
-              <a:t>Sentimentanalyse</a:t>
+                <a:latin typeface="Calibri"/>
+              </a:rPr>
+              <a:t>1.  Data geselecteerd</a:t>
+            </a:r>
+          </a:p>
+          <a:p>
+            <a:pPr algn="l">
+              <a:lnSpc>
+                <a:spcPct val="130000"/>
+              </a:lnSpc>
+            </a:pPr>
+            <a:r>
+              <a:rPr sz="1400" b="0">
+                <a:solidFill>
+                  <a:srgbClr val="FFFFFF"/>
+                </a:solidFill>
+                <a:latin typeface="Calibri"/>
+              </a:rPr>
+              <a:t>2.  Heatmap bekeken</a:t>
+            </a:r>
+          </a:p>
+          <a:p>
+            <a:pPr algn="l">
+              <a:lnSpc>
+                <a:spcPct val="130000"/>
+              </a:lnSpc>
+            </a:pPr>
+            <a:r>
+              <a:rPr sz="1400" b="0">
+                <a:solidFill>
+                  <a:srgbClr val="FFFFFF"/>
+                </a:solidFill>
+                <a:latin typeface="Calibri"/>
+              </a:rPr>
+              <a:t>3.  Bubble chart (4 variabelen)</a:t>
+            </a:r>
+          </a:p>
+          <a:p>
+            <a:pPr algn="l">
+              <a:lnSpc>
+                <a:spcPct val="130000"/>
+              </a:lnSpc>
+            </a:pPr>
+            <a:r>
+              <a:rPr sz="1400" b="0">
+                <a:solidFill>
+                  <a:srgbClr val="FFFFFF"/>
+                </a:solidFill>
+                <a:latin typeface="Calibri"/>
+              </a:rPr>
+              <a:t>4.  Regressie + neuraal netwerk</a:t>
             </a:r>
           </a:p>
         </p:txBody>
@@ -5556,7 +6096,7 @@
         <p:spPr>
           <a:xfrm>
             <a:off x="4480560" y="822960"/>
-            <a:ext cx="7132320" cy="1280160"/>
+            <a:ext cx="7223760" cy="1463040"/>
           </a:xfrm>
           <a:prstGeom prst="rect">
             <a:avLst/>
@@ -5581,7 +6121,7 @@
                 </a:solidFill>
                 <a:latin typeface="Calibri"/>
               </a:rPr>
-              <a:t>Onderzoeksvraag / onderwerp</a:t>
+              <a:t>Vraag</a:t>
             </a:r>
           </a:p>
           <a:p>
@@ -5597,7 +6137,7 @@
                 </a:solidFill>
                 <a:latin typeface="Calibri"/>
               </a:rPr>
-              <a:t>Hangen nieuwsberichten over Shell (SHEL) samen met de aandelenkoers?</a:t>
+              <a:t>Wat is het verband tussen koffie, koper, goud en de koers van Apple?</a:t>
             </a:r>
           </a:p>
         </p:txBody>
@@ -5610,8 +6150,8 @@
         </p:nvSpPr>
         <p:spPr>
           <a:xfrm>
-            <a:off x="4480560" y="2468880"/>
-            <a:ext cx="7132320" cy="457200"/>
+            <a:off x="4480560" y="2651760"/>
+            <a:ext cx="7223760" cy="822960"/>
           </a:xfrm>
           <a:prstGeom prst="rect">
             <a:avLst/>
@@ -5626,7 +6166,7 @@
           <a:p>
             <a:pPr algn="l">
               <a:lnSpc>
-                <a:spcPct val="110000"/>
+                <a:spcPct val="115000"/>
               </a:lnSpc>
             </a:pPr>
             <a:r>
@@ -5636,7 +6176,23 @@
                 </a:solidFill>
                 <a:latin typeface="Calibri"/>
               </a:rPr>
-              <a:t>Belangrijkste conclusie</a:t>
+              <a:t>Resultaat regressie</a:t>
+            </a:r>
+          </a:p>
+          <a:p>
+            <a:pPr algn="l">
+              <a:lnSpc>
+                <a:spcPct val="115000"/>
+              </a:lnSpc>
+            </a:pPr>
+            <a:r>
+              <a:rPr sz="1600" b="0">
+                <a:solidFill>
+                  <a:srgbClr val="21295C"/>
+                </a:solidFill>
+                <a:latin typeface="Calibri"/>
+              </a:rPr>
+              <a:t>Coffee +0,7351  ·  Copper +0,0236  ·  Gold −0,0097  ·  R² = 0,88</a:t>
             </a:r>
           </a:p>
         </p:txBody>
@@ -5649,8 +6205,8 @@
         </p:nvSpPr>
         <p:spPr>
           <a:xfrm>
-            <a:off x="4480560" y="2971800"/>
-            <a:ext cx="7223760" cy="3291840"/>
+            <a:off x="4480560" y="3931920"/>
+            <a:ext cx="7223760" cy="457200"/>
           </a:xfrm>
           <a:prstGeom prst="rect">
             <a:avLst/>
@@ -5665,6 +6221,45 @@
           <a:p>
             <a:pPr algn="l">
               <a:lnSpc>
+                <a:spcPct val="110000"/>
+              </a:lnSpc>
+            </a:pPr>
+            <a:r>
+              <a:rPr sz="1400" b="1">
+                <a:solidFill>
+                  <a:srgbClr val="02C39A"/>
+                </a:solidFill>
+                <a:latin typeface="Calibri"/>
+              </a:rPr>
+              <a:t>Conclusie</a:t>
+            </a:r>
+          </a:p>
+        </p:txBody>
+      </p:sp>
+      <p:sp>
+        <p:nvSpPr>
+          <p:cNvPr id="10" name="TextBox 9"/>
+          <p:cNvSpPr txBox="1"/>
+          <p:nvPr/>
+        </p:nvSpPr>
+        <p:spPr>
+          <a:xfrm>
+            <a:off x="4480560" y="4434840"/>
+            <a:ext cx="7223760" cy="2011680"/>
+          </a:xfrm>
+          <a:prstGeom prst="rect">
+            <a:avLst/>
+          </a:prstGeom>
+          <a:noFill/>
+        </p:spPr>
+        <p:txBody>
+          <a:bodyPr wrap="square" anchor="t" lIns="0" rIns="0">
+            <a:spAutoFit/>
+          </a:bodyPr>
+          <a:lstStyle/>
+          <a:p>
+            <a:pPr algn="l">
+              <a:lnSpc>
                 <a:spcPct val="125000"/>
               </a:lnSpc>
             </a:pPr>
@@ -5675,7 +6270,7 @@
                 </a:solidFill>
                 <a:latin typeface="Calibri"/>
               </a:rPr>
-              <a:t>Nieuws geanalyseerd met VADER, TextBlob en Hugging Face (DistilBERT).</a:t>
+              <a:t>Significant en sterke correlatie.</a:t>
             </a:r>
           </a:p>
           <a:p>
@@ -5691,7 +6286,7 @@
                 </a:solidFill>
                 <a:latin typeface="Calibri"/>
               </a:rPr>
-              <a:t>Sentimentscores gekoppeld aan de dagkoers van Shell.</a:t>
+              <a:t>Hoogconjunctuur drijft Apple en koper omhoog;</a:t>
             </a:r>
           </a:p>
           <a:p>
@@ -5707,7 +6302,7 @@
                 </a:solidFill>
                 <a:latin typeface="Calibri"/>
               </a:rPr>
-              <a:t>Regressie: p-waarde &gt; 0,05 → geen significant verband aangetoond.</a:t>
+              <a:t>goud reageert juist zwakker (veilige haven).</a:t>
             </a:r>
           </a:p>
         </p:txBody>
@@ -5776,14 +6371,53 @@
       </p:sp>
       <p:sp>
         <p:nvSpPr>
-          <p:cNvPr id="3" name="Rectangle 2"/>
+          <p:cNvPr id="3" name="TextBox 2"/>
+          <p:cNvSpPr txBox="1"/>
+          <p:nvPr/>
+        </p:nvSpPr>
+        <p:spPr>
+          <a:xfrm>
+            <a:off x="822960" y="457200"/>
+            <a:ext cx="10515600" cy="822960"/>
+          </a:xfrm>
+          <a:prstGeom prst="rect">
+            <a:avLst/>
+          </a:prstGeom>
+          <a:noFill/>
+        </p:spPr>
+        <p:txBody>
+          <a:bodyPr wrap="square" anchor="t" lIns="0" rIns="0">
+            <a:spAutoFit/>
+          </a:bodyPr>
+          <a:lstStyle/>
+          <a:p>
+            <a:pPr algn="l">
+              <a:lnSpc>
+                <a:spcPct val="110000"/>
+              </a:lnSpc>
+            </a:pPr>
+            <a:r>
+              <a:rPr sz="3600" b="1">
+                <a:solidFill>
+                  <a:srgbClr val="1E2761"/>
+                </a:solidFill>
+                <a:latin typeface="Georgia"/>
+              </a:rPr>
+              <a:t>Twee beleggersprofielen — maximale Sharpe-ratio</a:t>
+            </a:r>
+          </a:p>
+        </p:txBody>
+      </p:sp>
+      <p:sp>
+        <p:nvSpPr>
+          <p:cNvPr id="4" name="Rectangle 3"/>
           <p:cNvSpPr/>
           <p:nvPr/>
         </p:nvSpPr>
         <p:spPr>
           <a:xfrm>
-            <a:off x="0" y="0"/>
-            <a:ext cx="3931920" cy="6858000"/>
+            <a:off x="822960" y="1554480"/>
+            <a:ext cx="5303520" cy="640080"/>
           </a:xfrm>
           <a:prstGeom prst="rect">
             <a:avLst/>
@@ -5820,20 +6454,185 @@
       </p:sp>
       <p:sp>
         <p:nvSpPr>
-          <p:cNvPr id="4" name="Oval 3"/>
+          <p:cNvPr id="5" name="TextBox 4"/>
+          <p:cNvSpPr txBox="1"/>
+          <p:nvPr/>
+        </p:nvSpPr>
+        <p:spPr>
+          <a:xfrm>
+            <a:off x="822960" y="1627632"/>
+            <a:ext cx="5303520" cy="548640"/>
+          </a:xfrm>
+          <a:prstGeom prst="rect">
+            <a:avLst/>
+          </a:prstGeom>
+          <a:noFill/>
+        </p:spPr>
+        <p:txBody>
+          <a:bodyPr wrap="square" anchor="t" lIns="0" rIns="0">
+            <a:spAutoFit/>
+          </a:bodyPr>
+          <a:lstStyle/>
+          <a:p>
+            <a:pPr algn="ctr">
+              <a:lnSpc>
+                <a:spcPct val="110000"/>
+              </a:lnSpc>
+            </a:pPr>
+            <a:r>
+              <a:rPr sz="1800" b="1">
+                <a:solidFill>
+                  <a:srgbClr val="FFFFFF"/>
+                </a:solidFill>
+                <a:latin typeface="Calibri"/>
+              </a:rPr>
+              <a:t>Jonge student (dynamisch)</a:t>
+            </a:r>
+          </a:p>
+        </p:txBody>
+      </p:sp>
+      <p:sp>
+        <p:nvSpPr>
+          <p:cNvPr id="6" name="TextBox 5"/>
+          <p:cNvSpPr txBox="1"/>
+          <p:nvPr/>
+        </p:nvSpPr>
+        <p:spPr>
+          <a:xfrm>
+            <a:off x="1005840" y="2377440"/>
+            <a:ext cx="5120640" cy="3108960"/>
+          </a:xfrm>
+          <a:prstGeom prst="rect">
+            <a:avLst/>
+          </a:prstGeom>
+          <a:noFill/>
+        </p:spPr>
+        <p:txBody>
+          <a:bodyPr wrap="square" anchor="t" lIns="0" rIns="0">
+            <a:spAutoFit/>
+          </a:bodyPr>
+          <a:lstStyle/>
+          <a:p>
+            <a:pPr algn="l">
+              <a:lnSpc>
+                <a:spcPct val="125000"/>
+              </a:lnSpc>
+            </a:pPr>
+            <a:r>
+              <a:rPr sz="1500" b="0">
+                <a:solidFill>
+                  <a:srgbClr val="21295C"/>
+                </a:solidFill>
+                <a:latin typeface="Consolas"/>
+              </a:rPr>
+              <a:t>Broadcom        37,5%</a:t>
+            </a:r>
+          </a:p>
+          <a:p>
+            <a:pPr algn="l">
+              <a:lnSpc>
+                <a:spcPct val="125000"/>
+              </a:lnSpc>
+            </a:pPr>
+            <a:r>
+              <a:rPr sz="1500" b="0">
+                <a:solidFill>
+                  <a:srgbClr val="21295C"/>
+                </a:solidFill>
+                <a:latin typeface="Consolas"/>
+              </a:rPr>
+              <a:t>Bitcoin         23,5%</a:t>
+            </a:r>
+          </a:p>
+          <a:p>
+            <a:pPr algn="l">
+              <a:lnSpc>
+                <a:spcPct val="125000"/>
+              </a:lnSpc>
+            </a:pPr>
+            <a:r>
+              <a:rPr sz="1500" b="0">
+                <a:solidFill>
+                  <a:srgbClr val="21295C"/>
+                </a:solidFill>
+                <a:latin typeface="Consolas"/>
+              </a:rPr>
+              <a:t>Apple           36,0%</a:t>
+            </a:r>
+          </a:p>
+          <a:p>
+            <a:pPr algn="l">
+              <a:lnSpc>
+                <a:spcPct val="125000"/>
+              </a:lnSpc>
+            </a:pPr>
+            <a:r>
+              <a:rPr sz="1500" b="0">
+                <a:solidFill>
+                  <a:srgbClr val="21295C"/>
+                </a:solidFill>
+                <a:latin typeface="Consolas"/>
+              </a:rPr>
+              <a:t>ASML            3,0%</a:t>
+            </a:r>
+          </a:p>
+        </p:txBody>
+      </p:sp>
+      <p:sp>
+        <p:nvSpPr>
+          <p:cNvPr id="7" name="TextBox 6"/>
+          <p:cNvSpPr txBox="1"/>
+          <p:nvPr/>
+        </p:nvSpPr>
+        <p:spPr>
+          <a:xfrm>
+            <a:off x="822960" y="5669280"/>
+            <a:ext cx="5303520" cy="822960"/>
+          </a:xfrm>
+          <a:prstGeom prst="rect">
+            <a:avLst/>
+          </a:prstGeom>
+          <a:noFill/>
+        </p:spPr>
+        <p:txBody>
+          <a:bodyPr wrap="square" anchor="t" lIns="0" rIns="0">
+            <a:spAutoFit/>
+          </a:bodyPr>
+          <a:lstStyle/>
+          <a:p>
+            <a:pPr algn="l">
+              <a:lnSpc>
+                <a:spcPct val="120000"/>
+              </a:lnSpc>
+            </a:pPr>
+            <a:r>
+              <a:rPr sz="1500" b="1">
+                <a:solidFill>
+                  <a:srgbClr val="02C39A"/>
+                </a:solidFill>
+                <a:latin typeface="Calibri"/>
+              </a:rPr>
+              <a:t>Rendement 24%  ·  risico 25%  ·  Sharpe 0,85</a:t>
+            </a:r>
+          </a:p>
+        </p:txBody>
+      </p:sp>
+      <p:sp>
+        <p:nvSpPr>
+          <p:cNvPr id="8" name="Rectangle 7"/>
           <p:cNvSpPr/>
           <p:nvPr/>
         </p:nvSpPr>
         <p:spPr>
           <a:xfrm>
-            <a:off x="548640" y="640080"/>
-            <a:ext cx="256032" cy="256032"/>
-          </a:xfrm>
-          <a:prstGeom prst="ellipse">
+            <a:off x="6583680" y="1554480"/>
+            <a:ext cx="5303520" cy="640080"/>
+          </a:xfrm>
+          <a:prstGeom prst="rect">
             <a:avLst/>
           </a:prstGeom>
           <a:solidFill>
-            <a:srgbClr val="02C39A"/>
+            <a:srgbClr val="1E2761"/>
           </a:solidFill>
           <a:ln>
             <a:noFill/>
@@ -5864,14 +6663,14 @@
       </p:sp>
       <p:sp>
         <p:nvSpPr>
-          <p:cNvPr id="5" name="TextBox 4"/>
+          <p:cNvPr id="9" name="TextBox 8"/>
           <p:cNvSpPr txBox="1"/>
           <p:nvPr/>
         </p:nvSpPr>
         <p:spPr>
           <a:xfrm>
-            <a:off x="548640" y="1097280"/>
-            <a:ext cx="2926080" cy="548640"/>
+            <a:off x="6583680" y="1627632"/>
+            <a:ext cx="5303520" cy="548640"/>
           </a:xfrm>
           <a:prstGeom prst="rect">
             <a:avLst/>
@@ -5884,7 +6683,7 @@
           </a:bodyPr>
           <a:lstStyle/>
           <a:p>
-            <a:pPr algn="l">
+            <a:pPr algn="ctr">
               <a:lnSpc>
                 <a:spcPct val="110000"/>
               </a:lnSpc>
@@ -5892,25 +6691,25 @@
             <a:r>
               <a:rPr sz="1800" b="1">
                 <a:solidFill>
-                  <a:srgbClr val="02C39A"/>
-                </a:solidFill>
-                <a:latin typeface="Calibri"/>
-              </a:rPr>
-              <a:t>Lesweek 6</a:t>
-            </a:r>
-          </a:p>
-        </p:txBody>
-      </p:sp>
-      <p:sp>
-        <p:nvSpPr>
-          <p:cNvPr id="6" name="TextBox 5"/>
+                  <a:srgbClr val="FFFFFF"/>
+                </a:solidFill>
+                <a:latin typeface="Calibri"/>
+              </a:rPr>
+              <a:t>Oude docent (defensief)</a:t>
+            </a:r>
+          </a:p>
+        </p:txBody>
+      </p:sp>
+      <p:sp>
+        <p:nvSpPr>
+          <p:cNvPr id="10" name="TextBox 9"/>
           <p:cNvSpPr txBox="1"/>
           <p:nvPr/>
         </p:nvSpPr>
         <p:spPr>
           <a:xfrm>
-            <a:off x="548640" y="1737360"/>
-            <a:ext cx="3017520" cy="4114800"/>
+            <a:off x="6766560" y="2377440"/>
+            <a:ext cx="5120640" cy="3108960"/>
           </a:xfrm>
           <a:prstGeom prst="rect">
             <a:avLst/>
@@ -5925,31 +6724,79 @@
           <a:p>
             <a:pPr algn="l">
               <a:lnSpc>
-                <a:spcPct val="105000"/>
-              </a:lnSpc>
-            </a:pPr>
-            <a:r>
-              <a:rPr sz="2800" b="1">
-                <a:solidFill>
-                  <a:srgbClr val="FFFFFF"/>
-                </a:solidFill>
-                <a:latin typeface="Georgia"/>
-              </a:rPr>
-              <a:t>Neuraal netwerk (MLPRegressor)</a:t>
-            </a:r>
-          </a:p>
-        </p:txBody>
-      </p:sp>
-      <p:sp>
-        <p:nvSpPr>
-          <p:cNvPr id="7" name="TextBox 6"/>
+                <a:spcPct val="125000"/>
+              </a:lnSpc>
+            </a:pPr>
+            <a:r>
+              <a:rPr sz="1500" b="0">
+                <a:solidFill>
+                  <a:srgbClr val="21295C"/>
+                </a:solidFill>
+                <a:latin typeface="Consolas"/>
+              </a:rPr>
+              <a:t>Goud            59,5%</a:t>
+            </a:r>
+          </a:p>
+          <a:p>
+            <a:pPr algn="l">
+              <a:lnSpc>
+                <a:spcPct val="125000"/>
+              </a:lnSpc>
+            </a:pPr>
+            <a:r>
+              <a:rPr sz="1500" b="0">
+                <a:solidFill>
+                  <a:srgbClr val="21295C"/>
+                </a:solidFill>
+                <a:latin typeface="Consolas"/>
+              </a:rPr>
+              <a:t>Apple           40,5%</a:t>
+            </a:r>
+          </a:p>
+          <a:p>
+            <a:pPr algn="l">
+              <a:lnSpc>
+                <a:spcPct val="125000"/>
+              </a:lnSpc>
+            </a:pPr>
+            <a:r>
+              <a:rPr sz="1500" b="0">
+                <a:solidFill>
+                  <a:srgbClr val="21295C"/>
+                </a:solidFill>
+                <a:latin typeface="Consolas"/>
+              </a:rPr>
+              <a:t>Zilver          0%</a:t>
+            </a:r>
+          </a:p>
+          <a:p>
+            <a:pPr algn="l">
+              <a:lnSpc>
+                <a:spcPct val="125000"/>
+              </a:lnSpc>
+            </a:pPr>
+            <a:r>
+              <a:rPr sz="1500" b="0">
+                <a:solidFill>
+                  <a:srgbClr val="21295C"/>
+                </a:solidFill>
+                <a:latin typeface="Consolas"/>
+              </a:rPr>
+              <a:t>Shell           0%</a:t>
+            </a:r>
+          </a:p>
+        </p:txBody>
+      </p:sp>
+      <p:sp>
+        <p:nvSpPr>
+          <p:cNvPr id="11" name="TextBox 10"/>
           <p:cNvSpPr txBox="1"/>
           <p:nvPr/>
         </p:nvSpPr>
         <p:spPr>
           <a:xfrm>
-            <a:off x="4480560" y="822960"/>
-            <a:ext cx="7132320" cy="1280160"/>
+            <a:off x="6583680" y="5669280"/>
+            <a:ext cx="5303520" cy="822960"/>
           </a:xfrm>
           <a:prstGeom prst="rect">
             <a:avLst/>
@@ -5964,143 +6811,17 @@
           <a:p>
             <a:pPr algn="l">
               <a:lnSpc>
-                <a:spcPct val="115000"/>
-              </a:lnSpc>
-            </a:pPr>
-            <a:r>
-              <a:rPr sz="1400" b="1">
+                <a:spcPct val="120000"/>
+              </a:lnSpc>
+            </a:pPr>
+            <a:r>
+              <a:rPr sz="1500" b="1">
                 <a:solidFill>
                   <a:srgbClr val="02C39A"/>
                 </a:solidFill>
                 <a:latin typeface="Calibri"/>
               </a:rPr>
-              <a:t>Onderzoeksvraag / onderwerp</a:t>
-            </a:r>
-          </a:p>
-          <a:p>
-            <a:pPr algn="l">
-              <a:lnSpc>
-                <a:spcPct val="115000"/>
-              </a:lnSpc>
-            </a:pPr>
-            <a:r>
-              <a:rPr sz="1700" b="0">
-                <a:solidFill>
-                  <a:srgbClr val="21295C"/>
-                </a:solidFill>
-                <a:latin typeface="Calibri"/>
-              </a:rPr>
-              <a:t>Kan een neuraal netwerk de Apple-koers voorspellen uit Coffee, Copper en Gold?</a:t>
-            </a:r>
-          </a:p>
-        </p:txBody>
-      </p:sp>
-      <p:sp>
-        <p:nvSpPr>
-          <p:cNvPr id="8" name="TextBox 7"/>
-          <p:cNvSpPr txBox="1"/>
-          <p:nvPr/>
-        </p:nvSpPr>
-        <p:spPr>
-          <a:xfrm>
-            <a:off x="4480560" y="2468880"/>
-            <a:ext cx="7132320" cy="457200"/>
-          </a:xfrm>
-          <a:prstGeom prst="rect">
-            <a:avLst/>
-          </a:prstGeom>
-          <a:noFill/>
-        </p:spPr>
-        <p:txBody>
-          <a:bodyPr wrap="square" anchor="t" lIns="0" rIns="0">
-            <a:spAutoFit/>
-          </a:bodyPr>
-          <a:lstStyle/>
-          <a:p>
-            <a:pPr algn="l">
-              <a:lnSpc>
-                <a:spcPct val="110000"/>
-              </a:lnSpc>
-            </a:pPr>
-            <a:r>
-              <a:rPr sz="1400" b="1">
-                <a:solidFill>
-                  <a:srgbClr val="02C39A"/>
-                </a:solidFill>
-                <a:latin typeface="Calibri"/>
-              </a:rPr>
-              <a:t>Belangrijkste conclusie</a:t>
-            </a:r>
-          </a:p>
-        </p:txBody>
-      </p:sp>
-      <p:sp>
-        <p:nvSpPr>
-          <p:cNvPr id="9" name="TextBox 8"/>
-          <p:cNvSpPr txBox="1"/>
-          <p:nvPr/>
-        </p:nvSpPr>
-        <p:spPr>
-          <a:xfrm>
-            <a:off x="4480560" y="2971800"/>
-            <a:ext cx="7223760" cy="3291840"/>
-          </a:xfrm>
-          <a:prstGeom prst="rect">
-            <a:avLst/>
-          </a:prstGeom>
-          <a:noFill/>
-        </p:spPr>
-        <p:txBody>
-          <a:bodyPr wrap="square" anchor="t" lIns="0" rIns="0">
-            <a:spAutoFit/>
-          </a:bodyPr>
-          <a:lstStyle/>
-          <a:p>
-            <a:pPr algn="l">
-              <a:lnSpc>
-                <a:spcPct val="125000"/>
-              </a:lnSpc>
-            </a:pPr>
-            <a:r>
-              <a:rPr sz="1600" b="0">
-                <a:solidFill>
-                  <a:srgbClr val="21295C"/>
-                </a:solidFill>
-                <a:latin typeface="Calibri"/>
-              </a:rPr>
-              <a:t>MLPRegressor met 3 verborgen lagen (64-64-64).</a:t>
-            </a:r>
-          </a:p>
-          <a:p>
-            <a:pPr algn="l">
-              <a:lnSpc>
-                <a:spcPct val="125000"/>
-              </a:lnSpc>
-            </a:pPr>
-            <a:r>
-              <a:rPr sz="1600" b="0">
-                <a:solidFill>
-                  <a:srgbClr val="21295C"/>
-                </a:solidFill>
-                <a:latin typeface="Calibri"/>
-              </a:rPr>
-              <a:t>Gemiddelde afwijking ca. $7,85–$10,81.</a:t>
-            </a:r>
-          </a:p>
-          <a:p>
-            <a:pPr algn="l">
-              <a:lnSpc>
-                <a:spcPct val="125000"/>
-              </a:lnSpc>
-            </a:pPr>
-            <a:r>
-              <a:rPr sz="1600" b="0">
-                <a:solidFill>
-                  <a:srgbClr val="21295C"/>
-                </a:solidFill>
-                <a:latin typeface="Calibri"/>
-              </a:rPr>
-              <a:t>Hoge R² (≈ 0,98): sterk verband tussen de variabelen en de Apple-koers.</a:t>
+              <a:t>Rendement 13%  ·  risico 13%  ·  Sharpe 0,78</a:t>
             </a:r>
           </a:p>
         </p:txBody>
@@ -6169,14 +6890,243 @@
       </p:sp>
       <p:sp>
         <p:nvSpPr>
-          <p:cNvPr id="3" name="Rectangle 2"/>
+          <p:cNvPr id="3" name="TextBox 2"/>
+          <p:cNvSpPr txBox="1"/>
+          <p:nvPr/>
+        </p:nvSpPr>
+        <p:spPr>
+          <a:xfrm>
+            <a:off x="822960" y="457200"/>
+            <a:ext cx="10515600" cy="822960"/>
+          </a:xfrm>
+          <a:prstGeom prst="rect">
+            <a:avLst/>
+          </a:prstGeom>
+          <a:noFill/>
+        </p:spPr>
+        <p:txBody>
+          <a:bodyPr wrap="square" anchor="t" lIns="0" rIns="0">
+            <a:spAutoFit/>
+          </a:bodyPr>
+          <a:lstStyle/>
+          <a:p>
+            <a:pPr algn="l">
+              <a:lnSpc>
+                <a:spcPct val="110000"/>
+              </a:lnSpc>
+            </a:pPr>
+            <a:r>
+              <a:rPr sz="3000" b="1">
+                <a:solidFill>
+                  <a:srgbClr val="1E2761"/>
+                </a:solidFill>
+                <a:latin typeface="Georgia"/>
+              </a:rPr>
+              <a:t>Marktportfolio — hoogste Sharpe-ratio (alle 20 variabelen)</a:t>
+            </a:r>
+          </a:p>
+        </p:txBody>
+      </p:sp>
+      <p:sp>
+        <p:nvSpPr>
+          <p:cNvPr id="4" name="TextBox 3"/>
+          <p:cNvSpPr txBox="1"/>
+          <p:nvPr/>
+        </p:nvSpPr>
+        <p:spPr>
+          <a:xfrm>
+            <a:off x="822960" y="1645920"/>
+            <a:ext cx="5120640" cy="457200"/>
+          </a:xfrm>
+          <a:prstGeom prst="rect">
+            <a:avLst/>
+          </a:prstGeom>
+          <a:noFill/>
+        </p:spPr>
+        <p:txBody>
+          <a:bodyPr wrap="square" anchor="t" lIns="0" rIns="0">
+            <a:spAutoFit/>
+          </a:bodyPr>
+          <a:lstStyle/>
+          <a:p>
+            <a:pPr algn="l">
+              <a:lnSpc>
+                <a:spcPct val="110000"/>
+              </a:lnSpc>
+            </a:pPr>
+            <a:r>
+              <a:rPr sz="1600" b="1">
+                <a:solidFill>
+                  <a:srgbClr val="02C39A"/>
+                </a:solidFill>
+                <a:latin typeface="Calibri"/>
+              </a:rPr>
+              <a:t>Belangrijkste gewichten</a:t>
+            </a:r>
+          </a:p>
+        </p:txBody>
+      </p:sp>
+      <p:sp>
+        <p:nvSpPr>
+          <p:cNvPr id="5" name="TextBox 4"/>
+          <p:cNvSpPr txBox="1"/>
+          <p:nvPr/>
+        </p:nvSpPr>
+        <p:spPr>
+          <a:xfrm>
+            <a:off x="822960" y="2194560"/>
+            <a:ext cx="5120640" cy="3474720"/>
+          </a:xfrm>
+          <a:prstGeom prst="rect">
+            <a:avLst/>
+          </a:prstGeom>
+          <a:noFill/>
+        </p:spPr>
+        <p:txBody>
+          <a:bodyPr wrap="square" anchor="t" lIns="0" rIns="0">
+            <a:spAutoFit/>
+          </a:bodyPr>
+          <a:lstStyle/>
+          <a:p>
+            <a:pPr algn="l">
+              <a:lnSpc>
+                <a:spcPct val="130000"/>
+              </a:lnSpc>
+            </a:pPr>
+            <a:r>
+              <a:rPr sz="1600" b="0">
+                <a:solidFill>
+                  <a:srgbClr val="21295C"/>
+                </a:solidFill>
+                <a:latin typeface="Consolas"/>
+              </a:rPr>
+              <a:t>Coffee        37,0%</a:t>
+            </a:r>
+          </a:p>
+          <a:p>
+            <a:pPr algn="l">
+              <a:lnSpc>
+                <a:spcPct val="130000"/>
+              </a:lnSpc>
+            </a:pPr>
+            <a:r>
+              <a:rPr sz="1600" b="0">
+                <a:solidFill>
+                  <a:srgbClr val="21295C"/>
+                </a:solidFill>
+                <a:latin typeface="Consolas"/>
+              </a:rPr>
+              <a:t>Goud          19,2%</a:t>
+            </a:r>
+          </a:p>
+          <a:p>
+            <a:pPr algn="l">
+              <a:lnSpc>
+                <a:spcPct val="130000"/>
+              </a:lnSpc>
+            </a:pPr>
+            <a:r>
+              <a:rPr sz="1600" b="0">
+                <a:solidFill>
+                  <a:srgbClr val="21295C"/>
+                </a:solidFill>
+                <a:latin typeface="Consolas"/>
+              </a:rPr>
+              <a:t>Gasoline      10,5%</a:t>
+            </a:r>
+          </a:p>
+          <a:p>
+            <a:pPr algn="l">
+              <a:lnSpc>
+                <a:spcPct val="130000"/>
+              </a:lnSpc>
+            </a:pPr>
+            <a:r>
+              <a:rPr sz="1600" b="0">
+                <a:solidFill>
+                  <a:srgbClr val="21295C"/>
+                </a:solidFill>
+                <a:latin typeface="Consolas"/>
+              </a:rPr>
+              <a:t>Copper        9,3%</a:t>
+            </a:r>
+          </a:p>
+          <a:p>
+            <a:pPr algn="l">
+              <a:lnSpc>
+                <a:spcPct val="130000"/>
+              </a:lnSpc>
+            </a:pPr>
+            <a:r>
+              <a:rPr sz="1600" b="0">
+                <a:solidFill>
+                  <a:srgbClr val="21295C"/>
+                </a:solidFill>
+                <a:latin typeface="Consolas"/>
+              </a:rPr>
+              <a:t>Broadcom      6,8%</a:t>
+            </a:r>
+          </a:p>
+          <a:p>
+            <a:pPr algn="l">
+              <a:lnSpc>
+                <a:spcPct val="130000"/>
+              </a:lnSpc>
+            </a:pPr>
+            <a:r>
+              <a:rPr sz="1600" b="0">
+                <a:solidFill>
+                  <a:srgbClr val="21295C"/>
+                </a:solidFill>
+                <a:latin typeface="Consolas"/>
+              </a:rPr>
+              <a:t>Apple         6,7%</a:t>
+            </a:r>
+          </a:p>
+          <a:p>
+            <a:pPr algn="l">
+              <a:lnSpc>
+                <a:spcPct val="130000"/>
+              </a:lnSpc>
+            </a:pPr>
+            <a:r>
+              <a:rPr sz="1600" b="0">
+                <a:solidFill>
+                  <a:srgbClr val="21295C"/>
+                </a:solidFill>
+                <a:latin typeface="Consolas"/>
+              </a:rPr>
+              <a:t>Steel         5,0%</a:t>
+            </a:r>
+          </a:p>
+          <a:p>
+            <a:pPr algn="l">
+              <a:lnSpc>
+                <a:spcPct val="130000"/>
+              </a:lnSpc>
+            </a:pPr>
+            <a:r>
+              <a:rPr sz="1600" b="0">
+                <a:solidFill>
+                  <a:srgbClr val="21295C"/>
+                </a:solidFill>
+                <a:latin typeface="Consolas"/>
+              </a:rPr>
+              <a:t>Bitcoin       4,0%</a:t>
+            </a:r>
+          </a:p>
+        </p:txBody>
+      </p:sp>
+      <p:sp>
+        <p:nvSpPr>
+          <p:cNvPr id="6" name="Rectangle 5"/>
           <p:cNvSpPr/>
           <p:nvPr/>
         </p:nvSpPr>
         <p:spPr>
           <a:xfrm>
-            <a:off x="0" y="0"/>
-            <a:ext cx="3931920" cy="6858000"/>
+            <a:off x="6400800" y="2194560"/>
+            <a:ext cx="4937760" cy="2377440"/>
           </a:xfrm>
           <a:prstGeom prst="rect">
             <a:avLst/>
@@ -6213,58 +7163,14 @@
       </p:sp>
       <p:sp>
         <p:nvSpPr>
-          <p:cNvPr id="4" name="Oval 3"/>
-          <p:cNvSpPr/>
-          <p:nvPr/>
-        </p:nvSpPr>
-        <p:spPr>
-          <a:xfrm>
-            <a:off x="548640" y="640080"/>
-            <a:ext cx="256032" cy="256032"/>
-          </a:xfrm>
-          <a:prstGeom prst="ellipse">
-            <a:avLst/>
-          </a:prstGeom>
-          <a:solidFill>
-            <a:srgbClr val="02C39A"/>
-          </a:solidFill>
-          <a:ln>
-            <a:noFill/>
-          </a:ln>
-          <a:effectLst/>
-        </p:spPr>
-        <p:style>
-          <a:lnRef idx="1">
-            <a:schemeClr val="accent1"/>
-          </a:lnRef>
-          <a:fillRef idx="3">
-            <a:schemeClr val="accent1"/>
-          </a:fillRef>
-          <a:effectRef idx="2">
-            <a:schemeClr val="accent1"/>
-          </a:effectRef>
-          <a:fontRef idx="minor">
-            <a:schemeClr val="lt1"/>
-          </a:fontRef>
-        </p:style>
-        <p:txBody>
-          <a:bodyPr rtlCol="0" anchor="ctr"/>
-          <a:lstStyle/>
-          <a:p>
-            <a:pPr algn="ctr"/>
-          </a:p>
-        </p:txBody>
-      </p:sp>
-      <p:sp>
-        <p:nvSpPr>
-          <p:cNvPr id="5" name="TextBox 4"/>
+          <p:cNvPr id="7" name="TextBox 6"/>
           <p:cNvSpPr txBox="1"/>
           <p:nvPr/>
         </p:nvSpPr>
         <p:spPr>
           <a:xfrm>
-            <a:off x="548640" y="1097280"/>
-            <a:ext cx="2926080" cy="548640"/>
+            <a:off x="6675120" y="2468880"/>
+            <a:ext cx="4480560" cy="2011680"/>
           </a:xfrm>
           <a:prstGeom prst="rect">
             <a:avLst/>
@@ -6279,7 +7185,7 @@
           <a:p>
             <a:pPr algn="l">
               <a:lnSpc>
-                <a:spcPct val="110000"/>
+                <a:spcPct val="130000"/>
               </a:lnSpc>
             </a:pPr>
             <a:r>
@@ -6289,211 +7195,103 @@
                 </a:solidFill>
                 <a:latin typeface="Calibri"/>
               </a:rPr>
-              <a:t>Lesweek 7</a:t>
-            </a:r>
-          </a:p>
-        </p:txBody>
-      </p:sp>
-      <p:sp>
-        <p:nvSpPr>
-          <p:cNvPr id="6" name="TextBox 5"/>
-          <p:cNvSpPr txBox="1"/>
-          <p:nvPr/>
-        </p:nvSpPr>
-        <p:spPr>
-          <a:xfrm>
-            <a:off x="548640" y="1737360"/>
-            <a:ext cx="3017520" cy="4114800"/>
-          </a:xfrm>
-          <a:prstGeom prst="rect">
-            <a:avLst/>
-          </a:prstGeom>
-          <a:noFill/>
-        </p:spPr>
-        <p:txBody>
-          <a:bodyPr wrap="square" anchor="t" lIns="0" rIns="0">
-            <a:spAutoFit/>
-          </a:bodyPr>
-          <a:lstStyle/>
-          <a:p>
-            <a:pPr algn="l">
-              <a:lnSpc>
-                <a:spcPct val="105000"/>
-              </a:lnSpc>
-            </a:pPr>
-            <a:r>
-              <a:rPr sz="2800" b="1">
+              <a:t>Resultaat</a:t>
+            </a:r>
+          </a:p>
+          <a:p>
+            <a:pPr algn="l">
+              <a:lnSpc>
+                <a:spcPct val="130000"/>
+              </a:lnSpc>
+            </a:pPr>
+            <a:r>
+              <a:rPr sz="1800" b="0">
                 <a:solidFill>
                   <a:srgbClr val="FFFFFF"/>
                 </a:solidFill>
-                <a:latin typeface="Georgia"/>
-              </a:rPr>
-              <a:t>Portfolio-optimalisatie (Markowitz)</a:t>
-            </a:r>
-          </a:p>
-        </p:txBody>
-      </p:sp>
-      <p:sp>
-        <p:nvSpPr>
-          <p:cNvPr id="7" name="TextBox 6"/>
-          <p:cNvSpPr txBox="1"/>
-          <p:nvPr/>
-        </p:nvSpPr>
-        <p:spPr>
-          <a:xfrm>
-            <a:off x="4480560" y="822960"/>
-            <a:ext cx="7132320" cy="1280160"/>
-          </a:xfrm>
-          <a:prstGeom prst="rect">
-            <a:avLst/>
-          </a:prstGeom>
-          <a:noFill/>
-        </p:spPr>
-        <p:txBody>
-          <a:bodyPr wrap="square" anchor="t" lIns="0" rIns="0">
-            <a:spAutoFit/>
-          </a:bodyPr>
-          <a:lstStyle/>
-          <a:p>
-            <a:pPr algn="l">
-              <a:lnSpc>
-                <a:spcPct val="115000"/>
-              </a:lnSpc>
-            </a:pPr>
-            <a:r>
-              <a:rPr sz="1400" b="1">
-                <a:solidFill>
-                  <a:srgbClr val="02C39A"/>
-                </a:solidFill>
-                <a:latin typeface="Calibri"/>
-              </a:rPr>
-              <a:t>Onderzoeksvraag / onderwerp</a:t>
-            </a:r>
-          </a:p>
-          <a:p>
-            <a:pPr algn="l">
-              <a:lnSpc>
-                <a:spcPct val="115000"/>
-              </a:lnSpc>
-            </a:pPr>
-            <a:r>
-              <a:rPr sz="1700" b="0">
-                <a:solidFill>
-                  <a:srgbClr val="21295C"/>
-                </a:solidFill>
-                <a:latin typeface="Calibri"/>
-              </a:rPr>
-              <a:t>Hoe stellen we volgens Markowitz een optimale portefeuille samen op rendement én risico?</a:t>
-            </a:r>
-          </a:p>
-        </p:txBody>
-      </p:sp>
-      <p:sp>
-        <p:nvSpPr>
-          <p:cNvPr id="8" name="TextBox 7"/>
-          <p:cNvSpPr txBox="1"/>
-          <p:nvPr/>
-        </p:nvSpPr>
-        <p:spPr>
-          <a:xfrm>
-            <a:off x="4480560" y="2468880"/>
-            <a:ext cx="7132320" cy="457200"/>
-          </a:xfrm>
-          <a:prstGeom prst="rect">
-            <a:avLst/>
-          </a:prstGeom>
-          <a:noFill/>
-        </p:spPr>
-        <p:txBody>
-          <a:bodyPr wrap="square" anchor="t" lIns="0" rIns="0">
-            <a:spAutoFit/>
-          </a:bodyPr>
-          <a:lstStyle/>
-          <a:p>
-            <a:pPr algn="l">
-              <a:lnSpc>
-                <a:spcPct val="110000"/>
-              </a:lnSpc>
-            </a:pPr>
-            <a:r>
-              <a:rPr sz="1400" b="1">
-                <a:solidFill>
-                  <a:srgbClr val="02C39A"/>
-                </a:solidFill>
-                <a:latin typeface="Calibri"/>
-              </a:rPr>
-              <a:t>Belangrijkste conclusie</a:t>
-            </a:r>
-          </a:p>
-        </p:txBody>
-      </p:sp>
-      <p:sp>
-        <p:nvSpPr>
-          <p:cNvPr id="9" name="TextBox 8"/>
-          <p:cNvSpPr txBox="1"/>
-          <p:nvPr/>
-        </p:nvSpPr>
-        <p:spPr>
-          <a:xfrm>
-            <a:off x="4480560" y="2971800"/>
-            <a:ext cx="7223760" cy="3291840"/>
-          </a:xfrm>
-          <a:prstGeom prst="rect">
-            <a:avLst/>
-          </a:prstGeom>
-          <a:noFill/>
-        </p:spPr>
-        <p:txBody>
-          <a:bodyPr wrap="square" anchor="t" lIns="0" rIns="0">
-            <a:spAutoFit/>
-          </a:bodyPr>
-          <a:lstStyle/>
-          <a:p>
-            <a:pPr algn="l">
-              <a:lnSpc>
-                <a:spcPct val="125000"/>
-              </a:lnSpc>
-            </a:pPr>
-            <a:r>
-              <a:rPr sz="1600" b="0">
-                <a:solidFill>
-                  <a:srgbClr val="21295C"/>
-                </a:solidFill>
-                <a:latin typeface="Calibri"/>
-              </a:rPr>
-              <a:t>Optimale gewichten berekend voor max. Sharpe-ratio en min. variantie.</a:t>
-            </a:r>
-          </a:p>
-          <a:p>
-            <a:pPr algn="l">
-              <a:lnSpc>
-                <a:spcPct val="125000"/>
-              </a:lnSpc>
-            </a:pPr>
-            <a:r>
-              <a:rPr sz="1600" b="0">
-                <a:solidFill>
-                  <a:srgbClr val="21295C"/>
-                </a:solidFill>
-                <a:latin typeface="Calibri"/>
-              </a:rPr>
-              <a:t>Marktportfolio (rode ster) heeft de hoogste Sharpe-ratio.</a:t>
-            </a:r>
-          </a:p>
-          <a:p>
-            <a:pPr algn="l">
-              <a:lnSpc>
-                <a:spcPct val="125000"/>
-              </a:lnSpc>
-            </a:pPr>
-            <a:r>
-              <a:rPr sz="1600" b="0">
-                <a:solidFill>
-                  <a:srgbClr val="21295C"/>
-                </a:solidFill>
-                <a:latin typeface="Calibri"/>
-              </a:rPr>
-              <a:t>Efficiënte grenslijn toont de haalbare combinaties van risico en rendement.</a:t>
+                <a:latin typeface="Calibri"/>
+              </a:rPr>
+              <a:t>Rendement:  9,1%</a:t>
+            </a:r>
+          </a:p>
+          <a:p>
+            <a:pPr algn="l">
+              <a:lnSpc>
+                <a:spcPct val="130000"/>
+              </a:lnSpc>
+            </a:pPr>
+            <a:r>
+              <a:rPr sz="1800" b="0">
+                <a:solidFill>
+                  <a:srgbClr val="FFFFFF"/>
+                </a:solidFill>
+                <a:latin typeface="Calibri"/>
+              </a:rPr>
+              <a:t>Risico (std):  6,0%</a:t>
+            </a:r>
+          </a:p>
+          <a:p>
+            <a:pPr algn="l">
+              <a:lnSpc>
+                <a:spcPct val="130000"/>
+              </a:lnSpc>
+            </a:pPr>
+            <a:r>
+              <a:rPr sz="2000" b="1">
+                <a:solidFill>
+                  <a:srgbClr val="FFFFFF"/>
+                </a:solidFill>
+                <a:latin typeface="Calibri"/>
+              </a:rPr>
+              <a:t>Sharpe-ratio:  1,10</a:t>
+            </a:r>
+          </a:p>
+          <a:p>
+            <a:pPr algn="l">
+              <a:lnSpc>
+                <a:spcPct val="130000"/>
+              </a:lnSpc>
+            </a:pPr>
+            <a:r>
+              <a:rPr sz="800" b="0">
+                <a:solidFill>
+                  <a:srgbClr val="FFFFFF"/>
+                </a:solidFill>
+                <a:latin typeface="Calibri"/>
+              </a:rPr>
+              <a:t/>
+            </a:r>
+          </a:p>
+          <a:p>
+            <a:pPr algn="l">
+              <a:lnSpc>
+                <a:spcPct val="130000"/>
+              </a:lnSpc>
+            </a:pPr>
+            <a:r>
+              <a:rPr sz="1400" b="0">
+                <a:solidFill>
+                  <a:srgbClr val="CADCFC"/>
+                </a:solidFill>
+                <a:latin typeface="Calibri"/>
+              </a:rPr>
+              <a:t>Macro-indicatoren krijgen ~0%:</a:t>
+            </a:r>
+          </a:p>
+          <a:p>
+            <a:pPr algn="l">
+              <a:lnSpc>
+                <a:spcPct val="130000"/>
+              </a:lnSpc>
+            </a:pPr>
+            <a:r>
+              <a:rPr sz="1400" b="0">
+                <a:solidFill>
+                  <a:srgbClr val="CADCFC"/>
+                </a:solidFill>
+                <a:latin typeface="Calibri"/>
+              </a:rPr>
+              <a:t>ze voegen geen rendement per risico toe.</a:t>
             </a:r>
           </a:p>
         </p:txBody>

--- a/Werkplaats2_Groep3_Eindpresentatie.pptx
+++ b/Werkplaats2_Groep3_Eindpresentatie.pptx
@@ -3193,8 +3193,8 @@
         </p:nvSpPr>
         <p:spPr>
           <a:xfrm>
-            <a:off x="822960" y="2194560"/>
-            <a:ext cx="10515600" cy="2011680"/>
+            <a:off x="822960" y="2377440"/>
+            <a:ext cx="10515600" cy="1645920"/>
           </a:xfrm>
           <a:prstGeom prst="rect">
             <a:avLst/>
@@ -3202,7 +3202,7 @@
           <a:noFill/>
         </p:spPr>
         <p:txBody>
-          <a:bodyPr wrap="square" anchor="t" lIns="0" rIns="0">
+          <a:bodyPr wrap="square" anchor="t" lIns="0" rIns="0" tIns="0" bIns="0">
             <a:spAutoFit/>
           </a:bodyPr>
           <a:lstStyle/>
@@ -3211,9 +3211,12 @@
               <a:lnSpc>
                 <a:spcPct val="110000"/>
               </a:lnSpc>
-            </a:pPr>
-            <a:r>
-              <a:rPr sz="4800" b="1">
+              <a:spcAft>
+                <a:spcPts val="200"/>
+              </a:spcAft>
+            </a:pPr>
+            <a:r>
+              <a:rPr sz="4600" b="1">
                 <a:solidFill>
                   <a:srgbClr val="FFFFFF"/>
                 </a:solidFill>
@@ -3232,8 +3235,8 @@
         </p:nvSpPr>
         <p:spPr>
           <a:xfrm>
-            <a:off x="868680" y="3840480"/>
-            <a:ext cx="10515600" cy="1371600"/>
+            <a:off x="868680" y="4114800"/>
+            <a:ext cx="10515600" cy="914400"/>
           </a:xfrm>
           <a:prstGeom prst="rect">
             <a:avLst/>
@@ -3241,7 +3244,7 @@
           <a:noFill/>
         </p:spPr>
         <p:txBody>
-          <a:bodyPr wrap="square" anchor="t" lIns="0" rIns="0">
+          <a:bodyPr wrap="square" anchor="t" lIns="0" rIns="0" tIns="0" bIns="0">
             <a:spAutoFit/>
           </a:bodyPr>
           <a:lstStyle/>
@@ -3250,6 +3253,9 @@
               <a:lnSpc>
                 <a:spcPct val="120000"/>
               </a:lnSpc>
+              <a:spcAft>
+                <a:spcPts val="200"/>
+              </a:spcAft>
             </a:pPr>
             <a:r>
               <a:rPr sz="2000" b="0">
@@ -3386,7 +3392,7 @@
           <a:noFill/>
         </p:spPr>
         <p:txBody>
-          <a:bodyPr wrap="square" anchor="t" lIns="0" rIns="0">
+          <a:bodyPr wrap="square" anchor="t" lIns="0" rIns="0" tIns="0" bIns="0">
             <a:spAutoFit/>
           </a:bodyPr>
           <a:lstStyle/>
@@ -3395,6 +3401,9 @@
               <a:lnSpc>
                 <a:spcPct val="110000"/>
               </a:lnSpc>
+              <a:spcAft>
+                <a:spcPts val="200"/>
+              </a:spcAft>
             </a:pPr>
             <a:r>
               <a:rPr sz="4400" b="1">
@@ -3425,7 +3434,7 @@
           <a:noFill/>
         </p:spPr>
         <p:txBody>
-          <a:bodyPr wrap="square" anchor="t" lIns="0" rIns="0">
+          <a:bodyPr wrap="square" anchor="t" lIns="0" rIns="0" tIns="0" bIns="0">
             <a:spAutoFit/>
           </a:bodyPr>
           <a:lstStyle/>
@@ -3434,6 +3443,9 @@
               <a:lnSpc>
                 <a:spcPct val="145000"/>
               </a:lnSpc>
+              <a:spcAft>
+                <a:spcPts val="200"/>
+              </a:spcAft>
             </a:pPr>
             <a:r>
               <a:rPr sz="1800" b="0">
@@ -3450,6 +3462,9 @@
               <a:lnSpc>
                 <a:spcPct val="145000"/>
               </a:lnSpc>
+              <a:spcAft>
+                <a:spcPts val="200"/>
+              </a:spcAft>
             </a:pPr>
             <a:r>
               <a:rPr sz="1800" b="0">
@@ -3466,6 +3481,9 @@
               <a:lnSpc>
                 <a:spcPct val="145000"/>
               </a:lnSpc>
+              <a:spcAft>
+                <a:spcPts val="200"/>
+              </a:spcAft>
             </a:pPr>
             <a:r>
               <a:rPr sz="1800" b="0">
@@ -3482,6 +3500,9 @@
               <a:lnSpc>
                 <a:spcPct val="145000"/>
               </a:lnSpc>
+              <a:spcAft>
+                <a:spcPts val="200"/>
+              </a:spcAft>
             </a:pPr>
             <a:r>
               <a:rPr sz="1800" b="0">
@@ -3498,6 +3519,9 @@
               <a:lnSpc>
                 <a:spcPct val="145000"/>
               </a:lnSpc>
+              <a:spcAft>
+                <a:spcPts val="200"/>
+              </a:spcAft>
             </a:pPr>
             <a:r>
               <a:rPr sz="1800" b="0">
@@ -3514,6 +3538,9 @@
               <a:lnSpc>
                 <a:spcPct val="145000"/>
               </a:lnSpc>
+              <a:spcAft>
+                <a:spcPts val="200"/>
+              </a:spcAft>
             </a:pPr>
             <a:r>
               <a:rPr sz="1800" b="0">
@@ -3606,7 +3633,7 @@
           <a:noFill/>
         </p:spPr>
         <p:txBody>
-          <a:bodyPr wrap="square" anchor="t" lIns="0" rIns="0">
+          <a:bodyPr wrap="square" anchor="t" lIns="0" rIns="0" tIns="0" bIns="0">
             <a:spAutoFit/>
           </a:bodyPr>
           <a:lstStyle/>
@@ -3615,6 +3642,9 @@
               <a:lnSpc>
                 <a:spcPct val="110000"/>
               </a:lnSpc>
+              <a:spcAft>
+                <a:spcPts val="200"/>
+              </a:spcAft>
             </a:pPr>
             <a:r>
               <a:rPr sz="4000" b="1">
@@ -3645,7 +3675,7 @@
           <a:noFill/>
         </p:spPr>
         <p:txBody>
-          <a:bodyPr wrap="square" anchor="t" lIns="0" rIns="0">
+          <a:bodyPr wrap="square" anchor="t" lIns="0" rIns="0" tIns="0" bIns="0">
             <a:spAutoFit/>
           </a:bodyPr>
           <a:lstStyle/>
@@ -3654,6 +3684,9 @@
               <a:lnSpc>
                 <a:spcPct val="140000"/>
               </a:lnSpc>
+              <a:spcAft>
+                <a:spcPts val="200"/>
+              </a:spcAft>
             </a:pPr>
             <a:r>
               <a:rPr sz="1800" b="0">
@@ -3670,6 +3703,9 @@
               <a:lnSpc>
                 <a:spcPct val="140000"/>
               </a:lnSpc>
+              <a:spcAft>
+                <a:spcPts val="200"/>
+              </a:spcAft>
             </a:pPr>
             <a:r>
               <a:rPr sz="1700" b="0">
@@ -3686,6 +3722,9 @@
               <a:lnSpc>
                 <a:spcPct val="140000"/>
               </a:lnSpc>
+              <a:spcAft>
+                <a:spcPts val="200"/>
+              </a:spcAft>
             </a:pPr>
             <a:r>
               <a:rPr sz="1700" b="0">
@@ -3702,6 +3741,9 @@
               <a:lnSpc>
                 <a:spcPct val="140000"/>
               </a:lnSpc>
+              <a:spcAft>
+                <a:spcPts val="200"/>
+              </a:spcAft>
             </a:pPr>
             <a:r>
               <a:rPr sz="1700" b="0">
@@ -3718,6 +3760,9 @@
               <a:lnSpc>
                 <a:spcPct val="140000"/>
               </a:lnSpc>
+              <a:spcAft>
+                <a:spcPts val="200"/>
+              </a:spcAft>
             </a:pPr>
             <a:r>
               <a:rPr sz="1700" b="0">
@@ -3734,6 +3779,9 @@
               <a:lnSpc>
                 <a:spcPct val="140000"/>
               </a:lnSpc>
+              <a:spcAft>
+                <a:spcPts val="200"/>
+              </a:spcAft>
             </a:pPr>
             <a:r>
               <a:rPr sz="1700" b="0">
@@ -3914,7 +3962,7 @@
           <a:noFill/>
         </p:spPr>
         <p:txBody>
-          <a:bodyPr wrap="square" anchor="t" lIns="0" rIns="0">
+          <a:bodyPr wrap="square" anchor="t" lIns="0" rIns="0" tIns="0" bIns="0">
             <a:spAutoFit/>
           </a:bodyPr>
           <a:lstStyle/>
@@ -3923,6 +3971,9 @@
               <a:lnSpc>
                 <a:spcPct val="110000"/>
               </a:lnSpc>
+              <a:spcAft>
+                <a:spcPts val="200"/>
+              </a:spcAft>
             </a:pPr>
             <a:r>
               <a:rPr sz="1800" b="1">
@@ -3953,7 +4004,7 @@
           <a:noFill/>
         </p:spPr>
         <p:txBody>
-          <a:bodyPr wrap="square" anchor="t" lIns="0" rIns="0">
+          <a:bodyPr wrap="square" anchor="t" lIns="0" rIns="0" tIns="0" bIns="0">
             <a:spAutoFit/>
           </a:bodyPr>
           <a:lstStyle/>
@@ -3962,6 +4013,9 @@
               <a:lnSpc>
                 <a:spcPct val="130000"/>
               </a:lnSpc>
+              <a:spcAft>
+                <a:spcPts val="200"/>
+              </a:spcAft>
             </a:pPr>
             <a:r>
               <a:rPr sz="1400" b="1">
@@ -3978,6 +4032,9 @@
               <a:lnSpc>
                 <a:spcPct val="130000"/>
               </a:lnSpc>
+              <a:spcAft>
+                <a:spcPts val="200"/>
+              </a:spcAft>
             </a:pPr>
             <a:r>
               <a:rPr sz="1400" b="0">
@@ -3994,6 +4051,9 @@
               <a:lnSpc>
                 <a:spcPct val="130000"/>
               </a:lnSpc>
+              <a:spcAft>
+                <a:spcPts val="200"/>
+              </a:spcAft>
             </a:pPr>
             <a:r>
               <a:rPr sz="1400" b="0">
@@ -4010,6 +4070,9 @@
               <a:lnSpc>
                 <a:spcPct val="130000"/>
               </a:lnSpc>
+              <a:spcAft>
+                <a:spcPts val="200"/>
+              </a:spcAft>
             </a:pPr>
             <a:r>
               <a:rPr sz="1400" b="0">
@@ -4026,6 +4089,9 @@
               <a:lnSpc>
                 <a:spcPct val="130000"/>
               </a:lnSpc>
+              <a:spcAft>
+                <a:spcPts val="200"/>
+              </a:spcAft>
             </a:pPr>
             <a:r>
               <a:rPr sz="1400" b="0">
@@ -4056,7 +4122,7 @@
           <a:noFill/>
         </p:spPr>
         <p:txBody>
-          <a:bodyPr wrap="square" anchor="t" lIns="0" rIns="0">
+          <a:bodyPr wrap="square" anchor="t" lIns="0" rIns="0" tIns="0" bIns="0">
             <a:spAutoFit/>
           </a:bodyPr>
           <a:lstStyle/>
@@ -4065,6 +4131,9 @@
               <a:lnSpc>
                 <a:spcPct val="115000"/>
               </a:lnSpc>
+              <a:spcAft>
+                <a:spcPts val="200"/>
+              </a:spcAft>
             </a:pPr>
             <a:r>
               <a:rPr sz="1400" b="1">
@@ -4081,6 +4150,9 @@
               <a:lnSpc>
                 <a:spcPct val="115000"/>
               </a:lnSpc>
+              <a:spcAft>
+                <a:spcPts val="200"/>
+              </a:spcAft>
             </a:pPr>
             <a:r>
               <a:rPr sz="1700" b="0">
@@ -4111,7 +4183,7 @@
           <a:noFill/>
         </p:spPr>
         <p:txBody>
-          <a:bodyPr wrap="square" anchor="t" lIns="0" rIns="0">
+          <a:bodyPr wrap="square" anchor="t" lIns="0" rIns="0" tIns="0" bIns="0">
             <a:spAutoFit/>
           </a:bodyPr>
           <a:lstStyle/>
@@ -4120,6 +4192,9 @@
               <a:lnSpc>
                 <a:spcPct val="115000"/>
               </a:lnSpc>
+              <a:spcAft>
+                <a:spcPts val="200"/>
+              </a:spcAft>
             </a:pPr>
             <a:r>
               <a:rPr sz="1400" b="1">
@@ -4136,6 +4211,9 @@
               <a:lnSpc>
                 <a:spcPct val="115000"/>
               </a:lnSpc>
+              <a:spcAft>
+                <a:spcPts val="200"/>
+              </a:spcAft>
             </a:pPr>
             <a:r>
               <a:rPr sz="1600" b="0">
@@ -4166,7 +4244,7 @@
           <a:noFill/>
         </p:spPr>
         <p:txBody>
-          <a:bodyPr wrap="square" anchor="t" lIns="0" rIns="0">
+          <a:bodyPr wrap="square" anchor="t" lIns="0" rIns="0" tIns="0" bIns="0">
             <a:spAutoFit/>
           </a:bodyPr>
           <a:lstStyle/>
@@ -4175,6 +4253,9 @@
               <a:lnSpc>
                 <a:spcPct val="110000"/>
               </a:lnSpc>
+              <a:spcAft>
+                <a:spcPts val="200"/>
+              </a:spcAft>
             </a:pPr>
             <a:r>
               <a:rPr sz="1400" b="1">
@@ -4205,7 +4286,7 @@
           <a:noFill/>
         </p:spPr>
         <p:txBody>
-          <a:bodyPr wrap="square" anchor="t" lIns="0" rIns="0">
+          <a:bodyPr wrap="square" anchor="t" lIns="0" rIns="0" tIns="0" bIns="0">
             <a:spAutoFit/>
           </a:bodyPr>
           <a:lstStyle/>
@@ -4214,6 +4295,9 @@
               <a:lnSpc>
                 <a:spcPct val="125000"/>
               </a:lnSpc>
+              <a:spcAft>
+                <a:spcPts val="200"/>
+              </a:spcAft>
             </a:pPr>
             <a:r>
               <a:rPr sz="1600" b="0">
@@ -4230,6 +4314,9 @@
               <a:lnSpc>
                 <a:spcPct val="125000"/>
               </a:lnSpc>
+              <a:spcAft>
+                <a:spcPts val="200"/>
+              </a:spcAft>
             </a:pPr>
             <a:r>
               <a:rPr sz="1600" b="0">
@@ -4246,6 +4333,9 @@
               <a:lnSpc>
                 <a:spcPct val="125000"/>
               </a:lnSpc>
+              <a:spcAft>
+                <a:spcPts val="200"/>
+              </a:spcAft>
             </a:pPr>
             <a:r>
               <a:rPr sz="1600" b="0">
@@ -4426,7 +4516,7 @@
           <a:noFill/>
         </p:spPr>
         <p:txBody>
-          <a:bodyPr wrap="square" anchor="t" lIns="0" rIns="0">
+          <a:bodyPr wrap="square" anchor="t" lIns="0" rIns="0" tIns="0" bIns="0">
             <a:spAutoFit/>
           </a:bodyPr>
           <a:lstStyle/>
@@ -4435,6 +4525,9 @@
               <a:lnSpc>
                 <a:spcPct val="110000"/>
               </a:lnSpc>
+              <a:spcAft>
+                <a:spcPts val="200"/>
+              </a:spcAft>
             </a:pPr>
             <a:r>
               <a:rPr sz="1800" b="1">
@@ -4465,7 +4558,7 @@
           <a:noFill/>
         </p:spPr>
         <p:txBody>
-          <a:bodyPr wrap="square" anchor="t" lIns="0" rIns="0">
+          <a:bodyPr wrap="square" anchor="t" lIns="0" rIns="0" tIns="0" bIns="0">
             <a:spAutoFit/>
           </a:bodyPr>
           <a:lstStyle/>
@@ -4474,6 +4567,9 @@
               <a:lnSpc>
                 <a:spcPct val="130000"/>
               </a:lnSpc>
+              <a:spcAft>
+                <a:spcPts val="200"/>
+              </a:spcAft>
             </a:pPr>
             <a:r>
               <a:rPr sz="1400" b="1">
@@ -4490,6 +4586,9 @@
               <a:lnSpc>
                 <a:spcPct val="130000"/>
               </a:lnSpc>
+              <a:spcAft>
+                <a:spcPts val="200"/>
+              </a:spcAft>
             </a:pPr>
             <a:r>
               <a:rPr sz="1400" b="0">
@@ -4506,6 +4605,9 @@
               <a:lnSpc>
                 <a:spcPct val="130000"/>
               </a:lnSpc>
+              <a:spcAft>
+                <a:spcPts val="200"/>
+              </a:spcAft>
             </a:pPr>
             <a:r>
               <a:rPr sz="1400" b="0">
@@ -4522,6 +4624,9 @@
               <a:lnSpc>
                 <a:spcPct val="130000"/>
               </a:lnSpc>
+              <a:spcAft>
+                <a:spcPts val="200"/>
+              </a:spcAft>
             </a:pPr>
             <a:r>
               <a:rPr sz="1400" b="0">
@@ -4538,6 +4643,9 @@
               <a:lnSpc>
                 <a:spcPct val="130000"/>
               </a:lnSpc>
+              <a:spcAft>
+                <a:spcPts val="200"/>
+              </a:spcAft>
             </a:pPr>
             <a:r>
               <a:rPr sz="1400" b="0">
@@ -4568,7 +4676,7 @@
           <a:noFill/>
         </p:spPr>
         <p:txBody>
-          <a:bodyPr wrap="square" anchor="t" lIns="0" rIns="0">
+          <a:bodyPr wrap="square" anchor="t" lIns="0" rIns="0" tIns="0" bIns="0">
             <a:spAutoFit/>
           </a:bodyPr>
           <a:lstStyle/>
@@ -4577,6 +4685,9 @@
               <a:lnSpc>
                 <a:spcPct val="115000"/>
               </a:lnSpc>
+              <a:spcAft>
+                <a:spcPts val="200"/>
+              </a:spcAft>
             </a:pPr>
             <a:r>
               <a:rPr sz="1400" b="1">
@@ -4593,6 +4704,9 @@
               <a:lnSpc>
                 <a:spcPct val="115000"/>
               </a:lnSpc>
+              <a:spcAft>
+                <a:spcPts val="200"/>
+              </a:spcAft>
             </a:pPr>
             <a:r>
               <a:rPr sz="1700" b="0">
@@ -4623,7 +4737,7 @@
           <a:noFill/>
         </p:spPr>
         <p:txBody>
-          <a:bodyPr wrap="square" anchor="t" lIns="0" rIns="0">
+          <a:bodyPr wrap="square" anchor="t" lIns="0" rIns="0" tIns="0" bIns="0">
             <a:spAutoFit/>
           </a:bodyPr>
           <a:lstStyle/>
@@ -4632,6 +4746,9 @@
               <a:lnSpc>
                 <a:spcPct val="115000"/>
               </a:lnSpc>
+              <a:spcAft>
+                <a:spcPts val="200"/>
+              </a:spcAft>
             </a:pPr>
             <a:r>
               <a:rPr sz="1400" b="1">
@@ -4648,6 +4765,9 @@
               <a:lnSpc>
                 <a:spcPct val="115000"/>
               </a:lnSpc>
+              <a:spcAft>
+                <a:spcPts val="200"/>
+              </a:spcAft>
             </a:pPr>
             <a:r>
               <a:rPr sz="1600" b="0">
@@ -4678,7 +4798,7 @@
           <a:noFill/>
         </p:spPr>
         <p:txBody>
-          <a:bodyPr wrap="square" anchor="t" lIns="0" rIns="0">
+          <a:bodyPr wrap="square" anchor="t" lIns="0" rIns="0" tIns="0" bIns="0">
             <a:spAutoFit/>
           </a:bodyPr>
           <a:lstStyle/>
@@ -4687,6 +4807,9 @@
               <a:lnSpc>
                 <a:spcPct val="110000"/>
               </a:lnSpc>
+              <a:spcAft>
+                <a:spcPts val="200"/>
+              </a:spcAft>
             </a:pPr>
             <a:r>
               <a:rPr sz="1400" b="1">
@@ -4717,7 +4840,7 @@
           <a:noFill/>
         </p:spPr>
         <p:txBody>
-          <a:bodyPr wrap="square" anchor="t" lIns="0" rIns="0">
+          <a:bodyPr wrap="square" anchor="t" lIns="0" rIns="0" tIns="0" bIns="0">
             <a:spAutoFit/>
           </a:bodyPr>
           <a:lstStyle/>
@@ -4726,6 +4849,9 @@
               <a:lnSpc>
                 <a:spcPct val="125000"/>
               </a:lnSpc>
+              <a:spcAft>
+                <a:spcPts val="200"/>
+              </a:spcAft>
             </a:pPr>
             <a:r>
               <a:rPr sz="1600" b="0">
@@ -4742,6 +4868,9 @@
               <a:lnSpc>
                 <a:spcPct val="125000"/>
               </a:lnSpc>
+              <a:spcAft>
+                <a:spcPts val="200"/>
+              </a:spcAft>
             </a:pPr>
             <a:r>
               <a:rPr sz="1600" b="0">
@@ -4758,6 +4887,9 @@
               <a:lnSpc>
                 <a:spcPct val="125000"/>
               </a:lnSpc>
+              <a:spcAft>
+                <a:spcPts val="200"/>
+              </a:spcAft>
             </a:pPr>
             <a:r>
               <a:rPr sz="1600" b="0">
@@ -4938,7 +5070,7 @@
           <a:noFill/>
         </p:spPr>
         <p:txBody>
-          <a:bodyPr wrap="square" anchor="t" lIns="0" rIns="0">
+          <a:bodyPr wrap="square" anchor="t" lIns="0" rIns="0" tIns="0" bIns="0">
             <a:spAutoFit/>
           </a:bodyPr>
           <a:lstStyle/>
@@ -4947,6 +5079,9 @@
               <a:lnSpc>
                 <a:spcPct val="110000"/>
               </a:lnSpc>
+              <a:spcAft>
+                <a:spcPts val="200"/>
+              </a:spcAft>
             </a:pPr>
             <a:r>
               <a:rPr sz="1800" b="1">
@@ -4977,7 +5112,7 @@
           <a:noFill/>
         </p:spPr>
         <p:txBody>
-          <a:bodyPr wrap="square" anchor="t" lIns="0" rIns="0">
+          <a:bodyPr wrap="square" anchor="t" lIns="0" rIns="0" tIns="0" bIns="0">
             <a:spAutoFit/>
           </a:bodyPr>
           <a:lstStyle/>
@@ -4986,6 +5121,9 @@
               <a:lnSpc>
                 <a:spcPct val="130000"/>
               </a:lnSpc>
+              <a:spcAft>
+                <a:spcPts val="200"/>
+              </a:spcAft>
             </a:pPr>
             <a:r>
               <a:rPr sz="1400" b="1">
@@ -5002,6 +5140,9 @@
               <a:lnSpc>
                 <a:spcPct val="130000"/>
               </a:lnSpc>
+              <a:spcAft>
+                <a:spcPts val="200"/>
+              </a:spcAft>
             </a:pPr>
             <a:r>
               <a:rPr sz="1400" b="0">
@@ -5018,6 +5159,9 @@
               <a:lnSpc>
                 <a:spcPct val="130000"/>
               </a:lnSpc>
+              <a:spcAft>
+                <a:spcPts val="200"/>
+              </a:spcAft>
             </a:pPr>
             <a:r>
               <a:rPr sz="1400" b="0">
@@ -5034,6 +5178,9 @@
               <a:lnSpc>
                 <a:spcPct val="130000"/>
               </a:lnSpc>
+              <a:spcAft>
+                <a:spcPts val="200"/>
+              </a:spcAft>
             </a:pPr>
             <a:r>
               <a:rPr sz="1400" b="0">
@@ -5050,6 +5197,9 @@
               <a:lnSpc>
                 <a:spcPct val="130000"/>
               </a:lnSpc>
+              <a:spcAft>
+                <a:spcPts val="200"/>
+              </a:spcAft>
             </a:pPr>
             <a:r>
               <a:rPr sz="1400" b="0">
@@ -5080,7 +5230,7 @@
           <a:noFill/>
         </p:spPr>
         <p:txBody>
-          <a:bodyPr wrap="square" anchor="t" lIns="0" rIns="0">
+          <a:bodyPr wrap="square" anchor="t" lIns="0" rIns="0" tIns="0" bIns="0">
             <a:spAutoFit/>
           </a:bodyPr>
           <a:lstStyle/>
@@ -5089,6 +5239,9 @@
               <a:lnSpc>
                 <a:spcPct val="115000"/>
               </a:lnSpc>
+              <a:spcAft>
+                <a:spcPts val="200"/>
+              </a:spcAft>
             </a:pPr>
             <a:r>
               <a:rPr sz="1400" b="1">
@@ -5105,6 +5258,9 @@
               <a:lnSpc>
                 <a:spcPct val="115000"/>
               </a:lnSpc>
+              <a:spcAft>
+                <a:spcPts val="200"/>
+              </a:spcAft>
             </a:pPr>
             <a:r>
               <a:rPr sz="1700" b="0">
@@ -5135,7 +5291,7 @@
           <a:noFill/>
         </p:spPr>
         <p:txBody>
-          <a:bodyPr wrap="square" anchor="t" lIns="0" rIns="0">
+          <a:bodyPr wrap="square" anchor="t" lIns="0" rIns="0" tIns="0" bIns="0">
             <a:spAutoFit/>
           </a:bodyPr>
           <a:lstStyle/>
@@ -5144,6 +5300,9 @@
               <a:lnSpc>
                 <a:spcPct val="115000"/>
               </a:lnSpc>
+              <a:spcAft>
+                <a:spcPts val="200"/>
+              </a:spcAft>
             </a:pPr>
             <a:r>
               <a:rPr sz="1400" b="1">
@@ -5160,6 +5319,9 @@
               <a:lnSpc>
                 <a:spcPct val="115000"/>
               </a:lnSpc>
+              <a:spcAft>
+                <a:spcPts val="200"/>
+              </a:spcAft>
             </a:pPr>
             <a:r>
               <a:rPr sz="1600" b="0">
@@ -5190,7 +5352,7 @@
           <a:noFill/>
         </p:spPr>
         <p:txBody>
-          <a:bodyPr wrap="square" anchor="t" lIns="0" rIns="0">
+          <a:bodyPr wrap="square" anchor="t" lIns="0" rIns="0" tIns="0" bIns="0">
             <a:spAutoFit/>
           </a:bodyPr>
           <a:lstStyle/>
@@ -5199,6 +5361,9 @@
               <a:lnSpc>
                 <a:spcPct val="110000"/>
               </a:lnSpc>
+              <a:spcAft>
+                <a:spcPts val="200"/>
+              </a:spcAft>
             </a:pPr>
             <a:r>
               <a:rPr sz="1400" b="1">
@@ -5229,7 +5394,7 @@
           <a:noFill/>
         </p:spPr>
         <p:txBody>
-          <a:bodyPr wrap="square" anchor="t" lIns="0" rIns="0">
+          <a:bodyPr wrap="square" anchor="t" lIns="0" rIns="0" tIns="0" bIns="0">
             <a:spAutoFit/>
           </a:bodyPr>
           <a:lstStyle/>
@@ -5238,6 +5403,9 @@
               <a:lnSpc>
                 <a:spcPct val="125000"/>
               </a:lnSpc>
+              <a:spcAft>
+                <a:spcPts val="200"/>
+              </a:spcAft>
             </a:pPr>
             <a:r>
               <a:rPr sz="1600" b="0">
@@ -5254,6 +5422,9 @@
               <a:lnSpc>
                 <a:spcPct val="125000"/>
               </a:lnSpc>
+              <a:spcAft>
+                <a:spcPts val="200"/>
+              </a:spcAft>
             </a:pPr>
             <a:r>
               <a:rPr sz="1600" b="0">
@@ -5270,6 +5441,9 @@
               <a:lnSpc>
                 <a:spcPct val="125000"/>
               </a:lnSpc>
+              <a:spcAft>
+                <a:spcPts val="200"/>
+              </a:spcAft>
             </a:pPr>
             <a:r>
               <a:rPr sz="1600" b="0">
@@ -5450,7 +5624,7 @@
           <a:noFill/>
         </p:spPr>
         <p:txBody>
-          <a:bodyPr wrap="square" anchor="t" lIns="0" rIns="0">
+          <a:bodyPr wrap="square" anchor="t" lIns="0" rIns="0" tIns="0" bIns="0">
             <a:spAutoFit/>
           </a:bodyPr>
           <a:lstStyle/>
@@ -5459,6 +5633,9 @@
               <a:lnSpc>
                 <a:spcPct val="110000"/>
               </a:lnSpc>
+              <a:spcAft>
+                <a:spcPts val="200"/>
+              </a:spcAft>
             </a:pPr>
             <a:r>
               <a:rPr sz="1800" b="1">
@@ -5489,7 +5666,7 @@
           <a:noFill/>
         </p:spPr>
         <p:txBody>
-          <a:bodyPr wrap="square" anchor="t" lIns="0" rIns="0">
+          <a:bodyPr wrap="square" anchor="t" lIns="0" rIns="0" tIns="0" bIns="0">
             <a:spAutoFit/>
           </a:bodyPr>
           <a:lstStyle/>
@@ -5498,6 +5675,9 @@
               <a:lnSpc>
                 <a:spcPct val="130000"/>
               </a:lnSpc>
+              <a:spcAft>
+                <a:spcPts val="200"/>
+              </a:spcAft>
             </a:pPr>
             <a:r>
               <a:rPr sz="1400" b="1">
@@ -5514,6 +5694,9 @@
               <a:lnSpc>
                 <a:spcPct val="130000"/>
               </a:lnSpc>
+              <a:spcAft>
+                <a:spcPts val="200"/>
+              </a:spcAft>
             </a:pPr>
             <a:r>
               <a:rPr sz="1400" b="0">
@@ -5530,6 +5713,9 @@
               <a:lnSpc>
                 <a:spcPct val="130000"/>
               </a:lnSpc>
+              <a:spcAft>
+                <a:spcPts val="200"/>
+              </a:spcAft>
             </a:pPr>
             <a:r>
               <a:rPr sz="1400" b="0">
@@ -5546,6 +5732,9 @@
               <a:lnSpc>
                 <a:spcPct val="130000"/>
               </a:lnSpc>
+              <a:spcAft>
+                <a:spcPts val="200"/>
+              </a:spcAft>
             </a:pPr>
             <a:r>
               <a:rPr sz="1400" b="0">
@@ -5562,6 +5751,9 @@
               <a:lnSpc>
                 <a:spcPct val="130000"/>
               </a:lnSpc>
+              <a:spcAft>
+                <a:spcPts val="200"/>
+              </a:spcAft>
             </a:pPr>
             <a:r>
               <a:rPr sz="1400" b="0">
@@ -5592,7 +5784,7 @@
           <a:noFill/>
         </p:spPr>
         <p:txBody>
-          <a:bodyPr wrap="square" anchor="t" lIns="0" rIns="0">
+          <a:bodyPr wrap="square" anchor="t" lIns="0" rIns="0" tIns="0" bIns="0">
             <a:spAutoFit/>
           </a:bodyPr>
           <a:lstStyle/>
@@ -5601,6 +5793,9 @@
               <a:lnSpc>
                 <a:spcPct val="115000"/>
               </a:lnSpc>
+              <a:spcAft>
+                <a:spcPts val="200"/>
+              </a:spcAft>
             </a:pPr>
             <a:r>
               <a:rPr sz="1400" b="1">
@@ -5617,6 +5812,9 @@
               <a:lnSpc>
                 <a:spcPct val="115000"/>
               </a:lnSpc>
+              <a:spcAft>
+                <a:spcPts val="200"/>
+              </a:spcAft>
             </a:pPr>
             <a:r>
               <a:rPr sz="1700" b="0">
@@ -5647,7 +5845,7 @@
           <a:noFill/>
         </p:spPr>
         <p:txBody>
-          <a:bodyPr wrap="square" anchor="t" lIns="0" rIns="0">
+          <a:bodyPr wrap="square" anchor="t" lIns="0" rIns="0" tIns="0" bIns="0">
             <a:spAutoFit/>
           </a:bodyPr>
           <a:lstStyle/>
@@ -5656,6 +5854,9 @@
               <a:lnSpc>
                 <a:spcPct val="115000"/>
               </a:lnSpc>
+              <a:spcAft>
+                <a:spcPts val="200"/>
+              </a:spcAft>
             </a:pPr>
             <a:r>
               <a:rPr sz="1400" b="1">
@@ -5672,6 +5873,9 @@
               <a:lnSpc>
                 <a:spcPct val="115000"/>
               </a:lnSpc>
+              <a:spcAft>
+                <a:spcPts val="200"/>
+              </a:spcAft>
             </a:pPr>
             <a:r>
               <a:rPr sz="1600" b="0">
@@ -5702,7 +5906,7 @@
           <a:noFill/>
         </p:spPr>
         <p:txBody>
-          <a:bodyPr wrap="square" anchor="t" lIns="0" rIns="0">
+          <a:bodyPr wrap="square" anchor="t" lIns="0" rIns="0" tIns="0" bIns="0">
             <a:spAutoFit/>
           </a:bodyPr>
           <a:lstStyle/>
@@ -5711,6 +5915,9 @@
               <a:lnSpc>
                 <a:spcPct val="110000"/>
               </a:lnSpc>
+              <a:spcAft>
+                <a:spcPts val="200"/>
+              </a:spcAft>
             </a:pPr>
             <a:r>
               <a:rPr sz="1400" b="1">
@@ -5741,7 +5948,7 @@
           <a:noFill/>
         </p:spPr>
         <p:txBody>
-          <a:bodyPr wrap="square" anchor="t" lIns="0" rIns="0">
+          <a:bodyPr wrap="square" anchor="t" lIns="0" rIns="0" tIns="0" bIns="0">
             <a:spAutoFit/>
           </a:bodyPr>
           <a:lstStyle/>
@@ -5750,6 +5957,9 @@
               <a:lnSpc>
                 <a:spcPct val="125000"/>
               </a:lnSpc>
+              <a:spcAft>
+                <a:spcPts val="200"/>
+              </a:spcAft>
             </a:pPr>
             <a:r>
               <a:rPr sz="1600" b="0">
@@ -5766,6 +5976,9 @@
               <a:lnSpc>
                 <a:spcPct val="125000"/>
               </a:lnSpc>
+              <a:spcAft>
+                <a:spcPts val="200"/>
+              </a:spcAft>
             </a:pPr>
             <a:r>
               <a:rPr sz="1600" b="0">
@@ -5782,6 +5995,9 @@
               <a:lnSpc>
                 <a:spcPct val="125000"/>
               </a:lnSpc>
+              <a:spcAft>
+                <a:spcPts val="200"/>
+              </a:spcAft>
             </a:pPr>
             <a:r>
               <a:rPr sz="1600" b="0">
@@ -5962,7 +6178,7 @@
           <a:noFill/>
         </p:spPr>
         <p:txBody>
-          <a:bodyPr wrap="square" anchor="t" lIns="0" rIns="0">
+          <a:bodyPr wrap="square" anchor="t" lIns="0" rIns="0" tIns="0" bIns="0">
             <a:spAutoFit/>
           </a:bodyPr>
           <a:lstStyle/>
@@ -5971,6 +6187,9 @@
               <a:lnSpc>
                 <a:spcPct val="110000"/>
               </a:lnSpc>
+              <a:spcAft>
+                <a:spcPts val="200"/>
+              </a:spcAft>
             </a:pPr>
             <a:r>
               <a:rPr sz="1800" b="1">
@@ -6001,7 +6220,7 @@
           <a:noFill/>
         </p:spPr>
         <p:txBody>
-          <a:bodyPr wrap="square" anchor="t" lIns="0" rIns="0">
+          <a:bodyPr wrap="square" anchor="t" lIns="0" rIns="0" tIns="0" bIns="0">
             <a:spAutoFit/>
           </a:bodyPr>
           <a:lstStyle/>
@@ -6010,6 +6229,9 @@
               <a:lnSpc>
                 <a:spcPct val="130000"/>
               </a:lnSpc>
+              <a:spcAft>
+                <a:spcPts val="200"/>
+              </a:spcAft>
             </a:pPr>
             <a:r>
               <a:rPr sz="1400" b="1">
@@ -6026,6 +6248,9 @@
               <a:lnSpc>
                 <a:spcPct val="130000"/>
               </a:lnSpc>
+              <a:spcAft>
+                <a:spcPts val="200"/>
+              </a:spcAft>
             </a:pPr>
             <a:r>
               <a:rPr sz="1400" b="0">
@@ -6042,6 +6267,9 @@
               <a:lnSpc>
                 <a:spcPct val="130000"/>
               </a:lnSpc>
+              <a:spcAft>
+                <a:spcPts val="200"/>
+              </a:spcAft>
             </a:pPr>
             <a:r>
               <a:rPr sz="1400" b="0">
@@ -6058,6 +6286,9 @@
               <a:lnSpc>
                 <a:spcPct val="130000"/>
               </a:lnSpc>
+              <a:spcAft>
+                <a:spcPts val="200"/>
+              </a:spcAft>
             </a:pPr>
             <a:r>
               <a:rPr sz="1400" b="0">
@@ -6074,6 +6305,9 @@
               <a:lnSpc>
                 <a:spcPct val="130000"/>
               </a:lnSpc>
+              <a:spcAft>
+                <a:spcPts val="200"/>
+              </a:spcAft>
             </a:pPr>
             <a:r>
               <a:rPr sz="1400" b="0">
@@ -6104,7 +6338,7 @@
           <a:noFill/>
         </p:spPr>
         <p:txBody>
-          <a:bodyPr wrap="square" anchor="t" lIns="0" rIns="0">
+          <a:bodyPr wrap="square" anchor="t" lIns="0" rIns="0" tIns="0" bIns="0">
             <a:spAutoFit/>
           </a:bodyPr>
           <a:lstStyle/>
@@ -6113,6 +6347,9 @@
               <a:lnSpc>
                 <a:spcPct val="115000"/>
               </a:lnSpc>
+              <a:spcAft>
+                <a:spcPts val="200"/>
+              </a:spcAft>
             </a:pPr>
             <a:r>
               <a:rPr sz="1400" b="1">
@@ -6129,6 +6366,9 @@
               <a:lnSpc>
                 <a:spcPct val="115000"/>
               </a:lnSpc>
+              <a:spcAft>
+                <a:spcPts val="200"/>
+              </a:spcAft>
             </a:pPr>
             <a:r>
               <a:rPr sz="1700" b="0">
@@ -6159,7 +6399,7 @@
           <a:noFill/>
         </p:spPr>
         <p:txBody>
-          <a:bodyPr wrap="square" anchor="t" lIns="0" rIns="0">
+          <a:bodyPr wrap="square" anchor="t" lIns="0" rIns="0" tIns="0" bIns="0">
             <a:spAutoFit/>
           </a:bodyPr>
           <a:lstStyle/>
@@ -6168,6 +6408,9 @@
               <a:lnSpc>
                 <a:spcPct val="115000"/>
               </a:lnSpc>
+              <a:spcAft>
+                <a:spcPts val="200"/>
+              </a:spcAft>
             </a:pPr>
             <a:r>
               <a:rPr sz="1400" b="1">
@@ -6184,6 +6427,9 @@
               <a:lnSpc>
                 <a:spcPct val="115000"/>
               </a:lnSpc>
+              <a:spcAft>
+                <a:spcPts val="200"/>
+              </a:spcAft>
             </a:pPr>
             <a:r>
               <a:rPr sz="1600" b="0">
@@ -6214,7 +6460,7 @@
           <a:noFill/>
         </p:spPr>
         <p:txBody>
-          <a:bodyPr wrap="square" anchor="t" lIns="0" rIns="0">
+          <a:bodyPr wrap="square" anchor="t" lIns="0" rIns="0" tIns="0" bIns="0">
             <a:spAutoFit/>
           </a:bodyPr>
           <a:lstStyle/>
@@ -6223,6 +6469,9 @@
               <a:lnSpc>
                 <a:spcPct val="110000"/>
               </a:lnSpc>
+              <a:spcAft>
+                <a:spcPts val="200"/>
+              </a:spcAft>
             </a:pPr>
             <a:r>
               <a:rPr sz="1400" b="1">
@@ -6253,7 +6502,7 @@
           <a:noFill/>
         </p:spPr>
         <p:txBody>
-          <a:bodyPr wrap="square" anchor="t" lIns="0" rIns="0">
+          <a:bodyPr wrap="square" anchor="t" lIns="0" rIns="0" tIns="0" bIns="0">
             <a:spAutoFit/>
           </a:bodyPr>
           <a:lstStyle/>
@@ -6262,6 +6511,9 @@
               <a:lnSpc>
                 <a:spcPct val="125000"/>
               </a:lnSpc>
+              <a:spcAft>
+                <a:spcPts val="200"/>
+              </a:spcAft>
             </a:pPr>
             <a:r>
               <a:rPr sz="1600" b="0">
@@ -6278,6 +6530,9 @@
               <a:lnSpc>
                 <a:spcPct val="125000"/>
               </a:lnSpc>
+              <a:spcAft>
+                <a:spcPts val="200"/>
+              </a:spcAft>
             </a:pPr>
             <a:r>
               <a:rPr sz="1600" b="0">
@@ -6294,6 +6549,9 @@
               <a:lnSpc>
                 <a:spcPct val="125000"/>
               </a:lnSpc>
+              <a:spcAft>
+                <a:spcPts val="200"/>
+              </a:spcAft>
             </a:pPr>
             <a:r>
               <a:rPr sz="1600" b="0">
@@ -6386,7 +6644,7 @@
           <a:noFill/>
         </p:spPr>
         <p:txBody>
-          <a:bodyPr wrap="square" anchor="t" lIns="0" rIns="0">
+          <a:bodyPr wrap="square" anchor="t" lIns="0" rIns="0" tIns="0" bIns="0">
             <a:spAutoFit/>
           </a:bodyPr>
           <a:lstStyle/>
@@ -6395,6 +6653,9 @@
               <a:lnSpc>
                 <a:spcPct val="110000"/>
               </a:lnSpc>
+              <a:spcAft>
+                <a:spcPts val="200"/>
+              </a:spcAft>
             </a:pPr>
             <a:r>
               <a:rPr sz="3600" b="1">
@@ -6469,7 +6730,7 @@
           <a:noFill/>
         </p:spPr>
         <p:txBody>
-          <a:bodyPr wrap="square" anchor="t" lIns="0" rIns="0">
+          <a:bodyPr wrap="square" anchor="t" lIns="0" rIns="0" tIns="0" bIns="0">
             <a:spAutoFit/>
           </a:bodyPr>
           <a:lstStyle/>
@@ -6478,6 +6739,9 @@
               <a:lnSpc>
                 <a:spcPct val="110000"/>
               </a:lnSpc>
+              <a:spcAft>
+                <a:spcPts val="200"/>
+              </a:spcAft>
             </a:pPr>
             <a:r>
               <a:rPr sz="1800" b="1">
@@ -6508,7 +6772,7 @@
           <a:noFill/>
         </p:spPr>
         <p:txBody>
-          <a:bodyPr wrap="square" anchor="t" lIns="0" rIns="0">
+          <a:bodyPr wrap="square" anchor="t" lIns="0" rIns="0" tIns="0" bIns="0">
             <a:spAutoFit/>
           </a:bodyPr>
           <a:lstStyle/>
@@ -6517,6 +6781,9 @@
               <a:lnSpc>
                 <a:spcPct val="125000"/>
               </a:lnSpc>
+              <a:spcAft>
+                <a:spcPts val="200"/>
+              </a:spcAft>
             </a:pPr>
             <a:r>
               <a:rPr sz="1500" b="0">
@@ -6533,6 +6800,9 @@
               <a:lnSpc>
                 <a:spcPct val="125000"/>
               </a:lnSpc>
+              <a:spcAft>
+                <a:spcPts val="200"/>
+              </a:spcAft>
             </a:pPr>
             <a:r>
               <a:rPr sz="1500" b="0">
@@ -6549,6 +6819,9 @@
               <a:lnSpc>
                 <a:spcPct val="125000"/>
               </a:lnSpc>
+              <a:spcAft>
+                <a:spcPts val="200"/>
+              </a:spcAft>
             </a:pPr>
             <a:r>
               <a:rPr sz="1500" b="0">
@@ -6565,6 +6838,9 @@
               <a:lnSpc>
                 <a:spcPct val="125000"/>
               </a:lnSpc>
+              <a:spcAft>
+                <a:spcPts val="200"/>
+              </a:spcAft>
             </a:pPr>
             <a:r>
               <a:rPr sz="1500" b="0">
@@ -6595,7 +6871,7 @@
           <a:noFill/>
         </p:spPr>
         <p:txBody>
-          <a:bodyPr wrap="square" anchor="t" lIns="0" rIns="0">
+          <a:bodyPr wrap="square" anchor="t" lIns="0" rIns="0" tIns="0" bIns="0">
             <a:spAutoFit/>
           </a:bodyPr>
           <a:lstStyle/>
@@ -6604,6 +6880,9 @@
               <a:lnSpc>
                 <a:spcPct val="120000"/>
               </a:lnSpc>
+              <a:spcAft>
+                <a:spcPts val="200"/>
+              </a:spcAft>
             </a:pPr>
             <a:r>
               <a:rPr sz="1500" b="1">
@@ -6678,7 +6957,7 @@
           <a:noFill/>
         </p:spPr>
         <p:txBody>
-          <a:bodyPr wrap="square" anchor="t" lIns="0" rIns="0">
+          <a:bodyPr wrap="square" anchor="t" lIns="0" rIns="0" tIns="0" bIns="0">
             <a:spAutoFit/>
           </a:bodyPr>
           <a:lstStyle/>
@@ -6687,6 +6966,9 @@
               <a:lnSpc>
                 <a:spcPct val="110000"/>
               </a:lnSpc>
+              <a:spcAft>
+                <a:spcPts val="200"/>
+              </a:spcAft>
             </a:pPr>
             <a:r>
               <a:rPr sz="1800" b="1">
@@ -6717,7 +6999,7 @@
           <a:noFill/>
         </p:spPr>
         <p:txBody>
-          <a:bodyPr wrap="square" anchor="t" lIns="0" rIns="0">
+          <a:bodyPr wrap="square" anchor="t" lIns="0" rIns="0" tIns="0" bIns="0">
             <a:spAutoFit/>
           </a:bodyPr>
           <a:lstStyle/>
@@ -6726,6 +7008,9 @@
               <a:lnSpc>
                 <a:spcPct val="125000"/>
               </a:lnSpc>
+              <a:spcAft>
+                <a:spcPts val="200"/>
+              </a:spcAft>
             </a:pPr>
             <a:r>
               <a:rPr sz="1500" b="0">
@@ -6742,6 +7027,9 @@
               <a:lnSpc>
                 <a:spcPct val="125000"/>
               </a:lnSpc>
+              <a:spcAft>
+                <a:spcPts val="200"/>
+              </a:spcAft>
             </a:pPr>
             <a:r>
               <a:rPr sz="1500" b="0">
@@ -6758,6 +7046,9 @@
               <a:lnSpc>
                 <a:spcPct val="125000"/>
               </a:lnSpc>
+              <a:spcAft>
+                <a:spcPts val="200"/>
+              </a:spcAft>
             </a:pPr>
             <a:r>
               <a:rPr sz="1500" b="0">
@@ -6774,6 +7065,9 @@
               <a:lnSpc>
                 <a:spcPct val="125000"/>
               </a:lnSpc>
+              <a:spcAft>
+                <a:spcPts val="200"/>
+              </a:spcAft>
             </a:pPr>
             <a:r>
               <a:rPr sz="1500" b="0">
@@ -6804,7 +7098,7 @@
           <a:noFill/>
         </p:spPr>
         <p:txBody>
-          <a:bodyPr wrap="square" anchor="t" lIns="0" rIns="0">
+          <a:bodyPr wrap="square" anchor="t" lIns="0" rIns="0" tIns="0" bIns="0">
             <a:spAutoFit/>
           </a:bodyPr>
           <a:lstStyle/>
@@ -6813,6 +7107,9 @@
               <a:lnSpc>
                 <a:spcPct val="120000"/>
               </a:lnSpc>
+              <a:spcAft>
+                <a:spcPts val="200"/>
+              </a:spcAft>
             </a:pPr>
             <a:r>
               <a:rPr sz="1500" b="1">
@@ -6905,7 +7202,7 @@
           <a:noFill/>
         </p:spPr>
         <p:txBody>
-          <a:bodyPr wrap="square" anchor="t" lIns="0" rIns="0">
+          <a:bodyPr wrap="square" anchor="t" lIns="0" rIns="0" tIns="0" bIns="0">
             <a:spAutoFit/>
           </a:bodyPr>
           <a:lstStyle/>
@@ -6914,6 +7211,9 @@
               <a:lnSpc>
                 <a:spcPct val="110000"/>
               </a:lnSpc>
+              <a:spcAft>
+                <a:spcPts val="200"/>
+              </a:spcAft>
             </a:pPr>
             <a:r>
               <a:rPr sz="3000" b="1">
@@ -6944,7 +7244,7 @@
           <a:noFill/>
         </p:spPr>
         <p:txBody>
-          <a:bodyPr wrap="square" anchor="t" lIns="0" rIns="0">
+          <a:bodyPr wrap="square" anchor="t" lIns="0" rIns="0" tIns="0" bIns="0">
             <a:spAutoFit/>
           </a:bodyPr>
           <a:lstStyle/>
@@ -6953,6 +7253,9 @@
               <a:lnSpc>
                 <a:spcPct val="110000"/>
               </a:lnSpc>
+              <a:spcAft>
+                <a:spcPts val="200"/>
+              </a:spcAft>
             </a:pPr>
             <a:r>
               <a:rPr sz="1600" b="1">
@@ -6983,7 +7286,7 @@
           <a:noFill/>
         </p:spPr>
         <p:txBody>
-          <a:bodyPr wrap="square" anchor="t" lIns="0" rIns="0">
+          <a:bodyPr wrap="square" anchor="t" lIns="0" rIns="0" tIns="0" bIns="0">
             <a:spAutoFit/>
           </a:bodyPr>
           <a:lstStyle/>
@@ -6992,6 +7295,9 @@
               <a:lnSpc>
                 <a:spcPct val="130000"/>
               </a:lnSpc>
+              <a:spcAft>
+                <a:spcPts val="200"/>
+              </a:spcAft>
             </a:pPr>
             <a:r>
               <a:rPr sz="1600" b="0">
@@ -7008,6 +7314,9 @@
               <a:lnSpc>
                 <a:spcPct val="130000"/>
               </a:lnSpc>
+              <a:spcAft>
+                <a:spcPts val="200"/>
+              </a:spcAft>
             </a:pPr>
             <a:r>
               <a:rPr sz="1600" b="0">
@@ -7024,6 +7333,9 @@
               <a:lnSpc>
                 <a:spcPct val="130000"/>
               </a:lnSpc>
+              <a:spcAft>
+                <a:spcPts val="200"/>
+              </a:spcAft>
             </a:pPr>
             <a:r>
               <a:rPr sz="1600" b="0">
@@ -7040,6 +7352,9 @@
               <a:lnSpc>
                 <a:spcPct val="130000"/>
               </a:lnSpc>
+              <a:spcAft>
+                <a:spcPts val="200"/>
+              </a:spcAft>
             </a:pPr>
             <a:r>
               <a:rPr sz="1600" b="0">
@@ -7056,6 +7371,9 @@
               <a:lnSpc>
                 <a:spcPct val="130000"/>
               </a:lnSpc>
+              <a:spcAft>
+                <a:spcPts val="200"/>
+              </a:spcAft>
             </a:pPr>
             <a:r>
               <a:rPr sz="1600" b="0">
@@ -7072,6 +7390,9 @@
               <a:lnSpc>
                 <a:spcPct val="130000"/>
               </a:lnSpc>
+              <a:spcAft>
+                <a:spcPts val="200"/>
+              </a:spcAft>
             </a:pPr>
             <a:r>
               <a:rPr sz="1600" b="0">
@@ -7088,6 +7409,9 @@
               <a:lnSpc>
                 <a:spcPct val="130000"/>
               </a:lnSpc>
+              <a:spcAft>
+                <a:spcPts val="200"/>
+              </a:spcAft>
             </a:pPr>
             <a:r>
               <a:rPr sz="1600" b="0">
@@ -7104,6 +7428,9 @@
               <a:lnSpc>
                 <a:spcPct val="130000"/>
               </a:lnSpc>
+              <a:spcAft>
+                <a:spcPts val="200"/>
+              </a:spcAft>
             </a:pPr>
             <a:r>
               <a:rPr sz="1600" b="0">
@@ -7178,7 +7505,7 @@
           <a:noFill/>
         </p:spPr>
         <p:txBody>
-          <a:bodyPr wrap="square" anchor="t" lIns="0" rIns="0">
+          <a:bodyPr wrap="square" anchor="t" lIns="0" rIns="0" tIns="0" bIns="0">
             <a:spAutoFit/>
           </a:bodyPr>
           <a:lstStyle/>
@@ -7187,6 +7514,9 @@
               <a:lnSpc>
                 <a:spcPct val="130000"/>
               </a:lnSpc>
+              <a:spcAft>
+                <a:spcPts val="200"/>
+              </a:spcAft>
             </a:pPr>
             <a:r>
               <a:rPr sz="1800" b="1">
@@ -7203,6 +7533,9 @@
               <a:lnSpc>
                 <a:spcPct val="130000"/>
               </a:lnSpc>
+              <a:spcAft>
+                <a:spcPts val="200"/>
+              </a:spcAft>
             </a:pPr>
             <a:r>
               <a:rPr sz="1800" b="0">
@@ -7219,6 +7552,9 @@
               <a:lnSpc>
                 <a:spcPct val="130000"/>
               </a:lnSpc>
+              <a:spcAft>
+                <a:spcPts val="200"/>
+              </a:spcAft>
             </a:pPr>
             <a:r>
               <a:rPr sz="1800" b="0">
@@ -7235,6 +7571,9 @@
               <a:lnSpc>
                 <a:spcPct val="130000"/>
               </a:lnSpc>
+              <a:spcAft>
+                <a:spcPts val="200"/>
+              </a:spcAft>
             </a:pPr>
             <a:r>
               <a:rPr sz="2000" b="1">
@@ -7251,6 +7590,9 @@
               <a:lnSpc>
                 <a:spcPct val="130000"/>
               </a:lnSpc>
+              <a:spcAft>
+                <a:spcPts val="200"/>
+              </a:spcAft>
             </a:pPr>
             <a:r>
               <a:rPr sz="800" b="0">
@@ -7267,6 +7609,9 @@
               <a:lnSpc>
                 <a:spcPct val="130000"/>
               </a:lnSpc>
+              <a:spcAft>
+                <a:spcPts val="200"/>
+              </a:spcAft>
             </a:pPr>
             <a:r>
               <a:rPr sz="1400" b="0">
@@ -7283,6 +7628,9 @@
               <a:lnSpc>
                 <a:spcPct val="130000"/>
               </a:lnSpc>
+              <a:spcAft>
+                <a:spcPts val="200"/>
+              </a:spcAft>
             </a:pPr>
             <a:r>
               <a:rPr sz="1400" b="0">

--- a/Werkplaats2_Groep3_Eindpresentatie.pptx
+++ b/Werkplaats2_Groep3_Eindpresentatie.pptx
@@ -3425,7 +3425,7 @@
         </p:nvSpPr>
         <p:spPr>
           <a:xfrm>
-            <a:off x="822960" y="2560320"/>
+            <a:off x="822960" y="2651760"/>
             <a:ext cx="10607040" cy="3657600"/>
           </a:xfrm>
           <a:prstGeom prst="rect">
@@ -3441,7 +3441,7 @@
           <a:p>
             <a:pPr algn="l">
               <a:lnSpc>
-                <a:spcPct val="145000"/>
+                <a:spcPct val="150000"/>
               </a:lnSpc>
               <a:spcAft>
                 <a:spcPts val="200"/>
@@ -3454,13 +3454,13 @@
                 </a:solidFill>
                 <a:latin typeface="Calibri"/>
               </a:rPr>
-              <a:t>Door regressie, tijdreeks- en sentimentanalyse vonden we duidelijke, vaak significante</a:t>
-            </a:r>
-          </a:p>
-          <a:p>
-            <a:pPr algn="l">
-              <a:lnSpc>
-                <a:spcPct val="145000"/>
+              <a:t>Met regressie, tijdreeks- en sentimentanalyse vonden we duidelijke, vaak significante</a:t>
+            </a:r>
+          </a:p>
+          <a:p>
+            <a:pPr algn="l">
+              <a:lnSpc>
+                <a:spcPct val="150000"/>
               </a:lnSpc>
               <a:spcAft>
                 <a:spcPts val="200"/>
@@ -3479,7 +3479,7 @@
           <a:p>
             <a:pPr algn="l">
               <a:lnSpc>
-                <a:spcPct val="145000"/>
+                <a:spcPct val="150000"/>
               </a:lnSpc>
               <a:spcAft>
                 <a:spcPts val="200"/>
@@ -3498,7 +3498,7 @@
           <a:p>
             <a:pPr algn="l">
               <a:lnSpc>
-                <a:spcPct val="145000"/>
+                <a:spcPct val="150000"/>
               </a:lnSpc>
               <a:spcAft>
                 <a:spcPts val="200"/>
@@ -3511,13 +3511,13 @@
                 </a:solidFill>
                 <a:latin typeface="Calibri"/>
               </a:rPr>
-              <a:t>géén significant koerseffect liet zien.</a:t>
-            </a:r>
-          </a:p>
-          <a:p>
-            <a:pPr algn="l">
-              <a:lnSpc>
-                <a:spcPct val="145000"/>
+              <a:t>geen significant koerseffect liet zien.</a:t>
+            </a:r>
+          </a:p>
+          <a:p>
+            <a:pPr algn="l">
+              <a:lnSpc>
+                <a:spcPct val="150000"/>
               </a:lnSpc>
               <a:spcAft>
                 <a:spcPts val="200"/>
@@ -3530,13 +3530,13 @@
                 </a:solidFill>
                 <a:latin typeface="Calibri"/>
               </a:rPr>
-              <a:t>Tot slot leverde de Markowitz-optimalisatie een portefeuille met de hoogste Sharpe-ratio:</a:t>
-            </a:r>
-          </a:p>
-          <a:p>
-            <a:pPr algn="l">
-              <a:lnSpc>
-                <a:spcPct val="145000"/>
+              <a:t>De Markowitz-optimalisatie leverde een marktportfolio op met de hoogste Sharpe-ratio (1,10):</a:t>
+            </a:r>
+          </a:p>
+          <a:p>
+            <a:pPr algn="l">
+              <a:lnSpc>
+                <a:spcPct val="150000"/>
               </a:lnSpc>
               <a:spcAft>
                 <a:spcPts val="200"/>
@@ -3624,8 +3624,8 @@
         </p:nvSpPr>
         <p:spPr>
           <a:xfrm>
-            <a:off x="822960" y="640080"/>
-            <a:ext cx="10515600" cy="914400"/>
+            <a:off x="822960" y="502920"/>
+            <a:ext cx="10607040" cy="914400"/>
           </a:xfrm>
           <a:prstGeom prst="rect">
             <a:avLst/>
@@ -3633,7 +3633,7 @@
           <a:noFill/>
         </p:spPr>
         <p:txBody>
-          <a:bodyPr wrap="square" anchor="t" lIns="0" rIns="0" tIns="0" bIns="0">
+          <a:bodyPr wrap="square" anchor="ctr" lIns="0" rIns="0" tIns="0" bIns="0">
             <a:spAutoFit/>
           </a:bodyPr>
           <a:lstStyle/>
@@ -3647,7 +3647,7 @@
               </a:spcAft>
             </a:pPr>
             <a:r>
-              <a:rPr sz="4000" b="1">
+              <a:rPr sz="3400" b="1">
                 <a:solidFill>
                   <a:srgbClr val="1E2761"/>
                 </a:solidFill>
@@ -3660,7 +3660,51 @@
       </p:sp>
       <p:sp>
         <p:nvSpPr>
-          <p:cNvPr id="4" name="TextBox 3"/>
+          <p:cNvPr id="4" name="Rectangle 3"/>
+          <p:cNvSpPr/>
+          <p:nvPr/>
+        </p:nvSpPr>
+        <p:spPr>
+          <a:xfrm>
+            <a:off x="822960" y="1417320"/>
+            <a:ext cx="2194560" cy="54864"/>
+          </a:xfrm>
+          <a:prstGeom prst="rect">
+            <a:avLst/>
+          </a:prstGeom>
+          <a:solidFill>
+            <a:srgbClr val="02C39A"/>
+          </a:solidFill>
+          <a:ln>
+            <a:noFill/>
+          </a:ln>
+          <a:effectLst/>
+        </p:spPr>
+        <p:style>
+          <a:lnRef idx="1">
+            <a:schemeClr val="accent1"/>
+          </a:lnRef>
+          <a:fillRef idx="3">
+            <a:schemeClr val="accent1"/>
+          </a:fillRef>
+          <a:effectRef idx="2">
+            <a:schemeClr val="accent1"/>
+          </a:effectRef>
+          <a:fontRef idx="minor">
+            <a:schemeClr val="lt1"/>
+          </a:fontRef>
+        </p:style>
+        <p:txBody>
+          <a:bodyPr rtlCol="0" anchor="ctr"/>
+          <a:lstStyle/>
+          <a:p>
+            <a:pPr algn="ctr"/>
+          </a:p>
+        </p:txBody>
+      </p:sp>
+      <p:sp>
+        <p:nvSpPr>
+          <p:cNvPr id="5" name="TextBox 4"/>
           <p:cNvSpPr txBox="1"/>
           <p:nvPr/>
         </p:nvSpPr>
@@ -3682,7 +3726,7 @@
           <a:p>
             <a:pPr algn="l">
               <a:lnSpc>
-                <a:spcPct val="140000"/>
+                <a:spcPct val="150000"/>
               </a:lnSpc>
               <a:spcAft>
                 <a:spcPts val="200"/>
@@ -3695,39 +3739,39 @@
                 </a:solidFill>
                 <a:latin typeface="Calibri"/>
               </a:rPr>
-              <a:t>We hebben 20 producten en indicatoren verzameld over de periode dec 2015 – mei 2026.</a:t>
-            </a:r>
-          </a:p>
-          <a:p>
-            <a:pPr algn="l">
-              <a:lnSpc>
-                <a:spcPct val="140000"/>
-              </a:lnSpc>
-              <a:spcAft>
-                <a:spcPts val="200"/>
-              </a:spcAft>
-            </a:pPr>
-            <a:r>
-              <a:rPr sz="1700" b="0">
+              <a:t>We verzamelden 20 producten en indicatoren over de periode dec 2015 – mei 2026.</a:t>
+            </a:r>
+          </a:p>
+          <a:p>
+            <a:pPr algn="l">
+              <a:lnSpc>
+                <a:spcPct val="150000"/>
+              </a:lnSpc>
+              <a:spcAft>
+                <a:spcPts val="200"/>
+              </a:spcAft>
+            </a:pPr>
+            <a:r>
+              <a:rPr sz="1600" b="0">
                 <a:solidFill>
                   <a:srgbClr val="21295C"/>
                 </a:solidFill>
                 <a:latin typeface="Calibri"/>
               </a:rPr>
-              <a:t>•  Aandelen, crypto en obligaties via Yahoo Finance (o.a. Apple, ASML, Broadcom, Shell, Bitcoin).</a:t>
-            </a:r>
-          </a:p>
-          <a:p>
-            <a:pPr algn="l">
-              <a:lnSpc>
-                <a:spcPct val="140000"/>
-              </a:lnSpc>
-              <a:spcAft>
-                <a:spcPts val="200"/>
-              </a:spcAft>
-            </a:pPr>
-            <a:r>
-              <a:rPr sz="1700" b="0">
+              <a:t>•  Aandelen, crypto en obligaties via Yahoo Finance (Apple, ASML, Broadcom, Shell, Bitcoin).</a:t>
+            </a:r>
+          </a:p>
+          <a:p>
+            <a:pPr algn="l">
+              <a:lnSpc>
+                <a:spcPct val="150000"/>
+              </a:lnSpc>
+              <a:spcAft>
+                <a:spcPts val="200"/>
+              </a:spcAft>
+            </a:pPr>
+            <a:r>
+              <a:rPr sz="1600" b="0">
                 <a:solidFill>
                   <a:srgbClr val="21295C"/>
                 </a:solidFill>
@@ -3739,14 +3783,14 @@
           <a:p>
             <a:pPr algn="l">
               <a:lnSpc>
-                <a:spcPct val="140000"/>
-              </a:lnSpc>
-              <a:spcAft>
-                <a:spcPts val="200"/>
-              </a:spcAft>
-            </a:pPr>
-            <a:r>
-              <a:rPr sz="1700" b="0">
+                <a:spcPct val="150000"/>
+              </a:lnSpc>
+              <a:spcAft>
+                <a:spcPts val="200"/>
+              </a:spcAft>
+            </a:pPr>
+            <a:r>
+              <a:rPr sz="1600" b="0">
                 <a:solidFill>
                   <a:srgbClr val="21295C"/>
                 </a:solidFill>
@@ -3758,33 +3802,33 @@
           <a:p>
             <a:pPr algn="l">
               <a:lnSpc>
-                <a:spcPct val="140000"/>
-              </a:lnSpc>
-              <a:spcAft>
-                <a:spcPts val="200"/>
-              </a:spcAft>
-            </a:pPr>
-            <a:r>
-              <a:rPr sz="1700" b="0">
+                <a:spcPct val="150000"/>
+              </a:lnSpc>
+              <a:spcAft>
+                <a:spcPts val="200"/>
+              </a:spcAft>
+            </a:pPr>
+            <a:r>
+              <a:rPr sz="1600" b="0">
                 <a:solidFill>
                   <a:srgbClr val="21295C"/>
                 </a:solidFill>
                 <a:latin typeface="Calibri"/>
               </a:rPr>
-              <a:t>Op deze data passen we regressie, tijdreeksanalyse, sentimentanalyse, machine learning en</a:t>
-            </a:r>
-          </a:p>
-          <a:p>
-            <a:pPr algn="l">
-              <a:lnSpc>
-                <a:spcPct val="140000"/>
-              </a:lnSpc>
-              <a:spcAft>
-                <a:spcPts val="200"/>
-              </a:spcAft>
-            </a:pPr>
-            <a:r>
-              <a:rPr sz="1700" b="0">
+              <a:t>Hierop pasten we regressie, tijdreeksanalyse, sentimentanalyse, machine learning en</a:t>
+            </a:r>
+          </a:p>
+          <a:p>
+            <a:pPr algn="l">
+              <a:lnSpc>
+                <a:spcPct val="150000"/>
+              </a:lnSpc>
+              <a:spcAft>
+                <a:spcPts val="200"/>
+              </a:spcAft>
+            </a:pPr>
+            <a:r>
+              <a:rPr sz="1600" b="0">
                 <a:solidFill>
                   <a:srgbClr val="21295C"/>
                 </a:solidFill>
@@ -3953,7 +3997,7 @@
         </p:nvSpPr>
         <p:spPr>
           <a:xfrm>
-            <a:off x="548640" y="1097280"/>
+            <a:off x="548640" y="1051560"/>
             <a:ext cx="3017520" cy="548640"/>
           </a:xfrm>
           <a:prstGeom prst="rect">
@@ -3976,7 +4020,7 @@
               </a:spcAft>
             </a:pPr>
             <a:r>
-              <a:rPr sz="1800" b="1">
+              <a:rPr sz="2000" b="1">
                 <a:solidFill>
                   <a:srgbClr val="02C39A"/>
                 </a:solidFill>
@@ -3995,7 +4039,7 @@
         </p:nvSpPr>
         <p:spPr>
           <a:xfrm>
-            <a:off x="548640" y="1828800"/>
+            <a:off x="548640" y="1920240"/>
             <a:ext cx="3108960" cy="4389120"/>
           </a:xfrm>
           <a:prstGeom prst="rect">
@@ -4011,14 +4055,14 @@
           <a:p>
             <a:pPr algn="l">
               <a:lnSpc>
-                <a:spcPct val="130000"/>
-              </a:lnSpc>
-              <a:spcAft>
-                <a:spcPts val="200"/>
-              </a:spcAft>
-            </a:pPr>
-            <a:r>
-              <a:rPr sz="1400" b="1">
+                <a:spcPct val="140000"/>
+              </a:lnSpc>
+              <a:spcAft>
+                <a:spcPts val="200"/>
+              </a:spcAft>
+            </a:pPr>
+            <a:r>
+              <a:rPr sz="1500" b="1">
                 <a:solidFill>
                   <a:srgbClr val="CADCFC"/>
                 </a:solidFill>
@@ -4030,7 +4074,7 @@
           <a:p>
             <a:pPr algn="l">
               <a:lnSpc>
-                <a:spcPct val="130000"/>
+                <a:spcPct val="140000"/>
               </a:lnSpc>
               <a:spcAft>
                 <a:spcPts val="200"/>
@@ -4049,7 +4093,7 @@
           <a:p>
             <a:pPr algn="l">
               <a:lnSpc>
-                <a:spcPct val="130000"/>
+                <a:spcPct val="140000"/>
               </a:lnSpc>
               <a:spcAft>
                 <a:spcPts val="200"/>
@@ -4068,7 +4112,7 @@
           <a:p>
             <a:pPr algn="l">
               <a:lnSpc>
-                <a:spcPct val="130000"/>
+                <a:spcPct val="140000"/>
               </a:lnSpc>
               <a:spcAft>
                 <a:spcPts val="200"/>
@@ -4081,13 +4125,13 @@
                 </a:solidFill>
                 <a:latin typeface="Calibri"/>
               </a:rPr>
-              <a:t>3.  Bubble chart (GDP × Income × Coffee)</a:t>
-            </a:r>
-          </a:p>
-          <a:p>
-            <a:pPr algn="l">
-              <a:lnSpc>
-                <a:spcPct val="130000"/>
+              <a:t>3.  Bubble chart (GDP x Income x Coffee)</a:t>
+            </a:r>
+          </a:p>
+          <a:p>
+            <a:pPr algn="l">
+              <a:lnSpc>
+                <a:spcPct val="140000"/>
               </a:lnSpc>
               <a:spcAft>
                 <a:spcPts val="200"/>
@@ -4113,8 +4157,8 @@
         </p:nvSpPr>
         <p:spPr>
           <a:xfrm>
-            <a:off x="4480560" y="822960"/>
-            <a:ext cx="7223760" cy="1463040"/>
+            <a:off x="4480560" y="914400"/>
+            <a:ext cx="7132320" cy="1280160"/>
           </a:xfrm>
           <a:prstGeom prst="rect">
             <a:avLst/>
@@ -4136,13 +4180,13 @@
               </a:spcAft>
             </a:pPr>
             <a:r>
-              <a:rPr sz="1400" b="1">
+              <a:rPr sz="1300" b="1">
                 <a:solidFill>
                   <a:srgbClr val="02C39A"/>
                 </a:solidFill>
                 <a:latin typeface="Calibri"/>
               </a:rPr>
-              <a:t>Vraag</a:t>
+              <a:t>VRAAG</a:t>
             </a:r>
           </a:p>
           <a:p>
@@ -4155,7 +4199,7 @@
               </a:spcAft>
             </a:pPr>
             <a:r>
-              <a:rPr sz="1700" b="0">
+              <a:rPr sz="1900" b="0">
                 <a:solidFill>
                   <a:srgbClr val="21295C"/>
                 </a:solidFill>
@@ -4175,7 +4219,7 @@
         <p:spPr>
           <a:xfrm>
             <a:off x="4480560" y="2651760"/>
-            <a:ext cx="7223760" cy="822960"/>
+            <a:ext cx="7132320" cy="1005840"/>
           </a:xfrm>
           <a:prstGeom prst="rect">
             <a:avLst/>
@@ -4197,13 +4241,13 @@
               </a:spcAft>
             </a:pPr>
             <a:r>
-              <a:rPr sz="1400" b="1">
+              <a:rPr sz="1300" b="1">
                 <a:solidFill>
                   <a:srgbClr val="02C39A"/>
                 </a:solidFill>
                 <a:latin typeface="Calibri"/>
               </a:rPr>
-              <a:t>Resultaat regressie</a:t>
+              <a:t>RESULTAAT REGRESSIE</a:t>
             </a:r>
           </a:p>
           <a:p>
@@ -4222,7 +4266,7 @@
                 </a:solidFill>
                 <a:latin typeface="Calibri"/>
               </a:rPr>
-              <a:t>GDP +0,0160  ·  Income −0,0064  ·  R² = 0,80  (p &lt; 0,05)</a:t>
+              <a:t>GDP +0,0160   ·   Income -0,0064   ·   R² = 0,80   (p &lt; 0,05)</a:t>
             </a:r>
           </a:p>
         </p:txBody>
@@ -4236,7 +4280,7 @@
         <p:spPr>
           <a:xfrm>
             <a:off x="4480560" y="3931920"/>
-            <a:ext cx="7223760" cy="457200"/>
+            <a:ext cx="7132320" cy="2377440"/>
           </a:xfrm>
           <a:prstGeom prst="rect">
             <a:avLst/>
@@ -4251,45 +4295,22 @@
           <a:p>
             <a:pPr algn="l">
               <a:lnSpc>
-                <a:spcPct val="110000"/>
-              </a:lnSpc>
-              <a:spcAft>
-                <a:spcPts val="200"/>
-              </a:spcAft>
-            </a:pPr>
-            <a:r>
-              <a:rPr sz="1400" b="1">
+                <a:spcPct val="125000"/>
+              </a:lnSpc>
+              <a:spcAft>
+                <a:spcPts val="200"/>
+              </a:spcAft>
+            </a:pPr>
+            <a:r>
+              <a:rPr sz="1300" b="1">
                 <a:solidFill>
                   <a:srgbClr val="02C39A"/>
                 </a:solidFill>
                 <a:latin typeface="Calibri"/>
               </a:rPr>
-              <a:t>Conclusie</a:t>
-            </a:r>
-          </a:p>
-        </p:txBody>
-      </p:sp>
-      <p:sp>
-        <p:nvSpPr>
-          <p:cNvPr id="10" name="TextBox 9"/>
-          <p:cNvSpPr txBox="1"/>
-          <p:nvPr/>
-        </p:nvSpPr>
-        <p:spPr>
-          <a:xfrm>
-            <a:off x="4480560" y="4434840"/>
-            <a:ext cx="7223760" cy="2011680"/>
-          </a:xfrm>
-          <a:prstGeom prst="rect">
-            <a:avLst/>
-          </a:prstGeom>
-          <a:noFill/>
-        </p:spPr>
-        <p:txBody>
-          <a:bodyPr wrap="square" anchor="t" lIns="0" rIns="0" tIns="0" bIns="0">
-            <a:spAutoFit/>
-          </a:bodyPr>
-          <a:lstStyle/>
+              <a:t>CONCLUSIE</a:t>
+            </a:r>
+          </a:p>
           <a:p>
             <a:pPr algn="l">
               <a:lnSpc>
@@ -4507,7 +4528,7 @@
         </p:nvSpPr>
         <p:spPr>
           <a:xfrm>
-            <a:off x="548640" y="1097280"/>
+            <a:off x="548640" y="1051560"/>
             <a:ext cx="3017520" cy="548640"/>
           </a:xfrm>
           <a:prstGeom prst="rect">
@@ -4530,7 +4551,7 @@
               </a:spcAft>
             </a:pPr>
             <a:r>
-              <a:rPr sz="1800" b="1">
+              <a:rPr sz="2000" b="1">
                 <a:solidFill>
                   <a:srgbClr val="02C39A"/>
                 </a:solidFill>
@@ -4549,7 +4570,7 @@
         </p:nvSpPr>
         <p:spPr>
           <a:xfrm>
-            <a:off x="548640" y="1828800"/>
+            <a:off x="548640" y="1920240"/>
             <a:ext cx="3108960" cy="4389120"/>
           </a:xfrm>
           <a:prstGeom prst="rect">
@@ -4565,14 +4586,14 @@
           <a:p>
             <a:pPr algn="l">
               <a:lnSpc>
-                <a:spcPct val="130000"/>
-              </a:lnSpc>
-              <a:spcAft>
-                <a:spcPts val="200"/>
-              </a:spcAft>
-            </a:pPr>
-            <a:r>
-              <a:rPr sz="1400" b="1">
+                <a:spcPct val="140000"/>
+              </a:lnSpc>
+              <a:spcAft>
+                <a:spcPts val="200"/>
+              </a:spcAft>
+            </a:pPr>
+            <a:r>
+              <a:rPr sz="1500" b="1">
                 <a:solidFill>
                   <a:srgbClr val="CADCFC"/>
                 </a:solidFill>
@@ -4584,7 +4605,7 @@
           <a:p>
             <a:pPr algn="l">
               <a:lnSpc>
-                <a:spcPct val="130000"/>
+                <a:spcPct val="140000"/>
               </a:lnSpc>
               <a:spcAft>
                 <a:spcPts val="200"/>
@@ -4603,7 +4624,7 @@
           <a:p>
             <a:pPr algn="l">
               <a:lnSpc>
-                <a:spcPct val="130000"/>
+                <a:spcPct val="140000"/>
               </a:lnSpc>
               <a:spcAft>
                 <a:spcPts val="200"/>
@@ -4622,7 +4643,7 @@
           <a:p>
             <a:pPr algn="l">
               <a:lnSpc>
-                <a:spcPct val="130000"/>
+                <a:spcPct val="140000"/>
               </a:lnSpc>
               <a:spcAft>
                 <a:spcPts val="200"/>
@@ -4635,13 +4656,13 @@
                 </a:solidFill>
                 <a:latin typeface="Calibri"/>
               </a:rPr>
-              <a:t>3.  Bubble chart (Broadcom × Coffee)</a:t>
-            </a:r>
-          </a:p>
-          <a:p>
-            <a:pPr algn="l">
-              <a:lnSpc>
-                <a:spcPct val="130000"/>
+              <a:t>3.  Bubble chart (Broadcom x Coffee)</a:t>
+            </a:r>
+          </a:p>
+          <a:p>
+            <a:pPr algn="l">
+              <a:lnSpc>
+                <a:spcPct val="140000"/>
               </a:lnSpc>
               <a:spcAft>
                 <a:spcPts val="200"/>
@@ -4667,8 +4688,8 @@
         </p:nvSpPr>
         <p:spPr>
           <a:xfrm>
-            <a:off x="4480560" y="822960"/>
-            <a:ext cx="7223760" cy="1463040"/>
+            <a:off x="4480560" y="914400"/>
+            <a:ext cx="7132320" cy="1280160"/>
           </a:xfrm>
           <a:prstGeom prst="rect">
             <a:avLst/>
@@ -4690,13 +4711,13 @@
               </a:spcAft>
             </a:pPr>
             <a:r>
-              <a:rPr sz="1400" b="1">
+              <a:rPr sz="1300" b="1">
                 <a:solidFill>
                   <a:srgbClr val="02C39A"/>
                 </a:solidFill>
                 <a:latin typeface="Calibri"/>
               </a:rPr>
-              <a:t>Vraag</a:t>
+              <a:t>VRAAG</a:t>
             </a:r>
           </a:p>
           <a:p>
@@ -4709,7 +4730,7 @@
               </a:spcAft>
             </a:pPr>
             <a:r>
-              <a:rPr sz="1700" b="0">
+              <a:rPr sz="1900" b="0">
                 <a:solidFill>
                   <a:srgbClr val="21295C"/>
                 </a:solidFill>
@@ -4729,7 +4750,7 @@
         <p:spPr>
           <a:xfrm>
             <a:off x="4480560" y="2651760"/>
-            <a:ext cx="7223760" cy="822960"/>
+            <a:ext cx="7132320" cy="1005840"/>
           </a:xfrm>
           <a:prstGeom prst="rect">
             <a:avLst/>
@@ -4751,13 +4772,13 @@
               </a:spcAft>
             </a:pPr>
             <a:r>
-              <a:rPr sz="1400" b="1">
+              <a:rPr sz="1300" b="1">
                 <a:solidFill>
                   <a:srgbClr val="02C39A"/>
                 </a:solidFill>
                 <a:latin typeface="Calibri"/>
               </a:rPr>
-              <a:t>Resultaat regressie</a:t>
+              <a:t>RESULTAAT REGRESSIE</a:t>
             </a:r>
           </a:p>
           <a:p>
@@ -4776,7 +4797,7 @@
                 </a:solidFill>
                 <a:latin typeface="Calibri"/>
               </a:rPr>
-              <a:t>Broadcom +0,5205  ·  R² = 0,94  (p &lt; 0,05)</a:t>
+              <a:t>Broadcom +0,5205   ·   R² = 0,94   (p &lt; 0,05)</a:t>
             </a:r>
           </a:p>
         </p:txBody>
@@ -4790,7 +4811,7 @@
         <p:spPr>
           <a:xfrm>
             <a:off x="4480560" y="3931920"/>
-            <a:ext cx="7223760" cy="457200"/>
+            <a:ext cx="7132320" cy="2377440"/>
           </a:xfrm>
           <a:prstGeom prst="rect">
             <a:avLst/>
@@ -4805,45 +4826,22 @@
           <a:p>
             <a:pPr algn="l">
               <a:lnSpc>
-                <a:spcPct val="110000"/>
-              </a:lnSpc>
-              <a:spcAft>
-                <a:spcPts val="200"/>
-              </a:spcAft>
-            </a:pPr>
-            <a:r>
-              <a:rPr sz="1400" b="1">
+                <a:spcPct val="125000"/>
+              </a:lnSpc>
+              <a:spcAft>
+                <a:spcPts val="200"/>
+              </a:spcAft>
+            </a:pPr>
+            <a:r>
+              <a:rPr sz="1300" b="1">
                 <a:solidFill>
                   <a:srgbClr val="02C39A"/>
                 </a:solidFill>
                 <a:latin typeface="Calibri"/>
               </a:rPr>
-              <a:t>Conclusie</a:t>
-            </a:r>
-          </a:p>
-        </p:txBody>
-      </p:sp>
-      <p:sp>
-        <p:nvSpPr>
-          <p:cNvPr id="10" name="TextBox 9"/>
-          <p:cNvSpPr txBox="1"/>
-          <p:nvPr/>
-        </p:nvSpPr>
-        <p:spPr>
-          <a:xfrm>
-            <a:off x="4480560" y="4434840"/>
-            <a:ext cx="7223760" cy="2011680"/>
-          </a:xfrm>
-          <a:prstGeom prst="rect">
-            <a:avLst/>
-          </a:prstGeom>
-          <a:noFill/>
-        </p:spPr>
-        <p:txBody>
-          <a:bodyPr wrap="square" anchor="t" lIns="0" rIns="0" tIns="0" bIns="0">
-            <a:spAutoFit/>
-          </a:bodyPr>
-          <a:lstStyle/>
+              <a:t>CONCLUSIE</a:t>
+            </a:r>
+          </a:p>
           <a:p>
             <a:pPr algn="l">
               <a:lnSpc>
@@ -5061,7 +5059,7 @@
         </p:nvSpPr>
         <p:spPr>
           <a:xfrm>
-            <a:off x="548640" y="1097280"/>
+            <a:off x="548640" y="1051560"/>
             <a:ext cx="3017520" cy="548640"/>
           </a:xfrm>
           <a:prstGeom prst="rect">
@@ -5084,7 +5082,7 @@
               </a:spcAft>
             </a:pPr>
             <a:r>
-              <a:rPr sz="1800" b="1">
+              <a:rPr sz="2000" b="1">
                 <a:solidFill>
                   <a:srgbClr val="02C39A"/>
                 </a:solidFill>
@@ -5103,7 +5101,7 @@
         </p:nvSpPr>
         <p:spPr>
           <a:xfrm>
-            <a:off x="548640" y="1828800"/>
+            <a:off x="548640" y="1920240"/>
             <a:ext cx="3108960" cy="4389120"/>
           </a:xfrm>
           <a:prstGeom prst="rect">
@@ -5119,14 +5117,14 @@
           <a:p>
             <a:pPr algn="l">
               <a:lnSpc>
-                <a:spcPct val="130000"/>
-              </a:lnSpc>
-              <a:spcAft>
-                <a:spcPts val="200"/>
-              </a:spcAft>
-            </a:pPr>
-            <a:r>
-              <a:rPr sz="1400" b="1">
+                <a:spcPct val="140000"/>
+              </a:lnSpc>
+              <a:spcAft>
+                <a:spcPts val="200"/>
+              </a:spcAft>
+            </a:pPr>
+            <a:r>
+              <a:rPr sz="1500" b="1">
                 <a:solidFill>
                   <a:srgbClr val="CADCFC"/>
                 </a:solidFill>
@@ -5138,7 +5136,7 @@
           <a:p>
             <a:pPr algn="l">
               <a:lnSpc>
-                <a:spcPct val="130000"/>
+                <a:spcPct val="140000"/>
               </a:lnSpc>
               <a:spcAft>
                 <a:spcPts val="200"/>
@@ -5157,7 +5155,7 @@
           <a:p>
             <a:pPr algn="l">
               <a:lnSpc>
-                <a:spcPct val="130000"/>
+                <a:spcPct val="140000"/>
               </a:lnSpc>
               <a:spcAft>
                 <a:spcPts val="200"/>
@@ -5176,7 +5174,7 @@
           <a:p>
             <a:pPr algn="l">
               <a:lnSpc>
-                <a:spcPct val="130000"/>
+                <a:spcPct val="140000"/>
               </a:lnSpc>
               <a:spcAft>
                 <a:spcPts val="200"/>
@@ -5189,13 +5187,13 @@
                 </a:solidFill>
                 <a:latin typeface="Calibri"/>
               </a:rPr>
-              <a:t>3.  Bubble chart (Copper × ASML)</a:t>
-            </a:r>
-          </a:p>
-          <a:p>
-            <a:pPr algn="l">
-              <a:lnSpc>
-                <a:spcPct val="130000"/>
+              <a:t>3.  Bubble chart (Copper x ASML)</a:t>
+            </a:r>
+          </a:p>
+          <a:p>
+            <a:pPr algn="l">
+              <a:lnSpc>
+                <a:spcPct val="140000"/>
               </a:lnSpc>
               <a:spcAft>
                 <a:spcPts val="200"/>
@@ -5221,8 +5219,8 @@
         </p:nvSpPr>
         <p:spPr>
           <a:xfrm>
-            <a:off x="4480560" y="822960"/>
-            <a:ext cx="7223760" cy="1463040"/>
+            <a:off x="4480560" y="914400"/>
+            <a:ext cx="7132320" cy="1280160"/>
           </a:xfrm>
           <a:prstGeom prst="rect">
             <a:avLst/>
@@ -5244,13 +5242,13 @@
               </a:spcAft>
             </a:pPr>
             <a:r>
-              <a:rPr sz="1400" b="1">
+              <a:rPr sz="1300" b="1">
                 <a:solidFill>
                   <a:srgbClr val="02C39A"/>
                 </a:solidFill>
                 <a:latin typeface="Calibri"/>
               </a:rPr>
-              <a:t>Vraag</a:t>
+              <a:t>VRAAG</a:t>
             </a:r>
           </a:p>
           <a:p>
@@ -5263,7 +5261,7 @@
               </a:spcAft>
             </a:pPr>
             <a:r>
-              <a:rPr sz="1700" b="0">
+              <a:rPr sz="1900" b="0">
                 <a:solidFill>
                   <a:srgbClr val="21295C"/>
                 </a:solidFill>
@@ -5283,7 +5281,7 @@
         <p:spPr>
           <a:xfrm>
             <a:off x="4480560" y="2651760"/>
-            <a:ext cx="7223760" cy="822960"/>
+            <a:ext cx="7132320" cy="1005840"/>
           </a:xfrm>
           <a:prstGeom prst="rect">
             <a:avLst/>
@@ -5305,13 +5303,13 @@
               </a:spcAft>
             </a:pPr>
             <a:r>
-              <a:rPr sz="1400" b="1">
+              <a:rPr sz="1300" b="1">
                 <a:solidFill>
                   <a:srgbClr val="02C39A"/>
                 </a:solidFill>
                 <a:latin typeface="Calibri"/>
               </a:rPr>
-              <a:t>Resultaat regressie</a:t>
+              <a:t>RESULTAAT REGRESSIE</a:t>
             </a:r>
           </a:p>
           <a:p>
@@ -5330,7 +5328,7 @@
                 </a:solidFill>
                 <a:latin typeface="Calibri"/>
               </a:rPr>
-              <a:t>Copper +0,1560  ·  R² = 0,87  (p &lt; 0,05)</a:t>
+              <a:t>Copper +0,1560   ·   R² = 0,87   (p &lt; 0,05)</a:t>
             </a:r>
           </a:p>
         </p:txBody>
@@ -5344,7 +5342,7 @@
         <p:spPr>
           <a:xfrm>
             <a:off x="4480560" y="3931920"/>
-            <a:ext cx="7223760" cy="457200"/>
+            <a:ext cx="7132320" cy="2377440"/>
           </a:xfrm>
           <a:prstGeom prst="rect">
             <a:avLst/>
@@ -5359,45 +5357,22 @@
           <a:p>
             <a:pPr algn="l">
               <a:lnSpc>
-                <a:spcPct val="110000"/>
-              </a:lnSpc>
-              <a:spcAft>
-                <a:spcPts val="200"/>
-              </a:spcAft>
-            </a:pPr>
-            <a:r>
-              <a:rPr sz="1400" b="1">
+                <a:spcPct val="125000"/>
+              </a:lnSpc>
+              <a:spcAft>
+                <a:spcPts val="200"/>
+              </a:spcAft>
+            </a:pPr>
+            <a:r>
+              <a:rPr sz="1300" b="1">
                 <a:solidFill>
                   <a:srgbClr val="02C39A"/>
                 </a:solidFill>
                 <a:latin typeface="Calibri"/>
               </a:rPr>
-              <a:t>Conclusie</a:t>
-            </a:r>
-          </a:p>
-        </p:txBody>
-      </p:sp>
-      <p:sp>
-        <p:nvSpPr>
-          <p:cNvPr id="10" name="TextBox 9"/>
-          <p:cNvSpPr txBox="1"/>
-          <p:nvPr/>
-        </p:nvSpPr>
-        <p:spPr>
-          <a:xfrm>
-            <a:off x="4480560" y="4434840"/>
-            <a:ext cx="7223760" cy="2011680"/>
-          </a:xfrm>
-          <a:prstGeom prst="rect">
-            <a:avLst/>
-          </a:prstGeom>
-          <a:noFill/>
-        </p:spPr>
-        <p:txBody>
-          <a:bodyPr wrap="square" anchor="t" lIns="0" rIns="0" tIns="0" bIns="0">
-            <a:spAutoFit/>
-          </a:bodyPr>
-          <a:lstStyle/>
+              <a:t>CONCLUSIE</a:t>
+            </a:r>
+          </a:p>
           <a:p>
             <a:pPr algn="l">
               <a:lnSpc>
@@ -5433,7 +5408,7 @@
                 </a:solidFill>
                 <a:latin typeface="Calibri"/>
               </a:rPr>
-              <a:t>Logisch: meer vraag naar chips → ASML stijgt,</a:t>
+              <a:t>Logisch: meer vraag naar chips -&gt; ASML stijgt,</a:t>
             </a:r>
           </a:p>
           <a:p>
@@ -5452,7 +5427,7 @@
                 </a:solidFill>
                 <a:latin typeface="Calibri"/>
               </a:rPr>
-              <a:t>en chips gebruiken veel koper → koperprijs stijgt mee.</a:t>
+              <a:t>en chips gebruiken veel koper -&gt; koperprijs stijgt mee.</a:t>
             </a:r>
           </a:p>
         </p:txBody>
@@ -5615,7 +5590,7 @@
         </p:nvSpPr>
         <p:spPr>
           <a:xfrm>
-            <a:off x="548640" y="1097280"/>
+            <a:off x="548640" y="1051560"/>
             <a:ext cx="3017520" cy="548640"/>
           </a:xfrm>
           <a:prstGeom prst="rect">
@@ -5638,7 +5613,7 @@
               </a:spcAft>
             </a:pPr>
             <a:r>
-              <a:rPr sz="1800" b="1">
+              <a:rPr sz="2000" b="1">
                 <a:solidFill>
                   <a:srgbClr val="02C39A"/>
                 </a:solidFill>
@@ -5657,7 +5632,7 @@
         </p:nvSpPr>
         <p:spPr>
           <a:xfrm>
-            <a:off x="548640" y="1828800"/>
+            <a:off x="548640" y="1920240"/>
             <a:ext cx="3108960" cy="4389120"/>
           </a:xfrm>
           <a:prstGeom prst="rect">
@@ -5673,14 +5648,14 @@
           <a:p>
             <a:pPr algn="l">
               <a:lnSpc>
-                <a:spcPct val="130000"/>
-              </a:lnSpc>
-              <a:spcAft>
-                <a:spcPts val="200"/>
-              </a:spcAft>
-            </a:pPr>
-            <a:r>
-              <a:rPr sz="1400" b="1">
+                <a:spcPct val="140000"/>
+              </a:lnSpc>
+              <a:spcAft>
+                <a:spcPts val="200"/>
+              </a:spcAft>
+            </a:pPr>
+            <a:r>
+              <a:rPr sz="1500" b="1">
                 <a:solidFill>
                   <a:srgbClr val="CADCFC"/>
                 </a:solidFill>
@@ -5692,7 +5667,7 @@
           <a:p>
             <a:pPr algn="l">
               <a:lnSpc>
-                <a:spcPct val="130000"/>
+                <a:spcPct val="140000"/>
               </a:lnSpc>
               <a:spcAft>
                 <a:spcPts val="200"/>
@@ -5711,7 +5686,7 @@
           <a:p>
             <a:pPr algn="l">
               <a:lnSpc>
-                <a:spcPct val="130000"/>
+                <a:spcPct val="140000"/>
               </a:lnSpc>
               <a:spcAft>
                 <a:spcPts val="200"/>
@@ -5730,7 +5705,7 @@
           <a:p>
             <a:pPr algn="l">
               <a:lnSpc>
-                <a:spcPct val="130000"/>
+                <a:spcPct val="140000"/>
               </a:lnSpc>
               <a:spcAft>
                 <a:spcPts val="200"/>
@@ -5743,13 +5718,13 @@
                 </a:solidFill>
                 <a:latin typeface="Calibri"/>
               </a:rPr>
-              <a:t>3.  Bubble chart (Gasoline × Oil × Shell)</a:t>
-            </a:r>
-          </a:p>
-          <a:p>
-            <a:pPr algn="l">
-              <a:lnSpc>
-                <a:spcPct val="130000"/>
+              <a:t>3.  Bubble chart (Gasoline x Oil x Shell)</a:t>
+            </a:r>
+          </a:p>
+          <a:p>
+            <a:pPr algn="l">
+              <a:lnSpc>
+                <a:spcPct val="140000"/>
               </a:lnSpc>
               <a:spcAft>
                 <a:spcPts val="200"/>
@@ -5775,8 +5750,8 @@
         </p:nvSpPr>
         <p:spPr>
           <a:xfrm>
-            <a:off x="4480560" y="822960"/>
-            <a:ext cx="7223760" cy="1463040"/>
+            <a:off x="4480560" y="914400"/>
+            <a:ext cx="7132320" cy="1280160"/>
           </a:xfrm>
           <a:prstGeom prst="rect">
             <a:avLst/>
@@ -5798,13 +5773,13 @@
               </a:spcAft>
             </a:pPr>
             <a:r>
-              <a:rPr sz="1400" b="1">
+              <a:rPr sz="1300" b="1">
                 <a:solidFill>
                   <a:srgbClr val="02C39A"/>
                 </a:solidFill>
                 <a:latin typeface="Calibri"/>
               </a:rPr>
-              <a:t>Vraag</a:t>
+              <a:t>VRAAG</a:t>
             </a:r>
           </a:p>
           <a:p>
@@ -5817,7 +5792,7 @@
               </a:spcAft>
             </a:pPr>
             <a:r>
-              <a:rPr sz="1700" b="0">
+              <a:rPr sz="1900" b="0">
                 <a:solidFill>
                   <a:srgbClr val="21295C"/>
                 </a:solidFill>
@@ -5837,7 +5812,7 @@
         <p:spPr>
           <a:xfrm>
             <a:off x="4480560" y="2651760"/>
-            <a:ext cx="7223760" cy="822960"/>
+            <a:ext cx="7132320" cy="1005840"/>
           </a:xfrm>
           <a:prstGeom prst="rect">
             <a:avLst/>
@@ -5859,13 +5834,13 @@
               </a:spcAft>
             </a:pPr>
             <a:r>
-              <a:rPr sz="1400" b="1">
+              <a:rPr sz="1300" b="1">
                 <a:solidFill>
                   <a:srgbClr val="02C39A"/>
                 </a:solidFill>
                 <a:latin typeface="Calibri"/>
               </a:rPr>
-              <a:t>Resultaat regressie</a:t>
+              <a:t>RESULTAAT REGRESSIE</a:t>
             </a:r>
           </a:p>
           <a:p>
@@ -5884,7 +5859,7 @@
                 </a:solidFill>
                 <a:latin typeface="Calibri"/>
               </a:rPr>
-              <a:t>Gasoline +11,6507  ·  Oil +0,0891  ·  R² = 0,36  (p &lt; 0,05)</a:t>
+              <a:t>Gasoline +11,6507   ·   Oil +0,0891   ·   R² = 0,36   (p &lt; 0,05)</a:t>
             </a:r>
           </a:p>
         </p:txBody>
@@ -5898,7 +5873,7 @@
         <p:spPr>
           <a:xfrm>
             <a:off x="4480560" y="3931920"/>
-            <a:ext cx="7223760" cy="457200"/>
+            <a:ext cx="7132320" cy="2377440"/>
           </a:xfrm>
           <a:prstGeom prst="rect">
             <a:avLst/>
@@ -5913,45 +5888,22 @@
           <a:p>
             <a:pPr algn="l">
               <a:lnSpc>
-                <a:spcPct val="110000"/>
-              </a:lnSpc>
-              <a:spcAft>
-                <a:spcPts val="200"/>
-              </a:spcAft>
-            </a:pPr>
-            <a:r>
-              <a:rPr sz="1400" b="1">
+                <a:spcPct val="125000"/>
+              </a:lnSpc>
+              <a:spcAft>
+                <a:spcPts val="200"/>
+              </a:spcAft>
+            </a:pPr>
+            <a:r>
+              <a:rPr sz="1300" b="1">
                 <a:solidFill>
                   <a:srgbClr val="02C39A"/>
                 </a:solidFill>
                 <a:latin typeface="Calibri"/>
               </a:rPr>
-              <a:t>Conclusie</a:t>
-            </a:r>
-          </a:p>
-        </p:txBody>
-      </p:sp>
-      <p:sp>
-        <p:nvSpPr>
-          <p:cNvPr id="10" name="TextBox 9"/>
-          <p:cNvSpPr txBox="1"/>
-          <p:nvPr/>
-        </p:nvSpPr>
-        <p:spPr>
-          <a:xfrm>
-            <a:off x="4480560" y="4434840"/>
-            <a:ext cx="7223760" cy="2011680"/>
-          </a:xfrm>
-          <a:prstGeom prst="rect">
-            <a:avLst/>
-          </a:prstGeom>
-          <a:noFill/>
-        </p:spPr>
-        <p:txBody>
-          <a:bodyPr wrap="square" anchor="t" lIns="0" rIns="0" tIns="0" bIns="0">
-            <a:spAutoFit/>
-          </a:bodyPr>
-          <a:lstStyle/>
+              <a:t>CONCLUSIE</a:t>
+            </a:r>
+          </a:p>
           <a:p>
             <a:pPr algn="l">
               <a:lnSpc>
@@ -6006,7 +5958,7 @@
                 </a:solidFill>
                 <a:latin typeface="Calibri"/>
               </a:rPr>
-              <a:t>langetermijnprijs → onderzocht met timeshift.</a:t>
+              <a:t>langetermijnprijs -&gt; onderzocht met timeshift.</a:t>
             </a:r>
           </a:p>
         </p:txBody>
@@ -6169,7 +6121,7 @@
         </p:nvSpPr>
         <p:spPr>
           <a:xfrm>
-            <a:off x="548640" y="1097280"/>
+            <a:off x="548640" y="1051560"/>
             <a:ext cx="3017520" cy="548640"/>
           </a:xfrm>
           <a:prstGeom prst="rect">
@@ -6192,7 +6144,7 @@
               </a:spcAft>
             </a:pPr>
             <a:r>
-              <a:rPr sz="1800" b="1">
+              <a:rPr sz="2000" b="1">
                 <a:solidFill>
                   <a:srgbClr val="02C39A"/>
                 </a:solidFill>
@@ -6211,7 +6163,7 @@
         </p:nvSpPr>
         <p:spPr>
           <a:xfrm>
-            <a:off x="548640" y="1828800"/>
+            <a:off x="548640" y="1920240"/>
             <a:ext cx="3108960" cy="4389120"/>
           </a:xfrm>
           <a:prstGeom prst="rect">
@@ -6227,14 +6179,14 @@
           <a:p>
             <a:pPr algn="l">
               <a:lnSpc>
-                <a:spcPct val="130000"/>
-              </a:lnSpc>
-              <a:spcAft>
-                <a:spcPts val="200"/>
-              </a:spcAft>
-            </a:pPr>
-            <a:r>
-              <a:rPr sz="1400" b="1">
+                <a:spcPct val="140000"/>
+              </a:lnSpc>
+              <a:spcAft>
+                <a:spcPts val="200"/>
+              </a:spcAft>
+            </a:pPr>
+            <a:r>
+              <a:rPr sz="1500" b="1">
                 <a:solidFill>
                   <a:srgbClr val="CADCFC"/>
                 </a:solidFill>
@@ -6246,7 +6198,7 @@
           <a:p>
             <a:pPr algn="l">
               <a:lnSpc>
-                <a:spcPct val="130000"/>
+                <a:spcPct val="140000"/>
               </a:lnSpc>
               <a:spcAft>
                 <a:spcPts val="200"/>
@@ -6265,7 +6217,7 @@
           <a:p>
             <a:pPr algn="l">
               <a:lnSpc>
-                <a:spcPct val="130000"/>
+                <a:spcPct val="140000"/>
               </a:lnSpc>
               <a:spcAft>
                 <a:spcPts val="200"/>
@@ -6284,7 +6236,7 @@
           <a:p>
             <a:pPr algn="l">
               <a:lnSpc>
-                <a:spcPct val="130000"/>
+                <a:spcPct val="140000"/>
               </a:lnSpc>
               <a:spcAft>
                 <a:spcPts val="200"/>
@@ -6303,7 +6255,7 @@
           <a:p>
             <a:pPr algn="l">
               <a:lnSpc>
-                <a:spcPct val="130000"/>
+                <a:spcPct val="140000"/>
               </a:lnSpc>
               <a:spcAft>
                 <a:spcPts val="200"/>
@@ -6329,8 +6281,8 @@
         </p:nvSpPr>
         <p:spPr>
           <a:xfrm>
-            <a:off x="4480560" y="822960"/>
-            <a:ext cx="7223760" cy="1463040"/>
+            <a:off x="4480560" y="914400"/>
+            <a:ext cx="7132320" cy="1280160"/>
           </a:xfrm>
           <a:prstGeom prst="rect">
             <a:avLst/>
@@ -6352,13 +6304,13 @@
               </a:spcAft>
             </a:pPr>
             <a:r>
-              <a:rPr sz="1400" b="1">
+              <a:rPr sz="1300" b="1">
                 <a:solidFill>
                   <a:srgbClr val="02C39A"/>
                 </a:solidFill>
                 <a:latin typeface="Calibri"/>
               </a:rPr>
-              <a:t>Vraag</a:t>
+              <a:t>VRAAG</a:t>
             </a:r>
           </a:p>
           <a:p>
@@ -6371,7 +6323,7 @@
               </a:spcAft>
             </a:pPr>
             <a:r>
-              <a:rPr sz="1700" b="0">
+              <a:rPr sz="1900" b="0">
                 <a:solidFill>
                   <a:srgbClr val="21295C"/>
                 </a:solidFill>
@@ -6391,7 +6343,7 @@
         <p:spPr>
           <a:xfrm>
             <a:off x="4480560" y="2651760"/>
-            <a:ext cx="7223760" cy="822960"/>
+            <a:ext cx="7132320" cy="1005840"/>
           </a:xfrm>
           <a:prstGeom prst="rect">
             <a:avLst/>
@@ -6413,13 +6365,13 @@
               </a:spcAft>
             </a:pPr>
             <a:r>
-              <a:rPr sz="1400" b="1">
+              <a:rPr sz="1300" b="1">
                 <a:solidFill>
                   <a:srgbClr val="02C39A"/>
                 </a:solidFill>
                 <a:latin typeface="Calibri"/>
               </a:rPr>
-              <a:t>Resultaat regressie</a:t>
+              <a:t>RESULTAAT REGRESSIE</a:t>
             </a:r>
           </a:p>
           <a:p>
@@ -6438,7 +6390,7 @@
                 </a:solidFill>
                 <a:latin typeface="Calibri"/>
               </a:rPr>
-              <a:t>Coffee +0,7351  ·  Copper +0,0236  ·  Gold −0,0097  ·  R² = 0,88</a:t>
+              <a:t>Coffee +0,7351  ·  Copper +0,0236  ·  Gold -0,0097  ·  R² = 0,88</a:t>
             </a:r>
           </a:p>
         </p:txBody>
@@ -6452,7 +6404,7 @@
         <p:spPr>
           <a:xfrm>
             <a:off x="4480560" y="3931920"/>
-            <a:ext cx="7223760" cy="457200"/>
+            <a:ext cx="7132320" cy="2377440"/>
           </a:xfrm>
           <a:prstGeom prst="rect">
             <a:avLst/>
@@ -6467,45 +6419,22 @@
           <a:p>
             <a:pPr algn="l">
               <a:lnSpc>
-                <a:spcPct val="110000"/>
-              </a:lnSpc>
-              <a:spcAft>
-                <a:spcPts val="200"/>
-              </a:spcAft>
-            </a:pPr>
-            <a:r>
-              <a:rPr sz="1400" b="1">
+                <a:spcPct val="125000"/>
+              </a:lnSpc>
+              <a:spcAft>
+                <a:spcPts val="200"/>
+              </a:spcAft>
+            </a:pPr>
+            <a:r>
+              <a:rPr sz="1300" b="1">
                 <a:solidFill>
                   <a:srgbClr val="02C39A"/>
                 </a:solidFill>
                 <a:latin typeface="Calibri"/>
               </a:rPr>
-              <a:t>Conclusie</a:t>
-            </a:r>
-          </a:p>
-        </p:txBody>
-      </p:sp>
-      <p:sp>
-        <p:nvSpPr>
-          <p:cNvPr id="10" name="TextBox 9"/>
-          <p:cNvSpPr txBox="1"/>
-          <p:nvPr/>
-        </p:nvSpPr>
-        <p:spPr>
-          <a:xfrm>
-            <a:off x="4480560" y="4434840"/>
-            <a:ext cx="7223760" cy="2011680"/>
-          </a:xfrm>
-          <a:prstGeom prst="rect">
-            <a:avLst/>
-          </a:prstGeom>
-          <a:noFill/>
-        </p:spPr>
-        <p:txBody>
-          <a:bodyPr wrap="square" anchor="t" lIns="0" rIns="0" tIns="0" bIns="0">
-            <a:spAutoFit/>
-          </a:bodyPr>
-          <a:lstStyle/>
+              <a:t>CONCLUSIE</a:t>
+            </a:r>
+          </a:p>
           <a:p>
             <a:pPr algn="l">
               <a:lnSpc>
@@ -6635,8 +6564,8 @@
         </p:nvSpPr>
         <p:spPr>
           <a:xfrm>
-            <a:off x="822960" y="457200"/>
-            <a:ext cx="10515600" cy="822960"/>
+            <a:off x="822960" y="502920"/>
+            <a:ext cx="10607040" cy="914400"/>
           </a:xfrm>
           <a:prstGeom prst="rect">
             <a:avLst/>
@@ -6644,7 +6573,7 @@
           <a:noFill/>
         </p:spPr>
         <p:txBody>
-          <a:bodyPr wrap="square" anchor="t" lIns="0" rIns="0" tIns="0" bIns="0">
+          <a:bodyPr wrap="square" anchor="ctr" lIns="0" rIns="0" tIns="0" bIns="0">
             <a:spAutoFit/>
           </a:bodyPr>
           <a:lstStyle/>
@@ -6658,13 +6587,13 @@
               </a:spcAft>
             </a:pPr>
             <a:r>
-              <a:rPr sz="3600" b="1">
+              <a:rPr sz="3200" b="1">
                 <a:solidFill>
                   <a:srgbClr val="1E2761"/>
                 </a:solidFill>
                 <a:latin typeface="Georgia"/>
               </a:rPr>
-              <a:t>Twee beleggersprofielen — maximale Sharpe-ratio</a:t>
+              <a:t>Twee beleggersprofielen (max. Sharpe-ratio)</a:t>
             </a:r>
           </a:p>
         </p:txBody>
@@ -6677,8 +6606,52 @@
         </p:nvSpPr>
         <p:spPr>
           <a:xfrm>
-            <a:off x="822960" y="1554480"/>
-            <a:ext cx="5303520" cy="640080"/>
+            <a:off x="822960" y="1417320"/>
+            <a:ext cx="2194560" cy="54864"/>
+          </a:xfrm>
+          <a:prstGeom prst="rect">
+            <a:avLst/>
+          </a:prstGeom>
+          <a:solidFill>
+            <a:srgbClr val="02C39A"/>
+          </a:solidFill>
+          <a:ln>
+            <a:noFill/>
+          </a:ln>
+          <a:effectLst/>
+        </p:spPr>
+        <p:style>
+          <a:lnRef idx="1">
+            <a:schemeClr val="accent1"/>
+          </a:lnRef>
+          <a:fillRef idx="3">
+            <a:schemeClr val="accent1"/>
+          </a:fillRef>
+          <a:effectRef idx="2">
+            <a:schemeClr val="accent1"/>
+          </a:effectRef>
+          <a:fontRef idx="minor">
+            <a:schemeClr val="lt1"/>
+          </a:fontRef>
+        </p:style>
+        <p:txBody>
+          <a:bodyPr rtlCol="0" anchor="ctr"/>
+          <a:lstStyle/>
+          <a:p>
+            <a:pPr algn="ctr"/>
+          </a:p>
+        </p:txBody>
+      </p:sp>
+      <p:sp>
+        <p:nvSpPr>
+          <p:cNvPr id="5" name="Rectangle 4"/>
+          <p:cNvSpPr/>
+          <p:nvPr/>
+        </p:nvSpPr>
+        <p:spPr>
+          <a:xfrm>
+            <a:off x="822960" y="1783080"/>
+            <a:ext cx="5212080" cy="594360"/>
           </a:xfrm>
           <a:prstGeom prst="rect">
             <a:avLst/>
@@ -6715,14 +6688,14 @@
       </p:sp>
       <p:sp>
         <p:nvSpPr>
-          <p:cNvPr id="5" name="TextBox 4"/>
+          <p:cNvPr id="6" name="TextBox 5"/>
           <p:cNvSpPr txBox="1"/>
           <p:nvPr/>
         </p:nvSpPr>
         <p:spPr>
           <a:xfrm>
-            <a:off x="822960" y="1627632"/>
-            <a:ext cx="5303520" cy="548640"/>
+            <a:off x="822960" y="1783080"/>
+            <a:ext cx="5212080" cy="594360"/>
           </a:xfrm>
           <a:prstGeom prst="rect">
             <a:avLst/>
@@ -6730,7 +6703,7 @@
           <a:noFill/>
         </p:spPr>
         <p:txBody>
-          <a:bodyPr wrap="square" anchor="t" lIns="0" rIns="0" tIns="0" bIns="0">
+          <a:bodyPr wrap="square" anchor="ctr" lIns="0" rIns="0" tIns="0" bIns="0">
             <a:spAutoFit/>
           </a:bodyPr>
           <a:lstStyle/>
@@ -6755,16 +6728,326 @@
           </a:p>
         </p:txBody>
       </p:sp>
-      <p:sp>
-        <p:nvSpPr>
-          <p:cNvPr id="6" name="TextBox 5"/>
+      <p:graphicFrame>
+        <p:nvGraphicFramePr>
+          <p:cNvPr id="7" name="Table 6"/>
+          <p:cNvGraphicFramePr>
+            <a:graphicFrameLocks noGrp="1"/>
+          </p:cNvGraphicFramePr>
+          <p:nvPr/>
+        </p:nvGraphicFramePr>
+        <p:xfrm>
+          <a:off x="822960" y="2606040"/>
+          <a:ext cx="5212079" cy="1920240"/>
+        </p:xfrm>
+        <a:graphic>
+          <a:graphicData uri="http://schemas.openxmlformats.org/drawingml/2006/table">
+            <a:tbl>
+              <a:tblPr firstRow="1" bandRow="1">
+                <a:tableStyleId>{5C22544A-7EE6-4342-B048-85BDC9FD1C3A}</a:tableStyleId>
+              </a:tblPr>
+              <a:tblGrid>
+                <a:gridCol w="3231489"/>
+                <a:gridCol w="1980590"/>
+              </a:tblGrid>
+              <a:tr h="384048">
+                <a:tc>
+                  <a:txBody>
+                    <a:bodyPr/>
+                    <a:lstStyle/>
+                    <a:p>
+                      <a:pPr algn="l"/>
+                      <a:r>
+                        <a:rPr sz="1400" b="1">
+                          <a:solidFill>
+                            <a:srgbClr val="FFFFFF"/>
+                          </a:solidFill>
+                          <a:latin typeface="Calibri"/>
+                        </a:rPr>
+                        <a:t>Product</a:t>
+                      </a:r>
+                    </a:p>
+                  </a:txBody>
+                  <a:tcPr anchor="ctr">
+                    <a:solidFill>
+                      <a:srgbClr val="1E2761"/>
+                    </a:solidFill>
+                  </a:tcPr>
+                </a:tc>
+                <a:tc>
+                  <a:txBody>
+                    <a:bodyPr/>
+                    <a:lstStyle/>
+                    <a:p>
+                      <a:pPr algn="r"/>
+                      <a:r>
+                        <a:rPr sz="1400" b="1">
+                          <a:solidFill>
+                            <a:srgbClr val="FFFFFF"/>
+                          </a:solidFill>
+                          <a:latin typeface="Calibri"/>
+                        </a:rPr>
+                        <a:t>Gewicht</a:t>
+                      </a:r>
+                    </a:p>
+                  </a:txBody>
+                  <a:tcPr anchor="ctr">
+                    <a:solidFill>
+                      <a:srgbClr val="1E2761"/>
+                    </a:solidFill>
+                  </a:tcPr>
+                </a:tc>
+              </a:tr>
+              <a:tr h="384048">
+                <a:tc>
+                  <a:txBody>
+                    <a:bodyPr/>
+                    <a:lstStyle/>
+                    <a:p>
+                      <a:pPr algn="l"/>
+                      <a:r>
+                        <a:rPr sz="1400" b="0">
+                          <a:solidFill>
+                            <a:srgbClr val="21295C"/>
+                          </a:solidFill>
+                          <a:latin typeface="Calibri"/>
+                        </a:rPr>
+                        <a:t>Broadcom</a:t>
+                      </a:r>
+                    </a:p>
+                  </a:txBody>
+                  <a:tcPr anchor="ctr">
+                    <a:solidFill>
+                      <a:srgbClr val="FFFFFF"/>
+                    </a:solidFill>
+                  </a:tcPr>
+                </a:tc>
+                <a:tc>
+                  <a:txBody>
+                    <a:bodyPr/>
+                    <a:lstStyle/>
+                    <a:p>
+                      <a:pPr algn="r"/>
+                      <a:r>
+                        <a:rPr sz="1400" b="1">
+                          <a:solidFill>
+                            <a:srgbClr val="21295C"/>
+                          </a:solidFill>
+                          <a:latin typeface="Calibri"/>
+                        </a:rPr>
+                        <a:t>37,5%</a:t>
+                      </a:r>
+                    </a:p>
+                  </a:txBody>
+                  <a:tcPr anchor="ctr">
+                    <a:solidFill>
+                      <a:srgbClr val="FFFFFF"/>
+                    </a:solidFill>
+                  </a:tcPr>
+                </a:tc>
+              </a:tr>
+              <a:tr h="384048">
+                <a:tc>
+                  <a:txBody>
+                    <a:bodyPr/>
+                    <a:lstStyle/>
+                    <a:p>
+                      <a:pPr algn="l"/>
+                      <a:r>
+                        <a:rPr sz="1400" b="0">
+                          <a:solidFill>
+                            <a:srgbClr val="21295C"/>
+                          </a:solidFill>
+                          <a:latin typeface="Calibri"/>
+                        </a:rPr>
+                        <a:t>Bitcoin</a:t>
+                      </a:r>
+                    </a:p>
+                  </a:txBody>
+                  <a:tcPr anchor="ctr">
+                    <a:solidFill>
+                      <a:srgbClr val="EFF2FB"/>
+                    </a:solidFill>
+                  </a:tcPr>
+                </a:tc>
+                <a:tc>
+                  <a:txBody>
+                    <a:bodyPr/>
+                    <a:lstStyle/>
+                    <a:p>
+                      <a:pPr algn="r"/>
+                      <a:r>
+                        <a:rPr sz="1400" b="1">
+                          <a:solidFill>
+                            <a:srgbClr val="21295C"/>
+                          </a:solidFill>
+                          <a:latin typeface="Calibri"/>
+                        </a:rPr>
+                        <a:t>23,5%</a:t>
+                      </a:r>
+                    </a:p>
+                  </a:txBody>
+                  <a:tcPr anchor="ctr">
+                    <a:solidFill>
+                      <a:srgbClr val="EFF2FB"/>
+                    </a:solidFill>
+                  </a:tcPr>
+                </a:tc>
+              </a:tr>
+              <a:tr h="384048">
+                <a:tc>
+                  <a:txBody>
+                    <a:bodyPr/>
+                    <a:lstStyle/>
+                    <a:p>
+                      <a:pPr algn="l"/>
+                      <a:r>
+                        <a:rPr sz="1400" b="0">
+                          <a:solidFill>
+                            <a:srgbClr val="21295C"/>
+                          </a:solidFill>
+                          <a:latin typeface="Calibri"/>
+                        </a:rPr>
+                        <a:t>Apple</a:t>
+                      </a:r>
+                    </a:p>
+                  </a:txBody>
+                  <a:tcPr anchor="ctr">
+                    <a:solidFill>
+                      <a:srgbClr val="FFFFFF"/>
+                    </a:solidFill>
+                  </a:tcPr>
+                </a:tc>
+                <a:tc>
+                  <a:txBody>
+                    <a:bodyPr/>
+                    <a:lstStyle/>
+                    <a:p>
+                      <a:pPr algn="r"/>
+                      <a:r>
+                        <a:rPr sz="1400" b="1">
+                          <a:solidFill>
+                            <a:srgbClr val="21295C"/>
+                          </a:solidFill>
+                          <a:latin typeface="Calibri"/>
+                        </a:rPr>
+                        <a:t>36,0%</a:t>
+                      </a:r>
+                    </a:p>
+                  </a:txBody>
+                  <a:tcPr anchor="ctr">
+                    <a:solidFill>
+                      <a:srgbClr val="FFFFFF"/>
+                    </a:solidFill>
+                  </a:tcPr>
+                </a:tc>
+              </a:tr>
+              <a:tr h="384048">
+                <a:tc>
+                  <a:txBody>
+                    <a:bodyPr/>
+                    <a:lstStyle/>
+                    <a:p>
+                      <a:pPr algn="l"/>
+                      <a:r>
+                        <a:rPr sz="1400" b="0">
+                          <a:solidFill>
+                            <a:srgbClr val="21295C"/>
+                          </a:solidFill>
+                          <a:latin typeface="Calibri"/>
+                        </a:rPr>
+                        <a:t>ASML</a:t>
+                      </a:r>
+                    </a:p>
+                  </a:txBody>
+                  <a:tcPr anchor="ctr">
+                    <a:solidFill>
+                      <a:srgbClr val="EFF2FB"/>
+                    </a:solidFill>
+                  </a:tcPr>
+                </a:tc>
+                <a:tc>
+                  <a:txBody>
+                    <a:bodyPr/>
+                    <a:lstStyle/>
+                    <a:p>
+                      <a:pPr algn="r"/>
+                      <a:r>
+                        <a:rPr sz="1400" b="1">
+                          <a:solidFill>
+                            <a:srgbClr val="21295C"/>
+                          </a:solidFill>
+                          <a:latin typeface="Calibri"/>
+                        </a:rPr>
+                        <a:t>3,0%</a:t>
+                      </a:r>
+                    </a:p>
+                  </a:txBody>
+                  <a:tcPr anchor="ctr">
+                    <a:solidFill>
+                      <a:srgbClr val="EFF2FB"/>
+                    </a:solidFill>
+                  </a:tcPr>
+                </a:tc>
+              </a:tr>
+            </a:tbl>
+          </a:graphicData>
+        </a:graphic>
+      </p:graphicFrame>
+      <p:sp>
+        <p:nvSpPr>
+          <p:cNvPr id="8" name="Rectangle 7"/>
+          <p:cNvSpPr/>
+          <p:nvPr/>
+        </p:nvSpPr>
+        <p:spPr>
+          <a:xfrm>
+            <a:off x="822960" y="4754880"/>
+            <a:ext cx="5212080" cy="548640"/>
+          </a:xfrm>
+          <a:prstGeom prst="rect">
+            <a:avLst/>
+          </a:prstGeom>
+          <a:solidFill>
+            <a:srgbClr val="EFF2FB"/>
+          </a:solidFill>
+          <a:ln>
+            <a:noFill/>
+          </a:ln>
+          <a:effectLst/>
+        </p:spPr>
+        <p:style>
+          <a:lnRef idx="1">
+            <a:schemeClr val="accent1"/>
+          </a:lnRef>
+          <a:fillRef idx="3">
+            <a:schemeClr val="accent1"/>
+          </a:fillRef>
+          <a:effectRef idx="2">
+            <a:schemeClr val="accent1"/>
+          </a:effectRef>
+          <a:fontRef idx="minor">
+            <a:schemeClr val="lt1"/>
+          </a:fontRef>
+        </p:style>
+        <p:txBody>
+          <a:bodyPr rtlCol="0" anchor="ctr"/>
+          <a:lstStyle/>
+          <a:p>
+            <a:pPr algn="ctr"/>
+          </a:p>
+        </p:txBody>
+      </p:sp>
+      <p:sp>
+        <p:nvSpPr>
+          <p:cNvPr id="9" name="TextBox 8"/>
           <p:cNvSpPr txBox="1"/>
           <p:nvPr/>
         </p:nvSpPr>
         <p:spPr>
           <a:xfrm>
-            <a:off x="1005840" y="2377440"/>
-            <a:ext cx="5120640" cy="3108960"/>
+            <a:off x="822960" y="4754880"/>
+            <a:ext cx="5212080" cy="548640"/>
           </a:xfrm>
           <a:prstGeom prst="rect">
             <a:avLst/>
@@ -6772,140 +7055,41 @@
           <a:noFill/>
         </p:spPr>
         <p:txBody>
-          <a:bodyPr wrap="square" anchor="t" lIns="0" rIns="0" tIns="0" bIns="0">
+          <a:bodyPr wrap="square" anchor="ctr" lIns="0" rIns="0" tIns="0" bIns="0">
             <a:spAutoFit/>
           </a:bodyPr>
           <a:lstStyle/>
           <a:p>
-            <a:pPr algn="l">
-              <a:lnSpc>
-                <a:spcPct val="125000"/>
-              </a:lnSpc>
-              <a:spcAft>
-                <a:spcPts val="200"/>
-              </a:spcAft>
-            </a:pPr>
-            <a:r>
-              <a:rPr sz="1500" b="0">
+            <a:pPr algn="ctr">
+              <a:lnSpc>
+                <a:spcPct val="110000"/>
+              </a:lnSpc>
+              <a:spcAft>
+                <a:spcPts val="200"/>
+              </a:spcAft>
+            </a:pPr>
+            <a:r>
+              <a:rPr sz="1500" b="1">
                 <a:solidFill>
                   <a:srgbClr val="21295C"/>
                 </a:solidFill>
-                <a:latin typeface="Consolas"/>
-              </a:rPr>
-              <a:t>Broadcom        37,5%</a:t>
-            </a:r>
-          </a:p>
-          <a:p>
-            <a:pPr algn="l">
-              <a:lnSpc>
-                <a:spcPct val="125000"/>
-              </a:lnSpc>
-              <a:spcAft>
-                <a:spcPts val="200"/>
-              </a:spcAft>
-            </a:pPr>
-            <a:r>
-              <a:rPr sz="1500" b="0">
-                <a:solidFill>
-                  <a:srgbClr val="21295C"/>
-                </a:solidFill>
-                <a:latin typeface="Consolas"/>
-              </a:rPr>
-              <a:t>Bitcoin         23,5%</a:t>
-            </a:r>
-          </a:p>
-          <a:p>
-            <a:pPr algn="l">
-              <a:lnSpc>
-                <a:spcPct val="125000"/>
-              </a:lnSpc>
-              <a:spcAft>
-                <a:spcPts val="200"/>
-              </a:spcAft>
-            </a:pPr>
-            <a:r>
-              <a:rPr sz="1500" b="0">
-                <a:solidFill>
-                  <a:srgbClr val="21295C"/>
-                </a:solidFill>
-                <a:latin typeface="Consolas"/>
-              </a:rPr>
-              <a:t>Apple           36,0%</a:t>
-            </a:r>
-          </a:p>
-          <a:p>
-            <a:pPr algn="l">
-              <a:lnSpc>
-                <a:spcPct val="125000"/>
-              </a:lnSpc>
-              <a:spcAft>
-                <a:spcPts val="200"/>
-              </a:spcAft>
-            </a:pPr>
-            <a:r>
-              <a:rPr sz="1500" b="0">
-                <a:solidFill>
-                  <a:srgbClr val="21295C"/>
-                </a:solidFill>
-                <a:latin typeface="Consolas"/>
-              </a:rPr>
-              <a:t>ASML            3,0%</a:t>
-            </a:r>
-          </a:p>
-        </p:txBody>
-      </p:sp>
-      <p:sp>
-        <p:nvSpPr>
-          <p:cNvPr id="7" name="TextBox 6"/>
-          <p:cNvSpPr txBox="1"/>
-          <p:nvPr/>
-        </p:nvSpPr>
-        <p:spPr>
-          <a:xfrm>
-            <a:off x="822960" y="5669280"/>
-            <a:ext cx="5303520" cy="822960"/>
-          </a:xfrm>
-          <a:prstGeom prst="rect">
-            <a:avLst/>
-          </a:prstGeom>
-          <a:noFill/>
-        </p:spPr>
-        <p:txBody>
-          <a:bodyPr wrap="square" anchor="t" lIns="0" rIns="0" tIns="0" bIns="0">
-            <a:spAutoFit/>
-          </a:bodyPr>
-          <a:lstStyle/>
-          <a:p>
-            <a:pPr algn="l">
-              <a:lnSpc>
-                <a:spcPct val="120000"/>
-              </a:lnSpc>
-              <a:spcAft>
-                <a:spcPts val="200"/>
-              </a:spcAft>
-            </a:pPr>
-            <a:r>
-              <a:rPr sz="1500" b="1">
-                <a:solidFill>
-                  <a:srgbClr val="02C39A"/>
-                </a:solidFill>
-                <a:latin typeface="Calibri"/>
-              </a:rPr>
-              <a:t>Rendement 24%  ·  risico 25%  ·  Sharpe 0,85</a:t>
-            </a:r>
-          </a:p>
-        </p:txBody>
-      </p:sp>
-      <p:sp>
-        <p:nvSpPr>
-          <p:cNvPr id="8" name="Rectangle 7"/>
+                <a:latin typeface="Calibri"/>
+              </a:rPr>
+              <a:t>Rendement 24%   ·   risico 25%   ·   Sharpe 0,85</a:t>
+            </a:r>
+          </a:p>
+        </p:txBody>
+      </p:sp>
+      <p:sp>
+        <p:nvSpPr>
+          <p:cNvPr id="10" name="Rectangle 9"/>
           <p:cNvSpPr/>
           <p:nvPr/>
         </p:nvSpPr>
         <p:spPr>
           <a:xfrm>
-            <a:off x="6583680" y="1554480"/>
-            <a:ext cx="5303520" cy="640080"/>
+            <a:off x="6629400" y="1783080"/>
+            <a:ext cx="5212080" cy="594360"/>
           </a:xfrm>
           <a:prstGeom prst="rect">
             <a:avLst/>
@@ -6942,14 +7126,14 @@
       </p:sp>
       <p:sp>
         <p:nvSpPr>
-          <p:cNvPr id="9" name="TextBox 8"/>
+          <p:cNvPr id="11" name="TextBox 10"/>
           <p:cNvSpPr txBox="1"/>
           <p:nvPr/>
         </p:nvSpPr>
         <p:spPr>
           <a:xfrm>
-            <a:off x="6583680" y="1627632"/>
-            <a:ext cx="5303520" cy="548640"/>
+            <a:off x="6629400" y="1783080"/>
+            <a:ext cx="5212080" cy="594360"/>
           </a:xfrm>
           <a:prstGeom prst="rect">
             <a:avLst/>
@@ -6957,7 +7141,7 @@
           <a:noFill/>
         </p:spPr>
         <p:txBody>
-          <a:bodyPr wrap="square" anchor="t" lIns="0" rIns="0" tIns="0" bIns="0">
+          <a:bodyPr wrap="square" anchor="ctr" lIns="0" rIns="0" tIns="0" bIns="0">
             <a:spAutoFit/>
           </a:bodyPr>
           <a:lstStyle/>
@@ -6982,16 +7166,326 @@
           </a:p>
         </p:txBody>
       </p:sp>
-      <p:sp>
-        <p:nvSpPr>
-          <p:cNvPr id="10" name="TextBox 9"/>
+      <p:graphicFrame>
+        <p:nvGraphicFramePr>
+          <p:cNvPr id="12" name="Table 11"/>
+          <p:cNvGraphicFramePr>
+            <a:graphicFrameLocks noGrp="1"/>
+          </p:cNvGraphicFramePr>
+          <p:nvPr/>
+        </p:nvGraphicFramePr>
+        <p:xfrm>
+          <a:off x="6629400" y="2606040"/>
+          <a:ext cx="5212079" cy="1920240"/>
+        </p:xfrm>
+        <a:graphic>
+          <a:graphicData uri="http://schemas.openxmlformats.org/drawingml/2006/table">
+            <a:tbl>
+              <a:tblPr firstRow="1" bandRow="1">
+                <a:tableStyleId>{5C22544A-7EE6-4342-B048-85BDC9FD1C3A}</a:tableStyleId>
+              </a:tblPr>
+              <a:tblGrid>
+                <a:gridCol w="3231489"/>
+                <a:gridCol w="1980590"/>
+              </a:tblGrid>
+              <a:tr h="384048">
+                <a:tc>
+                  <a:txBody>
+                    <a:bodyPr/>
+                    <a:lstStyle/>
+                    <a:p>
+                      <a:pPr algn="l"/>
+                      <a:r>
+                        <a:rPr sz="1400" b="1">
+                          <a:solidFill>
+                            <a:srgbClr val="FFFFFF"/>
+                          </a:solidFill>
+                          <a:latin typeface="Calibri"/>
+                        </a:rPr>
+                        <a:t>Product</a:t>
+                      </a:r>
+                    </a:p>
+                  </a:txBody>
+                  <a:tcPr anchor="ctr">
+                    <a:solidFill>
+                      <a:srgbClr val="1E2761"/>
+                    </a:solidFill>
+                  </a:tcPr>
+                </a:tc>
+                <a:tc>
+                  <a:txBody>
+                    <a:bodyPr/>
+                    <a:lstStyle/>
+                    <a:p>
+                      <a:pPr algn="r"/>
+                      <a:r>
+                        <a:rPr sz="1400" b="1">
+                          <a:solidFill>
+                            <a:srgbClr val="FFFFFF"/>
+                          </a:solidFill>
+                          <a:latin typeface="Calibri"/>
+                        </a:rPr>
+                        <a:t>Gewicht</a:t>
+                      </a:r>
+                    </a:p>
+                  </a:txBody>
+                  <a:tcPr anchor="ctr">
+                    <a:solidFill>
+                      <a:srgbClr val="1E2761"/>
+                    </a:solidFill>
+                  </a:tcPr>
+                </a:tc>
+              </a:tr>
+              <a:tr h="384048">
+                <a:tc>
+                  <a:txBody>
+                    <a:bodyPr/>
+                    <a:lstStyle/>
+                    <a:p>
+                      <a:pPr algn="l"/>
+                      <a:r>
+                        <a:rPr sz="1400" b="0">
+                          <a:solidFill>
+                            <a:srgbClr val="21295C"/>
+                          </a:solidFill>
+                          <a:latin typeface="Calibri"/>
+                        </a:rPr>
+                        <a:t>Goud</a:t>
+                      </a:r>
+                    </a:p>
+                  </a:txBody>
+                  <a:tcPr anchor="ctr">
+                    <a:solidFill>
+                      <a:srgbClr val="FFFFFF"/>
+                    </a:solidFill>
+                  </a:tcPr>
+                </a:tc>
+                <a:tc>
+                  <a:txBody>
+                    <a:bodyPr/>
+                    <a:lstStyle/>
+                    <a:p>
+                      <a:pPr algn="r"/>
+                      <a:r>
+                        <a:rPr sz="1400" b="1">
+                          <a:solidFill>
+                            <a:srgbClr val="21295C"/>
+                          </a:solidFill>
+                          <a:latin typeface="Calibri"/>
+                        </a:rPr>
+                        <a:t>59,5%</a:t>
+                      </a:r>
+                    </a:p>
+                  </a:txBody>
+                  <a:tcPr anchor="ctr">
+                    <a:solidFill>
+                      <a:srgbClr val="FFFFFF"/>
+                    </a:solidFill>
+                  </a:tcPr>
+                </a:tc>
+              </a:tr>
+              <a:tr h="384048">
+                <a:tc>
+                  <a:txBody>
+                    <a:bodyPr/>
+                    <a:lstStyle/>
+                    <a:p>
+                      <a:pPr algn="l"/>
+                      <a:r>
+                        <a:rPr sz="1400" b="0">
+                          <a:solidFill>
+                            <a:srgbClr val="21295C"/>
+                          </a:solidFill>
+                          <a:latin typeface="Calibri"/>
+                        </a:rPr>
+                        <a:t>Apple</a:t>
+                      </a:r>
+                    </a:p>
+                  </a:txBody>
+                  <a:tcPr anchor="ctr">
+                    <a:solidFill>
+                      <a:srgbClr val="EFF2FB"/>
+                    </a:solidFill>
+                  </a:tcPr>
+                </a:tc>
+                <a:tc>
+                  <a:txBody>
+                    <a:bodyPr/>
+                    <a:lstStyle/>
+                    <a:p>
+                      <a:pPr algn="r"/>
+                      <a:r>
+                        <a:rPr sz="1400" b="1">
+                          <a:solidFill>
+                            <a:srgbClr val="21295C"/>
+                          </a:solidFill>
+                          <a:latin typeface="Calibri"/>
+                        </a:rPr>
+                        <a:t>40,5%</a:t>
+                      </a:r>
+                    </a:p>
+                  </a:txBody>
+                  <a:tcPr anchor="ctr">
+                    <a:solidFill>
+                      <a:srgbClr val="EFF2FB"/>
+                    </a:solidFill>
+                  </a:tcPr>
+                </a:tc>
+              </a:tr>
+              <a:tr h="384048">
+                <a:tc>
+                  <a:txBody>
+                    <a:bodyPr/>
+                    <a:lstStyle/>
+                    <a:p>
+                      <a:pPr algn="l"/>
+                      <a:r>
+                        <a:rPr sz="1400" b="0">
+                          <a:solidFill>
+                            <a:srgbClr val="21295C"/>
+                          </a:solidFill>
+                          <a:latin typeface="Calibri"/>
+                        </a:rPr>
+                        <a:t>Zilver</a:t>
+                      </a:r>
+                    </a:p>
+                  </a:txBody>
+                  <a:tcPr anchor="ctr">
+                    <a:solidFill>
+                      <a:srgbClr val="FFFFFF"/>
+                    </a:solidFill>
+                  </a:tcPr>
+                </a:tc>
+                <a:tc>
+                  <a:txBody>
+                    <a:bodyPr/>
+                    <a:lstStyle/>
+                    <a:p>
+                      <a:pPr algn="r"/>
+                      <a:r>
+                        <a:rPr sz="1400" b="1">
+                          <a:solidFill>
+                            <a:srgbClr val="21295C"/>
+                          </a:solidFill>
+                          <a:latin typeface="Calibri"/>
+                        </a:rPr>
+                        <a:t>0%</a:t>
+                      </a:r>
+                    </a:p>
+                  </a:txBody>
+                  <a:tcPr anchor="ctr">
+                    <a:solidFill>
+                      <a:srgbClr val="FFFFFF"/>
+                    </a:solidFill>
+                  </a:tcPr>
+                </a:tc>
+              </a:tr>
+              <a:tr h="384048">
+                <a:tc>
+                  <a:txBody>
+                    <a:bodyPr/>
+                    <a:lstStyle/>
+                    <a:p>
+                      <a:pPr algn="l"/>
+                      <a:r>
+                        <a:rPr sz="1400" b="0">
+                          <a:solidFill>
+                            <a:srgbClr val="21295C"/>
+                          </a:solidFill>
+                          <a:latin typeface="Calibri"/>
+                        </a:rPr>
+                        <a:t>Shell</a:t>
+                      </a:r>
+                    </a:p>
+                  </a:txBody>
+                  <a:tcPr anchor="ctr">
+                    <a:solidFill>
+                      <a:srgbClr val="EFF2FB"/>
+                    </a:solidFill>
+                  </a:tcPr>
+                </a:tc>
+                <a:tc>
+                  <a:txBody>
+                    <a:bodyPr/>
+                    <a:lstStyle/>
+                    <a:p>
+                      <a:pPr algn="r"/>
+                      <a:r>
+                        <a:rPr sz="1400" b="1">
+                          <a:solidFill>
+                            <a:srgbClr val="21295C"/>
+                          </a:solidFill>
+                          <a:latin typeface="Calibri"/>
+                        </a:rPr>
+                        <a:t>0%</a:t>
+                      </a:r>
+                    </a:p>
+                  </a:txBody>
+                  <a:tcPr anchor="ctr">
+                    <a:solidFill>
+                      <a:srgbClr val="EFF2FB"/>
+                    </a:solidFill>
+                  </a:tcPr>
+                </a:tc>
+              </a:tr>
+            </a:tbl>
+          </a:graphicData>
+        </a:graphic>
+      </p:graphicFrame>
+      <p:sp>
+        <p:nvSpPr>
+          <p:cNvPr id="13" name="Rectangle 12"/>
+          <p:cNvSpPr/>
+          <p:nvPr/>
+        </p:nvSpPr>
+        <p:spPr>
+          <a:xfrm>
+            <a:off x="6629400" y="4754880"/>
+            <a:ext cx="5212080" cy="548640"/>
+          </a:xfrm>
+          <a:prstGeom prst="rect">
+            <a:avLst/>
+          </a:prstGeom>
+          <a:solidFill>
+            <a:srgbClr val="EFF2FB"/>
+          </a:solidFill>
+          <a:ln>
+            <a:noFill/>
+          </a:ln>
+          <a:effectLst/>
+        </p:spPr>
+        <p:style>
+          <a:lnRef idx="1">
+            <a:schemeClr val="accent1"/>
+          </a:lnRef>
+          <a:fillRef idx="3">
+            <a:schemeClr val="accent1"/>
+          </a:fillRef>
+          <a:effectRef idx="2">
+            <a:schemeClr val="accent1"/>
+          </a:effectRef>
+          <a:fontRef idx="minor">
+            <a:schemeClr val="lt1"/>
+          </a:fontRef>
+        </p:style>
+        <p:txBody>
+          <a:bodyPr rtlCol="0" anchor="ctr"/>
+          <a:lstStyle/>
+          <a:p>
+            <a:pPr algn="ctr"/>
+          </a:p>
+        </p:txBody>
+      </p:sp>
+      <p:sp>
+        <p:nvSpPr>
+          <p:cNvPr id="14" name="TextBox 13"/>
           <p:cNvSpPr txBox="1"/>
           <p:nvPr/>
         </p:nvSpPr>
         <p:spPr>
           <a:xfrm>
-            <a:off x="6766560" y="2377440"/>
-            <a:ext cx="5120640" cy="3108960"/>
+            <a:off x="6629400" y="4754880"/>
+            <a:ext cx="5212080" cy="548640"/>
           </a:xfrm>
           <a:prstGeom prst="rect">
             <a:avLst/>
@@ -6999,126 +7493,27 @@
           <a:noFill/>
         </p:spPr>
         <p:txBody>
-          <a:bodyPr wrap="square" anchor="t" lIns="0" rIns="0" tIns="0" bIns="0">
+          <a:bodyPr wrap="square" anchor="ctr" lIns="0" rIns="0" tIns="0" bIns="0">
             <a:spAutoFit/>
           </a:bodyPr>
           <a:lstStyle/>
           <a:p>
-            <a:pPr algn="l">
-              <a:lnSpc>
-                <a:spcPct val="125000"/>
-              </a:lnSpc>
-              <a:spcAft>
-                <a:spcPts val="200"/>
-              </a:spcAft>
-            </a:pPr>
-            <a:r>
-              <a:rPr sz="1500" b="0">
+            <a:pPr algn="ctr">
+              <a:lnSpc>
+                <a:spcPct val="110000"/>
+              </a:lnSpc>
+              <a:spcAft>
+                <a:spcPts val="200"/>
+              </a:spcAft>
+            </a:pPr>
+            <a:r>
+              <a:rPr sz="1500" b="1">
                 <a:solidFill>
                   <a:srgbClr val="21295C"/>
                 </a:solidFill>
-                <a:latin typeface="Consolas"/>
-              </a:rPr>
-              <a:t>Goud            59,5%</a:t>
-            </a:r>
-          </a:p>
-          <a:p>
-            <a:pPr algn="l">
-              <a:lnSpc>
-                <a:spcPct val="125000"/>
-              </a:lnSpc>
-              <a:spcAft>
-                <a:spcPts val="200"/>
-              </a:spcAft>
-            </a:pPr>
-            <a:r>
-              <a:rPr sz="1500" b="0">
-                <a:solidFill>
-                  <a:srgbClr val="21295C"/>
-                </a:solidFill>
-                <a:latin typeface="Consolas"/>
-              </a:rPr>
-              <a:t>Apple           40,5%</a:t>
-            </a:r>
-          </a:p>
-          <a:p>
-            <a:pPr algn="l">
-              <a:lnSpc>
-                <a:spcPct val="125000"/>
-              </a:lnSpc>
-              <a:spcAft>
-                <a:spcPts val="200"/>
-              </a:spcAft>
-            </a:pPr>
-            <a:r>
-              <a:rPr sz="1500" b="0">
-                <a:solidFill>
-                  <a:srgbClr val="21295C"/>
-                </a:solidFill>
-                <a:latin typeface="Consolas"/>
-              </a:rPr>
-              <a:t>Zilver          0%</a:t>
-            </a:r>
-          </a:p>
-          <a:p>
-            <a:pPr algn="l">
-              <a:lnSpc>
-                <a:spcPct val="125000"/>
-              </a:lnSpc>
-              <a:spcAft>
-                <a:spcPts val="200"/>
-              </a:spcAft>
-            </a:pPr>
-            <a:r>
-              <a:rPr sz="1500" b="0">
-                <a:solidFill>
-                  <a:srgbClr val="21295C"/>
-                </a:solidFill>
-                <a:latin typeface="Consolas"/>
-              </a:rPr>
-              <a:t>Shell           0%</a:t>
-            </a:r>
-          </a:p>
-        </p:txBody>
-      </p:sp>
-      <p:sp>
-        <p:nvSpPr>
-          <p:cNvPr id="11" name="TextBox 10"/>
-          <p:cNvSpPr txBox="1"/>
-          <p:nvPr/>
-        </p:nvSpPr>
-        <p:spPr>
-          <a:xfrm>
-            <a:off x="6583680" y="5669280"/>
-            <a:ext cx="5303520" cy="822960"/>
-          </a:xfrm>
-          <a:prstGeom prst="rect">
-            <a:avLst/>
-          </a:prstGeom>
-          <a:noFill/>
-        </p:spPr>
-        <p:txBody>
-          <a:bodyPr wrap="square" anchor="t" lIns="0" rIns="0" tIns="0" bIns="0">
-            <a:spAutoFit/>
-          </a:bodyPr>
-          <a:lstStyle/>
-          <a:p>
-            <a:pPr algn="l">
-              <a:lnSpc>
-                <a:spcPct val="120000"/>
-              </a:lnSpc>
-              <a:spcAft>
-                <a:spcPts val="200"/>
-              </a:spcAft>
-            </a:pPr>
-            <a:r>
-              <a:rPr sz="1500" b="1">
-                <a:solidFill>
-                  <a:srgbClr val="02C39A"/>
-                </a:solidFill>
-                <a:latin typeface="Calibri"/>
-              </a:rPr>
-              <a:t>Rendement 13%  ·  risico 13%  ·  Sharpe 0,78</a:t>
+                <a:latin typeface="Calibri"/>
+              </a:rPr>
+              <a:t>Rendement 13%   ·   risico 13%   ·   Sharpe 0,78</a:t>
             </a:r>
           </a:p>
         </p:txBody>
@@ -7193,8 +7588,8 @@
         </p:nvSpPr>
         <p:spPr>
           <a:xfrm>
-            <a:off x="822960" y="457200"/>
-            <a:ext cx="10515600" cy="822960"/>
+            <a:off x="822960" y="502920"/>
+            <a:ext cx="10607040" cy="914400"/>
           </a:xfrm>
           <a:prstGeom prst="rect">
             <a:avLst/>
@@ -7202,7 +7597,7 @@
           <a:noFill/>
         </p:spPr>
         <p:txBody>
-          <a:bodyPr wrap="square" anchor="t" lIns="0" rIns="0" tIns="0" bIns="0">
+          <a:bodyPr wrap="square" anchor="ctr" lIns="0" rIns="0" tIns="0" bIns="0">
             <a:spAutoFit/>
           </a:bodyPr>
           <a:lstStyle/>
@@ -7216,27 +7611,71 @@
               </a:spcAft>
             </a:pPr>
             <a:r>
-              <a:rPr sz="3000" b="1">
+              <a:rPr sz="3200" b="1">
                 <a:solidFill>
                   <a:srgbClr val="1E2761"/>
                 </a:solidFill>
                 <a:latin typeface="Georgia"/>
               </a:rPr>
-              <a:t>Marktportfolio — hoogste Sharpe-ratio (alle 20 variabelen)</a:t>
-            </a:r>
-          </a:p>
-        </p:txBody>
-      </p:sp>
-      <p:sp>
-        <p:nvSpPr>
-          <p:cNvPr id="4" name="TextBox 3"/>
+              <a:t>Marktportfolio — hoogste Sharpe-ratio</a:t>
+            </a:r>
+          </a:p>
+        </p:txBody>
+      </p:sp>
+      <p:sp>
+        <p:nvSpPr>
+          <p:cNvPr id="4" name="Rectangle 3"/>
+          <p:cNvSpPr/>
+          <p:nvPr/>
+        </p:nvSpPr>
+        <p:spPr>
+          <a:xfrm>
+            <a:off x="822960" y="1417320"/>
+            <a:ext cx="2194560" cy="54864"/>
+          </a:xfrm>
+          <a:prstGeom prst="rect">
+            <a:avLst/>
+          </a:prstGeom>
+          <a:solidFill>
+            <a:srgbClr val="02C39A"/>
+          </a:solidFill>
+          <a:ln>
+            <a:noFill/>
+          </a:ln>
+          <a:effectLst/>
+        </p:spPr>
+        <p:style>
+          <a:lnRef idx="1">
+            <a:schemeClr val="accent1"/>
+          </a:lnRef>
+          <a:fillRef idx="3">
+            <a:schemeClr val="accent1"/>
+          </a:fillRef>
+          <a:effectRef idx="2">
+            <a:schemeClr val="accent1"/>
+          </a:effectRef>
+          <a:fontRef idx="minor">
+            <a:schemeClr val="lt1"/>
+          </a:fontRef>
+        </p:style>
+        <p:txBody>
+          <a:bodyPr rtlCol="0" anchor="ctr"/>
+          <a:lstStyle/>
+          <a:p>
+            <a:pPr algn="ctr"/>
+          </a:p>
+        </p:txBody>
+      </p:sp>
+      <p:sp>
+        <p:nvSpPr>
+          <p:cNvPr id="5" name="TextBox 4"/>
           <p:cNvSpPr txBox="1"/>
           <p:nvPr/>
         </p:nvSpPr>
         <p:spPr>
           <a:xfrm>
-            <a:off x="822960" y="1645920"/>
-            <a:ext cx="5120640" cy="457200"/>
+            <a:off x="822960" y="1691640"/>
+            <a:ext cx="5120640" cy="365760"/>
           </a:xfrm>
           <a:prstGeom prst="rect">
             <a:avLst/>
@@ -7258,202 +7697,485 @@
               </a:spcAft>
             </a:pPr>
             <a:r>
-              <a:rPr sz="1600" b="1">
+              <a:rPr sz="1500" b="1">
                 <a:solidFill>
                   <a:srgbClr val="02C39A"/>
                 </a:solidFill>
                 <a:latin typeface="Calibri"/>
               </a:rPr>
-              <a:t>Belangrijkste gewichten</a:t>
-            </a:r>
-          </a:p>
-        </p:txBody>
-      </p:sp>
-      <p:sp>
-        <p:nvSpPr>
-          <p:cNvPr id="5" name="TextBox 4"/>
-          <p:cNvSpPr txBox="1"/>
+              <a:t>Belangrijkste gewichten (van 20 variabelen)</a:t>
+            </a:r>
+          </a:p>
+        </p:txBody>
+      </p:sp>
+      <p:graphicFrame>
+        <p:nvGraphicFramePr>
+          <p:cNvPr id="6" name="Table 5"/>
+          <p:cNvGraphicFramePr>
+            <a:graphicFrameLocks noGrp="1"/>
+          </p:cNvGraphicFramePr>
           <p:nvPr/>
-        </p:nvSpPr>
-        <p:spPr>
-          <a:xfrm>
-            <a:off x="822960" y="2194560"/>
-            <a:ext cx="5120640" cy="3474720"/>
-          </a:xfrm>
-          <a:prstGeom prst="rect">
-            <a:avLst/>
-          </a:prstGeom>
-          <a:noFill/>
-        </p:spPr>
-        <p:txBody>
-          <a:bodyPr wrap="square" anchor="t" lIns="0" rIns="0" tIns="0" bIns="0">
-            <a:spAutoFit/>
-          </a:bodyPr>
-          <a:lstStyle/>
-          <a:p>
-            <a:pPr algn="l">
-              <a:lnSpc>
-                <a:spcPct val="130000"/>
-              </a:lnSpc>
-              <a:spcAft>
-                <a:spcPts val="200"/>
-              </a:spcAft>
-            </a:pPr>
-            <a:r>
-              <a:rPr sz="1600" b="0">
-                <a:solidFill>
-                  <a:srgbClr val="21295C"/>
-                </a:solidFill>
-                <a:latin typeface="Consolas"/>
-              </a:rPr>
-              <a:t>Coffee        37,0%</a:t>
-            </a:r>
-          </a:p>
-          <a:p>
-            <a:pPr algn="l">
-              <a:lnSpc>
-                <a:spcPct val="130000"/>
-              </a:lnSpc>
-              <a:spcAft>
-                <a:spcPts val="200"/>
-              </a:spcAft>
-            </a:pPr>
-            <a:r>
-              <a:rPr sz="1600" b="0">
-                <a:solidFill>
-                  <a:srgbClr val="21295C"/>
-                </a:solidFill>
-                <a:latin typeface="Consolas"/>
-              </a:rPr>
-              <a:t>Goud          19,2%</a:t>
-            </a:r>
-          </a:p>
-          <a:p>
-            <a:pPr algn="l">
-              <a:lnSpc>
-                <a:spcPct val="130000"/>
-              </a:lnSpc>
-              <a:spcAft>
-                <a:spcPts val="200"/>
-              </a:spcAft>
-            </a:pPr>
-            <a:r>
-              <a:rPr sz="1600" b="0">
-                <a:solidFill>
-                  <a:srgbClr val="21295C"/>
-                </a:solidFill>
-                <a:latin typeface="Consolas"/>
-              </a:rPr>
-              <a:t>Gasoline      10,5%</a:t>
-            </a:r>
-          </a:p>
-          <a:p>
-            <a:pPr algn="l">
-              <a:lnSpc>
-                <a:spcPct val="130000"/>
-              </a:lnSpc>
-              <a:spcAft>
-                <a:spcPts val="200"/>
-              </a:spcAft>
-            </a:pPr>
-            <a:r>
-              <a:rPr sz="1600" b="0">
-                <a:solidFill>
-                  <a:srgbClr val="21295C"/>
-                </a:solidFill>
-                <a:latin typeface="Consolas"/>
-              </a:rPr>
-              <a:t>Copper        9,3%</a:t>
-            </a:r>
-          </a:p>
-          <a:p>
-            <a:pPr algn="l">
-              <a:lnSpc>
-                <a:spcPct val="130000"/>
-              </a:lnSpc>
-              <a:spcAft>
-                <a:spcPts val="200"/>
-              </a:spcAft>
-            </a:pPr>
-            <a:r>
-              <a:rPr sz="1600" b="0">
-                <a:solidFill>
-                  <a:srgbClr val="21295C"/>
-                </a:solidFill>
-                <a:latin typeface="Consolas"/>
-              </a:rPr>
-              <a:t>Broadcom      6,8%</a:t>
-            </a:r>
-          </a:p>
-          <a:p>
-            <a:pPr algn="l">
-              <a:lnSpc>
-                <a:spcPct val="130000"/>
-              </a:lnSpc>
-              <a:spcAft>
-                <a:spcPts val="200"/>
-              </a:spcAft>
-            </a:pPr>
-            <a:r>
-              <a:rPr sz="1600" b="0">
-                <a:solidFill>
-                  <a:srgbClr val="21295C"/>
-                </a:solidFill>
-                <a:latin typeface="Consolas"/>
-              </a:rPr>
-              <a:t>Apple         6,7%</a:t>
-            </a:r>
-          </a:p>
-          <a:p>
-            <a:pPr algn="l">
-              <a:lnSpc>
-                <a:spcPct val="130000"/>
-              </a:lnSpc>
-              <a:spcAft>
-                <a:spcPts val="200"/>
-              </a:spcAft>
-            </a:pPr>
-            <a:r>
-              <a:rPr sz="1600" b="0">
-                <a:solidFill>
-                  <a:srgbClr val="21295C"/>
-                </a:solidFill>
-                <a:latin typeface="Consolas"/>
-              </a:rPr>
-              <a:t>Steel         5,0%</a:t>
-            </a:r>
-          </a:p>
-          <a:p>
-            <a:pPr algn="l">
-              <a:lnSpc>
-                <a:spcPct val="130000"/>
-              </a:lnSpc>
-              <a:spcAft>
-                <a:spcPts val="200"/>
-              </a:spcAft>
-            </a:pPr>
-            <a:r>
-              <a:rPr sz="1600" b="0">
-                <a:solidFill>
-                  <a:srgbClr val="21295C"/>
-                </a:solidFill>
-                <a:latin typeface="Consolas"/>
-              </a:rPr>
-              <a:t>Bitcoin       4,0%</a:t>
-            </a:r>
-          </a:p>
-        </p:txBody>
-      </p:sp>
-      <p:sp>
-        <p:nvSpPr>
-          <p:cNvPr id="6" name="Rectangle 5"/>
+        </p:nvGraphicFramePr>
+        <p:xfrm>
+          <a:off x="822960" y="2194560"/>
+          <a:ext cx="4937759" cy="3456432"/>
+        </p:xfrm>
+        <a:graphic>
+          <a:graphicData uri="http://schemas.openxmlformats.org/drawingml/2006/table">
+            <a:tbl>
+              <a:tblPr firstRow="1" bandRow="1">
+                <a:tableStyleId>{5C22544A-7EE6-4342-B048-85BDC9FD1C3A}</a:tableStyleId>
+              </a:tblPr>
+              <a:tblGrid>
+                <a:gridCol w="3061411"/>
+                <a:gridCol w="1876348"/>
+              </a:tblGrid>
+              <a:tr h="384048">
+                <a:tc>
+                  <a:txBody>
+                    <a:bodyPr/>
+                    <a:lstStyle/>
+                    <a:p>
+                      <a:pPr algn="l"/>
+                      <a:r>
+                        <a:rPr sz="1400" b="1">
+                          <a:solidFill>
+                            <a:srgbClr val="FFFFFF"/>
+                          </a:solidFill>
+                          <a:latin typeface="Calibri"/>
+                        </a:rPr>
+                        <a:t>Product</a:t>
+                      </a:r>
+                    </a:p>
+                  </a:txBody>
+                  <a:tcPr anchor="ctr">
+                    <a:solidFill>
+                      <a:srgbClr val="1E2761"/>
+                    </a:solidFill>
+                  </a:tcPr>
+                </a:tc>
+                <a:tc>
+                  <a:txBody>
+                    <a:bodyPr/>
+                    <a:lstStyle/>
+                    <a:p>
+                      <a:pPr algn="r"/>
+                      <a:r>
+                        <a:rPr sz="1400" b="1">
+                          <a:solidFill>
+                            <a:srgbClr val="FFFFFF"/>
+                          </a:solidFill>
+                          <a:latin typeface="Calibri"/>
+                        </a:rPr>
+                        <a:t>Gewicht</a:t>
+                      </a:r>
+                    </a:p>
+                  </a:txBody>
+                  <a:tcPr anchor="ctr">
+                    <a:solidFill>
+                      <a:srgbClr val="1E2761"/>
+                    </a:solidFill>
+                  </a:tcPr>
+                </a:tc>
+              </a:tr>
+              <a:tr h="384048">
+                <a:tc>
+                  <a:txBody>
+                    <a:bodyPr/>
+                    <a:lstStyle/>
+                    <a:p>
+                      <a:pPr algn="l"/>
+                      <a:r>
+                        <a:rPr sz="1400" b="0">
+                          <a:solidFill>
+                            <a:srgbClr val="21295C"/>
+                          </a:solidFill>
+                          <a:latin typeface="Calibri"/>
+                        </a:rPr>
+                        <a:t>Coffee</a:t>
+                      </a:r>
+                    </a:p>
+                  </a:txBody>
+                  <a:tcPr anchor="ctr">
+                    <a:solidFill>
+                      <a:srgbClr val="FFFFFF"/>
+                    </a:solidFill>
+                  </a:tcPr>
+                </a:tc>
+                <a:tc>
+                  <a:txBody>
+                    <a:bodyPr/>
+                    <a:lstStyle/>
+                    <a:p>
+                      <a:pPr algn="r"/>
+                      <a:r>
+                        <a:rPr sz="1400" b="1">
+                          <a:solidFill>
+                            <a:srgbClr val="21295C"/>
+                          </a:solidFill>
+                          <a:latin typeface="Calibri"/>
+                        </a:rPr>
+                        <a:t>37,0%</a:t>
+                      </a:r>
+                    </a:p>
+                  </a:txBody>
+                  <a:tcPr anchor="ctr">
+                    <a:solidFill>
+                      <a:srgbClr val="FFFFFF"/>
+                    </a:solidFill>
+                  </a:tcPr>
+                </a:tc>
+              </a:tr>
+              <a:tr h="384048">
+                <a:tc>
+                  <a:txBody>
+                    <a:bodyPr/>
+                    <a:lstStyle/>
+                    <a:p>
+                      <a:pPr algn="l"/>
+                      <a:r>
+                        <a:rPr sz="1400" b="0">
+                          <a:solidFill>
+                            <a:srgbClr val="21295C"/>
+                          </a:solidFill>
+                          <a:latin typeface="Calibri"/>
+                        </a:rPr>
+                        <a:t>Goud</a:t>
+                      </a:r>
+                    </a:p>
+                  </a:txBody>
+                  <a:tcPr anchor="ctr">
+                    <a:solidFill>
+                      <a:srgbClr val="EFF2FB"/>
+                    </a:solidFill>
+                  </a:tcPr>
+                </a:tc>
+                <a:tc>
+                  <a:txBody>
+                    <a:bodyPr/>
+                    <a:lstStyle/>
+                    <a:p>
+                      <a:pPr algn="r"/>
+                      <a:r>
+                        <a:rPr sz="1400" b="1">
+                          <a:solidFill>
+                            <a:srgbClr val="21295C"/>
+                          </a:solidFill>
+                          <a:latin typeface="Calibri"/>
+                        </a:rPr>
+                        <a:t>19,2%</a:t>
+                      </a:r>
+                    </a:p>
+                  </a:txBody>
+                  <a:tcPr anchor="ctr">
+                    <a:solidFill>
+                      <a:srgbClr val="EFF2FB"/>
+                    </a:solidFill>
+                  </a:tcPr>
+                </a:tc>
+              </a:tr>
+              <a:tr h="384048">
+                <a:tc>
+                  <a:txBody>
+                    <a:bodyPr/>
+                    <a:lstStyle/>
+                    <a:p>
+                      <a:pPr algn="l"/>
+                      <a:r>
+                        <a:rPr sz="1400" b="0">
+                          <a:solidFill>
+                            <a:srgbClr val="21295C"/>
+                          </a:solidFill>
+                          <a:latin typeface="Calibri"/>
+                        </a:rPr>
+                        <a:t>Gasoline</a:t>
+                      </a:r>
+                    </a:p>
+                  </a:txBody>
+                  <a:tcPr anchor="ctr">
+                    <a:solidFill>
+                      <a:srgbClr val="FFFFFF"/>
+                    </a:solidFill>
+                  </a:tcPr>
+                </a:tc>
+                <a:tc>
+                  <a:txBody>
+                    <a:bodyPr/>
+                    <a:lstStyle/>
+                    <a:p>
+                      <a:pPr algn="r"/>
+                      <a:r>
+                        <a:rPr sz="1400" b="1">
+                          <a:solidFill>
+                            <a:srgbClr val="21295C"/>
+                          </a:solidFill>
+                          <a:latin typeface="Calibri"/>
+                        </a:rPr>
+                        <a:t>10,5%</a:t>
+                      </a:r>
+                    </a:p>
+                  </a:txBody>
+                  <a:tcPr anchor="ctr">
+                    <a:solidFill>
+                      <a:srgbClr val="FFFFFF"/>
+                    </a:solidFill>
+                  </a:tcPr>
+                </a:tc>
+              </a:tr>
+              <a:tr h="384048">
+                <a:tc>
+                  <a:txBody>
+                    <a:bodyPr/>
+                    <a:lstStyle/>
+                    <a:p>
+                      <a:pPr algn="l"/>
+                      <a:r>
+                        <a:rPr sz="1400" b="0">
+                          <a:solidFill>
+                            <a:srgbClr val="21295C"/>
+                          </a:solidFill>
+                          <a:latin typeface="Calibri"/>
+                        </a:rPr>
+                        <a:t>Copper</a:t>
+                      </a:r>
+                    </a:p>
+                  </a:txBody>
+                  <a:tcPr anchor="ctr">
+                    <a:solidFill>
+                      <a:srgbClr val="EFF2FB"/>
+                    </a:solidFill>
+                  </a:tcPr>
+                </a:tc>
+                <a:tc>
+                  <a:txBody>
+                    <a:bodyPr/>
+                    <a:lstStyle/>
+                    <a:p>
+                      <a:pPr algn="r"/>
+                      <a:r>
+                        <a:rPr sz="1400" b="1">
+                          <a:solidFill>
+                            <a:srgbClr val="21295C"/>
+                          </a:solidFill>
+                          <a:latin typeface="Calibri"/>
+                        </a:rPr>
+                        <a:t>9,3%</a:t>
+                      </a:r>
+                    </a:p>
+                  </a:txBody>
+                  <a:tcPr anchor="ctr">
+                    <a:solidFill>
+                      <a:srgbClr val="EFF2FB"/>
+                    </a:solidFill>
+                  </a:tcPr>
+                </a:tc>
+              </a:tr>
+              <a:tr h="384048">
+                <a:tc>
+                  <a:txBody>
+                    <a:bodyPr/>
+                    <a:lstStyle/>
+                    <a:p>
+                      <a:pPr algn="l"/>
+                      <a:r>
+                        <a:rPr sz="1400" b="0">
+                          <a:solidFill>
+                            <a:srgbClr val="21295C"/>
+                          </a:solidFill>
+                          <a:latin typeface="Calibri"/>
+                        </a:rPr>
+                        <a:t>Broadcom</a:t>
+                      </a:r>
+                    </a:p>
+                  </a:txBody>
+                  <a:tcPr anchor="ctr">
+                    <a:solidFill>
+                      <a:srgbClr val="FFFFFF"/>
+                    </a:solidFill>
+                  </a:tcPr>
+                </a:tc>
+                <a:tc>
+                  <a:txBody>
+                    <a:bodyPr/>
+                    <a:lstStyle/>
+                    <a:p>
+                      <a:pPr algn="r"/>
+                      <a:r>
+                        <a:rPr sz="1400" b="1">
+                          <a:solidFill>
+                            <a:srgbClr val="21295C"/>
+                          </a:solidFill>
+                          <a:latin typeface="Calibri"/>
+                        </a:rPr>
+                        <a:t>6,8%</a:t>
+                      </a:r>
+                    </a:p>
+                  </a:txBody>
+                  <a:tcPr anchor="ctr">
+                    <a:solidFill>
+                      <a:srgbClr val="FFFFFF"/>
+                    </a:solidFill>
+                  </a:tcPr>
+                </a:tc>
+              </a:tr>
+              <a:tr h="384048">
+                <a:tc>
+                  <a:txBody>
+                    <a:bodyPr/>
+                    <a:lstStyle/>
+                    <a:p>
+                      <a:pPr algn="l"/>
+                      <a:r>
+                        <a:rPr sz="1400" b="0">
+                          <a:solidFill>
+                            <a:srgbClr val="21295C"/>
+                          </a:solidFill>
+                          <a:latin typeface="Calibri"/>
+                        </a:rPr>
+                        <a:t>Apple</a:t>
+                      </a:r>
+                    </a:p>
+                  </a:txBody>
+                  <a:tcPr anchor="ctr">
+                    <a:solidFill>
+                      <a:srgbClr val="EFF2FB"/>
+                    </a:solidFill>
+                  </a:tcPr>
+                </a:tc>
+                <a:tc>
+                  <a:txBody>
+                    <a:bodyPr/>
+                    <a:lstStyle/>
+                    <a:p>
+                      <a:pPr algn="r"/>
+                      <a:r>
+                        <a:rPr sz="1400" b="1">
+                          <a:solidFill>
+                            <a:srgbClr val="21295C"/>
+                          </a:solidFill>
+                          <a:latin typeface="Calibri"/>
+                        </a:rPr>
+                        <a:t>6,7%</a:t>
+                      </a:r>
+                    </a:p>
+                  </a:txBody>
+                  <a:tcPr anchor="ctr">
+                    <a:solidFill>
+                      <a:srgbClr val="EFF2FB"/>
+                    </a:solidFill>
+                  </a:tcPr>
+                </a:tc>
+              </a:tr>
+              <a:tr h="384048">
+                <a:tc>
+                  <a:txBody>
+                    <a:bodyPr/>
+                    <a:lstStyle/>
+                    <a:p>
+                      <a:pPr algn="l"/>
+                      <a:r>
+                        <a:rPr sz="1400" b="0">
+                          <a:solidFill>
+                            <a:srgbClr val="21295C"/>
+                          </a:solidFill>
+                          <a:latin typeface="Calibri"/>
+                        </a:rPr>
+                        <a:t>Steel</a:t>
+                      </a:r>
+                    </a:p>
+                  </a:txBody>
+                  <a:tcPr anchor="ctr">
+                    <a:solidFill>
+                      <a:srgbClr val="FFFFFF"/>
+                    </a:solidFill>
+                  </a:tcPr>
+                </a:tc>
+                <a:tc>
+                  <a:txBody>
+                    <a:bodyPr/>
+                    <a:lstStyle/>
+                    <a:p>
+                      <a:pPr algn="r"/>
+                      <a:r>
+                        <a:rPr sz="1400" b="1">
+                          <a:solidFill>
+                            <a:srgbClr val="21295C"/>
+                          </a:solidFill>
+                          <a:latin typeface="Calibri"/>
+                        </a:rPr>
+                        <a:t>5,0%</a:t>
+                      </a:r>
+                    </a:p>
+                  </a:txBody>
+                  <a:tcPr anchor="ctr">
+                    <a:solidFill>
+                      <a:srgbClr val="FFFFFF"/>
+                    </a:solidFill>
+                  </a:tcPr>
+                </a:tc>
+              </a:tr>
+              <a:tr h="384048">
+                <a:tc>
+                  <a:txBody>
+                    <a:bodyPr/>
+                    <a:lstStyle/>
+                    <a:p>
+                      <a:pPr algn="l"/>
+                      <a:r>
+                        <a:rPr sz="1400" b="0">
+                          <a:solidFill>
+                            <a:srgbClr val="21295C"/>
+                          </a:solidFill>
+                          <a:latin typeface="Calibri"/>
+                        </a:rPr>
+                        <a:t>Bitcoin</a:t>
+                      </a:r>
+                    </a:p>
+                  </a:txBody>
+                  <a:tcPr anchor="ctr">
+                    <a:solidFill>
+                      <a:srgbClr val="EFF2FB"/>
+                    </a:solidFill>
+                  </a:tcPr>
+                </a:tc>
+                <a:tc>
+                  <a:txBody>
+                    <a:bodyPr/>
+                    <a:lstStyle/>
+                    <a:p>
+                      <a:pPr algn="r"/>
+                      <a:r>
+                        <a:rPr sz="1400" b="1">
+                          <a:solidFill>
+                            <a:srgbClr val="21295C"/>
+                          </a:solidFill>
+                          <a:latin typeface="Calibri"/>
+                        </a:rPr>
+                        <a:t>4,0%</a:t>
+                      </a:r>
+                    </a:p>
+                  </a:txBody>
+                  <a:tcPr anchor="ctr">
+                    <a:solidFill>
+                      <a:srgbClr val="EFF2FB"/>
+                    </a:solidFill>
+                  </a:tcPr>
+                </a:tc>
+              </a:tr>
+            </a:tbl>
+          </a:graphicData>
+        </a:graphic>
+      </p:graphicFrame>
+      <p:sp>
+        <p:nvSpPr>
+          <p:cNvPr id="7" name="Rectangle 6"/>
           <p:cNvSpPr/>
           <p:nvPr/>
         </p:nvSpPr>
         <p:spPr>
           <a:xfrm>
-            <a:off x="6400800" y="2194560"/>
-            <a:ext cx="4937760" cy="2377440"/>
+            <a:off x="6492240" y="2194560"/>
+            <a:ext cx="4846320" cy="3291840"/>
           </a:xfrm>
           <a:prstGeom prst="rect">
             <a:avLst/>
@@ -7490,14 +8212,14 @@
       </p:sp>
       <p:sp>
         <p:nvSpPr>
-          <p:cNvPr id="7" name="TextBox 6"/>
+          <p:cNvPr id="8" name="TextBox 7"/>
           <p:cNvSpPr txBox="1"/>
           <p:nvPr/>
         </p:nvSpPr>
         <p:spPr>
           <a:xfrm>
-            <a:off x="6675120" y="2468880"/>
-            <a:ext cx="4480560" cy="2011680"/>
+            <a:off x="6812280" y="2468880"/>
+            <a:ext cx="4206240" cy="2743200"/>
           </a:xfrm>
           <a:prstGeom prst="rect">
             <a:avLst/>
@@ -7512,14 +8234,14 @@
           <a:p>
             <a:pPr algn="l">
               <a:lnSpc>
-                <a:spcPct val="130000"/>
-              </a:lnSpc>
-              <a:spcAft>
-                <a:spcPts val="200"/>
-              </a:spcAft>
-            </a:pPr>
-            <a:r>
-              <a:rPr sz="1800" b="1">
+                <a:spcPct val="125000"/>
+              </a:lnSpc>
+              <a:spcAft>
+                <a:spcPts val="200"/>
+              </a:spcAft>
+            </a:pPr>
+            <a:r>
+              <a:rPr sz="2000" b="1">
                 <a:solidFill>
                   <a:srgbClr val="02C39A"/>
                 </a:solidFill>
@@ -7531,7 +8253,26 @@
           <a:p>
             <a:pPr algn="l">
               <a:lnSpc>
-                <a:spcPct val="130000"/>
+                <a:spcPct val="125000"/>
+              </a:lnSpc>
+              <a:spcAft>
+                <a:spcPts val="200"/>
+              </a:spcAft>
+            </a:pPr>
+            <a:r>
+              <a:rPr sz="600" b="0">
+                <a:solidFill>
+                  <a:srgbClr val="FFFFFF"/>
+                </a:solidFill>
+                <a:latin typeface="Calibri"/>
+              </a:rPr>
+              <a:t/>
+            </a:r>
+          </a:p>
+          <a:p>
+            <a:pPr algn="l">
+              <a:lnSpc>
+                <a:spcPct val="125000"/>
               </a:lnSpc>
               <a:spcAft>
                 <a:spcPts val="200"/>
@@ -7544,13 +8285,13 @@
                 </a:solidFill>
                 <a:latin typeface="Calibri"/>
               </a:rPr>
-              <a:t>Rendement:  9,1%</a:t>
-            </a:r>
-          </a:p>
-          <a:p>
-            <a:pPr algn="l">
-              <a:lnSpc>
-                <a:spcPct val="130000"/>
+              <a:t>Rendement:   9,1%</a:t>
+            </a:r>
+          </a:p>
+          <a:p>
+            <a:pPr algn="l">
+              <a:lnSpc>
+                <a:spcPct val="125000"/>
               </a:lnSpc>
               <a:spcAft>
                 <a:spcPts val="200"/>
@@ -7563,39 +8304,39 @@
                 </a:solidFill>
                 <a:latin typeface="Calibri"/>
               </a:rPr>
-              <a:t>Risico (std):  6,0%</a:t>
-            </a:r>
-          </a:p>
-          <a:p>
-            <a:pPr algn="l">
-              <a:lnSpc>
-                <a:spcPct val="130000"/>
-              </a:lnSpc>
-              <a:spcAft>
-                <a:spcPts val="200"/>
-              </a:spcAft>
-            </a:pPr>
-            <a:r>
-              <a:rPr sz="2000" b="1">
+              <a:t>Risico (std):   6,0%</a:t>
+            </a:r>
+          </a:p>
+          <a:p>
+            <a:pPr algn="l">
+              <a:lnSpc>
+                <a:spcPct val="125000"/>
+              </a:lnSpc>
+              <a:spcAft>
+                <a:spcPts val="200"/>
+              </a:spcAft>
+            </a:pPr>
+            <a:r>
+              <a:rPr sz="2200" b="1">
                 <a:solidFill>
                   <a:srgbClr val="FFFFFF"/>
                 </a:solidFill>
                 <a:latin typeface="Calibri"/>
               </a:rPr>
-              <a:t>Sharpe-ratio:  1,10</a:t>
-            </a:r>
-          </a:p>
-          <a:p>
-            <a:pPr algn="l">
-              <a:lnSpc>
-                <a:spcPct val="130000"/>
-              </a:lnSpc>
-              <a:spcAft>
-                <a:spcPts val="200"/>
-              </a:spcAft>
-            </a:pPr>
-            <a:r>
-              <a:rPr sz="800" b="0">
+              <a:t>Sharpe-ratio:   1,10</a:t>
+            </a:r>
+          </a:p>
+          <a:p>
+            <a:pPr algn="l">
+              <a:lnSpc>
+                <a:spcPct val="125000"/>
+              </a:lnSpc>
+              <a:spcAft>
+                <a:spcPts val="200"/>
+              </a:spcAft>
+            </a:pPr>
+            <a:r>
+              <a:rPr sz="1000" b="0">
                 <a:solidFill>
                   <a:srgbClr val="FFFFFF"/>
                 </a:solidFill>
@@ -7607,7 +8348,7 @@
           <a:p>
             <a:pPr algn="l">
               <a:lnSpc>
-                <a:spcPct val="130000"/>
+                <a:spcPct val="125000"/>
               </a:lnSpc>
               <a:spcAft>
                 <a:spcPts val="200"/>
@@ -7626,7 +8367,7 @@
           <a:p>
             <a:pPr algn="l">
               <a:lnSpc>
-                <a:spcPct val="130000"/>
+                <a:spcPct val="125000"/>
               </a:lnSpc>
               <a:spcAft>
                 <a:spcPts val="200"/>
@@ -7639,7 +8380,26 @@
                 </a:solidFill>
                 <a:latin typeface="Calibri"/>
               </a:rPr>
-              <a:t>ze voegen geen rendement per risico toe.</a:t>
+              <a:t>ze voegen geen rendement per</a:t>
+            </a:r>
+          </a:p>
+          <a:p>
+            <a:pPr algn="l">
+              <a:lnSpc>
+                <a:spcPct val="125000"/>
+              </a:lnSpc>
+              <a:spcAft>
+                <a:spcPts val="200"/>
+              </a:spcAft>
+            </a:pPr>
+            <a:r>
+              <a:rPr sz="1400" b="0">
+                <a:solidFill>
+                  <a:srgbClr val="CADCFC"/>
+                </a:solidFill>
+                <a:latin typeface="Calibri"/>
+              </a:rPr>
+              <a:t>eenheid risico toe.</a:t>
             </a:r>
           </a:p>
         </p:txBody>

--- a/Werkplaats2_Groep3_Eindpresentatie.pptx
+++ b/Werkplaats2_Groep3_Eindpresentatie.pptx
@@ -15,6 +15,16 @@
     <p:sldId id="263" r:id="rId14"/>
     <p:sldId id="264" r:id="rId15"/>
     <p:sldId id="265" r:id="rId16"/>
+    <p:sldId id="266" r:id="rId17"/>
+    <p:sldId id="267" r:id="rId18"/>
+    <p:sldId id="268" r:id="rId19"/>
+    <p:sldId id="269" r:id="rId20"/>
+    <p:sldId id="270" r:id="rId21"/>
+    <p:sldId id="271" r:id="rId22"/>
+    <p:sldId id="272" r:id="rId23"/>
+    <p:sldId id="273" r:id="rId24"/>
+    <p:sldId id="274" r:id="rId25"/>
+    <p:sldId id="275" r:id="rId26"/>
   </p:sldIdLst>
   <p:sldSz cx="12191695" cy="6858000" type="screen4x3"/>
   <p:notesSz cx="6858000" cy="9144000"/>
@@ -3562,7 +3572,7 @@
 </p:sld>
 </file>
 
-<file path=ppt/slides/slide2.xml><?xml version="1.0" encoding="utf-8"?>
+<file path=ppt/slides/slide11.xml><?xml version="1.0" encoding="utf-8"?>
 <p:sld xmlns:a="http://schemas.openxmlformats.org/drawingml/2006/main" xmlns:p="http://schemas.openxmlformats.org/presentationml/2006/main" xmlns:r="http://schemas.openxmlformats.org/officeDocument/2006/relationships">
   <p:cSld>
     <p:spTree>
@@ -3587,7 +3597,7 @@
             <a:avLst/>
           </a:prstGeom>
           <a:solidFill>
-            <a:srgbClr val="FFFFFF"/>
+            <a:srgbClr val="1E2761"/>
           </a:solidFill>
           <a:ln>
             <a:noFill/>
@@ -3618,58 +3628,16 @@
       </p:sp>
       <p:sp>
         <p:nvSpPr>
-          <p:cNvPr id="3" name="TextBox 2"/>
-          <p:cNvSpPr txBox="1"/>
-          <p:nvPr/>
-        </p:nvSpPr>
-        <p:spPr>
-          <a:xfrm>
-            <a:off x="822960" y="502920"/>
-            <a:ext cx="10607040" cy="914400"/>
-          </a:xfrm>
-          <a:prstGeom prst="rect">
-            <a:avLst/>
-          </a:prstGeom>
-          <a:noFill/>
-        </p:spPr>
-        <p:txBody>
-          <a:bodyPr wrap="square" anchor="ctr" lIns="0" rIns="0" tIns="0" bIns="0">
-            <a:spAutoFit/>
-          </a:bodyPr>
-          <a:lstStyle/>
-          <a:p>
-            <a:pPr algn="l">
-              <a:lnSpc>
-                <a:spcPct val="110000"/>
-              </a:lnSpc>
-              <a:spcAft>
-                <a:spcPts val="200"/>
-              </a:spcAft>
-            </a:pPr>
-            <a:r>
-              <a:rPr sz="3400" b="1">
-                <a:solidFill>
-                  <a:srgbClr val="1E2761"/>
-                </a:solidFill>
-                <a:latin typeface="Georgia"/>
-              </a:rPr>
-              <a:t>Onze data &amp; aanpak</a:t>
-            </a:r>
-          </a:p>
-        </p:txBody>
-      </p:sp>
-      <p:sp>
-        <p:nvSpPr>
-          <p:cNvPr id="4" name="Rectangle 3"/>
+          <p:cNvPr id="3" name="Oval 2"/>
           <p:cNvSpPr/>
           <p:nvPr/>
         </p:nvSpPr>
         <p:spPr>
           <a:xfrm>
-            <a:off x="822960" y="1417320"/>
-            <a:ext cx="2194560" cy="54864"/>
-          </a:xfrm>
-          <a:prstGeom prst="rect">
+            <a:off x="822960" y="1280160"/>
+            <a:ext cx="320040" cy="320040"/>
+          </a:xfrm>
+          <a:prstGeom prst="ellipse">
             <a:avLst/>
           </a:prstGeom>
           <a:solidFill>
@@ -3704,14 +3672,14 @@
       </p:sp>
       <p:sp>
         <p:nvSpPr>
-          <p:cNvPr id="5" name="TextBox 4"/>
+          <p:cNvPr id="4" name="TextBox 3"/>
           <p:cNvSpPr txBox="1"/>
           <p:nvPr/>
         </p:nvSpPr>
         <p:spPr>
           <a:xfrm>
-            <a:off x="822960" y="1828800"/>
-            <a:ext cx="10515600" cy="4389120"/>
+            <a:off x="822960" y="2377440"/>
+            <a:ext cx="10515600" cy="1645920"/>
           </a:xfrm>
           <a:prstGeom prst="rect">
             <a:avLst/>
@@ -3726,115 +3694,62 @@
           <a:p>
             <a:pPr algn="l">
               <a:lnSpc>
-                <a:spcPct val="150000"/>
-              </a:lnSpc>
-              <a:spcAft>
-                <a:spcPts val="200"/>
-              </a:spcAft>
-            </a:pPr>
-            <a:r>
-              <a:rPr sz="1800" b="0">
-                <a:solidFill>
-                  <a:srgbClr val="21295C"/>
-                </a:solidFill>
-                <a:latin typeface="Calibri"/>
-              </a:rPr>
-              <a:t>We verzamelden 20 producten en indicatoren over de periode dec 2015 – mei 2026.</a:t>
-            </a:r>
-          </a:p>
-          <a:p>
-            <a:pPr algn="l">
-              <a:lnSpc>
-                <a:spcPct val="150000"/>
-              </a:lnSpc>
-              <a:spcAft>
-                <a:spcPts val="200"/>
-              </a:spcAft>
-            </a:pPr>
-            <a:r>
-              <a:rPr sz="1600" b="0">
-                <a:solidFill>
-                  <a:srgbClr val="21295C"/>
-                </a:solidFill>
-                <a:latin typeface="Calibri"/>
-              </a:rPr>
-              <a:t>•  Aandelen, crypto en obligaties via Yahoo Finance (Apple, ASML, Broadcom, Shell, Bitcoin).</a:t>
-            </a:r>
-          </a:p>
-          <a:p>
-            <a:pPr algn="l">
-              <a:lnSpc>
-                <a:spcPct val="150000"/>
-              </a:lnSpc>
-              <a:spcAft>
-                <a:spcPts val="200"/>
-              </a:spcAft>
-            </a:pPr>
-            <a:r>
-              <a:rPr sz="1600" b="0">
-                <a:solidFill>
-                  <a:srgbClr val="21295C"/>
-                </a:solidFill>
-                <a:latin typeface="Calibri"/>
-              </a:rPr>
-              <a:t>•  Grondstoffen via Yahoo Finance en FRED (goud, olie, koper, graan, koffie, gas).</a:t>
-            </a:r>
-          </a:p>
-          <a:p>
-            <a:pPr algn="l">
-              <a:lnSpc>
-                <a:spcPct val="150000"/>
-              </a:lnSpc>
-              <a:spcAft>
-                <a:spcPts val="200"/>
-              </a:spcAft>
-            </a:pPr>
-            <a:r>
-              <a:rPr sz="1600" b="0">
-                <a:solidFill>
-                  <a:srgbClr val="21295C"/>
-                </a:solidFill>
-                <a:latin typeface="Calibri"/>
-              </a:rPr>
-              <a:t>•  Macro-economische indicatoren via de FED St. Louis (GDP, inkomen, inflatie, rente, werkloosheid).</a:t>
-            </a:r>
-          </a:p>
-          <a:p>
-            <a:pPr algn="l">
-              <a:lnSpc>
-                <a:spcPct val="150000"/>
-              </a:lnSpc>
-              <a:spcAft>
-                <a:spcPts val="200"/>
-              </a:spcAft>
-            </a:pPr>
-            <a:r>
-              <a:rPr sz="1600" b="0">
-                <a:solidFill>
-                  <a:srgbClr val="21295C"/>
-                </a:solidFill>
-                <a:latin typeface="Calibri"/>
-              </a:rPr>
-              <a:t>Hierop pasten we regressie, tijdreeksanalyse, sentimentanalyse, machine learning en</a:t>
-            </a:r>
-          </a:p>
-          <a:p>
-            <a:pPr algn="l">
-              <a:lnSpc>
-                <a:spcPct val="150000"/>
-              </a:lnSpc>
-              <a:spcAft>
-                <a:spcPts val="200"/>
-              </a:spcAft>
-            </a:pPr>
-            <a:r>
-              <a:rPr sz="1600" b="0">
-                <a:solidFill>
-                  <a:srgbClr val="21295C"/>
-                </a:solidFill>
-                <a:latin typeface="Calibri"/>
-              </a:rPr>
-              <a:t>portfolio-optimalisatie toe om verbanden te onderzoeken en een optimale portefeuille samen te stellen.</a:t>
+                <a:spcPct val="110000"/>
+              </a:lnSpc>
+              <a:spcAft>
+                <a:spcPts val="200"/>
+              </a:spcAft>
+            </a:pPr>
+            <a:r>
+              <a:rPr sz="4600" b="1">
+                <a:solidFill>
+                  <a:srgbClr val="FFFFFF"/>
+                </a:solidFill>
+                <a:latin typeface="Georgia"/>
+              </a:rPr>
+              <a:t>Werkplaats 2 — Eindpresentatie</a:t>
+            </a:r>
+          </a:p>
+        </p:txBody>
+      </p:sp>
+      <p:sp>
+        <p:nvSpPr>
+          <p:cNvPr id="5" name="TextBox 4"/>
+          <p:cNvSpPr txBox="1"/>
+          <p:nvPr/>
+        </p:nvSpPr>
+        <p:spPr>
+          <a:xfrm>
+            <a:off x="868680" y="4114800"/>
+            <a:ext cx="10515600" cy="914400"/>
+          </a:xfrm>
+          <a:prstGeom prst="rect">
+            <a:avLst/>
+          </a:prstGeom>
+          <a:noFill/>
+        </p:spPr>
+        <p:txBody>
+          <a:bodyPr wrap="square" anchor="t" lIns="0" rIns="0" tIns="0" bIns="0">
+            <a:spAutoFit/>
+          </a:bodyPr>
+          <a:lstStyle/>
+          <a:p>
+            <a:pPr algn="l">
+              <a:lnSpc>
+                <a:spcPct val="120000"/>
+              </a:lnSpc>
+              <a:spcAft>
+                <a:spcPts val="200"/>
+              </a:spcAft>
+            </a:pPr>
+            <a:r>
+              <a:rPr sz="2000" b="0">
+                <a:solidFill>
+                  <a:srgbClr val="CADCFC"/>
+                </a:solidFill>
+                <a:latin typeface="Calibri"/>
+              </a:rPr>
+              <a:t>Groep 3  ·  Data-analyse van een beleggingsportfolio en macro-economische data</a:t>
             </a:r>
           </a:p>
         </p:txBody>
@@ -3847,7 +3762,7 @@
 </p:sld>
 </file>
 
-<file path=ppt/slides/slide3.xml><?xml version="1.0" encoding="utf-8"?>
+<file path=ppt/slides/slide12.xml><?xml version="1.0" encoding="utf-8"?>
 <p:sld xmlns:a="http://schemas.openxmlformats.org/drawingml/2006/main" xmlns:p="http://schemas.openxmlformats.org/presentationml/2006/main" xmlns:r="http://schemas.openxmlformats.org/officeDocument/2006/relationships">
   <p:cSld>
     <p:spTree>
@@ -3903,60 +3818,58 @@
       </p:sp>
       <p:sp>
         <p:nvSpPr>
-          <p:cNvPr id="3" name="Rectangle 2"/>
+          <p:cNvPr id="3" name="TextBox 2"/>
+          <p:cNvSpPr txBox="1"/>
+          <p:nvPr/>
+        </p:nvSpPr>
+        <p:spPr>
+          <a:xfrm>
+            <a:off x="822960" y="502920"/>
+            <a:ext cx="10607040" cy="914400"/>
+          </a:xfrm>
+          <a:prstGeom prst="rect">
+            <a:avLst/>
+          </a:prstGeom>
+          <a:noFill/>
+        </p:spPr>
+        <p:txBody>
+          <a:bodyPr wrap="square" anchor="ctr" lIns="0" rIns="0" tIns="0" bIns="0">
+            <a:spAutoFit/>
+          </a:bodyPr>
+          <a:lstStyle/>
+          <a:p>
+            <a:pPr algn="l">
+              <a:lnSpc>
+                <a:spcPct val="110000"/>
+              </a:lnSpc>
+              <a:spcAft>
+                <a:spcPts val="200"/>
+              </a:spcAft>
+            </a:pPr>
+            <a:r>
+              <a:rPr sz="3400" b="1">
+                <a:solidFill>
+                  <a:srgbClr val="1E2761"/>
+                </a:solidFill>
+                <a:latin typeface="Georgia"/>
+              </a:rPr>
+              <a:t>Onze data &amp; aanpak</a:t>
+            </a:r>
+          </a:p>
+        </p:txBody>
+      </p:sp>
+      <p:sp>
+        <p:nvSpPr>
+          <p:cNvPr id="4" name="Rectangle 3"/>
           <p:cNvSpPr/>
           <p:nvPr/>
         </p:nvSpPr>
         <p:spPr>
           <a:xfrm>
-            <a:off x="0" y="0"/>
-            <a:ext cx="3931920" cy="6858000"/>
+            <a:off x="822960" y="1417320"/>
+            <a:ext cx="2194560" cy="54864"/>
           </a:xfrm>
           <a:prstGeom prst="rect">
-            <a:avLst/>
-          </a:prstGeom>
-          <a:solidFill>
-            <a:srgbClr val="1E2761"/>
-          </a:solidFill>
-          <a:ln>
-            <a:noFill/>
-          </a:ln>
-          <a:effectLst/>
-        </p:spPr>
-        <p:style>
-          <a:lnRef idx="1">
-            <a:schemeClr val="accent1"/>
-          </a:lnRef>
-          <a:fillRef idx="3">
-            <a:schemeClr val="accent1"/>
-          </a:fillRef>
-          <a:effectRef idx="2">
-            <a:schemeClr val="accent1"/>
-          </a:effectRef>
-          <a:fontRef idx="minor">
-            <a:schemeClr val="lt1"/>
-          </a:fontRef>
-        </p:style>
-        <p:txBody>
-          <a:bodyPr rtlCol="0" anchor="ctr"/>
-          <a:lstStyle/>
-          <a:p>
-            <a:pPr algn="ctr"/>
-          </a:p>
-        </p:txBody>
-      </p:sp>
-      <p:sp>
-        <p:nvSpPr>
-          <p:cNvPr id="4" name="Oval 3"/>
-          <p:cNvSpPr/>
-          <p:nvPr/>
-        </p:nvSpPr>
-        <p:spPr>
-          <a:xfrm>
-            <a:off x="548640" y="640080"/>
-            <a:ext cx="256032" cy="256032"/>
-          </a:xfrm>
-          <a:prstGeom prst="ellipse">
             <a:avLst/>
           </a:prstGeom>
           <a:solidFill>
@@ -3997,8 +3910,8 @@
         </p:nvSpPr>
         <p:spPr>
           <a:xfrm>
-            <a:off x="548640" y="1051560"/>
-            <a:ext cx="3017520" cy="548640"/>
+            <a:off x="822960" y="1828800"/>
+            <a:ext cx="10515600" cy="4389120"/>
           </a:xfrm>
           <a:prstGeom prst="rect">
             <a:avLst/>
@@ -4013,247 +3926,26 @@
           <a:p>
             <a:pPr algn="l">
               <a:lnSpc>
-                <a:spcPct val="110000"/>
-              </a:lnSpc>
-              <a:spcAft>
-                <a:spcPts val="200"/>
-              </a:spcAft>
-            </a:pPr>
-            <a:r>
-              <a:rPr sz="2000" b="1">
-                <a:solidFill>
-                  <a:srgbClr val="02C39A"/>
-                </a:solidFill>
-                <a:latin typeface="Calibri"/>
-              </a:rPr>
-              <a:t>Onderzoeksvraag 1</a:t>
-            </a:r>
-          </a:p>
-        </p:txBody>
-      </p:sp>
-      <p:sp>
-        <p:nvSpPr>
-          <p:cNvPr id="6" name="TextBox 5"/>
-          <p:cNvSpPr txBox="1"/>
-          <p:nvPr/>
-        </p:nvSpPr>
-        <p:spPr>
-          <a:xfrm>
-            <a:off x="548640" y="1920240"/>
-            <a:ext cx="3108960" cy="4389120"/>
-          </a:xfrm>
-          <a:prstGeom prst="rect">
-            <a:avLst/>
-          </a:prstGeom>
-          <a:noFill/>
-        </p:spPr>
-        <p:txBody>
-          <a:bodyPr wrap="square" anchor="t" lIns="0" rIns="0" tIns="0" bIns="0">
-            <a:spAutoFit/>
-          </a:bodyPr>
-          <a:lstStyle/>
-          <a:p>
-            <a:pPr algn="l">
-              <a:lnSpc>
-                <a:spcPct val="140000"/>
-              </a:lnSpc>
-              <a:spcAft>
-                <a:spcPts val="200"/>
-              </a:spcAft>
-            </a:pPr>
-            <a:r>
-              <a:rPr sz="1500" b="1">
-                <a:solidFill>
-                  <a:srgbClr val="CADCFC"/>
-                </a:solidFill>
-                <a:latin typeface="Calibri"/>
-              </a:rPr>
-              <a:t>Stappen vooraf</a:t>
-            </a:r>
-          </a:p>
-          <a:p>
-            <a:pPr algn="l">
-              <a:lnSpc>
-                <a:spcPct val="140000"/>
-              </a:lnSpc>
-              <a:spcAft>
-                <a:spcPts val="200"/>
-              </a:spcAft>
-            </a:pPr>
-            <a:r>
-              <a:rPr sz="1400" b="0">
-                <a:solidFill>
-                  <a:srgbClr val="FFFFFF"/>
-                </a:solidFill>
-                <a:latin typeface="Calibri"/>
-              </a:rPr>
-              <a:t>1.  Relevante data geselecteerd</a:t>
-            </a:r>
-          </a:p>
-          <a:p>
-            <a:pPr algn="l">
-              <a:lnSpc>
-                <a:spcPct val="140000"/>
-              </a:lnSpc>
-              <a:spcAft>
-                <a:spcPts val="200"/>
-              </a:spcAft>
-            </a:pPr>
-            <a:r>
-              <a:rPr sz="1400" b="0">
-                <a:solidFill>
-                  <a:srgbClr val="FFFFFF"/>
-                </a:solidFill>
-                <a:latin typeface="Calibri"/>
-              </a:rPr>
-              <a:t>2.  Correlatie-heatmap gemaakt</a:t>
-            </a:r>
-          </a:p>
-          <a:p>
-            <a:pPr algn="l">
-              <a:lnSpc>
-                <a:spcPct val="140000"/>
-              </a:lnSpc>
-              <a:spcAft>
-                <a:spcPts val="200"/>
-              </a:spcAft>
-            </a:pPr>
-            <a:r>
-              <a:rPr sz="1400" b="0">
-                <a:solidFill>
-                  <a:srgbClr val="FFFFFF"/>
-                </a:solidFill>
-                <a:latin typeface="Calibri"/>
-              </a:rPr>
-              <a:t>3.  Bubble chart (GDP x Income x Coffee)</a:t>
-            </a:r>
-          </a:p>
-          <a:p>
-            <a:pPr algn="l">
-              <a:lnSpc>
-                <a:spcPct val="140000"/>
-              </a:lnSpc>
-              <a:spcAft>
-                <a:spcPts val="200"/>
-              </a:spcAft>
-            </a:pPr>
-            <a:r>
-              <a:rPr sz="1400" b="0">
-                <a:solidFill>
-                  <a:srgbClr val="FFFFFF"/>
-                </a:solidFill>
-                <a:latin typeface="Calibri"/>
-              </a:rPr>
-              <a:t>4.  Meervoudige regressie</a:t>
-            </a:r>
-          </a:p>
-        </p:txBody>
-      </p:sp>
-      <p:sp>
-        <p:nvSpPr>
-          <p:cNvPr id="7" name="TextBox 6"/>
-          <p:cNvSpPr txBox="1"/>
-          <p:nvPr/>
-        </p:nvSpPr>
-        <p:spPr>
-          <a:xfrm>
-            <a:off x="4480560" y="914400"/>
-            <a:ext cx="7132320" cy="1280160"/>
-          </a:xfrm>
-          <a:prstGeom prst="rect">
-            <a:avLst/>
-          </a:prstGeom>
-          <a:noFill/>
-        </p:spPr>
-        <p:txBody>
-          <a:bodyPr wrap="square" anchor="t" lIns="0" rIns="0" tIns="0" bIns="0">
-            <a:spAutoFit/>
-          </a:bodyPr>
-          <a:lstStyle/>
-          <a:p>
-            <a:pPr algn="l">
-              <a:lnSpc>
-                <a:spcPct val="115000"/>
-              </a:lnSpc>
-              <a:spcAft>
-                <a:spcPts val="200"/>
-              </a:spcAft>
-            </a:pPr>
-            <a:r>
-              <a:rPr sz="1300" b="1">
-                <a:solidFill>
-                  <a:srgbClr val="02C39A"/>
-                </a:solidFill>
-                <a:latin typeface="Calibri"/>
-              </a:rPr>
-              <a:t>VRAAG</a:t>
-            </a:r>
-          </a:p>
-          <a:p>
-            <a:pPr algn="l">
-              <a:lnSpc>
-                <a:spcPct val="115000"/>
-              </a:lnSpc>
-              <a:spcAft>
-                <a:spcPts val="200"/>
-              </a:spcAft>
-            </a:pPr>
-            <a:r>
-              <a:rPr sz="1900" b="0">
+                <a:spcPct val="150000"/>
+              </a:lnSpc>
+              <a:spcAft>
+                <a:spcPts val="200"/>
+              </a:spcAft>
+            </a:pPr>
+            <a:r>
+              <a:rPr sz="1800" b="0">
                 <a:solidFill>
                   <a:srgbClr val="21295C"/>
                 </a:solidFill>
                 <a:latin typeface="Calibri"/>
               </a:rPr>
-              <a:t>Wat is het verband tussen GDP, persoonlijk inkomen en de koffieprijs?</a:t>
-            </a:r>
-          </a:p>
-        </p:txBody>
-      </p:sp>
-      <p:sp>
-        <p:nvSpPr>
-          <p:cNvPr id="8" name="TextBox 7"/>
-          <p:cNvSpPr txBox="1"/>
-          <p:nvPr/>
-        </p:nvSpPr>
-        <p:spPr>
-          <a:xfrm>
-            <a:off x="4480560" y="2651760"/>
-            <a:ext cx="7132320" cy="1005840"/>
-          </a:xfrm>
-          <a:prstGeom prst="rect">
-            <a:avLst/>
-          </a:prstGeom>
-          <a:noFill/>
-        </p:spPr>
-        <p:txBody>
-          <a:bodyPr wrap="square" anchor="t" lIns="0" rIns="0" tIns="0" bIns="0">
-            <a:spAutoFit/>
-          </a:bodyPr>
-          <a:lstStyle/>
-          <a:p>
-            <a:pPr algn="l">
-              <a:lnSpc>
-                <a:spcPct val="115000"/>
-              </a:lnSpc>
-              <a:spcAft>
-                <a:spcPts val="200"/>
-              </a:spcAft>
-            </a:pPr>
-            <a:r>
-              <a:rPr sz="1300" b="1">
-                <a:solidFill>
-                  <a:srgbClr val="02C39A"/>
-                </a:solidFill>
-                <a:latin typeface="Calibri"/>
-              </a:rPr>
-              <a:t>RESULTAAT REGRESSIE</a:t>
-            </a:r>
-          </a:p>
-          <a:p>
-            <a:pPr algn="l">
-              <a:lnSpc>
-                <a:spcPct val="115000"/>
+              <a:t>We verzamelden 20 producten en indicatoren over de periode dec 2015 – mei 2026.</a:t>
+            </a:r>
+          </a:p>
+          <a:p>
+            <a:pPr algn="l">
+              <a:lnSpc>
+                <a:spcPct val="150000"/>
               </a:lnSpc>
               <a:spcAft>
                 <a:spcPts val="200"/>
@@ -4266,55 +3958,13 @@
                 </a:solidFill>
                 <a:latin typeface="Calibri"/>
               </a:rPr>
-              <a:t>GDP +0,0160   ·   Income -0,0064   ·   R² = 0,80   (p &lt; 0,05)</a:t>
-            </a:r>
-          </a:p>
-        </p:txBody>
-      </p:sp>
-      <p:sp>
-        <p:nvSpPr>
-          <p:cNvPr id="9" name="TextBox 8"/>
-          <p:cNvSpPr txBox="1"/>
-          <p:nvPr/>
-        </p:nvSpPr>
-        <p:spPr>
-          <a:xfrm>
-            <a:off x="4480560" y="3931920"/>
-            <a:ext cx="7132320" cy="2377440"/>
-          </a:xfrm>
-          <a:prstGeom prst="rect">
-            <a:avLst/>
-          </a:prstGeom>
-          <a:noFill/>
-        </p:spPr>
-        <p:txBody>
-          <a:bodyPr wrap="square" anchor="t" lIns="0" rIns="0" tIns="0" bIns="0">
-            <a:spAutoFit/>
-          </a:bodyPr>
-          <a:lstStyle/>
-          <a:p>
-            <a:pPr algn="l">
-              <a:lnSpc>
-                <a:spcPct val="125000"/>
-              </a:lnSpc>
-              <a:spcAft>
-                <a:spcPts val="200"/>
-              </a:spcAft>
-            </a:pPr>
-            <a:r>
-              <a:rPr sz="1300" b="1">
-                <a:solidFill>
-                  <a:srgbClr val="02C39A"/>
-                </a:solidFill>
-                <a:latin typeface="Calibri"/>
-              </a:rPr>
-              <a:t>CONCLUSIE</a:t>
-            </a:r>
-          </a:p>
-          <a:p>
-            <a:pPr algn="l">
-              <a:lnSpc>
-                <a:spcPct val="125000"/>
+              <a:t>•  Aandelen, crypto en obligaties via Yahoo Finance (Apple, ASML, Broadcom, Shell, Bitcoin).</a:t>
+            </a:r>
+          </a:p>
+          <a:p>
+            <a:pPr algn="l">
+              <a:lnSpc>
+                <a:spcPct val="150000"/>
               </a:lnSpc>
               <a:spcAft>
                 <a:spcPts val="200"/>
@@ -4327,13 +3977,13 @@
                 </a:solidFill>
                 <a:latin typeface="Calibri"/>
               </a:rPr>
-              <a:t>Significant en matige correlatie.</a:t>
-            </a:r>
-          </a:p>
-          <a:p>
-            <a:pPr algn="l">
-              <a:lnSpc>
-                <a:spcPct val="125000"/>
+              <a:t>•  Grondstoffen via Yahoo Finance en FRED (goud, olie, koper, graan, koffie, gas).</a:t>
+            </a:r>
+          </a:p>
+          <a:p>
+            <a:pPr algn="l">
+              <a:lnSpc>
+                <a:spcPct val="150000"/>
               </a:lnSpc>
               <a:spcAft>
                 <a:spcPts val="200"/>
@@ -4346,13 +3996,13 @@
                 </a:solidFill>
                 <a:latin typeface="Calibri"/>
               </a:rPr>
-              <a:t>Door onderlinge samenhang van de X-variabelen is geen</a:t>
-            </a:r>
-          </a:p>
-          <a:p>
-            <a:pPr algn="l">
-              <a:lnSpc>
-                <a:spcPct val="125000"/>
+              <a:t>•  Macro-economische indicatoren via de FED St. Louis (GDP, inkomen, inflatie, rente, werkloosheid).</a:t>
+            </a:r>
+          </a:p>
+          <a:p>
+            <a:pPr algn="l">
+              <a:lnSpc>
+                <a:spcPct val="150000"/>
               </a:lnSpc>
               <a:spcAft>
                 <a:spcPts val="200"/>
@@ -4365,7 +4015,26 @@
                 </a:solidFill>
                 <a:latin typeface="Calibri"/>
               </a:rPr>
-              <a:t>zuivere oorzaak-gevolg-conclusie te trekken.</a:t>
+              <a:t>Hierop pasten we regressie, tijdreeksanalyse, sentimentanalyse, machine learning en</a:t>
+            </a:r>
+          </a:p>
+          <a:p>
+            <a:pPr algn="l">
+              <a:lnSpc>
+                <a:spcPct val="150000"/>
+              </a:lnSpc>
+              <a:spcAft>
+                <a:spcPts val="200"/>
+              </a:spcAft>
+            </a:pPr>
+            <a:r>
+              <a:rPr sz="1600" b="0">
+                <a:solidFill>
+                  <a:srgbClr val="21295C"/>
+                </a:solidFill>
+                <a:latin typeface="Calibri"/>
+              </a:rPr>
+              <a:t>portfolio-optimalisatie toe om verbanden te onderzoeken en een optimale portefeuille samen te stellen.</a:t>
             </a:r>
           </a:p>
         </p:txBody>
@@ -4378,7 +4047,7 @@
 </p:sld>
 </file>
 
-<file path=ppt/slides/slide4.xml><?xml version="1.0" encoding="utf-8"?>
+<file path=ppt/slides/slide13.xml><?xml version="1.0" encoding="utf-8"?>
 <p:sld xmlns:a="http://schemas.openxmlformats.org/drawingml/2006/main" xmlns:p="http://schemas.openxmlformats.org/presentationml/2006/main" xmlns:r="http://schemas.openxmlformats.org/officeDocument/2006/relationships">
   <p:cSld>
     <p:spTree>
@@ -4557,7 +4226,7 @@
                 </a:solidFill>
                 <a:latin typeface="Calibri"/>
               </a:rPr>
-              <a:t>Onderzoeksvraag 2</a:t>
+              <a:t>Onderzoeksvraag 1</a:t>
             </a:r>
           </a:p>
         </p:txBody>
@@ -4618,7 +4287,7 @@
                 </a:solidFill>
                 <a:latin typeface="Calibri"/>
               </a:rPr>
-              <a:t>1.  Data geselecteerd</a:t>
+              <a:t>1.  Relevante data geselecteerd</a:t>
             </a:r>
           </a:p>
           <a:p>
@@ -4637,7 +4306,7 @@
                 </a:solidFill>
                 <a:latin typeface="Calibri"/>
               </a:rPr>
-              <a:t>2.  Heatmap bekeken</a:t>
+              <a:t>2.  Correlatie-heatmap gemaakt</a:t>
             </a:r>
           </a:p>
           <a:p>
@@ -4656,7 +4325,7 @@
                 </a:solidFill>
                 <a:latin typeface="Calibri"/>
               </a:rPr>
-              <a:t>3.  Bubble chart (Broadcom x Coffee)</a:t>
+              <a:t>3.  Bubble chart (GDP x Income x Coffee)</a:t>
             </a:r>
           </a:p>
           <a:p>
@@ -4675,7 +4344,7 @@
                 </a:solidFill>
                 <a:latin typeface="Calibri"/>
               </a:rPr>
-              <a:t>4.  Enkelvoudige regressie</a:t>
+              <a:t>4.  Meervoudige regressie</a:t>
             </a:r>
           </a:p>
         </p:txBody>
@@ -4736,7 +4405,7 @@
                 </a:solidFill>
                 <a:latin typeface="Calibri"/>
               </a:rPr>
-              <a:t>Wat is het verband van Broadcom op de koffieprijs?</a:t>
+              <a:t>Wat is het verband tussen GDP, persoonlijk inkomen en de koffieprijs?</a:t>
             </a:r>
           </a:p>
         </p:txBody>
@@ -4797,7 +4466,7 @@
                 </a:solidFill>
                 <a:latin typeface="Calibri"/>
               </a:rPr>
-              <a:t>Broadcom +0,5205   ·   R² = 0,94   (p &lt; 0,05)</a:t>
+              <a:t>GDP +0,0160   ·   Income -0,0064   ·   R² = 0,80   (p &lt; 0,05)</a:t>
             </a:r>
           </a:p>
         </p:txBody>
@@ -4858,7 +4527,7 @@
                 </a:solidFill>
                 <a:latin typeface="Calibri"/>
               </a:rPr>
-              <a:t>Statistisch sterk verband, maar inhoudelijk niet logisch.</a:t>
+              <a:t>Significant en matige correlatie.</a:t>
             </a:r>
           </a:p>
           <a:p>
@@ -4877,7 +4546,7 @@
                 </a:solidFill>
                 <a:latin typeface="Calibri"/>
               </a:rPr>
-              <a:t>Waarschijnlijk schijncorrelatie: beide stijgen over de tijd.</a:t>
+              <a:t>Door onderlinge samenhang van de X-variabelen is geen</a:t>
             </a:r>
           </a:p>
           <a:p>
@@ -4896,7 +4565,7 @@
                 </a:solidFill>
                 <a:latin typeface="Calibri"/>
               </a:rPr>
-              <a:t>Geen betekenisvolle conclusie.</a:t>
+              <a:t>zuivere oorzaak-gevolg-conclusie te trekken.</a:t>
             </a:r>
           </a:p>
         </p:txBody>
@@ -4909,7 +4578,7 @@
 </p:sld>
 </file>
 
-<file path=ppt/slides/slide5.xml><?xml version="1.0" encoding="utf-8"?>
+<file path=ppt/slides/slide14.xml><?xml version="1.0" encoding="utf-8"?>
 <p:sld xmlns:a="http://schemas.openxmlformats.org/drawingml/2006/main" xmlns:p="http://schemas.openxmlformats.org/presentationml/2006/main" xmlns:r="http://schemas.openxmlformats.org/officeDocument/2006/relationships">
   <p:cSld>
     <p:spTree>
@@ -5088,7 +4757,7 @@
                 </a:solidFill>
                 <a:latin typeface="Calibri"/>
               </a:rPr>
-              <a:t>Onderzoeksvraag 3</a:t>
+              <a:t>Onderzoeksvraag 2</a:t>
             </a:r>
           </a:p>
         </p:txBody>
@@ -5187,7 +4856,7 @@
                 </a:solidFill>
                 <a:latin typeface="Calibri"/>
               </a:rPr>
-              <a:t>3.  Bubble chart (Copper x ASML)</a:t>
+              <a:t>3.  Bubble chart (Broadcom x Coffee)</a:t>
             </a:r>
           </a:p>
           <a:p>
@@ -5267,7 +4936,7 @@
                 </a:solidFill>
                 <a:latin typeface="Calibri"/>
               </a:rPr>
-              <a:t>Hoeveel invloed heeft de koperprijs op de koers van ASML?</a:t>
+              <a:t>Wat is het verband van Broadcom op de koffieprijs?</a:t>
             </a:r>
           </a:p>
         </p:txBody>
@@ -5328,7 +4997,7 @@
                 </a:solidFill>
                 <a:latin typeface="Calibri"/>
               </a:rPr>
-              <a:t>Copper +0,1560   ·   R² = 0,87   (p &lt; 0,05)</a:t>
+              <a:t>Broadcom +0,5205   ·   R² = 0,94   (p &lt; 0,05)</a:t>
             </a:r>
           </a:p>
         </p:txBody>
@@ -5389,7 +5058,7 @@
                 </a:solidFill>
                 <a:latin typeface="Calibri"/>
               </a:rPr>
-              <a:t>Significant en sterke correlatie.</a:t>
+              <a:t>Statistisch sterk verband, maar inhoudelijk niet logisch.</a:t>
             </a:r>
           </a:p>
           <a:p>
@@ -5408,7 +5077,7 @@
                 </a:solidFill>
                 <a:latin typeface="Calibri"/>
               </a:rPr>
-              <a:t>Logisch: meer vraag naar chips -&gt; ASML stijgt,</a:t>
+              <a:t>Waarschijnlijk schijncorrelatie: beide stijgen over de tijd.</a:t>
             </a:r>
           </a:p>
           <a:p>
@@ -5427,7 +5096,7 @@
                 </a:solidFill>
                 <a:latin typeface="Calibri"/>
               </a:rPr>
-              <a:t>en chips gebruiken veel koper -&gt; koperprijs stijgt mee.</a:t>
+              <a:t>Geen betekenisvolle conclusie.</a:t>
             </a:r>
           </a:p>
         </p:txBody>
@@ -5440,7 +5109,7 @@
 </p:sld>
 </file>
 
-<file path=ppt/slides/slide6.xml><?xml version="1.0" encoding="utf-8"?>
+<file path=ppt/slides/slide15.xml><?xml version="1.0" encoding="utf-8"?>
 <p:sld xmlns:a="http://schemas.openxmlformats.org/drawingml/2006/main" xmlns:p="http://schemas.openxmlformats.org/presentationml/2006/main" xmlns:r="http://schemas.openxmlformats.org/officeDocument/2006/relationships">
   <p:cSld>
     <p:spTree>
@@ -5619,7 +5288,7 @@
                 </a:solidFill>
                 <a:latin typeface="Calibri"/>
               </a:rPr>
-              <a:t>Onderzoeksvraag 4</a:t>
+              <a:t>Onderzoeksvraag 3</a:t>
             </a:r>
           </a:p>
         </p:txBody>
@@ -5718,7 +5387,7 @@
                 </a:solidFill>
                 <a:latin typeface="Calibri"/>
               </a:rPr>
-              <a:t>3.  Bubble chart (Gasoline x Oil x Shell)</a:t>
+              <a:t>3.  Bubble chart (Copper x ASML)</a:t>
             </a:r>
           </a:p>
           <a:p>
@@ -5737,7 +5406,7 @@
                 </a:solidFill>
                 <a:latin typeface="Calibri"/>
               </a:rPr>
-              <a:t>4.  Meervoudige regressie</a:t>
+              <a:t>4.  Enkelvoudige regressie</a:t>
             </a:r>
           </a:p>
         </p:txBody>
@@ -5798,7 +5467,7 @@
                 </a:solidFill>
                 <a:latin typeface="Calibri"/>
               </a:rPr>
-              <a:t>Waarom lijkt er minder verband tussen benzine, olie en de koers van Shell?</a:t>
+              <a:t>Hoeveel invloed heeft de koperprijs op de koers van ASML?</a:t>
             </a:r>
           </a:p>
         </p:txBody>
@@ -5859,7 +5528,7 @@
                 </a:solidFill>
                 <a:latin typeface="Calibri"/>
               </a:rPr>
-              <a:t>Gasoline +11,6507   ·   Oil +0,0891   ·   R² = 0,36   (p &lt; 0,05)</a:t>
+              <a:t>Copper +0,1560   ·   R² = 0,87   (p &lt; 0,05)</a:t>
             </a:r>
           </a:p>
         </p:txBody>
@@ -5920,7 +5589,7 @@
                 </a:solidFill>
                 <a:latin typeface="Calibri"/>
               </a:rPr>
-              <a:t>Significant maar slechts matige correlatie.</a:t>
+              <a:t>Significant en sterke correlatie.</a:t>
             </a:r>
           </a:p>
           <a:p>
@@ -5939,7 +5608,7 @@
                 </a:solidFill>
                 <a:latin typeface="Calibri"/>
               </a:rPr>
-              <a:t>Shell reageert niet op de actuele, maar op de verwachte</a:t>
+              <a:t>Logisch: meer vraag naar chips -&gt; ASML stijgt,</a:t>
             </a:r>
           </a:p>
           <a:p>
@@ -5958,7 +5627,7 @@
                 </a:solidFill>
                 <a:latin typeface="Calibri"/>
               </a:rPr>
-              <a:t>langetermijnprijs -&gt; onderzocht met timeshift.</a:t>
+              <a:t>en chips gebruiken veel koper -&gt; koperprijs stijgt mee.</a:t>
             </a:r>
           </a:p>
         </p:txBody>
@@ -5971,7 +5640,7 @@
 </p:sld>
 </file>
 
-<file path=ppt/slides/slide7.xml><?xml version="1.0" encoding="utf-8"?>
+<file path=ppt/slides/slide16.xml><?xml version="1.0" encoding="utf-8"?>
 <p:sld xmlns:a="http://schemas.openxmlformats.org/drawingml/2006/main" xmlns:p="http://schemas.openxmlformats.org/presentationml/2006/main" xmlns:r="http://schemas.openxmlformats.org/officeDocument/2006/relationships">
   <p:cSld>
     <p:spTree>
@@ -6150,7 +5819,7 @@
                 </a:solidFill>
                 <a:latin typeface="Calibri"/>
               </a:rPr>
-              <a:t>Onderzoeksvraag 5</a:t>
+              <a:t>Onderzoeksvraag 4</a:t>
             </a:r>
           </a:p>
         </p:txBody>
@@ -6249,7 +5918,7 @@
                 </a:solidFill>
                 <a:latin typeface="Calibri"/>
               </a:rPr>
-              <a:t>3.  Bubble chart (4 variabelen)</a:t>
+              <a:t>3.  Bubble chart (Gasoline x Oil x Shell)</a:t>
             </a:r>
           </a:p>
           <a:p>
@@ -6268,7 +5937,7 @@
                 </a:solidFill>
                 <a:latin typeface="Calibri"/>
               </a:rPr>
-              <a:t>4.  Regressie + neuraal netwerk</a:t>
+              <a:t>4.  Meervoudige regressie</a:t>
             </a:r>
           </a:p>
         </p:txBody>
@@ -6329,7 +5998,7 @@
                 </a:solidFill>
                 <a:latin typeface="Calibri"/>
               </a:rPr>
-              <a:t>Wat is het verband tussen koffie, koper, goud en de koers van Apple?</a:t>
+              <a:t>Waarom lijkt er minder verband tussen benzine, olie en de koers van Shell?</a:t>
             </a:r>
           </a:p>
         </p:txBody>
@@ -6390,7 +6059,7 @@
                 </a:solidFill>
                 <a:latin typeface="Calibri"/>
               </a:rPr>
-              <a:t>Coffee +0,7351  ·  Copper +0,0236  ·  Gold -0,0097  ·  R² = 0,88</a:t>
+              <a:t>Gasoline +11,6507   ·   Oil +0,0891   ·   R² = 0,36   (p &lt; 0,05)</a:t>
             </a:r>
           </a:p>
         </p:txBody>
@@ -6451,7 +6120,7 @@
                 </a:solidFill>
                 <a:latin typeface="Calibri"/>
               </a:rPr>
-              <a:t>Significant en sterke correlatie.</a:t>
+              <a:t>Significant maar slechts matige correlatie.</a:t>
             </a:r>
           </a:p>
           <a:p>
@@ -6470,7 +6139,7 @@
                 </a:solidFill>
                 <a:latin typeface="Calibri"/>
               </a:rPr>
-              <a:t>Hoogconjunctuur drijft Apple en koper omhoog;</a:t>
+              <a:t>Shell reageert niet op de actuele, maar op de verwachte</a:t>
             </a:r>
           </a:p>
           <a:p>
@@ -6489,7 +6158,7 @@
                 </a:solidFill>
                 <a:latin typeface="Calibri"/>
               </a:rPr>
-              <a:t>goud reageert juist zwakker (veilige haven).</a:t>
+              <a:t>langetermijnprijs -&gt; onderzocht met timeshift.</a:t>
             </a:r>
           </a:p>
         </p:txBody>
@@ -6502,7 +6171,538 @@
 </p:sld>
 </file>
 
-<file path=ppt/slides/slide8.xml><?xml version="1.0" encoding="utf-8"?>
+<file path=ppt/slides/slide17.xml><?xml version="1.0" encoding="utf-8"?>
+<p:sld xmlns:a="http://schemas.openxmlformats.org/drawingml/2006/main" xmlns:p="http://schemas.openxmlformats.org/presentationml/2006/main" xmlns:r="http://schemas.openxmlformats.org/officeDocument/2006/relationships">
+  <p:cSld>
+    <p:spTree>
+      <p:nvGrpSpPr>
+        <p:cNvPr id="1" name=""/>
+        <p:cNvGrpSpPr/>
+        <p:nvPr/>
+      </p:nvGrpSpPr>
+      <p:grpSpPr/>
+      <p:sp>
+        <p:nvSpPr>
+          <p:cNvPr id="2" name="Rectangle 1"/>
+          <p:cNvSpPr/>
+          <p:nvPr/>
+        </p:nvSpPr>
+        <p:spPr>
+          <a:xfrm>
+            <a:off x="0" y="0"/>
+            <a:ext cx="12191695" cy="6858000"/>
+          </a:xfrm>
+          <a:prstGeom prst="rect">
+            <a:avLst/>
+          </a:prstGeom>
+          <a:solidFill>
+            <a:srgbClr val="FFFFFF"/>
+          </a:solidFill>
+          <a:ln>
+            <a:noFill/>
+          </a:ln>
+          <a:effectLst/>
+        </p:spPr>
+        <p:style>
+          <a:lnRef idx="1">
+            <a:schemeClr val="accent1"/>
+          </a:lnRef>
+          <a:fillRef idx="3">
+            <a:schemeClr val="accent1"/>
+          </a:fillRef>
+          <a:effectRef idx="2">
+            <a:schemeClr val="accent1"/>
+          </a:effectRef>
+          <a:fontRef idx="minor">
+            <a:schemeClr val="lt1"/>
+          </a:fontRef>
+        </p:style>
+        <p:txBody>
+          <a:bodyPr rtlCol="0" anchor="ctr"/>
+          <a:lstStyle/>
+          <a:p>
+            <a:pPr algn="ctr"/>
+          </a:p>
+        </p:txBody>
+      </p:sp>
+      <p:sp>
+        <p:nvSpPr>
+          <p:cNvPr id="3" name="Rectangle 2"/>
+          <p:cNvSpPr/>
+          <p:nvPr/>
+        </p:nvSpPr>
+        <p:spPr>
+          <a:xfrm>
+            <a:off x="0" y="0"/>
+            <a:ext cx="3931920" cy="6858000"/>
+          </a:xfrm>
+          <a:prstGeom prst="rect">
+            <a:avLst/>
+          </a:prstGeom>
+          <a:solidFill>
+            <a:srgbClr val="1E2761"/>
+          </a:solidFill>
+          <a:ln>
+            <a:noFill/>
+          </a:ln>
+          <a:effectLst/>
+        </p:spPr>
+        <p:style>
+          <a:lnRef idx="1">
+            <a:schemeClr val="accent1"/>
+          </a:lnRef>
+          <a:fillRef idx="3">
+            <a:schemeClr val="accent1"/>
+          </a:fillRef>
+          <a:effectRef idx="2">
+            <a:schemeClr val="accent1"/>
+          </a:effectRef>
+          <a:fontRef idx="minor">
+            <a:schemeClr val="lt1"/>
+          </a:fontRef>
+        </p:style>
+        <p:txBody>
+          <a:bodyPr rtlCol="0" anchor="ctr"/>
+          <a:lstStyle/>
+          <a:p>
+            <a:pPr algn="ctr"/>
+          </a:p>
+        </p:txBody>
+      </p:sp>
+      <p:sp>
+        <p:nvSpPr>
+          <p:cNvPr id="4" name="Oval 3"/>
+          <p:cNvSpPr/>
+          <p:nvPr/>
+        </p:nvSpPr>
+        <p:spPr>
+          <a:xfrm>
+            <a:off x="548640" y="640080"/>
+            <a:ext cx="256032" cy="256032"/>
+          </a:xfrm>
+          <a:prstGeom prst="ellipse">
+            <a:avLst/>
+          </a:prstGeom>
+          <a:solidFill>
+            <a:srgbClr val="02C39A"/>
+          </a:solidFill>
+          <a:ln>
+            <a:noFill/>
+          </a:ln>
+          <a:effectLst/>
+        </p:spPr>
+        <p:style>
+          <a:lnRef idx="1">
+            <a:schemeClr val="accent1"/>
+          </a:lnRef>
+          <a:fillRef idx="3">
+            <a:schemeClr val="accent1"/>
+          </a:fillRef>
+          <a:effectRef idx="2">
+            <a:schemeClr val="accent1"/>
+          </a:effectRef>
+          <a:fontRef idx="minor">
+            <a:schemeClr val="lt1"/>
+          </a:fontRef>
+        </p:style>
+        <p:txBody>
+          <a:bodyPr rtlCol="0" anchor="ctr"/>
+          <a:lstStyle/>
+          <a:p>
+            <a:pPr algn="ctr"/>
+          </a:p>
+        </p:txBody>
+      </p:sp>
+      <p:sp>
+        <p:nvSpPr>
+          <p:cNvPr id="5" name="TextBox 4"/>
+          <p:cNvSpPr txBox="1"/>
+          <p:nvPr/>
+        </p:nvSpPr>
+        <p:spPr>
+          <a:xfrm>
+            <a:off x="548640" y="1051560"/>
+            <a:ext cx="3017520" cy="548640"/>
+          </a:xfrm>
+          <a:prstGeom prst="rect">
+            <a:avLst/>
+          </a:prstGeom>
+          <a:noFill/>
+        </p:spPr>
+        <p:txBody>
+          <a:bodyPr wrap="square" anchor="t" lIns="0" rIns="0" tIns="0" bIns="0">
+            <a:spAutoFit/>
+          </a:bodyPr>
+          <a:lstStyle/>
+          <a:p>
+            <a:pPr algn="l">
+              <a:lnSpc>
+                <a:spcPct val="110000"/>
+              </a:lnSpc>
+              <a:spcAft>
+                <a:spcPts val="200"/>
+              </a:spcAft>
+            </a:pPr>
+            <a:r>
+              <a:rPr sz="2000" b="1">
+                <a:solidFill>
+                  <a:srgbClr val="02C39A"/>
+                </a:solidFill>
+                <a:latin typeface="Calibri"/>
+              </a:rPr>
+              <a:t>Onderzoeksvraag 5</a:t>
+            </a:r>
+          </a:p>
+        </p:txBody>
+      </p:sp>
+      <p:sp>
+        <p:nvSpPr>
+          <p:cNvPr id="6" name="TextBox 5"/>
+          <p:cNvSpPr txBox="1"/>
+          <p:nvPr/>
+        </p:nvSpPr>
+        <p:spPr>
+          <a:xfrm>
+            <a:off x="548640" y="1920240"/>
+            <a:ext cx="3108960" cy="4389120"/>
+          </a:xfrm>
+          <a:prstGeom prst="rect">
+            <a:avLst/>
+          </a:prstGeom>
+          <a:noFill/>
+        </p:spPr>
+        <p:txBody>
+          <a:bodyPr wrap="square" anchor="t" lIns="0" rIns="0" tIns="0" bIns="0">
+            <a:spAutoFit/>
+          </a:bodyPr>
+          <a:lstStyle/>
+          <a:p>
+            <a:pPr algn="l">
+              <a:lnSpc>
+                <a:spcPct val="140000"/>
+              </a:lnSpc>
+              <a:spcAft>
+                <a:spcPts val="200"/>
+              </a:spcAft>
+            </a:pPr>
+            <a:r>
+              <a:rPr sz="1500" b="1">
+                <a:solidFill>
+                  <a:srgbClr val="CADCFC"/>
+                </a:solidFill>
+                <a:latin typeface="Calibri"/>
+              </a:rPr>
+              <a:t>Stappen vooraf</a:t>
+            </a:r>
+          </a:p>
+          <a:p>
+            <a:pPr algn="l">
+              <a:lnSpc>
+                <a:spcPct val="140000"/>
+              </a:lnSpc>
+              <a:spcAft>
+                <a:spcPts val="200"/>
+              </a:spcAft>
+            </a:pPr>
+            <a:r>
+              <a:rPr sz="1400" b="0">
+                <a:solidFill>
+                  <a:srgbClr val="FFFFFF"/>
+                </a:solidFill>
+                <a:latin typeface="Calibri"/>
+              </a:rPr>
+              <a:t>1.  Data geselecteerd</a:t>
+            </a:r>
+          </a:p>
+          <a:p>
+            <a:pPr algn="l">
+              <a:lnSpc>
+                <a:spcPct val="140000"/>
+              </a:lnSpc>
+              <a:spcAft>
+                <a:spcPts val="200"/>
+              </a:spcAft>
+            </a:pPr>
+            <a:r>
+              <a:rPr sz="1400" b="0">
+                <a:solidFill>
+                  <a:srgbClr val="FFFFFF"/>
+                </a:solidFill>
+                <a:latin typeface="Calibri"/>
+              </a:rPr>
+              <a:t>2.  Heatmap bekeken</a:t>
+            </a:r>
+          </a:p>
+          <a:p>
+            <a:pPr algn="l">
+              <a:lnSpc>
+                <a:spcPct val="140000"/>
+              </a:lnSpc>
+              <a:spcAft>
+                <a:spcPts val="200"/>
+              </a:spcAft>
+            </a:pPr>
+            <a:r>
+              <a:rPr sz="1400" b="0">
+                <a:solidFill>
+                  <a:srgbClr val="FFFFFF"/>
+                </a:solidFill>
+                <a:latin typeface="Calibri"/>
+              </a:rPr>
+              <a:t>3.  Bubble chart (4 variabelen)</a:t>
+            </a:r>
+          </a:p>
+          <a:p>
+            <a:pPr algn="l">
+              <a:lnSpc>
+                <a:spcPct val="140000"/>
+              </a:lnSpc>
+              <a:spcAft>
+                <a:spcPts val="200"/>
+              </a:spcAft>
+            </a:pPr>
+            <a:r>
+              <a:rPr sz="1400" b="0">
+                <a:solidFill>
+                  <a:srgbClr val="FFFFFF"/>
+                </a:solidFill>
+                <a:latin typeface="Calibri"/>
+              </a:rPr>
+              <a:t>4.  Regressie + neuraal netwerk</a:t>
+            </a:r>
+          </a:p>
+        </p:txBody>
+      </p:sp>
+      <p:sp>
+        <p:nvSpPr>
+          <p:cNvPr id="7" name="TextBox 6"/>
+          <p:cNvSpPr txBox="1"/>
+          <p:nvPr/>
+        </p:nvSpPr>
+        <p:spPr>
+          <a:xfrm>
+            <a:off x="4480560" y="914400"/>
+            <a:ext cx="7132320" cy="1280160"/>
+          </a:xfrm>
+          <a:prstGeom prst="rect">
+            <a:avLst/>
+          </a:prstGeom>
+          <a:noFill/>
+        </p:spPr>
+        <p:txBody>
+          <a:bodyPr wrap="square" anchor="t" lIns="0" rIns="0" tIns="0" bIns="0">
+            <a:spAutoFit/>
+          </a:bodyPr>
+          <a:lstStyle/>
+          <a:p>
+            <a:pPr algn="l">
+              <a:lnSpc>
+                <a:spcPct val="115000"/>
+              </a:lnSpc>
+              <a:spcAft>
+                <a:spcPts val="200"/>
+              </a:spcAft>
+            </a:pPr>
+            <a:r>
+              <a:rPr sz="1300" b="1">
+                <a:solidFill>
+                  <a:srgbClr val="02C39A"/>
+                </a:solidFill>
+                <a:latin typeface="Calibri"/>
+              </a:rPr>
+              <a:t>VRAAG</a:t>
+            </a:r>
+          </a:p>
+          <a:p>
+            <a:pPr algn="l">
+              <a:lnSpc>
+                <a:spcPct val="115000"/>
+              </a:lnSpc>
+              <a:spcAft>
+                <a:spcPts val="200"/>
+              </a:spcAft>
+            </a:pPr>
+            <a:r>
+              <a:rPr sz="1900" b="0">
+                <a:solidFill>
+                  <a:srgbClr val="21295C"/>
+                </a:solidFill>
+                <a:latin typeface="Calibri"/>
+              </a:rPr>
+              <a:t>Wat is het verband tussen koffie, koper, goud en de koers van Apple?</a:t>
+            </a:r>
+          </a:p>
+        </p:txBody>
+      </p:sp>
+      <p:sp>
+        <p:nvSpPr>
+          <p:cNvPr id="8" name="TextBox 7"/>
+          <p:cNvSpPr txBox="1"/>
+          <p:nvPr/>
+        </p:nvSpPr>
+        <p:spPr>
+          <a:xfrm>
+            <a:off x="4480560" y="2651760"/>
+            <a:ext cx="7132320" cy="1005840"/>
+          </a:xfrm>
+          <a:prstGeom prst="rect">
+            <a:avLst/>
+          </a:prstGeom>
+          <a:noFill/>
+        </p:spPr>
+        <p:txBody>
+          <a:bodyPr wrap="square" anchor="t" lIns="0" rIns="0" tIns="0" bIns="0">
+            <a:spAutoFit/>
+          </a:bodyPr>
+          <a:lstStyle/>
+          <a:p>
+            <a:pPr algn="l">
+              <a:lnSpc>
+                <a:spcPct val="115000"/>
+              </a:lnSpc>
+              <a:spcAft>
+                <a:spcPts val="200"/>
+              </a:spcAft>
+            </a:pPr>
+            <a:r>
+              <a:rPr sz="1300" b="1">
+                <a:solidFill>
+                  <a:srgbClr val="02C39A"/>
+                </a:solidFill>
+                <a:latin typeface="Calibri"/>
+              </a:rPr>
+              <a:t>RESULTAAT REGRESSIE</a:t>
+            </a:r>
+          </a:p>
+          <a:p>
+            <a:pPr algn="l">
+              <a:lnSpc>
+                <a:spcPct val="115000"/>
+              </a:lnSpc>
+              <a:spcAft>
+                <a:spcPts val="200"/>
+              </a:spcAft>
+            </a:pPr>
+            <a:r>
+              <a:rPr sz="1600" b="0">
+                <a:solidFill>
+                  <a:srgbClr val="21295C"/>
+                </a:solidFill>
+                <a:latin typeface="Calibri"/>
+              </a:rPr>
+              <a:t>Coffee +0,7351  ·  Copper +0,0236  ·  Gold -0,0097  ·  R² = 0,88</a:t>
+            </a:r>
+          </a:p>
+        </p:txBody>
+      </p:sp>
+      <p:sp>
+        <p:nvSpPr>
+          <p:cNvPr id="9" name="TextBox 8"/>
+          <p:cNvSpPr txBox="1"/>
+          <p:nvPr/>
+        </p:nvSpPr>
+        <p:spPr>
+          <a:xfrm>
+            <a:off x="4480560" y="3931920"/>
+            <a:ext cx="7132320" cy="2377440"/>
+          </a:xfrm>
+          <a:prstGeom prst="rect">
+            <a:avLst/>
+          </a:prstGeom>
+          <a:noFill/>
+        </p:spPr>
+        <p:txBody>
+          <a:bodyPr wrap="square" anchor="t" lIns="0" rIns="0" tIns="0" bIns="0">
+            <a:spAutoFit/>
+          </a:bodyPr>
+          <a:lstStyle/>
+          <a:p>
+            <a:pPr algn="l">
+              <a:lnSpc>
+                <a:spcPct val="125000"/>
+              </a:lnSpc>
+              <a:spcAft>
+                <a:spcPts val="200"/>
+              </a:spcAft>
+            </a:pPr>
+            <a:r>
+              <a:rPr sz="1300" b="1">
+                <a:solidFill>
+                  <a:srgbClr val="02C39A"/>
+                </a:solidFill>
+                <a:latin typeface="Calibri"/>
+              </a:rPr>
+              <a:t>CONCLUSIE</a:t>
+            </a:r>
+          </a:p>
+          <a:p>
+            <a:pPr algn="l">
+              <a:lnSpc>
+                <a:spcPct val="125000"/>
+              </a:lnSpc>
+              <a:spcAft>
+                <a:spcPts val="200"/>
+              </a:spcAft>
+            </a:pPr>
+            <a:r>
+              <a:rPr sz="1600" b="0">
+                <a:solidFill>
+                  <a:srgbClr val="21295C"/>
+                </a:solidFill>
+                <a:latin typeface="Calibri"/>
+              </a:rPr>
+              <a:t>Significant en sterke correlatie.</a:t>
+            </a:r>
+          </a:p>
+          <a:p>
+            <a:pPr algn="l">
+              <a:lnSpc>
+                <a:spcPct val="125000"/>
+              </a:lnSpc>
+              <a:spcAft>
+                <a:spcPts val="200"/>
+              </a:spcAft>
+            </a:pPr>
+            <a:r>
+              <a:rPr sz="1600" b="0">
+                <a:solidFill>
+                  <a:srgbClr val="21295C"/>
+                </a:solidFill>
+                <a:latin typeface="Calibri"/>
+              </a:rPr>
+              <a:t>Hoogconjunctuur drijft Apple en koper omhoog;</a:t>
+            </a:r>
+          </a:p>
+          <a:p>
+            <a:pPr algn="l">
+              <a:lnSpc>
+                <a:spcPct val="125000"/>
+              </a:lnSpc>
+              <a:spcAft>
+                <a:spcPts val="200"/>
+              </a:spcAft>
+            </a:pPr>
+            <a:r>
+              <a:rPr sz="1600" b="0">
+                <a:solidFill>
+                  <a:srgbClr val="21295C"/>
+                </a:solidFill>
+                <a:latin typeface="Calibri"/>
+              </a:rPr>
+              <a:t>goud reageert juist zwakker (veilige haven).</a:t>
+            </a:r>
+          </a:p>
+        </p:txBody>
+      </p:sp>
+    </p:spTree>
+  </p:cSld>
+  <p:clrMapOvr>
+    <a:masterClrMapping/>
+  </p:clrMapOvr>
+</p:sld>
+</file>
+
+<file path=ppt/slides/slide18.xml><?xml version="1.0" encoding="utf-8"?>
 <p:sld xmlns:a="http://schemas.openxmlformats.org/drawingml/2006/main" xmlns:p="http://schemas.openxmlformats.org/presentationml/2006/main" xmlns:r="http://schemas.openxmlformats.org/officeDocument/2006/relationships">
   <p:cSld>
     <p:spTree>
@@ -7526,7 +7726,7 @@
 </p:sld>
 </file>
 
-<file path=ppt/slides/slide9.xml><?xml version="1.0" encoding="utf-8"?>
+<file path=ppt/slides/slide19.xml><?xml version="1.0" encoding="utf-8"?>
 <p:sld xmlns:a="http://schemas.openxmlformats.org/drawingml/2006/main" xmlns:p="http://schemas.openxmlformats.org/presentationml/2006/main" xmlns:r="http://schemas.openxmlformats.org/officeDocument/2006/relationships">
   <p:cSld>
     <p:spTree>
@@ -8336,6 +8536,5122 @@
               </a:spcAft>
             </a:pPr>
             <a:r>
+              <a:rPr sz="1400" b="0">
+                <a:solidFill>
+                  <a:srgbClr val="CADCFC"/>
+                </a:solidFill>
+                <a:latin typeface="Calibri"/>
+              </a:rPr>
+              <a:t>Macro-indicatoren krijgen ~0%:</a:t>
+            </a:r>
+          </a:p>
+          <a:p>
+            <a:pPr algn="l">
+              <a:lnSpc>
+                <a:spcPct val="125000"/>
+              </a:lnSpc>
+              <a:spcAft>
+                <a:spcPts val="200"/>
+              </a:spcAft>
+            </a:pPr>
+            <a:r>
+              <a:rPr sz="1400" b="0">
+                <a:solidFill>
+                  <a:srgbClr val="CADCFC"/>
+                </a:solidFill>
+                <a:latin typeface="Calibri"/>
+              </a:rPr>
+              <a:t>ze voegen geen rendement per</a:t>
+            </a:r>
+          </a:p>
+          <a:p>
+            <a:pPr algn="l">
+              <a:lnSpc>
+                <a:spcPct val="125000"/>
+              </a:lnSpc>
+              <a:spcAft>
+                <a:spcPts val="200"/>
+              </a:spcAft>
+            </a:pPr>
+            <a:r>
+              <a:rPr sz="1400" b="0">
+                <a:solidFill>
+                  <a:srgbClr val="CADCFC"/>
+                </a:solidFill>
+                <a:latin typeface="Calibri"/>
+              </a:rPr>
+              <a:t>eenheid risico toe.</a:t>
+            </a:r>
+          </a:p>
+        </p:txBody>
+      </p:sp>
+    </p:spTree>
+  </p:cSld>
+  <p:clrMapOvr>
+    <a:masterClrMapping/>
+  </p:clrMapOvr>
+</p:sld>
+</file>
+
+<file path=ppt/slides/slide2.xml><?xml version="1.0" encoding="utf-8"?>
+<p:sld xmlns:a="http://schemas.openxmlformats.org/drawingml/2006/main" xmlns:p="http://schemas.openxmlformats.org/presentationml/2006/main" xmlns:r="http://schemas.openxmlformats.org/officeDocument/2006/relationships">
+  <p:cSld>
+    <p:spTree>
+      <p:nvGrpSpPr>
+        <p:cNvPr id="1" name=""/>
+        <p:cNvGrpSpPr/>
+        <p:nvPr/>
+      </p:nvGrpSpPr>
+      <p:grpSpPr/>
+      <p:sp>
+        <p:nvSpPr>
+          <p:cNvPr id="2" name="Rectangle 1"/>
+          <p:cNvSpPr/>
+          <p:nvPr/>
+        </p:nvSpPr>
+        <p:spPr>
+          <a:xfrm>
+            <a:off x="0" y="0"/>
+            <a:ext cx="12191695" cy="6858000"/>
+          </a:xfrm>
+          <a:prstGeom prst="rect">
+            <a:avLst/>
+          </a:prstGeom>
+          <a:solidFill>
+            <a:srgbClr val="FFFFFF"/>
+          </a:solidFill>
+          <a:ln>
+            <a:noFill/>
+          </a:ln>
+          <a:effectLst/>
+        </p:spPr>
+        <p:style>
+          <a:lnRef idx="1">
+            <a:schemeClr val="accent1"/>
+          </a:lnRef>
+          <a:fillRef idx="3">
+            <a:schemeClr val="accent1"/>
+          </a:fillRef>
+          <a:effectRef idx="2">
+            <a:schemeClr val="accent1"/>
+          </a:effectRef>
+          <a:fontRef idx="minor">
+            <a:schemeClr val="lt1"/>
+          </a:fontRef>
+        </p:style>
+        <p:txBody>
+          <a:bodyPr rtlCol="0" anchor="ctr"/>
+          <a:lstStyle/>
+          <a:p>
+            <a:pPr algn="ctr"/>
+          </a:p>
+        </p:txBody>
+      </p:sp>
+      <p:sp>
+        <p:nvSpPr>
+          <p:cNvPr id="3" name="TextBox 2"/>
+          <p:cNvSpPr txBox="1"/>
+          <p:nvPr/>
+        </p:nvSpPr>
+        <p:spPr>
+          <a:xfrm>
+            <a:off x="822960" y="502920"/>
+            <a:ext cx="10607040" cy="914400"/>
+          </a:xfrm>
+          <a:prstGeom prst="rect">
+            <a:avLst/>
+          </a:prstGeom>
+          <a:noFill/>
+        </p:spPr>
+        <p:txBody>
+          <a:bodyPr wrap="square" anchor="ctr" lIns="0" rIns="0" tIns="0" bIns="0">
+            <a:spAutoFit/>
+          </a:bodyPr>
+          <a:lstStyle/>
+          <a:p>
+            <a:pPr algn="l">
+              <a:lnSpc>
+                <a:spcPct val="110000"/>
+              </a:lnSpc>
+              <a:spcAft>
+                <a:spcPts val="200"/>
+              </a:spcAft>
+            </a:pPr>
+            <a:r>
+              <a:rPr sz="3400" b="1">
+                <a:solidFill>
+                  <a:srgbClr val="1E2761"/>
+                </a:solidFill>
+                <a:latin typeface="Georgia"/>
+              </a:rPr>
+              <a:t>Onze data &amp; aanpak</a:t>
+            </a:r>
+          </a:p>
+        </p:txBody>
+      </p:sp>
+      <p:sp>
+        <p:nvSpPr>
+          <p:cNvPr id="4" name="Rectangle 3"/>
+          <p:cNvSpPr/>
+          <p:nvPr/>
+        </p:nvSpPr>
+        <p:spPr>
+          <a:xfrm>
+            <a:off x="822960" y="1417320"/>
+            <a:ext cx="2194560" cy="54864"/>
+          </a:xfrm>
+          <a:prstGeom prst="rect">
+            <a:avLst/>
+          </a:prstGeom>
+          <a:solidFill>
+            <a:srgbClr val="02C39A"/>
+          </a:solidFill>
+          <a:ln>
+            <a:noFill/>
+          </a:ln>
+          <a:effectLst/>
+        </p:spPr>
+        <p:style>
+          <a:lnRef idx="1">
+            <a:schemeClr val="accent1"/>
+          </a:lnRef>
+          <a:fillRef idx="3">
+            <a:schemeClr val="accent1"/>
+          </a:fillRef>
+          <a:effectRef idx="2">
+            <a:schemeClr val="accent1"/>
+          </a:effectRef>
+          <a:fontRef idx="minor">
+            <a:schemeClr val="lt1"/>
+          </a:fontRef>
+        </p:style>
+        <p:txBody>
+          <a:bodyPr rtlCol="0" anchor="ctr"/>
+          <a:lstStyle/>
+          <a:p>
+            <a:pPr algn="ctr"/>
+          </a:p>
+        </p:txBody>
+      </p:sp>
+      <p:sp>
+        <p:nvSpPr>
+          <p:cNvPr id="5" name="TextBox 4"/>
+          <p:cNvSpPr txBox="1"/>
+          <p:nvPr/>
+        </p:nvSpPr>
+        <p:spPr>
+          <a:xfrm>
+            <a:off x="822960" y="1828800"/>
+            <a:ext cx="10515600" cy="4389120"/>
+          </a:xfrm>
+          <a:prstGeom prst="rect">
+            <a:avLst/>
+          </a:prstGeom>
+          <a:noFill/>
+        </p:spPr>
+        <p:txBody>
+          <a:bodyPr wrap="square" anchor="t" lIns="0" rIns="0" tIns="0" bIns="0">
+            <a:spAutoFit/>
+          </a:bodyPr>
+          <a:lstStyle/>
+          <a:p>
+            <a:pPr algn="l">
+              <a:lnSpc>
+                <a:spcPct val="150000"/>
+              </a:lnSpc>
+              <a:spcAft>
+                <a:spcPts val="200"/>
+              </a:spcAft>
+            </a:pPr>
+            <a:r>
+              <a:rPr sz="1800" b="0">
+                <a:solidFill>
+                  <a:srgbClr val="21295C"/>
+                </a:solidFill>
+                <a:latin typeface="Calibri"/>
+              </a:rPr>
+              <a:t>We verzamelden 20 producten en indicatoren over de periode dec 2015 – mei 2026.</a:t>
+            </a:r>
+          </a:p>
+          <a:p>
+            <a:pPr algn="l">
+              <a:lnSpc>
+                <a:spcPct val="150000"/>
+              </a:lnSpc>
+              <a:spcAft>
+                <a:spcPts val="200"/>
+              </a:spcAft>
+            </a:pPr>
+            <a:r>
+              <a:rPr sz="1600" b="0">
+                <a:solidFill>
+                  <a:srgbClr val="21295C"/>
+                </a:solidFill>
+                <a:latin typeface="Calibri"/>
+              </a:rPr>
+              <a:t>•  Aandelen, crypto en obligaties via Yahoo Finance (Apple, ASML, Broadcom, Shell, Bitcoin).</a:t>
+            </a:r>
+          </a:p>
+          <a:p>
+            <a:pPr algn="l">
+              <a:lnSpc>
+                <a:spcPct val="150000"/>
+              </a:lnSpc>
+              <a:spcAft>
+                <a:spcPts val="200"/>
+              </a:spcAft>
+            </a:pPr>
+            <a:r>
+              <a:rPr sz="1600" b="0">
+                <a:solidFill>
+                  <a:srgbClr val="21295C"/>
+                </a:solidFill>
+                <a:latin typeface="Calibri"/>
+              </a:rPr>
+              <a:t>•  Grondstoffen via Yahoo Finance en FRED (goud, olie, koper, graan, koffie, gas).</a:t>
+            </a:r>
+          </a:p>
+          <a:p>
+            <a:pPr algn="l">
+              <a:lnSpc>
+                <a:spcPct val="150000"/>
+              </a:lnSpc>
+              <a:spcAft>
+                <a:spcPts val="200"/>
+              </a:spcAft>
+            </a:pPr>
+            <a:r>
+              <a:rPr sz="1600" b="0">
+                <a:solidFill>
+                  <a:srgbClr val="21295C"/>
+                </a:solidFill>
+                <a:latin typeface="Calibri"/>
+              </a:rPr>
+              <a:t>•  Macro-economische indicatoren via de FED St. Louis (GDP, inkomen, inflatie, rente, werkloosheid).</a:t>
+            </a:r>
+          </a:p>
+          <a:p>
+            <a:pPr algn="l">
+              <a:lnSpc>
+                <a:spcPct val="150000"/>
+              </a:lnSpc>
+              <a:spcAft>
+                <a:spcPts val="200"/>
+              </a:spcAft>
+            </a:pPr>
+            <a:r>
+              <a:rPr sz="1600" b="0">
+                <a:solidFill>
+                  <a:srgbClr val="21295C"/>
+                </a:solidFill>
+                <a:latin typeface="Calibri"/>
+              </a:rPr>
+              <a:t>Hierop pasten we regressie, tijdreeksanalyse, sentimentanalyse, machine learning en</a:t>
+            </a:r>
+          </a:p>
+          <a:p>
+            <a:pPr algn="l">
+              <a:lnSpc>
+                <a:spcPct val="150000"/>
+              </a:lnSpc>
+              <a:spcAft>
+                <a:spcPts val="200"/>
+              </a:spcAft>
+            </a:pPr>
+            <a:r>
+              <a:rPr sz="1600" b="0">
+                <a:solidFill>
+                  <a:srgbClr val="21295C"/>
+                </a:solidFill>
+                <a:latin typeface="Calibri"/>
+              </a:rPr>
+              <a:t>portfolio-optimalisatie toe om verbanden te onderzoeken en een optimale portefeuille samen te stellen.</a:t>
+            </a:r>
+          </a:p>
+        </p:txBody>
+      </p:sp>
+    </p:spTree>
+  </p:cSld>
+  <p:clrMapOvr>
+    <a:masterClrMapping/>
+  </p:clrMapOvr>
+</p:sld>
+</file>
+
+<file path=ppt/slides/slide20.xml><?xml version="1.0" encoding="utf-8"?>
+<p:sld xmlns:a="http://schemas.openxmlformats.org/drawingml/2006/main" xmlns:p="http://schemas.openxmlformats.org/presentationml/2006/main" xmlns:r="http://schemas.openxmlformats.org/officeDocument/2006/relationships">
+  <p:cSld>
+    <p:spTree>
+      <p:nvGrpSpPr>
+        <p:cNvPr id="1" name=""/>
+        <p:cNvGrpSpPr/>
+        <p:nvPr/>
+      </p:nvGrpSpPr>
+      <p:grpSpPr/>
+      <p:sp>
+        <p:nvSpPr>
+          <p:cNvPr id="2" name="Rectangle 1"/>
+          <p:cNvSpPr/>
+          <p:nvPr/>
+        </p:nvSpPr>
+        <p:spPr>
+          <a:xfrm>
+            <a:off x="0" y="0"/>
+            <a:ext cx="12191695" cy="6858000"/>
+          </a:xfrm>
+          <a:prstGeom prst="rect">
+            <a:avLst/>
+          </a:prstGeom>
+          <a:solidFill>
+            <a:srgbClr val="1E2761"/>
+          </a:solidFill>
+          <a:ln>
+            <a:noFill/>
+          </a:ln>
+          <a:effectLst/>
+        </p:spPr>
+        <p:style>
+          <a:lnRef idx="1">
+            <a:schemeClr val="accent1"/>
+          </a:lnRef>
+          <a:fillRef idx="3">
+            <a:schemeClr val="accent1"/>
+          </a:fillRef>
+          <a:effectRef idx="2">
+            <a:schemeClr val="accent1"/>
+          </a:effectRef>
+          <a:fontRef idx="minor">
+            <a:schemeClr val="lt1"/>
+          </a:fontRef>
+        </p:style>
+        <p:txBody>
+          <a:bodyPr rtlCol="0" anchor="ctr"/>
+          <a:lstStyle/>
+          <a:p>
+            <a:pPr algn="ctr"/>
+          </a:p>
+        </p:txBody>
+      </p:sp>
+      <p:sp>
+        <p:nvSpPr>
+          <p:cNvPr id="3" name="Oval 2"/>
+          <p:cNvSpPr/>
+          <p:nvPr/>
+        </p:nvSpPr>
+        <p:spPr>
+          <a:xfrm>
+            <a:off x="822960" y="822960"/>
+            <a:ext cx="274320" cy="274320"/>
+          </a:xfrm>
+          <a:prstGeom prst="ellipse">
+            <a:avLst/>
+          </a:prstGeom>
+          <a:solidFill>
+            <a:srgbClr val="02C39A"/>
+          </a:solidFill>
+          <a:ln>
+            <a:noFill/>
+          </a:ln>
+          <a:effectLst/>
+        </p:spPr>
+        <p:style>
+          <a:lnRef idx="1">
+            <a:schemeClr val="accent1"/>
+          </a:lnRef>
+          <a:fillRef idx="3">
+            <a:schemeClr val="accent1"/>
+          </a:fillRef>
+          <a:effectRef idx="2">
+            <a:schemeClr val="accent1"/>
+          </a:effectRef>
+          <a:fontRef idx="minor">
+            <a:schemeClr val="lt1"/>
+          </a:fontRef>
+        </p:style>
+        <p:txBody>
+          <a:bodyPr rtlCol="0" anchor="ctr"/>
+          <a:lstStyle/>
+          <a:p>
+            <a:pPr algn="ctr"/>
+          </a:p>
+        </p:txBody>
+      </p:sp>
+      <p:sp>
+        <p:nvSpPr>
+          <p:cNvPr id="4" name="TextBox 3"/>
+          <p:cNvSpPr txBox="1"/>
+          <p:nvPr/>
+        </p:nvSpPr>
+        <p:spPr>
+          <a:xfrm>
+            <a:off x="822960" y="1280160"/>
+            <a:ext cx="10515600" cy="914400"/>
+          </a:xfrm>
+          <a:prstGeom prst="rect">
+            <a:avLst/>
+          </a:prstGeom>
+          <a:noFill/>
+        </p:spPr>
+        <p:txBody>
+          <a:bodyPr wrap="square" anchor="t" lIns="0" rIns="0" tIns="0" bIns="0">
+            <a:spAutoFit/>
+          </a:bodyPr>
+          <a:lstStyle/>
+          <a:p>
+            <a:pPr algn="l">
+              <a:lnSpc>
+                <a:spcPct val="110000"/>
+              </a:lnSpc>
+              <a:spcAft>
+                <a:spcPts val="200"/>
+              </a:spcAft>
+            </a:pPr>
+            <a:r>
+              <a:rPr sz="4400" b="1">
+                <a:solidFill>
+                  <a:srgbClr val="FFFFFF"/>
+                </a:solidFill>
+                <a:latin typeface="Georgia"/>
+              </a:rPr>
+              <a:t>Eindconclusie</a:t>
+            </a:r>
+          </a:p>
+        </p:txBody>
+      </p:sp>
+      <p:sp>
+        <p:nvSpPr>
+          <p:cNvPr id="5" name="TextBox 4"/>
+          <p:cNvSpPr txBox="1"/>
+          <p:nvPr/>
+        </p:nvSpPr>
+        <p:spPr>
+          <a:xfrm>
+            <a:off x="822960" y="2651760"/>
+            <a:ext cx="10607040" cy="3657600"/>
+          </a:xfrm>
+          <a:prstGeom prst="rect">
+            <a:avLst/>
+          </a:prstGeom>
+          <a:noFill/>
+        </p:spPr>
+        <p:txBody>
+          <a:bodyPr wrap="square" anchor="t" lIns="0" rIns="0" tIns="0" bIns="0">
+            <a:spAutoFit/>
+          </a:bodyPr>
+          <a:lstStyle/>
+          <a:p>
+            <a:pPr algn="l">
+              <a:lnSpc>
+                <a:spcPct val="150000"/>
+              </a:lnSpc>
+              <a:spcAft>
+                <a:spcPts val="200"/>
+              </a:spcAft>
+            </a:pPr>
+            <a:r>
+              <a:rPr sz="1800" b="0">
+                <a:solidFill>
+                  <a:srgbClr val="CADCFC"/>
+                </a:solidFill>
+                <a:latin typeface="Calibri"/>
+              </a:rPr>
+              <a:t>Met regressie, tijdreeks- en sentimentanalyse vonden we duidelijke, vaak significante</a:t>
+            </a:r>
+          </a:p>
+          <a:p>
+            <a:pPr algn="l">
+              <a:lnSpc>
+                <a:spcPct val="150000"/>
+              </a:lnSpc>
+              <a:spcAft>
+                <a:spcPts val="200"/>
+              </a:spcAft>
+            </a:pPr>
+            <a:r>
+              <a:rPr sz="1800" b="0">
+                <a:solidFill>
+                  <a:srgbClr val="CADCFC"/>
+                </a:solidFill>
+                <a:latin typeface="Calibri"/>
+              </a:rPr>
+              <a:t>verbanden tussen macro-economische factoren en de koersen in onze portfolio.</a:t>
+            </a:r>
+          </a:p>
+          <a:p>
+            <a:pPr algn="l">
+              <a:lnSpc>
+                <a:spcPct val="150000"/>
+              </a:lnSpc>
+              <a:spcAft>
+                <a:spcPts val="200"/>
+              </a:spcAft>
+            </a:pPr>
+            <a:r>
+              <a:rPr sz="1800" b="0">
+                <a:solidFill>
+                  <a:srgbClr val="CADCFC"/>
+                </a:solidFill>
+                <a:latin typeface="Calibri"/>
+              </a:rPr>
+              <a:t>Het neurale netwerk voorspelt de Apple-koers sterk (R² ≈ 0,98), terwijl nieuws-sentiment</a:t>
+            </a:r>
+          </a:p>
+          <a:p>
+            <a:pPr algn="l">
+              <a:lnSpc>
+                <a:spcPct val="150000"/>
+              </a:lnSpc>
+              <a:spcAft>
+                <a:spcPts val="200"/>
+              </a:spcAft>
+            </a:pPr>
+            <a:r>
+              <a:rPr sz="1800" b="0">
+                <a:solidFill>
+                  <a:srgbClr val="CADCFC"/>
+                </a:solidFill>
+                <a:latin typeface="Calibri"/>
+              </a:rPr>
+              <a:t>geen significant koerseffect liet zien.</a:t>
+            </a:r>
+          </a:p>
+          <a:p>
+            <a:pPr algn="l">
+              <a:lnSpc>
+                <a:spcPct val="150000"/>
+              </a:lnSpc>
+              <a:spcAft>
+                <a:spcPts val="200"/>
+              </a:spcAft>
+            </a:pPr>
+            <a:r>
+              <a:rPr sz="1800" b="0">
+                <a:solidFill>
+                  <a:srgbClr val="CADCFC"/>
+                </a:solidFill>
+                <a:latin typeface="Calibri"/>
+              </a:rPr>
+              <a:t>De Markowitz-optimalisatie leverde een marktportfolio op met de hoogste Sharpe-ratio (1,10):</a:t>
+            </a:r>
+          </a:p>
+          <a:p>
+            <a:pPr algn="l">
+              <a:lnSpc>
+                <a:spcPct val="150000"/>
+              </a:lnSpc>
+              <a:spcAft>
+                <a:spcPts val="200"/>
+              </a:spcAft>
+            </a:pPr>
+            <a:r>
+              <a:rPr sz="1800" b="0">
+                <a:solidFill>
+                  <a:srgbClr val="CADCFC"/>
+                </a:solidFill>
+                <a:latin typeface="Calibri"/>
+              </a:rPr>
+              <a:t>het beste rendement per eenheid risico binnen onze dataset.</a:t>
+            </a:r>
+          </a:p>
+        </p:txBody>
+      </p:sp>
+    </p:spTree>
+  </p:cSld>
+  <p:clrMapOvr>
+    <a:masterClrMapping/>
+  </p:clrMapOvr>
+</p:sld>
+</file>
+
+<file path=ppt/slides/slide3.xml><?xml version="1.0" encoding="utf-8"?>
+<p:sld xmlns:a="http://schemas.openxmlformats.org/drawingml/2006/main" xmlns:p="http://schemas.openxmlformats.org/presentationml/2006/main" xmlns:r="http://schemas.openxmlformats.org/officeDocument/2006/relationships">
+  <p:cSld>
+    <p:spTree>
+      <p:nvGrpSpPr>
+        <p:cNvPr id="1" name=""/>
+        <p:cNvGrpSpPr/>
+        <p:nvPr/>
+      </p:nvGrpSpPr>
+      <p:grpSpPr/>
+      <p:sp>
+        <p:nvSpPr>
+          <p:cNvPr id="2" name="Rectangle 1"/>
+          <p:cNvSpPr/>
+          <p:nvPr/>
+        </p:nvSpPr>
+        <p:spPr>
+          <a:xfrm>
+            <a:off x="0" y="0"/>
+            <a:ext cx="12191695" cy="6858000"/>
+          </a:xfrm>
+          <a:prstGeom prst="rect">
+            <a:avLst/>
+          </a:prstGeom>
+          <a:solidFill>
+            <a:srgbClr val="FFFFFF"/>
+          </a:solidFill>
+          <a:ln>
+            <a:noFill/>
+          </a:ln>
+          <a:effectLst/>
+        </p:spPr>
+        <p:style>
+          <a:lnRef idx="1">
+            <a:schemeClr val="accent1"/>
+          </a:lnRef>
+          <a:fillRef idx="3">
+            <a:schemeClr val="accent1"/>
+          </a:fillRef>
+          <a:effectRef idx="2">
+            <a:schemeClr val="accent1"/>
+          </a:effectRef>
+          <a:fontRef idx="minor">
+            <a:schemeClr val="lt1"/>
+          </a:fontRef>
+        </p:style>
+        <p:txBody>
+          <a:bodyPr rtlCol="0" anchor="ctr"/>
+          <a:lstStyle/>
+          <a:p>
+            <a:pPr algn="ctr"/>
+          </a:p>
+        </p:txBody>
+      </p:sp>
+      <p:sp>
+        <p:nvSpPr>
+          <p:cNvPr id="3" name="Rectangle 2"/>
+          <p:cNvSpPr/>
+          <p:nvPr/>
+        </p:nvSpPr>
+        <p:spPr>
+          <a:xfrm>
+            <a:off x="0" y="0"/>
+            <a:ext cx="3931920" cy="6858000"/>
+          </a:xfrm>
+          <a:prstGeom prst="rect">
+            <a:avLst/>
+          </a:prstGeom>
+          <a:solidFill>
+            <a:srgbClr val="1E2761"/>
+          </a:solidFill>
+          <a:ln>
+            <a:noFill/>
+          </a:ln>
+          <a:effectLst/>
+        </p:spPr>
+        <p:style>
+          <a:lnRef idx="1">
+            <a:schemeClr val="accent1"/>
+          </a:lnRef>
+          <a:fillRef idx="3">
+            <a:schemeClr val="accent1"/>
+          </a:fillRef>
+          <a:effectRef idx="2">
+            <a:schemeClr val="accent1"/>
+          </a:effectRef>
+          <a:fontRef idx="minor">
+            <a:schemeClr val="lt1"/>
+          </a:fontRef>
+        </p:style>
+        <p:txBody>
+          <a:bodyPr rtlCol="0" anchor="ctr"/>
+          <a:lstStyle/>
+          <a:p>
+            <a:pPr algn="ctr"/>
+          </a:p>
+        </p:txBody>
+      </p:sp>
+      <p:sp>
+        <p:nvSpPr>
+          <p:cNvPr id="4" name="Oval 3"/>
+          <p:cNvSpPr/>
+          <p:nvPr/>
+        </p:nvSpPr>
+        <p:spPr>
+          <a:xfrm>
+            <a:off x="548640" y="640080"/>
+            <a:ext cx="256032" cy="256032"/>
+          </a:xfrm>
+          <a:prstGeom prst="ellipse">
+            <a:avLst/>
+          </a:prstGeom>
+          <a:solidFill>
+            <a:srgbClr val="02C39A"/>
+          </a:solidFill>
+          <a:ln>
+            <a:noFill/>
+          </a:ln>
+          <a:effectLst/>
+        </p:spPr>
+        <p:style>
+          <a:lnRef idx="1">
+            <a:schemeClr val="accent1"/>
+          </a:lnRef>
+          <a:fillRef idx="3">
+            <a:schemeClr val="accent1"/>
+          </a:fillRef>
+          <a:effectRef idx="2">
+            <a:schemeClr val="accent1"/>
+          </a:effectRef>
+          <a:fontRef idx="minor">
+            <a:schemeClr val="lt1"/>
+          </a:fontRef>
+        </p:style>
+        <p:txBody>
+          <a:bodyPr rtlCol="0" anchor="ctr"/>
+          <a:lstStyle/>
+          <a:p>
+            <a:pPr algn="ctr"/>
+          </a:p>
+        </p:txBody>
+      </p:sp>
+      <p:sp>
+        <p:nvSpPr>
+          <p:cNvPr id="5" name="TextBox 4"/>
+          <p:cNvSpPr txBox="1"/>
+          <p:nvPr/>
+        </p:nvSpPr>
+        <p:spPr>
+          <a:xfrm>
+            <a:off x="548640" y="1051560"/>
+            <a:ext cx="3017520" cy="548640"/>
+          </a:xfrm>
+          <a:prstGeom prst="rect">
+            <a:avLst/>
+          </a:prstGeom>
+          <a:noFill/>
+        </p:spPr>
+        <p:txBody>
+          <a:bodyPr wrap="square" anchor="t" lIns="0" rIns="0" tIns="0" bIns="0">
+            <a:spAutoFit/>
+          </a:bodyPr>
+          <a:lstStyle/>
+          <a:p>
+            <a:pPr algn="l">
+              <a:lnSpc>
+                <a:spcPct val="110000"/>
+              </a:lnSpc>
+              <a:spcAft>
+                <a:spcPts val="200"/>
+              </a:spcAft>
+            </a:pPr>
+            <a:r>
+              <a:rPr sz="2000" b="1">
+                <a:solidFill>
+                  <a:srgbClr val="02C39A"/>
+                </a:solidFill>
+                <a:latin typeface="Calibri"/>
+              </a:rPr>
+              <a:t>Onderzoeksvraag 1</a:t>
+            </a:r>
+          </a:p>
+        </p:txBody>
+      </p:sp>
+      <p:sp>
+        <p:nvSpPr>
+          <p:cNvPr id="6" name="TextBox 5"/>
+          <p:cNvSpPr txBox="1"/>
+          <p:nvPr/>
+        </p:nvSpPr>
+        <p:spPr>
+          <a:xfrm>
+            <a:off x="548640" y="1920240"/>
+            <a:ext cx="3108960" cy="4389120"/>
+          </a:xfrm>
+          <a:prstGeom prst="rect">
+            <a:avLst/>
+          </a:prstGeom>
+          <a:noFill/>
+        </p:spPr>
+        <p:txBody>
+          <a:bodyPr wrap="square" anchor="t" lIns="0" rIns="0" tIns="0" bIns="0">
+            <a:spAutoFit/>
+          </a:bodyPr>
+          <a:lstStyle/>
+          <a:p>
+            <a:pPr algn="l">
+              <a:lnSpc>
+                <a:spcPct val="140000"/>
+              </a:lnSpc>
+              <a:spcAft>
+                <a:spcPts val="200"/>
+              </a:spcAft>
+            </a:pPr>
+            <a:r>
+              <a:rPr sz="1500" b="1">
+                <a:solidFill>
+                  <a:srgbClr val="CADCFC"/>
+                </a:solidFill>
+                <a:latin typeface="Calibri"/>
+              </a:rPr>
+              <a:t>Stappen vooraf</a:t>
+            </a:r>
+          </a:p>
+          <a:p>
+            <a:pPr algn="l">
+              <a:lnSpc>
+                <a:spcPct val="140000"/>
+              </a:lnSpc>
+              <a:spcAft>
+                <a:spcPts val="200"/>
+              </a:spcAft>
+            </a:pPr>
+            <a:r>
+              <a:rPr sz="1400" b="0">
+                <a:solidFill>
+                  <a:srgbClr val="FFFFFF"/>
+                </a:solidFill>
+                <a:latin typeface="Calibri"/>
+              </a:rPr>
+              <a:t>1.  Relevante data geselecteerd</a:t>
+            </a:r>
+          </a:p>
+          <a:p>
+            <a:pPr algn="l">
+              <a:lnSpc>
+                <a:spcPct val="140000"/>
+              </a:lnSpc>
+              <a:spcAft>
+                <a:spcPts val="200"/>
+              </a:spcAft>
+            </a:pPr>
+            <a:r>
+              <a:rPr sz="1400" b="0">
+                <a:solidFill>
+                  <a:srgbClr val="FFFFFF"/>
+                </a:solidFill>
+                <a:latin typeface="Calibri"/>
+              </a:rPr>
+              <a:t>2.  Correlatie-heatmap gemaakt</a:t>
+            </a:r>
+          </a:p>
+          <a:p>
+            <a:pPr algn="l">
+              <a:lnSpc>
+                <a:spcPct val="140000"/>
+              </a:lnSpc>
+              <a:spcAft>
+                <a:spcPts val="200"/>
+              </a:spcAft>
+            </a:pPr>
+            <a:r>
+              <a:rPr sz="1400" b="0">
+                <a:solidFill>
+                  <a:srgbClr val="FFFFFF"/>
+                </a:solidFill>
+                <a:latin typeface="Calibri"/>
+              </a:rPr>
+              <a:t>3.  Bubble chart (GDP x Income x Coffee)</a:t>
+            </a:r>
+          </a:p>
+          <a:p>
+            <a:pPr algn="l">
+              <a:lnSpc>
+                <a:spcPct val="140000"/>
+              </a:lnSpc>
+              <a:spcAft>
+                <a:spcPts val="200"/>
+              </a:spcAft>
+            </a:pPr>
+            <a:r>
+              <a:rPr sz="1400" b="0">
+                <a:solidFill>
+                  <a:srgbClr val="FFFFFF"/>
+                </a:solidFill>
+                <a:latin typeface="Calibri"/>
+              </a:rPr>
+              <a:t>4.  Meervoudige regressie</a:t>
+            </a:r>
+          </a:p>
+        </p:txBody>
+      </p:sp>
+      <p:sp>
+        <p:nvSpPr>
+          <p:cNvPr id="7" name="TextBox 6"/>
+          <p:cNvSpPr txBox="1"/>
+          <p:nvPr/>
+        </p:nvSpPr>
+        <p:spPr>
+          <a:xfrm>
+            <a:off x="4480560" y="914400"/>
+            <a:ext cx="7132320" cy="1280160"/>
+          </a:xfrm>
+          <a:prstGeom prst="rect">
+            <a:avLst/>
+          </a:prstGeom>
+          <a:noFill/>
+        </p:spPr>
+        <p:txBody>
+          <a:bodyPr wrap="square" anchor="t" lIns="0" rIns="0" tIns="0" bIns="0">
+            <a:spAutoFit/>
+          </a:bodyPr>
+          <a:lstStyle/>
+          <a:p>
+            <a:pPr algn="l">
+              <a:lnSpc>
+                <a:spcPct val="115000"/>
+              </a:lnSpc>
+              <a:spcAft>
+                <a:spcPts val="200"/>
+              </a:spcAft>
+            </a:pPr>
+            <a:r>
+              <a:rPr sz="1300" b="1">
+                <a:solidFill>
+                  <a:srgbClr val="02C39A"/>
+                </a:solidFill>
+                <a:latin typeface="Calibri"/>
+              </a:rPr>
+              <a:t>VRAAG</a:t>
+            </a:r>
+          </a:p>
+          <a:p>
+            <a:pPr algn="l">
+              <a:lnSpc>
+                <a:spcPct val="115000"/>
+              </a:lnSpc>
+              <a:spcAft>
+                <a:spcPts val="200"/>
+              </a:spcAft>
+            </a:pPr>
+            <a:r>
+              <a:rPr sz="1900" b="0">
+                <a:solidFill>
+                  <a:srgbClr val="21295C"/>
+                </a:solidFill>
+                <a:latin typeface="Calibri"/>
+              </a:rPr>
+              <a:t>Wat is het verband tussen GDP, persoonlijk inkomen en de koffieprijs?</a:t>
+            </a:r>
+          </a:p>
+        </p:txBody>
+      </p:sp>
+      <p:sp>
+        <p:nvSpPr>
+          <p:cNvPr id="8" name="TextBox 7"/>
+          <p:cNvSpPr txBox="1"/>
+          <p:nvPr/>
+        </p:nvSpPr>
+        <p:spPr>
+          <a:xfrm>
+            <a:off x="4480560" y="2651760"/>
+            <a:ext cx="7132320" cy="1005840"/>
+          </a:xfrm>
+          <a:prstGeom prst="rect">
+            <a:avLst/>
+          </a:prstGeom>
+          <a:noFill/>
+        </p:spPr>
+        <p:txBody>
+          <a:bodyPr wrap="square" anchor="t" lIns="0" rIns="0" tIns="0" bIns="0">
+            <a:spAutoFit/>
+          </a:bodyPr>
+          <a:lstStyle/>
+          <a:p>
+            <a:pPr algn="l">
+              <a:lnSpc>
+                <a:spcPct val="115000"/>
+              </a:lnSpc>
+              <a:spcAft>
+                <a:spcPts val="200"/>
+              </a:spcAft>
+            </a:pPr>
+            <a:r>
+              <a:rPr sz="1300" b="1">
+                <a:solidFill>
+                  <a:srgbClr val="02C39A"/>
+                </a:solidFill>
+                <a:latin typeface="Calibri"/>
+              </a:rPr>
+              <a:t>RESULTAAT REGRESSIE</a:t>
+            </a:r>
+          </a:p>
+          <a:p>
+            <a:pPr algn="l">
+              <a:lnSpc>
+                <a:spcPct val="115000"/>
+              </a:lnSpc>
+              <a:spcAft>
+                <a:spcPts val="200"/>
+              </a:spcAft>
+            </a:pPr>
+            <a:r>
+              <a:rPr sz="1600" b="0">
+                <a:solidFill>
+                  <a:srgbClr val="21295C"/>
+                </a:solidFill>
+                <a:latin typeface="Calibri"/>
+              </a:rPr>
+              <a:t>GDP +0,0160   ·   Income -0,0064   ·   R² = 0,80   (p &lt; 0,05)</a:t>
+            </a:r>
+          </a:p>
+        </p:txBody>
+      </p:sp>
+      <p:sp>
+        <p:nvSpPr>
+          <p:cNvPr id="9" name="TextBox 8"/>
+          <p:cNvSpPr txBox="1"/>
+          <p:nvPr/>
+        </p:nvSpPr>
+        <p:spPr>
+          <a:xfrm>
+            <a:off x="4480560" y="3931920"/>
+            <a:ext cx="7132320" cy="2377440"/>
+          </a:xfrm>
+          <a:prstGeom prst="rect">
+            <a:avLst/>
+          </a:prstGeom>
+          <a:noFill/>
+        </p:spPr>
+        <p:txBody>
+          <a:bodyPr wrap="square" anchor="t" lIns="0" rIns="0" tIns="0" bIns="0">
+            <a:spAutoFit/>
+          </a:bodyPr>
+          <a:lstStyle/>
+          <a:p>
+            <a:pPr algn="l">
+              <a:lnSpc>
+                <a:spcPct val="125000"/>
+              </a:lnSpc>
+              <a:spcAft>
+                <a:spcPts val="200"/>
+              </a:spcAft>
+            </a:pPr>
+            <a:r>
+              <a:rPr sz="1300" b="1">
+                <a:solidFill>
+                  <a:srgbClr val="02C39A"/>
+                </a:solidFill>
+                <a:latin typeface="Calibri"/>
+              </a:rPr>
+              <a:t>CONCLUSIE</a:t>
+            </a:r>
+          </a:p>
+          <a:p>
+            <a:pPr algn="l">
+              <a:lnSpc>
+                <a:spcPct val="125000"/>
+              </a:lnSpc>
+              <a:spcAft>
+                <a:spcPts val="200"/>
+              </a:spcAft>
+            </a:pPr>
+            <a:r>
+              <a:rPr sz="1600" b="0">
+                <a:solidFill>
+                  <a:srgbClr val="21295C"/>
+                </a:solidFill>
+                <a:latin typeface="Calibri"/>
+              </a:rPr>
+              <a:t>Significant en matige correlatie.</a:t>
+            </a:r>
+          </a:p>
+          <a:p>
+            <a:pPr algn="l">
+              <a:lnSpc>
+                <a:spcPct val="125000"/>
+              </a:lnSpc>
+              <a:spcAft>
+                <a:spcPts val="200"/>
+              </a:spcAft>
+            </a:pPr>
+            <a:r>
+              <a:rPr sz="1600" b="0">
+                <a:solidFill>
+                  <a:srgbClr val="21295C"/>
+                </a:solidFill>
+                <a:latin typeface="Calibri"/>
+              </a:rPr>
+              <a:t>Door onderlinge samenhang van de X-variabelen is geen</a:t>
+            </a:r>
+          </a:p>
+          <a:p>
+            <a:pPr algn="l">
+              <a:lnSpc>
+                <a:spcPct val="125000"/>
+              </a:lnSpc>
+              <a:spcAft>
+                <a:spcPts val="200"/>
+              </a:spcAft>
+            </a:pPr>
+            <a:r>
+              <a:rPr sz="1600" b="0">
+                <a:solidFill>
+                  <a:srgbClr val="21295C"/>
+                </a:solidFill>
+                <a:latin typeface="Calibri"/>
+              </a:rPr>
+              <a:t>zuivere oorzaak-gevolg-conclusie te trekken.</a:t>
+            </a:r>
+          </a:p>
+        </p:txBody>
+      </p:sp>
+    </p:spTree>
+  </p:cSld>
+  <p:clrMapOvr>
+    <a:masterClrMapping/>
+  </p:clrMapOvr>
+</p:sld>
+</file>
+
+<file path=ppt/slides/slide4.xml><?xml version="1.0" encoding="utf-8"?>
+<p:sld xmlns:a="http://schemas.openxmlformats.org/drawingml/2006/main" xmlns:p="http://schemas.openxmlformats.org/presentationml/2006/main" xmlns:r="http://schemas.openxmlformats.org/officeDocument/2006/relationships">
+  <p:cSld>
+    <p:spTree>
+      <p:nvGrpSpPr>
+        <p:cNvPr id="1" name=""/>
+        <p:cNvGrpSpPr/>
+        <p:nvPr/>
+      </p:nvGrpSpPr>
+      <p:grpSpPr/>
+      <p:sp>
+        <p:nvSpPr>
+          <p:cNvPr id="2" name="Rectangle 1"/>
+          <p:cNvSpPr/>
+          <p:nvPr/>
+        </p:nvSpPr>
+        <p:spPr>
+          <a:xfrm>
+            <a:off x="0" y="0"/>
+            <a:ext cx="12191695" cy="6858000"/>
+          </a:xfrm>
+          <a:prstGeom prst="rect">
+            <a:avLst/>
+          </a:prstGeom>
+          <a:solidFill>
+            <a:srgbClr val="FFFFFF"/>
+          </a:solidFill>
+          <a:ln>
+            <a:noFill/>
+          </a:ln>
+          <a:effectLst/>
+        </p:spPr>
+        <p:style>
+          <a:lnRef idx="1">
+            <a:schemeClr val="accent1"/>
+          </a:lnRef>
+          <a:fillRef idx="3">
+            <a:schemeClr val="accent1"/>
+          </a:fillRef>
+          <a:effectRef idx="2">
+            <a:schemeClr val="accent1"/>
+          </a:effectRef>
+          <a:fontRef idx="minor">
+            <a:schemeClr val="lt1"/>
+          </a:fontRef>
+        </p:style>
+        <p:txBody>
+          <a:bodyPr rtlCol="0" anchor="ctr"/>
+          <a:lstStyle/>
+          <a:p>
+            <a:pPr algn="ctr"/>
+          </a:p>
+        </p:txBody>
+      </p:sp>
+      <p:sp>
+        <p:nvSpPr>
+          <p:cNvPr id="3" name="Rectangle 2"/>
+          <p:cNvSpPr/>
+          <p:nvPr/>
+        </p:nvSpPr>
+        <p:spPr>
+          <a:xfrm>
+            <a:off x="0" y="0"/>
+            <a:ext cx="3931920" cy="6858000"/>
+          </a:xfrm>
+          <a:prstGeom prst="rect">
+            <a:avLst/>
+          </a:prstGeom>
+          <a:solidFill>
+            <a:srgbClr val="1E2761"/>
+          </a:solidFill>
+          <a:ln>
+            <a:noFill/>
+          </a:ln>
+          <a:effectLst/>
+        </p:spPr>
+        <p:style>
+          <a:lnRef idx="1">
+            <a:schemeClr val="accent1"/>
+          </a:lnRef>
+          <a:fillRef idx="3">
+            <a:schemeClr val="accent1"/>
+          </a:fillRef>
+          <a:effectRef idx="2">
+            <a:schemeClr val="accent1"/>
+          </a:effectRef>
+          <a:fontRef idx="minor">
+            <a:schemeClr val="lt1"/>
+          </a:fontRef>
+        </p:style>
+        <p:txBody>
+          <a:bodyPr rtlCol="0" anchor="ctr"/>
+          <a:lstStyle/>
+          <a:p>
+            <a:pPr algn="ctr"/>
+          </a:p>
+        </p:txBody>
+      </p:sp>
+      <p:sp>
+        <p:nvSpPr>
+          <p:cNvPr id="4" name="Oval 3"/>
+          <p:cNvSpPr/>
+          <p:nvPr/>
+        </p:nvSpPr>
+        <p:spPr>
+          <a:xfrm>
+            <a:off x="548640" y="640080"/>
+            <a:ext cx="256032" cy="256032"/>
+          </a:xfrm>
+          <a:prstGeom prst="ellipse">
+            <a:avLst/>
+          </a:prstGeom>
+          <a:solidFill>
+            <a:srgbClr val="02C39A"/>
+          </a:solidFill>
+          <a:ln>
+            <a:noFill/>
+          </a:ln>
+          <a:effectLst/>
+        </p:spPr>
+        <p:style>
+          <a:lnRef idx="1">
+            <a:schemeClr val="accent1"/>
+          </a:lnRef>
+          <a:fillRef idx="3">
+            <a:schemeClr val="accent1"/>
+          </a:fillRef>
+          <a:effectRef idx="2">
+            <a:schemeClr val="accent1"/>
+          </a:effectRef>
+          <a:fontRef idx="minor">
+            <a:schemeClr val="lt1"/>
+          </a:fontRef>
+        </p:style>
+        <p:txBody>
+          <a:bodyPr rtlCol="0" anchor="ctr"/>
+          <a:lstStyle/>
+          <a:p>
+            <a:pPr algn="ctr"/>
+          </a:p>
+        </p:txBody>
+      </p:sp>
+      <p:sp>
+        <p:nvSpPr>
+          <p:cNvPr id="5" name="TextBox 4"/>
+          <p:cNvSpPr txBox="1"/>
+          <p:nvPr/>
+        </p:nvSpPr>
+        <p:spPr>
+          <a:xfrm>
+            <a:off x="548640" y="1051560"/>
+            <a:ext cx="3017520" cy="548640"/>
+          </a:xfrm>
+          <a:prstGeom prst="rect">
+            <a:avLst/>
+          </a:prstGeom>
+          <a:noFill/>
+        </p:spPr>
+        <p:txBody>
+          <a:bodyPr wrap="square" anchor="t" lIns="0" rIns="0" tIns="0" bIns="0">
+            <a:spAutoFit/>
+          </a:bodyPr>
+          <a:lstStyle/>
+          <a:p>
+            <a:pPr algn="l">
+              <a:lnSpc>
+                <a:spcPct val="110000"/>
+              </a:lnSpc>
+              <a:spcAft>
+                <a:spcPts val="200"/>
+              </a:spcAft>
+            </a:pPr>
+            <a:r>
+              <a:rPr sz="2000" b="1">
+                <a:solidFill>
+                  <a:srgbClr val="02C39A"/>
+                </a:solidFill>
+                <a:latin typeface="Calibri"/>
+              </a:rPr>
+              <a:t>Onderzoeksvraag 2</a:t>
+            </a:r>
+          </a:p>
+        </p:txBody>
+      </p:sp>
+      <p:sp>
+        <p:nvSpPr>
+          <p:cNvPr id="6" name="TextBox 5"/>
+          <p:cNvSpPr txBox="1"/>
+          <p:nvPr/>
+        </p:nvSpPr>
+        <p:spPr>
+          <a:xfrm>
+            <a:off x="548640" y="1920240"/>
+            <a:ext cx="3108960" cy="4389120"/>
+          </a:xfrm>
+          <a:prstGeom prst="rect">
+            <a:avLst/>
+          </a:prstGeom>
+          <a:noFill/>
+        </p:spPr>
+        <p:txBody>
+          <a:bodyPr wrap="square" anchor="t" lIns="0" rIns="0" tIns="0" bIns="0">
+            <a:spAutoFit/>
+          </a:bodyPr>
+          <a:lstStyle/>
+          <a:p>
+            <a:pPr algn="l">
+              <a:lnSpc>
+                <a:spcPct val="140000"/>
+              </a:lnSpc>
+              <a:spcAft>
+                <a:spcPts val="200"/>
+              </a:spcAft>
+            </a:pPr>
+            <a:r>
+              <a:rPr sz="1500" b="1">
+                <a:solidFill>
+                  <a:srgbClr val="CADCFC"/>
+                </a:solidFill>
+                <a:latin typeface="Calibri"/>
+              </a:rPr>
+              <a:t>Stappen vooraf</a:t>
+            </a:r>
+          </a:p>
+          <a:p>
+            <a:pPr algn="l">
+              <a:lnSpc>
+                <a:spcPct val="140000"/>
+              </a:lnSpc>
+              <a:spcAft>
+                <a:spcPts val="200"/>
+              </a:spcAft>
+            </a:pPr>
+            <a:r>
+              <a:rPr sz="1400" b="0">
+                <a:solidFill>
+                  <a:srgbClr val="FFFFFF"/>
+                </a:solidFill>
+                <a:latin typeface="Calibri"/>
+              </a:rPr>
+              <a:t>1.  Data geselecteerd</a:t>
+            </a:r>
+          </a:p>
+          <a:p>
+            <a:pPr algn="l">
+              <a:lnSpc>
+                <a:spcPct val="140000"/>
+              </a:lnSpc>
+              <a:spcAft>
+                <a:spcPts val="200"/>
+              </a:spcAft>
+            </a:pPr>
+            <a:r>
+              <a:rPr sz="1400" b="0">
+                <a:solidFill>
+                  <a:srgbClr val="FFFFFF"/>
+                </a:solidFill>
+                <a:latin typeface="Calibri"/>
+              </a:rPr>
+              <a:t>2.  Heatmap bekeken</a:t>
+            </a:r>
+          </a:p>
+          <a:p>
+            <a:pPr algn="l">
+              <a:lnSpc>
+                <a:spcPct val="140000"/>
+              </a:lnSpc>
+              <a:spcAft>
+                <a:spcPts val="200"/>
+              </a:spcAft>
+            </a:pPr>
+            <a:r>
+              <a:rPr sz="1400" b="0">
+                <a:solidFill>
+                  <a:srgbClr val="FFFFFF"/>
+                </a:solidFill>
+                <a:latin typeface="Calibri"/>
+              </a:rPr>
+              <a:t>3.  Bubble chart (Broadcom x Coffee)</a:t>
+            </a:r>
+          </a:p>
+          <a:p>
+            <a:pPr algn="l">
+              <a:lnSpc>
+                <a:spcPct val="140000"/>
+              </a:lnSpc>
+              <a:spcAft>
+                <a:spcPts val="200"/>
+              </a:spcAft>
+            </a:pPr>
+            <a:r>
+              <a:rPr sz="1400" b="0">
+                <a:solidFill>
+                  <a:srgbClr val="FFFFFF"/>
+                </a:solidFill>
+                <a:latin typeface="Calibri"/>
+              </a:rPr>
+              <a:t>4.  Enkelvoudige regressie</a:t>
+            </a:r>
+          </a:p>
+        </p:txBody>
+      </p:sp>
+      <p:sp>
+        <p:nvSpPr>
+          <p:cNvPr id="7" name="TextBox 6"/>
+          <p:cNvSpPr txBox="1"/>
+          <p:nvPr/>
+        </p:nvSpPr>
+        <p:spPr>
+          <a:xfrm>
+            <a:off x="4480560" y="914400"/>
+            <a:ext cx="7132320" cy="1280160"/>
+          </a:xfrm>
+          <a:prstGeom prst="rect">
+            <a:avLst/>
+          </a:prstGeom>
+          <a:noFill/>
+        </p:spPr>
+        <p:txBody>
+          <a:bodyPr wrap="square" anchor="t" lIns="0" rIns="0" tIns="0" bIns="0">
+            <a:spAutoFit/>
+          </a:bodyPr>
+          <a:lstStyle/>
+          <a:p>
+            <a:pPr algn="l">
+              <a:lnSpc>
+                <a:spcPct val="115000"/>
+              </a:lnSpc>
+              <a:spcAft>
+                <a:spcPts val="200"/>
+              </a:spcAft>
+            </a:pPr>
+            <a:r>
+              <a:rPr sz="1300" b="1">
+                <a:solidFill>
+                  <a:srgbClr val="02C39A"/>
+                </a:solidFill>
+                <a:latin typeface="Calibri"/>
+              </a:rPr>
+              <a:t>VRAAG</a:t>
+            </a:r>
+          </a:p>
+          <a:p>
+            <a:pPr algn="l">
+              <a:lnSpc>
+                <a:spcPct val="115000"/>
+              </a:lnSpc>
+              <a:spcAft>
+                <a:spcPts val="200"/>
+              </a:spcAft>
+            </a:pPr>
+            <a:r>
+              <a:rPr sz="1900" b="0">
+                <a:solidFill>
+                  <a:srgbClr val="21295C"/>
+                </a:solidFill>
+                <a:latin typeface="Calibri"/>
+              </a:rPr>
+              <a:t>Wat is het verband van Broadcom op de koffieprijs?</a:t>
+            </a:r>
+          </a:p>
+        </p:txBody>
+      </p:sp>
+      <p:sp>
+        <p:nvSpPr>
+          <p:cNvPr id="8" name="TextBox 7"/>
+          <p:cNvSpPr txBox="1"/>
+          <p:nvPr/>
+        </p:nvSpPr>
+        <p:spPr>
+          <a:xfrm>
+            <a:off x="4480560" y="2651760"/>
+            <a:ext cx="7132320" cy="1005840"/>
+          </a:xfrm>
+          <a:prstGeom prst="rect">
+            <a:avLst/>
+          </a:prstGeom>
+          <a:noFill/>
+        </p:spPr>
+        <p:txBody>
+          <a:bodyPr wrap="square" anchor="t" lIns="0" rIns="0" tIns="0" bIns="0">
+            <a:spAutoFit/>
+          </a:bodyPr>
+          <a:lstStyle/>
+          <a:p>
+            <a:pPr algn="l">
+              <a:lnSpc>
+                <a:spcPct val="115000"/>
+              </a:lnSpc>
+              <a:spcAft>
+                <a:spcPts val="200"/>
+              </a:spcAft>
+            </a:pPr>
+            <a:r>
+              <a:rPr sz="1300" b="1">
+                <a:solidFill>
+                  <a:srgbClr val="02C39A"/>
+                </a:solidFill>
+                <a:latin typeface="Calibri"/>
+              </a:rPr>
+              <a:t>RESULTAAT REGRESSIE</a:t>
+            </a:r>
+          </a:p>
+          <a:p>
+            <a:pPr algn="l">
+              <a:lnSpc>
+                <a:spcPct val="115000"/>
+              </a:lnSpc>
+              <a:spcAft>
+                <a:spcPts val="200"/>
+              </a:spcAft>
+            </a:pPr>
+            <a:r>
+              <a:rPr sz="1600" b="0">
+                <a:solidFill>
+                  <a:srgbClr val="21295C"/>
+                </a:solidFill>
+                <a:latin typeface="Calibri"/>
+              </a:rPr>
+              <a:t>Broadcom +0,5205   ·   R² = 0,94   (p &lt; 0,05)</a:t>
+            </a:r>
+          </a:p>
+        </p:txBody>
+      </p:sp>
+      <p:sp>
+        <p:nvSpPr>
+          <p:cNvPr id="9" name="TextBox 8"/>
+          <p:cNvSpPr txBox="1"/>
+          <p:nvPr/>
+        </p:nvSpPr>
+        <p:spPr>
+          <a:xfrm>
+            <a:off x="4480560" y="3931920"/>
+            <a:ext cx="7132320" cy="2377440"/>
+          </a:xfrm>
+          <a:prstGeom prst="rect">
+            <a:avLst/>
+          </a:prstGeom>
+          <a:noFill/>
+        </p:spPr>
+        <p:txBody>
+          <a:bodyPr wrap="square" anchor="t" lIns="0" rIns="0" tIns="0" bIns="0">
+            <a:spAutoFit/>
+          </a:bodyPr>
+          <a:lstStyle/>
+          <a:p>
+            <a:pPr algn="l">
+              <a:lnSpc>
+                <a:spcPct val="125000"/>
+              </a:lnSpc>
+              <a:spcAft>
+                <a:spcPts val="200"/>
+              </a:spcAft>
+            </a:pPr>
+            <a:r>
+              <a:rPr sz="1300" b="1">
+                <a:solidFill>
+                  <a:srgbClr val="02C39A"/>
+                </a:solidFill>
+                <a:latin typeface="Calibri"/>
+              </a:rPr>
+              <a:t>CONCLUSIE</a:t>
+            </a:r>
+          </a:p>
+          <a:p>
+            <a:pPr algn="l">
+              <a:lnSpc>
+                <a:spcPct val="125000"/>
+              </a:lnSpc>
+              <a:spcAft>
+                <a:spcPts val="200"/>
+              </a:spcAft>
+            </a:pPr>
+            <a:r>
+              <a:rPr sz="1600" b="0">
+                <a:solidFill>
+                  <a:srgbClr val="21295C"/>
+                </a:solidFill>
+                <a:latin typeface="Calibri"/>
+              </a:rPr>
+              <a:t>Statistisch sterk verband, maar inhoudelijk niet logisch.</a:t>
+            </a:r>
+          </a:p>
+          <a:p>
+            <a:pPr algn="l">
+              <a:lnSpc>
+                <a:spcPct val="125000"/>
+              </a:lnSpc>
+              <a:spcAft>
+                <a:spcPts val="200"/>
+              </a:spcAft>
+            </a:pPr>
+            <a:r>
+              <a:rPr sz="1600" b="0">
+                <a:solidFill>
+                  <a:srgbClr val="21295C"/>
+                </a:solidFill>
+                <a:latin typeface="Calibri"/>
+              </a:rPr>
+              <a:t>Waarschijnlijk schijncorrelatie: beide stijgen over de tijd.</a:t>
+            </a:r>
+          </a:p>
+          <a:p>
+            <a:pPr algn="l">
+              <a:lnSpc>
+                <a:spcPct val="125000"/>
+              </a:lnSpc>
+              <a:spcAft>
+                <a:spcPts val="200"/>
+              </a:spcAft>
+            </a:pPr>
+            <a:r>
+              <a:rPr sz="1600" b="0">
+                <a:solidFill>
+                  <a:srgbClr val="21295C"/>
+                </a:solidFill>
+                <a:latin typeface="Calibri"/>
+              </a:rPr>
+              <a:t>Geen betekenisvolle conclusie.</a:t>
+            </a:r>
+          </a:p>
+        </p:txBody>
+      </p:sp>
+    </p:spTree>
+  </p:cSld>
+  <p:clrMapOvr>
+    <a:masterClrMapping/>
+  </p:clrMapOvr>
+</p:sld>
+</file>
+
+<file path=ppt/slides/slide5.xml><?xml version="1.0" encoding="utf-8"?>
+<p:sld xmlns:a="http://schemas.openxmlformats.org/drawingml/2006/main" xmlns:p="http://schemas.openxmlformats.org/presentationml/2006/main" xmlns:r="http://schemas.openxmlformats.org/officeDocument/2006/relationships">
+  <p:cSld>
+    <p:spTree>
+      <p:nvGrpSpPr>
+        <p:cNvPr id="1" name=""/>
+        <p:cNvGrpSpPr/>
+        <p:nvPr/>
+      </p:nvGrpSpPr>
+      <p:grpSpPr/>
+      <p:sp>
+        <p:nvSpPr>
+          <p:cNvPr id="2" name="Rectangle 1"/>
+          <p:cNvSpPr/>
+          <p:nvPr/>
+        </p:nvSpPr>
+        <p:spPr>
+          <a:xfrm>
+            <a:off x="0" y="0"/>
+            <a:ext cx="12191695" cy="6858000"/>
+          </a:xfrm>
+          <a:prstGeom prst="rect">
+            <a:avLst/>
+          </a:prstGeom>
+          <a:solidFill>
+            <a:srgbClr val="FFFFFF"/>
+          </a:solidFill>
+          <a:ln>
+            <a:noFill/>
+          </a:ln>
+          <a:effectLst/>
+        </p:spPr>
+        <p:style>
+          <a:lnRef idx="1">
+            <a:schemeClr val="accent1"/>
+          </a:lnRef>
+          <a:fillRef idx="3">
+            <a:schemeClr val="accent1"/>
+          </a:fillRef>
+          <a:effectRef idx="2">
+            <a:schemeClr val="accent1"/>
+          </a:effectRef>
+          <a:fontRef idx="minor">
+            <a:schemeClr val="lt1"/>
+          </a:fontRef>
+        </p:style>
+        <p:txBody>
+          <a:bodyPr rtlCol="0" anchor="ctr"/>
+          <a:lstStyle/>
+          <a:p>
+            <a:pPr algn="ctr"/>
+          </a:p>
+        </p:txBody>
+      </p:sp>
+      <p:sp>
+        <p:nvSpPr>
+          <p:cNvPr id="3" name="Rectangle 2"/>
+          <p:cNvSpPr/>
+          <p:nvPr/>
+        </p:nvSpPr>
+        <p:spPr>
+          <a:xfrm>
+            <a:off x="0" y="0"/>
+            <a:ext cx="3931920" cy="6858000"/>
+          </a:xfrm>
+          <a:prstGeom prst="rect">
+            <a:avLst/>
+          </a:prstGeom>
+          <a:solidFill>
+            <a:srgbClr val="1E2761"/>
+          </a:solidFill>
+          <a:ln>
+            <a:noFill/>
+          </a:ln>
+          <a:effectLst/>
+        </p:spPr>
+        <p:style>
+          <a:lnRef idx="1">
+            <a:schemeClr val="accent1"/>
+          </a:lnRef>
+          <a:fillRef idx="3">
+            <a:schemeClr val="accent1"/>
+          </a:fillRef>
+          <a:effectRef idx="2">
+            <a:schemeClr val="accent1"/>
+          </a:effectRef>
+          <a:fontRef idx="minor">
+            <a:schemeClr val="lt1"/>
+          </a:fontRef>
+        </p:style>
+        <p:txBody>
+          <a:bodyPr rtlCol="0" anchor="ctr"/>
+          <a:lstStyle/>
+          <a:p>
+            <a:pPr algn="ctr"/>
+          </a:p>
+        </p:txBody>
+      </p:sp>
+      <p:sp>
+        <p:nvSpPr>
+          <p:cNvPr id="4" name="Oval 3"/>
+          <p:cNvSpPr/>
+          <p:nvPr/>
+        </p:nvSpPr>
+        <p:spPr>
+          <a:xfrm>
+            <a:off x="548640" y="640080"/>
+            <a:ext cx="256032" cy="256032"/>
+          </a:xfrm>
+          <a:prstGeom prst="ellipse">
+            <a:avLst/>
+          </a:prstGeom>
+          <a:solidFill>
+            <a:srgbClr val="02C39A"/>
+          </a:solidFill>
+          <a:ln>
+            <a:noFill/>
+          </a:ln>
+          <a:effectLst/>
+        </p:spPr>
+        <p:style>
+          <a:lnRef idx="1">
+            <a:schemeClr val="accent1"/>
+          </a:lnRef>
+          <a:fillRef idx="3">
+            <a:schemeClr val="accent1"/>
+          </a:fillRef>
+          <a:effectRef idx="2">
+            <a:schemeClr val="accent1"/>
+          </a:effectRef>
+          <a:fontRef idx="minor">
+            <a:schemeClr val="lt1"/>
+          </a:fontRef>
+        </p:style>
+        <p:txBody>
+          <a:bodyPr rtlCol="0" anchor="ctr"/>
+          <a:lstStyle/>
+          <a:p>
+            <a:pPr algn="ctr"/>
+          </a:p>
+        </p:txBody>
+      </p:sp>
+      <p:sp>
+        <p:nvSpPr>
+          <p:cNvPr id="5" name="TextBox 4"/>
+          <p:cNvSpPr txBox="1"/>
+          <p:nvPr/>
+        </p:nvSpPr>
+        <p:spPr>
+          <a:xfrm>
+            <a:off x="548640" y="1051560"/>
+            <a:ext cx="3017520" cy="548640"/>
+          </a:xfrm>
+          <a:prstGeom prst="rect">
+            <a:avLst/>
+          </a:prstGeom>
+          <a:noFill/>
+        </p:spPr>
+        <p:txBody>
+          <a:bodyPr wrap="square" anchor="t" lIns="0" rIns="0" tIns="0" bIns="0">
+            <a:spAutoFit/>
+          </a:bodyPr>
+          <a:lstStyle/>
+          <a:p>
+            <a:pPr algn="l">
+              <a:lnSpc>
+                <a:spcPct val="110000"/>
+              </a:lnSpc>
+              <a:spcAft>
+                <a:spcPts val="200"/>
+              </a:spcAft>
+            </a:pPr>
+            <a:r>
+              <a:rPr sz="2000" b="1">
+                <a:solidFill>
+                  <a:srgbClr val="02C39A"/>
+                </a:solidFill>
+                <a:latin typeface="Calibri"/>
+              </a:rPr>
+              <a:t>Onderzoeksvraag 3</a:t>
+            </a:r>
+          </a:p>
+        </p:txBody>
+      </p:sp>
+      <p:sp>
+        <p:nvSpPr>
+          <p:cNvPr id="6" name="TextBox 5"/>
+          <p:cNvSpPr txBox="1"/>
+          <p:nvPr/>
+        </p:nvSpPr>
+        <p:spPr>
+          <a:xfrm>
+            <a:off x="548640" y="1920240"/>
+            <a:ext cx="3108960" cy="4389120"/>
+          </a:xfrm>
+          <a:prstGeom prst="rect">
+            <a:avLst/>
+          </a:prstGeom>
+          <a:noFill/>
+        </p:spPr>
+        <p:txBody>
+          <a:bodyPr wrap="square" anchor="t" lIns="0" rIns="0" tIns="0" bIns="0">
+            <a:spAutoFit/>
+          </a:bodyPr>
+          <a:lstStyle/>
+          <a:p>
+            <a:pPr algn="l">
+              <a:lnSpc>
+                <a:spcPct val="140000"/>
+              </a:lnSpc>
+              <a:spcAft>
+                <a:spcPts val="200"/>
+              </a:spcAft>
+            </a:pPr>
+            <a:r>
+              <a:rPr sz="1500" b="1">
+                <a:solidFill>
+                  <a:srgbClr val="CADCFC"/>
+                </a:solidFill>
+                <a:latin typeface="Calibri"/>
+              </a:rPr>
+              <a:t>Stappen vooraf</a:t>
+            </a:r>
+          </a:p>
+          <a:p>
+            <a:pPr algn="l">
+              <a:lnSpc>
+                <a:spcPct val="140000"/>
+              </a:lnSpc>
+              <a:spcAft>
+                <a:spcPts val="200"/>
+              </a:spcAft>
+            </a:pPr>
+            <a:r>
+              <a:rPr sz="1400" b="0">
+                <a:solidFill>
+                  <a:srgbClr val="FFFFFF"/>
+                </a:solidFill>
+                <a:latin typeface="Calibri"/>
+              </a:rPr>
+              <a:t>1.  Data geselecteerd</a:t>
+            </a:r>
+          </a:p>
+          <a:p>
+            <a:pPr algn="l">
+              <a:lnSpc>
+                <a:spcPct val="140000"/>
+              </a:lnSpc>
+              <a:spcAft>
+                <a:spcPts val="200"/>
+              </a:spcAft>
+            </a:pPr>
+            <a:r>
+              <a:rPr sz="1400" b="0">
+                <a:solidFill>
+                  <a:srgbClr val="FFFFFF"/>
+                </a:solidFill>
+                <a:latin typeface="Calibri"/>
+              </a:rPr>
+              <a:t>2.  Heatmap bekeken</a:t>
+            </a:r>
+          </a:p>
+          <a:p>
+            <a:pPr algn="l">
+              <a:lnSpc>
+                <a:spcPct val="140000"/>
+              </a:lnSpc>
+              <a:spcAft>
+                <a:spcPts val="200"/>
+              </a:spcAft>
+            </a:pPr>
+            <a:r>
+              <a:rPr sz="1400" b="0">
+                <a:solidFill>
+                  <a:srgbClr val="FFFFFF"/>
+                </a:solidFill>
+                <a:latin typeface="Calibri"/>
+              </a:rPr>
+              <a:t>3.  Bubble chart (Copper x ASML)</a:t>
+            </a:r>
+          </a:p>
+          <a:p>
+            <a:pPr algn="l">
+              <a:lnSpc>
+                <a:spcPct val="140000"/>
+              </a:lnSpc>
+              <a:spcAft>
+                <a:spcPts val="200"/>
+              </a:spcAft>
+            </a:pPr>
+            <a:r>
+              <a:rPr sz="1400" b="0">
+                <a:solidFill>
+                  <a:srgbClr val="FFFFFF"/>
+                </a:solidFill>
+                <a:latin typeface="Calibri"/>
+              </a:rPr>
+              <a:t>4.  Enkelvoudige regressie</a:t>
+            </a:r>
+          </a:p>
+        </p:txBody>
+      </p:sp>
+      <p:sp>
+        <p:nvSpPr>
+          <p:cNvPr id="7" name="TextBox 6"/>
+          <p:cNvSpPr txBox="1"/>
+          <p:nvPr/>
+        </p:nvSpPr>
+        <p:spPr>
+          <a:xfrm>
+            <a:off x="4480560" y="914400"/>
+            <a:ext cx="7132320" cy="1280160"/>
+          </a:xfrm>
+          <a:prstGeom prst="rect">
+            <a:avLst/>
+          </a:prstGeom>
+          <a:noFill/>
+        </p:spPr>
+        <p:txBody>
+          <a:bodyPr wrap="square" anchor="t" lIns="0" rIns="0" tIns="0" bIns="0">
+            <a:spAutoFit/>
+          </a:bodyPr>
+          <a:lstStyle/>
+          <a:p>
+            <a:pPr algn="l">
+              <a:lnSpc>
+                <a:spcPct val="115000"/>
+              </a:lnSpc>
+              <a:spcAft>
+                <a:spcPts val="200"/>
+              </a:spcAft>
+            </a:pPr>
+            <a:r>
+              <a:rPr sz="1300" b="1">
+                <a:solidFill>
+                  <a:srgbClr val="02C39A"/>
+                </a:solidFill>
+                <a:latin typeface="Calibri"/>
+              </a:rPr>
+              <a:t>VRAAG</a:t>
+            </a:r>
+          </a:p>
+          <a:p>
+            <a:pPr algn="l">
+              <a:lnSpc>
+                <a:spcPct val="115000"/>
+              </a:lnSpc>
+              <a:spcAft>
+                <a:spcPts val="200"/>
+              </a:spcAft>
+            </a:pPr>
+            <a:r>
+              <a:rPr sz="1900" b="0">
+                <a:solidFill>
+                  <a:srgbClr val="21295C"/>
+                </a:solidFill>
+                <a:latin typeface="Calibri"/>
+              </a:rPr>
+              <a:t>Hoeveel invloed heeft de koperprijs op de koers van ASML?</a:t>
+            </a:r>
+          </a:p>
+        </p:txBody>
+      </p:sp>
+      <p:sp>
+        <p:nvSpPr>
+          <p:cNvPr id="8" name="TextBox 7"/>
+          <p:cNvSpPr txBox="1"/>
+          <p:nvPr/>
+        </p:nvSpPr>
+        <p:spPr>
+          <a:xfrm>
+            <a:off x="4480560" y="2651760"/>
+            <a:ext cx="7132320" cy="1005840"/>
+          </a:xfrm>
+          <a:prstGeom prst="rect">
+            <a:avLst/>
+          </a:prstGeom>
+          <a:noFill/>
+        </p:spPr>
+        <p:txBody>
+          <a:bodyPr wrap="square" anchor="t" lIns="0" rIns="0" tIns="0" bIns="0">
+            <a:spAutoFit/>
+          </a:bodyPr>
+          <a:lstStyle/>
+          <a:p>
+            <a:pPr algn="l">
+              <a:lnSpc>
+                <a:spcPct val="115000"/>
+              </a:lnSpc>
+              <a:spcAft>
+                <a:spcPts val="200"/>
+              </a:spcAft>
+            </a:pPr>
+            <a:r>
+              <a:rPr sz="1300" b="1">
+                <a:solidFill>
+                  <a:srgbClr val="02C39A"/>
+                </a:solidFill>
+                <a:latin typeface="Calibri"/>
+              </a:rPr>
+              <a:t>RESULTAAT REGRESSIE</a:t>
+            </a:r>
+          </a:p>
+          <a:p>
+            <a:pPr algn="l">
+              <a:lnSpc>
+                <a:spcPct val="115000"/>
+              </a:lnSpc>
+              <a:spcAft>
+                <a:spcPts val="200"/>
+              </a:spcAft>
+            </a:pPr>
+            <a:r>
+              <a:rPr sz="1600" b="0">
+                <a:solidFill>
+                  <a:srgbClr val="21295C"/>
+                </a:solidFill>
+                <a:latin typeface="Calibri"/>
+              </a:rPr>
+              <a:t>Copper +0,1560   ·   R² = 0,87   (p &lt; 0,05)</a:t>
+            </a:r>
+          </a:p>
+        </p:txBody>
+      </p:sp>
+      <p:sp>
+        <p:nvSpPr>
+          <p:cNvPr id="9" name="TextBox 8"/>
+          <p:cNvSpPr txBox="1"/>
+          <p:nvPr/>
+        </p:nvSpPr>
+        <p:spPr>
+          <a:xfrm>
+            <a:off x="4480560" y="3931920"/>
+            <a:ext cx="7132320" cy="2377440"/>
+          </a:xfrm>
+          <a:prstGeom prst="rect">
+            <a:avLst/>
+          </a:prstGeom>
+          <a:noFill/>
+        </p:spPr>
+        <p:txBody>
+          <a:bodyPr wrap="square" anchor="t" lIns="0" rIns="0" tIns="0" bIns="0">
+            <a:spAutoFit/>
+          </a:bodyPr>
+          <a:lstStyle/>
+          <a:p>
+            <a:pPr algn="l">
+              <a:lnSpc>
+                <a:spcPct val="125000"/>
+              </a:lnSpc>
+              <a:spcAft>
+                <a:spcPts val="200"/>
+              </a:spcAft>
+            </a:pPr>
+            <a:r>
+              <a:rPr sz="1300" b="1">
+                <a:solidFill>
+                  <a:srgbClr val="02C39A"/>
+                </a:solidFill>
+                <a:latin typeface="Calibri"/>
+              </a:rPr>
+              <a:t>CONCLUSIE</a:t>
+            </a:r>
+          </a:p>
+          <a:p>
+            <a:pPr algn="l">
+              <a:lnSpc>
+                <a:spcPct val="125000"/>
+              </a:lnSpc>
+              <a:spcAft>
+                <a:spcPts val="200"/>
+              </a:spcAft>
+            </a:pPr>
+            <a:r>
+              <a:rPr sz="1600" b="0">
+                <a:solidFill>
+                  <a:srgbClr val="21295C"/>
+                </a:solidFill>
+                <a:latin typeface="Calibri"/>
+              </a:rPr>
+              <a:t>Significant en sterke correlatie.</a:t>
+            </a:r>
+          </a:p>
+          <a:p>
+            <a:pPr algn="l">
+              <a:lnSpc>
+                <a:spcPct val="125000"/>
+              </a:lnSpc>
+              <a:spcAft>
+                <a:spcPts val="200"/>
+              </a:spcAft>
+            </a:pPr>
+            <a:r>
+              <a:rPr sz="1600" b="0">
+                <a:solidFill>
+                  <a:srgbClr val="21295C"/>
+                </a:solidFill>
+                <a:latin typeface="Calibri"/>
+              </a:rPr>
+              <a:t>Logisch: meer vraag naar chips -&gt; ASML stijgt,</a:t>
+            </a:r>
+          </a:p>
+          <a:p>
+            <a:pPr algn="l">
+              <a:lnSpc>
+                <a:spcPct val="125000"/>
+              </a:lnSpc>
+              <a:spcAft>
+                <a:spcPts val="200"/>
+              </a:spcAft>
+            </a:pPr>
+            <a:r>
+              <a:rPr sz="1600" b="0">
+                <a:solidFill>
+                  <a:srgbClr val="21295C"/>
+                </a:solidFill>
+                <a:latin typeface="Calibri"/>
+              </a:rPr>
+              <a:t>en chips gebruiken veel koper -&gt; koperprijs stijgt mee.</a:t>
+            </a:r>
+          </a:p>
+        </p:txBody>
+      </p:sp>
+    </p:spTree>
+  </p:cSld>
+  <p:clrMapOvr>
+    <a:masterClrMapping/>
+  </p:clrMapOvr>
+</p:sld>
+</file>
+
+<file path=ppt/slides/slide6.xml><?xml version="1.0" encoding="utf-8"?>
+<p:sld xmlns:a="http://schemas.openxmlformats.org/drawingml/2006/main" xmlns:p="http://schemas.openxmlformats.org/presentationml/2006/main" xmlns:r="http://schemas.openxmlformats.org/officeDocument/2006/relationships">
+  <p:cSld>
+    <p:spTree>
+      <p:nvGrpSpPr>
+        <p:cNvPr id="1" name=""/>
+        <p:cNvGrpSpPr/>
+        <p:nvPr/>
+      </p:nvGrpSpPr>
+      <p:grpSpPr/>
+      <p:sp>
+        <p:nvSpPr>
+          <p:cNvPr id="2" name="Rectangle 1"/>
+          <p:cNvSpPr/>
+          <p:nvPr/>
+        </p:nvSpPr>
+        <p:spPr>
+          <a:xfrm>
+            <a:off x="0" y="0"/>
+            <a:ext cx="12191695" cy="6858000"/>
+          </a:xfrm>
+          <a:prstGeom prst="rect">
+            <a:avLst/>
+          </a:prstGeom>
+          <a:solidFill>
+            <a:srgbClr val="FFFFFF"/>
+          </a:solidFill>
+          <a:ln>
+            <a:noFill/>
+          </a:ln>
+          <a:effectLst/>
+        </p:spPr>
+        <p:style>
+          <a:lnRef idx="1">
+            <a:schemeClr val="accent1"/>
+          </a:lnRef>
+          <a:fillRef idx="3">
+            <a:schemeClr val="accent1"/>
+          </a:fillRef>
+          <a:effectRef idx="2">
+            <a:schemeClr val="accent1"/>
+          </a:effectRef>
+          <a:fontRef idx="minor">
+            <a:schemeClr val="lt1"/>
+          </a:fontRef>
+        </p:style>
+        <p:txBody>
+          <a:bodyPr rtlCol="0" anchor="ctr"/>
+          <a:lstStyle/>
+          <a:p>
+            <a:pPr algn="ctr"/>
+          </a:p>
+        </p:txBody>
+      </p:sp>
+      <p:sp>
+        <p:nvSpPr>
+          <p:cNvPr id="3" name="Rectangle 2"/>
+          <p:cNvSpPr/>
+          <p:nvPr/>
+        </p:nvSpPr>
+        <p:spPr>
+          <a:xfrm>
+            <a:off x="0" y="0"/>
+            <a:ext cx="3931920" cy="6858000"/>
+          </a:xfrm>
+          <a:prstGeom prst="rect">
+            <a:avLst/>
+          </a:prstGeom>
+          <a:solidFill>
+            <a:srgbClr val="1E2761"/>
+          </a:solidFill>
+          <a:ln>
+            <a:noFill/>
+          </a:ln>
+          <a:effectLst/>
+        </p:spPr>
+        <p:style>
+          <a:lnRef idx="1">
+            <a:schemeClr val="accent1"/>
+          </a:lnRef>
+          <a:fillRef idx="3">
+            <a:schemeClr val="accent1"/>
+          </a:fillRef>
+          <a:effectRef idx="2">
+            <a:schemeClr val="accent1"/>
+          </a:effectRef>
+          <a:fontRef idx="minor">
+            <a:schemeClr val="lt1"/>
+          </a:fontRef>
+        </p:style>
+        <p:txBody>
+          <a:bodyPr rtlCol="0" anchor="ctr"/>
+          <a:lstStyle/>
+          <a:p>
+            <a:pPr algn="ctr"/>
+          </a:p>
+        </p:txBody>
+      </p:sp>
+      <p:sp>
+        <p:nvSpPr>
+          <p:cNvPr id="4" name="Oval 3"/>
+          <p:cNvSpPr/>
+          <p:nvPr/>
+        </p:nvSpPr>
+        <p:spPr>
+          <a:xfrm>
+            <a:off x="548640" y="640080"/>
+            <a:ext cx="256032" cy="256032"/>
+          </a:xfrm>
+          <a:prstGeom prst="ellipse">
+            <a:avLst/>
+          </a:prstGeom>
+          <a:solidFill>
+            <a:srgbClr val="02C39A"/>
+          </a:solidFill>
+          <a:ln>
+            <a:noFill/>
+          </a:ln>
+          <a:effectLst/>
+        </p:spPr>
+        <p:style>
+          <a:lnRef idx="1">
+            <a:schemeClr val="accent1"/>
+          </a:lnRef>
+          <a:fillRef idx="3">
+            <a:schemeClr val="accent1"/>
+          </a:fillRef>
+          <a:effectRef idx="2">
+            <a:schemeClr val="accent1"/>
+          </a:effectRef>
+          <a:fontRef idx="minor">
+            <a:schemeClr val="lt1"/>
+          </a:fontRef>
+        </p:style>
+        <p:txBody>
+          <a:bodyPr rtlCol="0" anchor="ctr"/>
+          <a:lstStyle/>
+          <a:p>
+            <a:pPr algn="ctr"/>
+          </a:p>
+        </p:txBody>
+      </p:sp>
+      <p:sp>
+        <p:nvSpPr>
+          <p:cNvPr id="5" name="TextBox 4"/>
+          <p:cNvSpPr txBox="1"/>
+          <p:nvPr/>
+        </p:nvSpPr>
+        <p:spPr>
+          <a:xfrm>
+            <a:off x="548640" y="1051560"/>
+            <a:ext cx="3017520" cy="548640"/>
+          </a:xfrm>
+          <a:prstGeom prst="rect">
+            <a:avLst/>
+          </a:prstGeom>
+          <a:noFill/>
+        </p:spPr>
+        <p:txBody>
+          <a:bodyPr wrap="square" anchor="t" lIns="0" rIns="0" tIns="0" bIns="0">
+            <a:spAutoFit/>
+          </a:bodyPr>
+          <a:lstStyle/>
+          <a:p>
+            <a:pPr algn="l">
+              <a:lnSpc>
+                <a:spcPct val="110000"/>
+              </a:lnSpc>
+              <a:spcAft>
+                <a:spcPts val="200"/>
+              </a:spcAft>
+            </a:pPr>
+            <a:r>
+              <a:rPr sz="2000" b="1">
+                <a:solidFill>
+                  <a:srgbClr val="02C39A"/>
+                </a:solidFill>
+                <a:latin typeface="Calibri"/>
+              </a:rPr>
+              <a:t>Onderzoeksvraag 4</a:t>
+            </a:r>
+          </a:p>
+        </p:txBody>
+      </p:sp>
+      <p:sp>
+        <p:nvSpPr>
+          <p:cNvPr id="6" name="TextBox 5"/>
+          <p:cNvSpPr txBox="1"/>
+          <p:nvPr/>
+        </p:nvSpPr>
+        <p:spPr>
+          <a:xfrm>
+            <a:off x="548640" y="1920240"/>
+            <a:ext cx="3108960" cy="4389120"/>
+          </a:xfrm>
+          <a:prstGeom prst="rect">
+            <a:avLst/>
+          </a:prstGeom>
+          <a:noFill/>
+        </p:spPr>
+        <p:txBody>
+          <a:bodyPr wrap="square" anchor="t" lIns="0" rIns="0" tIns="0" bIns="0">
+            <a:spAutoFit/>
+          </a:bodyPr>
+          <a:lstStyle/>
+          <a:p>
+            <a:pPr algn="l">
+              <a:lnSpc>
+                <a:spcPct val="140000"/>
+              </a:lnSpc>
+              <a:spcAft>
+                <a:spcPts val="200"/>
+              </a:spcAft>
+            </a:pPr>
+            <a:r>
+              <a:rPr sz="1500" b="1">
+                <a:solidFill>
+                  <a:srgbClr val="CADCFC"/>
+                </a:solidFill>
+                <a:latin typeface="Calibri"/>
+              </a:rPr>
+              <a:t>Stappen vooraf</a:t>
+            </a:r>
+          </a:p>
+          <a:p>
+            <a:pPr algn="l">
+              <a:lnSpc>
+                <a:spcPct val="140000"/>
+              </a:lnSpc>
+              <a:spcAft>
+                <a:spcPts val="200"/>
+              </a:spcAft>
+            </a:pPr>
+            <a:r>
+              <a:rPr sz="1400" b="0">
+                <a:solidFill>
+                  <a:srgbClr val="FFFFFF"/>
+                </a:solidFill>
+                <a:latin typeface="Calibri"/>
+              </a:rPr>
+              <a:t>1.  Data geselecteerd</a:t>
+            </a:r>
+          </a:p>
+          <a:p>
+            <a:pPr algn="l">
+              <a:lnSpc>
+                <a:spcPct val="140000"/>
+              </a:lnSpc>
+              <a:spcAft>
+                <a:spcPts val="200"/>
+              </a:spcAft>
+            </a:pPr>
+            <a:r>
+              <a:rPr sz="1400" b="0">
+                <a:solidFill>
+                  <a:srgbClr val="FFFFFF"/>
+                </a:solidFill>
+                <a:latin typeface="Calibri"/>
+              </a:rPr>
+              <a:t>2.  Heatmap bekeken</a:t>
+            </a:r>
+          </a:p>
+          <a:p>
+            <a:pPr algn="l">
+              <a:lnSpc>
+                <a:spcPct val="140000"/>
+              </a:lnSpc>
+              <a:spcAft>
+                <a:spcPts val="200"/>
+              </a:spcAft>
+            </a:pPr>
+            <a:r>
+              <a:rPr sz="1400" b="0">
+                <a:solidFill>
+                  <a:srgbClr val="FFFFFF"/>
+                </a:solidFill>
+                <a:latin typeface="Calibri"/>
+              </a:rPr>
+              <a:t>3.  Bubble chart (Gasoline x Oil x Shell)</a:t>
+            </a:r>
+          </a:p>
+          <a:p>
+            <a:pPr algn="l">
+              <a:lnSpc>
+                <a:spcPct val="140000"/>
+              </a:lnSpc>
+              <a:spcAft>
+                <a:spcPts val="200"/>
+              </a:spcAft>
+            </a:pPr>
+            <a:r>
+              <a:rPr sz="1400" b="0">
+                <a:solidFill>
+                  <a:srgbClr val="FFFFFF"/>
+                </a:solidFill>
+                <a:latin typeface="Calibri"/>
+              </a:rPr>
+              <a:t>4.  Meervoudige regressie</a:t>
+            </a:r>
+          </a:p>
+        </p:txBody>
+      </p:sp>
+      <p:sp>
+        <p:nvSpPr>
+          <p:cNvPr id="7" name="TextBox 6"/>
+          <p:cNvSpPr txBox="1"/>
+          <p:nvPr/>
+        </p:nvSpPr>
+        <p:spPr>
+          <a:xfrm>
+            <a:off x="4480560" y="914400"/>
+            <a:ext cx="7132320" cy="1280160"/>
+          </a:xfrm>
+          <a:prstGeom prst="rect">
+            <a:avLst/>
+          </a:prstGeom>
+          <a:noFill/>
+        </p:spPr>
+        <p:txBody>
+          <a:bodyPr wrap="square" anchor="t" lIns="0" rIns="0" tIns="0" bIns="0">
+            <a:spAutoFit/>
+          </a:bodyPr>
+          <a:lstStyle/>
+          <a:p>
+            <a:pPr algn="l">
+              <a:lnSpc>
+                <a:spcPct val="115000"/>
+              </a:lnSpc>
+              <a:spcAft>
+                <a:spcPts val="200"/>
+              </a:spcAft>
+            </a:pPr>
+            <a:r>
+              <a:rPr sz="1300" b="1">
+                <a:solidFill>
+                  <a:srgbClr val="02C39A"/>
+                </a:solidFill>
+                <a:latin typeface="Calibri"/>
+              </a:rPr>
+              <a:t>VRAAG</a:t>
+            </a:r>
+          </a:p>
+          <a:p>
+            <a:pPr algn="l">
+              <a:lnSpc>
+                <a:spcPct val="115000"/>
+              </a:lnSpc>
+              <a:spcAft>
+                <a:spcPts val="200"/>
+              </a:spcAft>
+            </a:pPr>
+            <a:r>
+              <a:rPr sz="1900" b="0">
+                <a:solidFill>
+                  <a:srgbClr val="21295C"/>
+                </a:solidFill>
+                <a:latin typeface="Calibri"/>
+              </a:rPr>
+              <a:t>Waarom lijkt er minder verband tussen benzine, olie en de koers van Shell?</a:t>
+            </a:r>
+          </a:p>
+        </p:txBody>
+      </p:sp>
+      <p:sp>
+        <p:nvSpPr>
+          <p:cNvPr id="8" name="TextBox 7"/>
+          <p:cNvSpPr txBox="1"/>
+          <p:nvPr/>
+        </p:nvSpPr>
+        <p:spPr>
+          <a:xfrm>
+            <a:off x="4480560" y="2651760"/>
+            <a:ext cx="7132320" cy="1005840"/>
+          </a:xfrm>
+          <a:prstGeom prst="rect">
+            <a:avLst/>
+          </a:prstGeom>
+          <a:noFill/>
+        </p:spPr>
+        <p:txBody>
+          <a:bodyPr wrap="square" anchor="t" lIns="0" rIns="0" tIns="0" bIns="0">
+            <a:spAutoFit/>
+          </a:bodyPr>
+          <a:lstStyle/>
+          <a:p>
+            <a:pPr algn="l">
+              <a:lnSpc>
+                <a:spcPct val="115000"/>
+              </a:lnSpc>
+              <a:spcAft>
+                <a:spcPts val="200"/>
+              </a:spcAft>
+            </a:pPr>
+            <a:r>
+              <a:rPr sz="1300" b="1">
+                <a:solidFill>
+                  <a:srgbClr val="02C39A"/>
+                </a:solidFill>
+                <a:latin typeface="Calibri"/>
+              </a:rPr>
+              <a:t>RESULTAAT REGRESSIE</a:t>
+            </a:r>
+          </a:p>
+          <a:p>
+            <a:pPr algn="l">
+              <a:lnSpc>
+                <a:spcPct val="115000"/>
+              </a:lnSpc>
+              <a:spcAft>
+                <a:spcPts val="200"/>
+              </a:spcAft>
+            </a:pPr>
+            <a:r>
+              <a:rPr sz="1600" b="0">
+                <a:solidFill>
+                  <a:srgbClr val="21295C"/>
+                </a:solidFill>
+                <a:latin typeface="Calibri"/>
+              </a:rPr>
+              <a:t>Gasoline +11,6507   ·   Oil +0,0891   ·   R² = 0,36   (p &lt; 0,05)</a:t>
+            </a:r>
+          </a:p>
+        </p:txBody>
+      </p:sp>
+      <p:sp>
+        <p:nvSpPr>
+          <p:cNvPr id="9" name="TextBox 8"/>
+          <p:cNvSpPr txBox="1"/>
+          <p:nvPr/>
+        </p:nvSpPr>
+        <p:spPr>
+          <a:xfrm>
+            <a:off x="4480560" y="3931920"/>
+            <a:ext cx="7132320" cy="2377440"/>
+          </a:xfrm>
+          <a:prstGeom prst="rect">
+            <a:avLst/>
+          </a:prstGeom>
+          <a:noFill/>
+        </p:spPr>
+        <p:txBody>
+          <a:bodyPr wrap="square" anchor="t" lIns="0" rIns="0" tIns="0" bIns="0">
+            <a:spAutoFit/>
+          </a:bodyPr>
+          <a:lstStyle/>
+          <a:p>
+            <a:pPr algn="l">
+              <a:lnSpc>
+                <a:spcPct val="125000"/>
+              </a:lnSpc>
+              <a:spcAft>
+                <a:spcPts val="200"/>
+              </a:spcAft>
+            </a:pPr>
+            <a:r>
+              <a:rPr sz="1300" b="1">
+                <a:solidFill>
+                  <a:srgbClr val="02C39A"/>
+                </a:solidFill>
+                <a:latin typeface="Calibri"/>
+              </a:rPr>
+              <a:t>CONCLUSIE</a:t>
+            </a:r>
+          </a:p>
+          <a:p>
+            <a:pPr algn="l">
+              <a:lnSpc>
+                <a:spcPct val="125000"/>
+              </a:lnSpc>
+              <a:spcAft>
+                <a:spcPts val="200"/>
+              </a:spcAft>
+            </a:pPr>
+            <a:r>
+              <a:rPr sz="1600" b="0">
+                <a:solidFill>
+                  <a:srgbClr val="21295C"/>
+                </a:solidFill>
+                <a:latin typeface="Calibri"/>
+              </a:rPr>
+              <a:t>Significant maar slechts matige correlatie.</a:t>
+            </a:r>
+          </a:p>
+          <a:p>
+            <a:pPr algn="l">
+              <a:lnSpc>
+                <a:spcPct val="125000"/>
+              </a:lnSpc>
+              <a:spcAft>
+                <a:spcPts val="200"/>
+              </a:spcAft>
+            </a:pPr>
+            <a:r>
+              <a:rPr sz="1600" b="0">
+                <a:solidFill>
+                  <a:srgbClr val="21295C"/>
+                </a:solidFill>
+                <a:latin typeface="Calibri"/>
+              </a:rPr>
+              <a:t>Shell reageert niet op de actuele, maar op de verwachte</a:t>
+            </a:r>
+          </a:p>
+          <a:p>
+            <a:pPr algn="l">
+              <a:lnSpc>
+                <a:spcPct val="125000"/>
+              </a:lnSpc>
+              <a:spcAft>
+                <a:spcPts val="200"/>
+              </a:spcAft>
+            </a:pPr>
+            <a:r>
+              <a:rPr sz="1600" b="0">
+                <a:solidFill>
+                  <a:srgbClr val="21295C"/>
+                </a:solidFill>
+                <a:latin typeface="Calibri"/>
+              </a:rPr>
+              <a:t>langetermijnprijs -&gt; onderzocht met timeshift.</a:t>
+            </a:r>
+          </a:p>
+        </p:txBody>
+      </p:sp>
+    </p:spTree>
+  </p:cSld>
+  <p:clrMapOvr>
+    <a:masterClrMapping/>
+  </p:clrMapOvr>
+</p:sld>
+</file>
+
+<file path=ppt/slides/slide7.xml><?xml version="1.0" encoding="utf-8"?>
+<p:sld xmlns:a="http://schemas.openxmlformats.org/drawingml/2006/main" xmlns:p="http://schemas.openxmlformats.org/presentationml/2006/main" xmlns:r="http://schemas.openxmlformats.org/officeDocument/2006/relationships">
+  <p:cSld>
+    <p:spTree>
+      <p:nvGrpSpPr>
+        <p:cNvPr id="1" name=""/>
+        <p:cNvGrpSpPr/>
+        <p:nvPr/>
+      </p:nvGrpSpPr>
+      <p:grpSpPr/>
+      <p:sp>
+        <p:nvSpPr>
+          <p:cNvPr id="2" name="Rectangle 1"/>
+          <p:cNvSpPr/>
+          <p:nvPr/>
+        </p:nvSpPr>
+        <p:spPr>
+          <a:xfrm>
+            <a:off x="0" y="0"/>
+            <a:ext cx="12191695" cy="6858000"/>
+          </a:xfrm>
+          <a:prstGeom prst="rect">
+            <a:avLst/>
+          </a:prstGeom>
+          <a:solidFill>
+            <a:srgbClr val="FFFFFF"/>
+          </a:solidFill>
+          <a:ln>
+            <a:noFill/>
+          </a:ln>
+          <a:effectLst/>
+        </p:spPr>
+        <p:style>
+          <a:lnRef idx="1">
+            <a:schemeClr val="accent1"/>
+          </a:lnRef>
+          <a:fillRef idx="3">
+            <a:schemeClr val="accent1"/>
+          </a:fillRef>
+          <a:effectRef idx="2">
+            <a:schemeClr val="accent1"/>
+          </a:effectRef>
+          <a:fontRef idx="minor">
+            <a:schemeClr val="lt1"/>
+          </a:fontRef>
+        </p:style>
+        <p:txBody>
+          <a:bodyPr rtlCol="0" anchor="ctr"/>
+          <a:lstStyle/>
+          <a:p>
+            <a:pPr algn="ctr"/>
+          </a:p>
+        </p:txBody>
+      </p:sp>
+      <p:sp>
+        <p:nvSpPr>
+          <p:cNvPr id="3" name="Rectangle 2"/>
+          <p:cNvSpPr/>
+          <p:nvPr/>
+        </p:nvSpPr>
+        <p:spPr>
+          <a:xfrm>
+            <a:off x="0" y="0"/>
+            <a:ext cx="3931920" cy="6858000"/>
+          </a:xfrm>
+          <a:prstGeom prst="rect">
+            <a:avLst/>
+          </a:prstGeom>
+          <a:solidFill>
+            <a:srgbClr val="1E2761"/>
+          </a:solidFill>
+          <a:ln>
+            <a:noFill/>
+          </a:ln>
+          <a:effectLst/>
+        </p:spPr>
+        <p:style>
+          <a:lnRef idx="1">
+            <a:schemeClr val="accent1"/>
+          </a:lnRef>
+          <a:fillRef idx="3">
+            <a:schemeClr val="accent1"/>
+          </a:fillRef>
+          <a:effectRef idx="2">
+            <a:schemeClr val="accent1"/>
+          </a:effectRef>
+          <a:fontRef idx="minor">
+            <a:schemeClr val="lt1"/>
+          </a:fontRef>
+        </p:style>
+        <p:txBody>
+          <a:bodyPr rtlCol="0" anchor="ctr"/>
+          <a:lstStyle/>
+          <a:p>
+            <a:pPr algn="ctr"/>
+          </a:p>
+        </p:txBody>
+      </p:sp>
+      <p:sp>
+        <p:nvSpPr>
+          <p:cNvPr id="4" name="Oval 3"/>
+          <p:cNvSpPr/>
+          <p:nvPr/>
+        </p:nvSpPr>
+        <p:spPr>
+          <a:xfrm>
+            <a:off x="548640" y="640080"/>
+            <a:ext cx="256032" cy="256032"/>
+          </a:xfrm>
+          <a:prstGeom prst="ellipse">
+            <a:avLst/>
+          </a:prstGeom>
+          <a:solidFill>
+            <a:srgbClr val="02C39A"/>
+          </a:solidFill>
+          <a:ln>
+            <a:noFill/>
+          </a:ln>
+          <a:effectLst/>
+        </p:spPr>
+        <p:style>
+          <a:lnRef idx="1">
+            <a:schemeClr val="accent1"/>
+          </a:lnRef>
+          <a:fillRef idx="3">
+            <a:schemeClr val="accent1"/>
+          </a:fillRef>
+          <a:effectRef idx="2">
+            <a:schemeClr val="accent1"/>
+          </a:effectRef>
+          <a:fontRef idx="minor">
+            <a:schemeClr val="lt1"/>
+          </a:fontRef>
+        </p:style>
+        <p:txBody>
+          <a:bodyPr rtlCol="0" anchor="ctr"/>
+          <a:lstStyle/>
+          <a:p>
+            <a:pPr algn="ctr"/>
+          </a:p>
+        </p:txBody>
+      </p:sp>
+      <p:sp>
+        <p:nvSpPr>
+          <p:cNvPr id="5" name="TextBox 4"/>
+          <p:cNvSpPr txBox="1"/>
+          <p:nvPr/>
+        </p:nvSpPr>
+        <p:spPr>
+          <a:xfrm>
+            <a:off x="548640" y="1051560"/>
+            <a:ext cx="3017520" cy="548640"/>
+          </a:xfrm>
+          <a:prstGeom prst="rect">
+            <a:avLst/>
+          </a:prstGeom>
+          <a:noFill/>
+        </p:spPr>
+        <p:txBody>
+          <a:bodyPr wrap="square" anchor="t" lIns="0" rIns="0" tIns="0" bIns="0">
+            <a:spAutoFit/>
+          </a:bodyPr>
+          <a:lstStyle/>
+          <a:p>
+            <a:pPr algn="l">
+              <a:lnSpc>
+                <a:spcPct val="110000"/>
+              </a:lnSpc>
+              <a:spcAft>
+                <a:spcPts val="200"/>
+              </a:spcAft>
+            </a:pPr>
+            <a:r>
+              <a:rPr sz="2000" b="1">
+                <a:solidFill>
+                  <a:srgbClr val="02C39A"/>
+                </a:solidFill>
+                <a:latin typeface="Calibri"/>
+              </a:rPr>
+              <a:t>Onderzoeksvraag 5</a:t>
+            </a:r>
+          </a:p>
+        </p:txBody>
+      </p:sp>
+      <p:sp>
+        <p:nvSpPr>
+          <p:cNvPr id="6" name="TextBox 5"/>
+          <p:cNvSpPr txBox="1"/>
+          <p:nvPr/>
+        </p:nvSpPr>
+        <p:spPr>
+          <a:xfrm>
+            <a:off x="548640" y="1920240"/>
+            <a:ext cx="3108960" cy="4389120"/>
+          </a:xfrm>
+          <a:prstGeom prst="rect">
+            <a:avLst/>
+          </a:prstGeom>
+          <a:noFill/>
+        </p:spPr>
+        <p:txBody>
+          <a:bodyPr wrap="square" anchor="t" lIns="0" rIns="0" tIns="0" bIns="0">
+            <a:spAutoFit/>
+          </a:bodyPr>
+          <a:lstStyle/>
+          <a:p>
+            <a:pPr algn="l">
+              <a:lnSpc>
+                <a:spcPct val="140000"/>
+              </a:lnSpc>
+              <a:spcAft>
+                <a:spcPts val="200"/>
+              </a:spcAft>
+            </a:pPr>
+            <a:r>
+              <a:rPr sz="1500" b="1">
+                <a:solidFill>
+                  <a:srgbClr val="CADCFC"/>
+                </a:solidFill>
+                <a:latin typeface="Calibri"/>
+              </a:rPr>
+              <a:t>Stappen vooraf</a:t>
+            </a:r>
+          </a:p>
+          <a:p>
+            <a:pPr algn="l">
+              <a:lnSpc>
+                <a:spcPct val="140000"/>
+              </a:lnSpc>
+              <a:spcAft>
+                <a:spcPts val="200"/>
+              </a:spcAft>
+            </a:pPr>
+            <a:r>
+              <a:rPr sz="1400" b="0">
+                <a:solidFill>
+                  <a:srgbClr val="FFFFFF"/>
+                </a:solidFill>
+                <a:latin typeface="Calibri"/>
+              </a:rPr>
+              <a:t>1.  Data geselecteerd</a:t>
+            </a:r>
+          </a:p>
+          <a:p>
+            <a:pPr algn="l">
+              <a:lnSpc>
+                <a:spcPct val="140000"/>
+              </a:lnSpc>
+              <a:spcAft>
+                <a:spcPts val="200"/>
+              </a:spcAft>
+            </a:pPr>
+            <a:r>
+              <a:rPr sz="1400" b="0">
+                <a:solidFill>
+                  <a:srgbClr val="FFFFFF"/>
+                </a:solidFill>
+                <a:latin typeface="Calibri"/>
+              </a:rPr>
+              <a:t>2.  Heatmap bekeken</a:t>
+            </a:r>
+          </a:p>
+          <a:p>
+            <a:pPr algn="l">
+              <a:lnSpc>
+                <a:spcPct val="140000"/>
+              </a:lnSpc>
+              <a:spcAft>
+                <a:spcPts val="200"/>
+              </a:spcAft>
+            </a:pPr>
+            <a:r>
+              <a:rPr sz="1400" b="0">
+                <a:solidFill>
+                  <a:srgbClr val="FFFFFF"/>
+                </a:solidFill>
+                <a:latin typeface="Calibri"/>
+              </a:rPr>
+              <a:t>3.  Bubble chart (4 variabelen)</a:t>
+            </a:r>
+          </a:p>
+          <a:p>
+            <a:pPr algn="l">
+              <a:lnSpc>
+                <a:spcPct val="140000"/>
+              </a:lnSpc>
+              <a:spcAft>
+                <a:spcPts val="200"/>
+              </a:spcAft>
+            </a:pPr>
+            <a:r>
+              <a:rPr sz="1400" b="0">
+                <a:solidFill>
+                  <a:srgbClr val="FFFFFF"/>
+                </a:solidFill>
+                <a:latin typeface="Calibri"/>
+              </a:rPr>
+              <a:t>4.  Regressie + neuraal netwerk</a:t>
+            </a:r>
+          </a:p>
+        </p:txBody>
+      </p:sp>
+      <p:sp>
+        <p:nvSpPr>
+          <p:cNvPr id="7" name="TextBox 6"/>
+          <p:cNvSpPr txBox="1"/>
+          <p:nvPr/>
+        </p:nvSpPr>
+        <p:spPr>
+          <a:xfrm>
+            <a:off x="4480560" y="914400"/>
+            <a:ext cx="7132320" cy="1280160"/>
+          </a:xfrm>
+          <a:prstGeom prst="rect">
+            <a:avLst/>
+          </a:prstGeom>
+          <a:noFill/>
+        </p:spPr>
+        <p:txBody>
+          <a:bodyPr wrap="square" anchor="t" lIns="0" rIns="0" tIns="0" bIns="0">
+            <a:spAutoFit/>
+          </a:bodyPr>
+          <a:lstStyle/>
+          <a:p>
+            <a:pPr algn="l">
+              <a:lnSpc>
+                <a:spcPct val="115000"/>
+              </a:lnSpc>
+              <a:spcAft>
+                <a:spcPts val="200"/>
+              </a:spcAft>
+            </a:pPr>
+            <a:r>
+              <a:rPr sz="1300" b="1">
+                <a:solidFill>
+                  <a:srgbClr val="02C39A"/>
+                </a:solidFill>
+                <a:latin typeface="Calibri"/>
+              </a:rPr>
+              <a:t>VRAAG</a:t>
+            </a:r>
+          </a:p>
+          <a:p>
+            <a:pPr algn="l">
+              <a:lnSpc>
+                <a:spcPct val="115000"/>
+              </a:lnSpc>
+              <a:spcAft>
+                <a:spcPts val="200"/>
+              </a:spcAft>
+            </a:pPr>
+            <a:r>
+              <a:rPr sz="1900" b="0">
+                <a:solidFill>
+                  <a:srgbClr val="21295C"/>
+                </a:solidFill>
+                <a:latin typeface="Calibri"/>
+              </a:rPr>
+              <a:t>Wat is het verband tussen koffie, koper, goud en de koers van Apple?</a:t>
+            </a:r>
+          </a:p>
+        </p:txBody>
+      </p:sp>
+      <p:sp>
+        <p:nvSpPr>
+          <p:cNvPr id="8" name="TextBox 7"/>
+          <p:cNvSpPr txBox="1"/>
+          <p:nvPr/>
+        </p:nvSpPr>
+        <p:spPr>
+          <a:xfrm>
+            <a:off x="4480560" y="2651760"/>
+            <a:ext cx="7132320" cy="1005840"/>
+          </a:xfrm>
+          <a:prstGeom prst="rect">
+            <a:avLst/>
+          </a:prstGeom>
+          <a:noFill/>
+        </p:spPr>
+        <p:txBody>
+          <a:bodyPr wrap="square" anchor="t" lIns="0" rIns="0" tIns="0" bIns="0">
+            <a:spAutoFit/>
+          </a:bodyPr>
+          <a:lstStyle/>
+          <a:p>
+            <a:pPr algn="l">
+              <a:lnSpc>
+                <a:spcPct val="115000"/>
+              </a:lnSpc>
+              <a:spcAft>
+                <a:spcPts val="200"/>
+              </a:spcAft>
+            </a:pPr>
+            <a:r>
+              <a:rPr sz="1300" b="1">
+                <a:solidFill>
+                  <a:srgbClr val="02C39A"/>
+                </a:solidFill>
+                <a:latin typeface="Calibri"/>
+              </a:rPr>
+              <a:t>RESULTAAT REGRESSIE</a:t>
+            </a:r>
+          </a:p>
+          <a:p>
+            <a:pPr algn="l">
+              <a:lnSpc>
+                <a:spcPct val="115000"/>
+              </a:lnSpc>
+              <a:spcAft>
+                <a:spcPts val="200"/>
+              </a:spcAft>
+            </a:pPr>
+            <a:r>
+              <a:rPr sz="1600" b="0">
+                <a:solidFill>
+                  <a:srgbClr val="21295C"/>
+                </a:solidFill>
+                <a:latin typeface="Calibri"/>
+              </a:rPr>
+              <a:t>Coffee +0,7351  ·  Copper +0,0236  ·  Gold -0,0097  ·  R² = 0,88</a:t>
+            </a:r>
+          </a:p>
+        </p:txBody>
+      </p:sp>
+      <p:sp>
+        <p:nvSpPr>
+          <p:cNvPr id="9" name="TextBox 8"/>
+          <p:cNvSpPr txBox="1"/>
+          <p:nvPr/>
+        </p:nvSpPr>
+        <p:spPr>
+          <a:xfrm>
+            <a:off x="4480560" y="3931920"/>
+            <a:ext cx="7132320" cy="2377440"/>
+          </a:xfrm>
+          <a:prstGeom prst="rect">
+            <a:avLst/>
+          </a:prstGeom>
+          <a:noFill/>
+        </p:spPr>
+        <p:txBody>
+          <a:bodyPr wrap="square" anchor="t" lIns="0" rIns="0" tIns="0" bIns="0">
+            <a:spAutoFit/>
+          </a:bodyPr>
+          <a:lstStyle/>
+          <a:p>
+            <a:pPr algn="l">
+              <a:lnSpc>
+                <a:spcPct val="125000"/>
+              </a:lnSpc>
+              <a:spcAft>
+                <a:spcPts val="200"/>
+              </a:spcAft>
+            </a:pPr>
+            <a:r>
+              <a:rPr sz="1300" b="1">
+                <a:solidFill>
+                  <a:srgbClr val="02C39A"/>
+                </a:solidFill>
+                <a:latin typeface="Calibri"/>
+              </a:rPr>
+              <a:t>CONCLUSIE</a:t>
+            </a:r>
+          </a:p>
+          <a:p>
+            <a:pPr algn="l">
+              <a:lnSpc>
+                <a:spcPct val="125000"/>
+              </a:lnSpc>
+              <a:spcAft>
+                <a:spcPts val="200"/>
+              </a:spcAft>
+            </a:pPr>
+            <a:r>
+              <a:rPr sz="1600" b="0">
+                <a:solidFill>
+                  <a:srgbClr val="21295C"/>
+                </a:solidFill>
+                <a:latin typeface="Calibri"/>
+              </a:rPr>
+              <a:t>Significant en sterke correlatie.</a:t>
+            </a:r>
+          </a:p>
+          <a:p>
+            <a:pPr algn="l">
+              <a:lnSpc>
+                <a:spcPct val="125000"/>
+              </a:lnSpc>
+              <a:spcAft>
+                <a:spcPts val="200"/>
+              </a:spcAft>
+            </a:pPr>
+            <a:r>
+              <a:rPr sz="1600" b="0">
+                <a:solidFill>
+                  <a:srgbClr val="21295C"/>
+                </a:solidFill>
+                <a:latin typeface="Calibri"/>
+              </a:rPr>
+              <a:t>Hoogconjunctuur drijft Apple en koper omhoog;</a:t>
+            </a:r>
+          </a:p>
+          <a:p>
+            <a:pPr algn="l">
+              <a:lnSpc>
+                <a:spcPct val="125000"/>
+              </a:lnSpc>
+              <a:spcAft>
+                <a:spcPts val="200"/>
+              </a:spcAft>
+            </a:pPr>
+            <a:r>
+              <a:rPr sz="1600" b="0">
+                <a:solidFill>
+                  <a:srgbClr val="21295C"/>
+                </a:solidFill>
+                <a:latin typeface="Calibri"/>
+              </a:rPr>
+              <a:t>goud reageert juist zwakker (veilige haven).</a:t>
+            </a:r>
+          </a:p>
+        </p:txBody>
+      </p:sp>
+    </p:spTree>
+  </p:cSld>
+  <p:clrMapOvr>
+    <a:masterClrMapping/>
+  </p:clrMapOvr>
+</p:sld>
+</file>
+
+<file path=ppt/slides/slide8.xml><?xml version="1.0" encoding="utf-8"?>
+<p:sld xmlns:a="http://schemas.openxmlformats.org/drawingml/2006/main" xmlns:p="http://schemas.openxmlformats.org/presentationml/2006/main" xmlns:r="http://schemas.openxmlformats.org/officeDocument/2006/relationships">
+  <p:cSld>
+    <p:spTree>
+      <p:nvGrpSpPr>
+        <p:cNvPr id="1" name=""/>
+        <p:cNvGrpSpPr/>
+        <p:nvPr/>
+      </p:nvGrpSpPr>
+      <p:grpSpPr/>
+      <p:sp>
+        <p:nvSpPr>
+          <p:cNvPr id="2" name="Rectangle 1"/>
+          <p:cNvSpPr/>
+          <p:nvPr/>
+        </p:nvSpPr>
+        <p:spPr>
+          <a:xfrm>
+            <a:off x="0" y="0"/>
+            <a:ext cx="12191695" cy="6858000"/>
+          </a:xfrm>
+          <a:prstGeom prst="rect">
+            <a:avLst/>
+          </a:prstGeom>
+          <a:solidFill>
+            <a:srgbClr val="FFFFFF"/>
+          </a:solidFill>
+          <a:ln>
+            <a:noFill/>
+          </a:ln>
+          <a:effectLst/>
+        </p:spPr>
+        <p:style>
+          <a:lnRef idx="1">
+            <a:schemeClr val="accent1"/>
+          </a:lnRef>
+          <a:fillRef idx="3">
+            <a:schemeClr val="accent1"/>
+          </a:fillRef>
+          <a:effectRef idx="2">
+            <a:schemeClr val="accent1"/>
+          </a:effectRef>
+          <a:fontRef idx="minor">
+            <a:schemeClr val="lt1"/>
+          </a:fontRef>
+        </p:style>
+        <p:txBody>
+          <a:bodyPr rtlCol="0" anchor="ctr"/>
+          <a:lstStyle/>
+          <a:p>
+            <a:pPr algn="ctr"/>
+          </a:p>
+        </p:txBody>
+      </p:sp>
+      <p:sp>
+        <p:nvSpPr>
+          <p:cNvPr id="3" name="TextBox 2"/>
+          <p:cNvSpPr txBox="1"/>
+          <p:nvPr/>
+        </p:nvSpPr>
+        <p:spPr>
+          <a:xfrm>
+            <a:off x="822960" y="502920"/>
+            <a:ext cx="10607040" cy="914400"/>
+          </a:xfrm>
+          <a:prstGeom prst="rect">
+            <a:avLst/>
+          </a:prstGeom>
+          <a:noFill/>
+        </p:spPr>
+        <p:txBody>
+          <a:bodyPr wrap="square" anchor="ctr" lIns="0" rIns="0" tIns="0" bIns="0">
+            <a:spAutoFit/>
+          </a:bodyPr>
+          <a:lstStyle/>
+          <a:p>
+            <a:pPr algn="l">
+              <a:lnSpc>
+                <a:spcPct val="110000"/>
+              </a:lnSpc>
+              <a:spcAft>
+                <a:spcPts val="200"/>
+              </a:spcAft>
+            </a:pPr>
+            <a:r>
+              <a:rPr sz="3200" b="1">
+                <a:solidFill>
+                  <a:srgbClr val="1E2761"/>
+                </a:solidFill>
+                <a:latin typeface="Georgia"/>
+              </a:rPr>
+              <a:t>Twee beleggersprofielen (max. Sharpe-ratio)</a:t>
+            </a:r>
+          </a:p>
+        </p:txBody>
+      </p:sp>
+      <p:sp>
+        <p:nvSpPr>
+          <p:cNvPr id="4" name="Rectangle 3"/>
+          <p:cNvSpPr/>
+          <p:nvPr/>
+        </p:nvSpPr>
+        <p:spPr>
+          <a:xfrm>
+            <a:off x="822960" y="1417320"/>
+            <a:ext cx="2194560" cy="54864"/>
+          </a:xfrm>
+          <a:prstGeom prst="rect">
+            <a:avLst/>
+          </a:prstGeom>
+          <a:solidFill>
+            <a:srgbClr val="02C39A"/>
+          </a:solidFill>
+          <a:ln>
+            <a:noFill/>
+          </a:ln>
+          <a:effectLst/>
+        </p:spPr>
+        <p:style>
+          <a:lnRef idx="1">
+            <a:schemeClr val="accent1"/>
+          </a:lnRef>
+          <a:fillRef idx="3">
+            <a:schemeClr val="accent1"/>
+          </a:fillRef>
+          <a:effectRef idx="2">
+            <a:schemeClr val="accent1"/>
+          </a:effectRef>
+          <a:fontRef idx="minor">
+            <a:schemeClr val="lt1"/>
+          </a:fontRef>
+        </p:style>
+        <p:txBody>
+          <a:bodyPr rtlCol="0" anchor="ctr"/>
+          <a:lstStyle/>
+          <a:p>
+            <a:pPr algn="ctr"/>
+          </a:p>
+        </p:txBody>
+      </p:sp>
+      <p:sp>
+        <p:nvSpPr>
+          <p:cNvPr id="5" name="Rectangle 4"/>
+          <p:cNvSpPr/>
+          <p:nvPr/>
+        </p:nvSpPr>
+        <p:spPr>
+          <a:xfrm>
+            <a:off x="822960" y="1783080"/>
+            <a:ext cx="5212080" cy="594360"/>
+          </a:xfrm>
+          <a:prstGeom prst="rect">
+            <a:avLst/>
+          </a:prstGeom>
+          <a:solidFill>
+            <a:srgbClr val="1E2761"/>
+          </a:solidFill>
+          <a:ln>
+            <a:noFill/>
+          </a:ln>
+          <a:effectLst/>
+        </p:spPr>
+        <p:style>
+          <a:lnRef idx="1">
+            <a:schemeClr val="accent1"/>
+          </a:lnRef>
+          <a:fillRef idx="3">
+            <a:schemeClr val="accent1"/>
+          </a:fillRef>
+          <a:effectRef idx="2">
+            <a:schemeClr val="accent1"/>
+          </a:effectRef>
+          <a:fontRef idx="minor">
+            <a:schemeClr val="lt1"/>
+          </a:fontRef>
+        </p:style>
+        <p:txBody>
+          <a:bodyPr rtlCol="0" anchor="ctr"/>
+          <a:lstStyle/>
+          <a:p>
+            <a:pPr algn="ctr"/>
+          </a:p>
+        </p:txBody>
+      </p:sp>
+      <p:sp>
+        <p:nvSpPr>
+          <p:cNvPr id="6" name="TextBox 5"/>
+          <p:cNvSpPr txBox="1"/>
+          <p:nvPr/>
+        </p:nvSpPr>
+        <p:spPr>
+          <a:xfrm>
+            <a:off x="822960" y="1783080"/>
+            <a:ext cx="5212080" cy="594360"/>
+          </a:xfrm>
+          <a:prstGeom prst="rect">
+            <a:avLst/>
+          </a:prstGeom>
+          <a:noFill/>
+        </p:spPr>
+        <p:txBody>
+          <a:bodyPr wrap="square" anchor="ctr" lIns="0" rIns="0" tIns="0" bIns="0">
+            <a:spAutoFit/>
+          </a:bodyPr>
+          <a:lstStyle/>
+          <a:p>
+            <a:pPr algn="ctr">
+              <a:lnSpc>
+                <a:spcPct val="110000"/>
+              </a:lnSpc>
+              <a:spcAft>
+                <a:spcPts val="200"/>
+              </a:spcAft>
+            </a:pPr>
+            <a:r>
+              <a:rPr sz="1800" b="1">
+                <a:solidFill>
+                  <a:srgbClr val="FFFFFF"/>
+                </a:solidFill>
+                <a:latin typeface="Calibri"/>
+              </a:rPr>
+              <a:t>Jonge student (dynamisch)</a:t>
+            </a:r>
+          </a:p>
+        </p:txBody>
+      </p:sp>
+      <p:graphicFrame>
+        <p:nvGraphicFramePr>
+          <p:cNvPr id="7" name="Table 6"/>
+          <p:cNvGraphicFramePr>
+            <a:graphicFrameLocks noGrp="1"/>
+          </p:cNvGraphicFramePr>
+          <p:nvPr/>
+        </p:nvGraphicFramePr>
+        <p:xfrm>
+          <a:off x="822960" y="2606040"/>
+          <a:ext cx="5212079" cy="1920240"/>
+        </p:xfrm>
+        <a:graphic>
+          <a:graphicData uri="http://schemas.openxmlformats.org/drawingml/2006/table">
+            <a:tbl>
+              <a:tblPr firstRow="1" bandRow="1">
+                <a:tableStyleId>{5C22544A-7EE6-4342-B048-85BDC9FD1C3A}</a:tableStyleId>
+              </a:tblPr>
+              <a:tblGrid>
+                <a:gridCol w="3231489"/>
+                <a:gridCol w="1980590"/>
+              </a:tblGrid>
+              <a:tr h="384048">
+                <a:tc>
+                  <a:txBody>
+                    <a:bodyPr/>
+                    <a:lstStyle/>
+                    <a:p>
+                      <a:pPr algn="l"/>
+                      <a:r>
+                        <a:rPr sz="1400" b="1">
+                          <a:solidFill>
+                            <a:srgbClr val="FFFFFF"/>
+                          </a:solidFill>
+                          <a:latin typeface="Calibri"/>
+                        </a:rPr>
+                        <a:t>Product</a:t>
+                      </a:r>
+                    </a:p>
+                  </a:txBody>
+                  <a:tcPr anchor="ctr">
+                    <a:solidFill>
+                      <a:srgbClr val="1E2761"/>
+                    </a:solidFill>
+                  </a:tcPr>
+                </a:tc>
+                <a:tc>
+                  <a:txBody>
+                    <a:bodyPr/>
+                    <a:lstStyle/>
+                    <a:p>
+                      <a:pPr algn="r"/>
+                      <a:r>
+                        <a:rPr sz="1400" b="1">
+                          <a:solidFill>
+                            <a:srgbClr val="FFFFFF"/>
+                          </a:solidFill>
+                          <a:latin typeface="Calibri"/>
+                        </a:rPr>
+                        <a:t>Gewicht</a:t>
+                      </a:r>
+                    </a:p>
+                  </a:txBody>
+                  <a:tcPr anchor="ctr">
+                    <a:solidFill>
+                      <a:srgbClr val="1E2761"/>
+                    </a:solidFill>
+                  </a:tcPr>
+                </a:tc>
+              </a:tr>
+              <a:tr h="384048">
+                <a:tc>
+                  <a:txBody>
+                    <a:bodyPr/>
+                    <a:lstStyle/>
+                    <a:p>
+                      <a:pPr algn="l"/>
+                      <a:r>
+                        <a:rPr sz="1400" b="0">
+                          <a:solidFill>
+                            <a:srgbClr val="21295C"/>
+                          </a:solidFill>
+                          <a:latin typeface="Calibri"/>
+                        </a:rPr>
+                        <a:t>Broadcom</a:t>
+                      </a:r>
+                    </a:p>
+                  </a:txBody>
+                  <a:tcPr anchor="ctr">
+                    <a:solidFill>
+                      <a:srgbClr val="FFFFFF"/>
+                    </a:solidFill>
+                  </a:tcPr>
+                </a:tc>
+                <a:tc>
+                  <a:txBody>
+                    <a:bodyPr/>
+                    <a:lstStyle/>
+                    <a:p>
+                      <a:pPr algn="r"/>
+                      <a:r>
+                        <a:rPr sz="1400" b="1">
+                          <a:solidFill>
+                            <a:srgbClr val="21295C"/>
+                          </a:solidFill>
+                          <a:latin typeface="Calibri"/>
+                        </a:rPr>
+                        <a:t>37,5%</a:t>
+                      </a:r>
+                    </a:p>
+                  </a:txBody>
+                  <a:tcPr anchor="ctr">
+                    <a:solidFill>
+                      <a:srgbClr val="FFFFFF"/>
+                    </a:solidFill>
+                  </a:tcPr>
+                </a:tc>
+              </a:tr>
+              <a:tr h="384048">
+                <a:tc>
+                  <a:txBody>
+                    <a:bodyPr/>
+                    <a:lstStyle/>
+                    <a:p>
+                      <a:pPr algn="l"/>
+                      <a:r>
+                        <a:rPr sz="1400" b="0">
+                          <a:solidFill>
+                            <a:srgbClr val="21295C"/>
+                          </a:solidFill>
+                          <a:latin typeface="Calibri"/>
+                        </a:rPr>
+                        <a:t>Bitcoin</a:t>
+                      </a:r>
+                    </a:p>
+                  </a:txBody>
+                  <a:tcPr anchor="ctr">
+                    <a:solidFill>
+                      <a:srgbClr val="EFF2FB"/>
+                    </a:solidFill>
+                  </a:tcPr>
+                </a:tc>
+                <a:tc>
+                  <a:txBody>
+                    <a:bodyPr/>
+                    <a:lstStyle/>
+                    <a:p>
+                      <a:pPr algn="r"/>
+                      <a:r>
+                        <a:rPr sz="1400" b="1">
+                          <a:solidFill>
+                            <a:srgbClr val="21295C"/>
+                          </a:solidFill>
+                          <a:latin typeface="Calibri"/>
+                        </a:rPr>
+                        <a:t>23,5%</a:t>
+                      </a:r>
+                    </a:p>
+                  </a:txBody>
+                  <a:tcPr anchor="ctr">
+                    <a:solidFill>
+                      <a:srgbClr val="EFF2FB"/>
+                    </a:solidFill>
+                  </a:tcPr>
+                </a:tc>
+              </a:tr>
+              <a:tr h="384048">
+                <a:tc>
+                  <a:txBody>
+                    <a:bodyPr/>
+                    <a:lstStyle/>
+                    <a:p>
+                      <a:pPr algn="l"/>
+                      <a:r>
+                        <a:rPr sz="1400" b="0">
+                          <a:solidFill>
+                            <a:srgbClr val="21295C"/>
+                          </a:solidFill>
+                          <a:latin typeface="Calibri"/>
+                        </a:rPr>
+                        <a:t>Apple</a:t>
+                      </a:r>
+                    </a:p>
+                  </a:txBody>
+                  <a:tcPr anchor="ctr">
+                    <a:solidFill>
+                      <a:srgbClr val="FFFFFF"/>
+                    </a:solidFill>
+                  </a:tcPr>
+                </a:tc>
+                <a:tc>
+                  <a:txBody>
+                    <a:bodyPr/>
+                    <a:lstStyle/>
+                    <a:p>
+                      <a:pPr algn="r"/>
+                      <a:r>
+                        <a:rPr sz="1400" b="1">
+                          <a:solidFill>
+                            <a:srgbClr val="21295C"/>
+                          </a:solidFill>
+                          <a:latin typeface="Calibri"/>
+                        </a:rPr>
+                        <a:t>36,0%</a:t>
+                      </a:r>
+                    </a:p>
+                  </a:txBody>
+                  <a:tcPr anchor="ctr">
+                    <a:solidFill>
+                      <a:srgbClr val="FFFFFF"/>
+                    </a:solidFill>
+                  </a:tcPr>
+                </a:tc>
+              </a:tr>
+              <a:tr h="384048">
+                <a:tc>
+                  <a:txBody>
+                    <a:bodyPr/>
+                    <a:lstStyle/>
+                    <a:p>
+                      <a:pPr algn="l"/>
+                      <a:r>
+                        <a:rPr sz="1400" b="0">
+                          <a:solidFill>
+                            <a:srgbClr val="21295C"/>
+                          </a:solidFill>
+                          <a:latin typeface="Calibri"/>
+                        </a:rPr>
+                        <a:t>ASML</a:t>
+                      </a:r>
+                    </a:p>
+                  </a:txBody>
+                  <a:tcPr anchor="ctr">
+                    <a:solidFill>
+                      <a:srgbClr val="EFF2FB"/>
+                    </a:solidFill>
+                  </a:tcPr>
+                </a:tc>
+                <a:tc>
+                  <a:txBody>
+                    <a:bodyPr/>
+                    <a:lstStyle/>
+                    <a:p>
+                      <a:pPr algn="r"/>
+                      <a:r>
+                        <a:rPr sz="1400" b="1">
+                          <a:solidFill>
+                            <a:srgbClr val="21295C"/>
+                          </a:solidFill>
+                          <a:latin typeface="Calibri"/>
+                        </a:rPr>
+                        <a:t>3,0%</a:t>
+                      </a:r>
+                    </a:p>
+                  </a:txBody>
+                  <a:tcPr anchor="ctr">
+                    <a:solidFill>
+                      <a:srgbClr val="EFF2FB"/>
+                    </a:solidFill>
+                  </a:tcPr>
+                </a:tc>
+              </a:tr>
+            </a:tbl>
+          </a:graphicData>
+        </a:graphic>
+      </p:graphicFrame>
+      <p:sp>
+        <p:nvSpPr>
+          <p:cNvPr id="8" name="Rectangle 7"/>
+          <p:cNvSpPr/>
+          <p:nvPr/>
+        </p:nvSpPr>
+        <p:spPr>
+          <a:xfrm>
+            <a:off x="822960" y="4754880"/>
+            <a:ext cx="5212080" cy="548640"/>
+          </a:xfrm>
+          <a:prstGeom prst="rect">
+            <a:avLst/>
+          </a:prstGeom>
+          <a:solidFill>
+            <a:srgbClr val="EFF2FB"/>
+          </a:solidFill>
+          <a:ln>
+            <a:noFill/>
+          </a:ln>
+          <a:effectLst/>
+        </p:spPr>
+        <p:style>
+          <a:lnRef idx="1">
+            <a:schemeClr val="accent1"/>
+          </a:lnRef>
+          <a:fillRef idx="3">
+            <a:schemeClr val="accent1"/>
+          </a:fillRef>
+          <a:effectRef idx="2">
+            <a:schemeClr val="accent1"/>
+          </a:effectRef>
+          <a:fontRef idx="minor">
+            <a:schemeClr val="lt1"/>
+          </a:fontRef>
+        </p:style>
+        <p:txBody>
+          <a:bodyPr rtlCol="0" anchor="ctr"/>
+          <a:lstStyle/>
+          <a:p>
+            <a:pPr algn="ctr"/>
+          </a:p>
+        </p:txBody>
+      </p:sp>
+      <p:sp>
+        <p:nvSpPr>
+          <p:cNvPr id="9" name="TextBox 8"/>
+          <p:cNvSpPr txBox="1"/>
+          <p:nvPr/>
+        </p:nvSpPr>
+        <p:spPr>
+          <a:xfrm>
+            <a:off x="822960" y="4754880"/>
+            <a:ext cx="5212080" cy="548640"/>
+          </a:xfrm>
+          <a:prstGeom prst="rect">
+            <a:avLst/>
+          </a:prstGeom>
+          <a:noFill/>
+        </p:spPr>
+        <p:txBody>
+          <a:bodyPr wrap="square" anchor="ctr" lIns="0" rIns="0" tIns="0" bIns="0">
+            <a:spAutoFit/>
+          </a:bodyPr>
+          <a:lstStyle/>
+          <a:p>
+            <a:pPr algn="ctr">
+              <a:lnSpc>
+                <a:spcPct val="110000"/>
+              </a:lnSpc>
+              <a:spcAft>
+                <a:spcPts val="200"/>
+              </a:spcAft>
+            </a:pPr>
+            <a:r>
+              <a:rPr sz="1500" b="1">
+                <a:solidFill>
+                  <a:srgbClr val="21295C"/>
+                </a:solidFill>
+                <a:latin typeface="Calibri"/>
+              </a:rPr>
+              <a:t>Rendement 24%   ·   risico 25%   ·   Sharpe 0,85</a:t>
+            </a:r>
+          </a:p>
+        </p:txBody>
+      </p:sp>
+      <p:sp>
+        <p:nvSpPr>
+          <p:cNvPr id="10" name="Rectangle 9"/>
+          <p:cNvSpPr/>
+          <p:nvPr/>
+        </p:nvSpPr>
+        <p:spPr>
+          <a:xfrm>
+            <a:off x="6629400" y="1783080"/>
+            <a:ext cx="5212080" cy="594360"/>
+          </a:xfrm>
+          <a:prstGeom prst="rect">
+            <a:avLst/>
+          </a:prstGeom>
+          <a:solidFill>
+            <a:srgbClr val="1E2761"/>
+          </a:solidFill>
+          <a:ln>
+            <a:noFill/>
+          </a:ln>
+          <a:effectLst/>
+        </p:spPr>
+        <p:style>
+          <a:lnRef idx="1">
+            <a:schemeClr val="accent1"/>
+          </a:lnRef>
+          <a:fillRef idx="3">
+            <a:schemeClr val="accent1"/>
+          </a:fillRef>
+          <a:effectRef idx="2">
+            <a:schemeClr val="accent1"/>
+          </a:effectRef>
+          <a:fontRef idx="minor">
+            <a:schemeClr val="lt1"/>
+          </a:fontRef>
+        </p:style>
+        <p:txBody>
+          <a:bodyPr rtlCol="0" anchor="ctr"/>
+          <a:lstStyle/>
+          <a:p>
+            <a:pPr algn="ctr"/>
+          </a:p>
+        </p:txBody>
+      </p:sp>
+      <p:sp>
+        <p:nvSpPr>
+          <p:cNvPr id="11" name="TextBox 10"/>
+          <p:cNvSpPr txBox="1"/>
+          <p:nvPr/>
+        </p:nvSpPr>
+        <p:spPr>
+          <a:xfrm>
+            <a:off x="6629400" y="1783080"/>
+            <a:ext cx="5212080" cy="594360"/>
+          </a:xfrm>
+          <a:prstGeom prst="rect">
+            <a:avLst/>
+          </a:prstGeom>
+          <a:noFill/>
+        </p:spPr>
+        <p:txBody>
+          <a:bodyPr wrap="square" anchor="ctr" lIns="0" rIns="0" tIns="0" bIns="0">
+            <a:spAutoFit/>
+          </a:bodyPr>
+          <a:lstStyle/>
+          <a:p>
+            <a:pPr algn="ctr">
+              <a:lnSpc>
+                <a:spcPct val="110000"/>
+              </a:lnSpc>
+              <a:spcAft>
+                <a:spcPts val="200"/>
+              </a:spcAft>
+            </a:pPr>
+            <a:r>
+              <a:rPr sz="1800" b="1">
+                <a:solidFill>
+                  <a:srgbClr val="FFFFFF"/>
+                </a:solidFill>
+                <a:latin typeface="Calibri"/>
+              </a:rPr>
+              <a:t>Oude docent (defensief)</a:t>
+            </a:r>
+          </a:p>
+        </p:txBody>
+      </p:sp>
+      <p:graphicFrame>
+        <p:nvGraphicFramePr>
+          <p:cNvPr id="12" name="Table 11"/>
+          <p:cNvGraphicFramePr>
+            <a:graphicFrameLocks noGrp="1"/>
+          </p:cNvGraphicFramePr>
+          <p:nvPr/>
+        </p:nvGraphicFramePr>
+        <p:xfrm>
+          <a:off x="6629400" y="2606040"/>
+          <a:ext cx="5212079" cy="1920240"/>
+        </p:xfrm>
+        <a:graphic>
+          <a:graphicData uri="http://schemas.openxmlformats.org/drawingml/2006/table">
+            <a:tbl>
+              <a:tblPr firstRow="1" bandRow="1">
+                <a:tableStyleId>{5C22544A-7EE6-4342-B048-85BDC9FD1C3A}</a:tableStyleId>
+              </a:tblPr>
+              <a:tblGrid>
+                <a:gridCol w="3231489"/>
+                <a:gridCol w="1980590"/>
+              </a:tblGrid>
+              <a:tr h="384048">
+                <a:tc>
+                  <a:txBody>
+                    <a:bodyPr/>
+                    <a:lstStyle/>
+                    <a:p>
+                      <a:pPr algn="l"/>
+                      <a:r>
+                        <a:rPr sz="1400" b="1">
+                          <a:solidFill>
+                            <a:srgbClr val="FFFFFF"/>
+                          </a:solidFill>
+                          <a:latin typeface="Calibri"/>
+                        </a:rPr>
+                        <a:t>Product</a:t>
+                      </a:r>
+                    </a:p>
+                  </a:txBody>
+                  <a:tcPr anchor="ctr">
+                    <a:solidFill>
+                      <a:srgbClr val="1E2761"/>
+                    </a:solidFill>
+                  </a:tcPr>
+                </a:tc>
+                <a:tc>
+                  <a:txBody>
+                    <a:bodyPr/>
+                    <a:lstStyle/>
+                    <a:p>
+                      <a:pPr algn="r"/>
+                      <a:r>
+                        <a:rPr sz="1400" b="1">
+                          <a:solidFill>
+                            <a:srgbClr val="FFFFFF"/>
+                          </a:solidFill>
+                          <a:latin typeface="Calibri"/>
+                        </a:rPr>
+                        <a:t>Gewicht</a:t>
+                      </a:r>
+                    </a:p>
+                  </a:txBody>
+                  <a:tcPr anchor="ctr">
+                    <a:solidFill>
+                      <a:srgbClr val="1E2761"/>
+                    </a:solidFill>
+                  </a:tcPr>
+                </a:tc>
+              </a:tr>
+              <a:tr h="384048">
+                <a:tc>
+                  <a:txBody>
+                    <a:bodyPr/>
+                    <a:lstStyle/>
+                    <a:p>
+                      <a:pPr algn="l"/>
+                      <a:r>
+                        <a:rPr sz="1400" b="0">
+                          <a:solidFill>
+                            <a:srgbClr val="21295C"/>
+                          </a:solidFill>
+                          <a:latin typeface="Calibri"/>
+                        </a:rPr>
+                        <a:t>Goud</a:t>
+                      </a:r>
+                    </a:p>
+                  </a:txBody>
+                  <a:tcPr anchor="ctr">
+                    <a:solidFill>
+                      <a:srgbClr val="FFFFFF"/>
+                    </a:solidFill>
+                  </a:tcPr>
+                </a:tc>
+                <a:tc>
+                  <a:txBody>
+                    <a:bodyPr/>
+                    <a:lstStyle/>
+                    <a:p>
+                      <a:pPr algn="r"/>
+                      <a:r>
+                        <a:rPr sz="1400" b="1">
+                          <a:solidFill>
+                            <a:srgbClr val="21295C"/>
+                          </a:solidFill>
+                          <a:latin typeface="Calibri"/>
+                        </a:rPr>
+                        <a:t>59,5%</a:t>
+                      </a:r>
+                    </a:p>
+                  </a:txBody>
+                  <a:tcPr anchor="ctr">
+                    <a:solidFill>
+                      <a:srgbClr val="FFFFFF"/>
+                    </a:solidFill>
+                  </a:tcPr>
+                </a:tc>
+              </a:tr>
+              <a:tr h="384048">
+                <a:tc>
+                  <a:txBody>
+                    <a:bodyPr/>
+                    <a:lstStyle/>
+                    <a:p>
+                      <a:pPr algn="l"/>
+                      <a:r>
+                        <a:rPr sz="1400" b="0">
+                          <a:solidFill>
+                            <a:srgbClr val="21295C"/>
+                          </a:solidFill>
+                          <a:latin typeface="Calibri"/>
+                        </a:rPr>
+                        <a:t>Apple</a:t>
+                      </a:r>
+                    </a:p>
+                  </a:txBody>
+                  <a:tcPr anchor="ctr">
+                    <a:solidFill>
+                      <a:srgbClr val="EFF2FB"/>
+                    </a:solidFill>
+                  </a:tcPr>
+                </a:tc>
+                <a:tc>
+                  <a:txBody>
+                    <a:bodyPr/>
+                    <a:lstStyle/>
+                    <a:p>
+                      <a:pPr algn="r"/>
+                      <a:r>
+                        <a:rPr sz="1400" b="1">
+                          <a:solidFill>
+                            <a:srgbClr val="21295C"/>
+                          </a:solidFill>
+                          <a:latin typeface="Calibri"/>
+                        </a:rPr>
+                        <a:t>40,5%</a:t>
+                      </a:r>
+                    </a:p>
+                  </a:txBody>
+                  <a:tcPr anchor="ctr">
+                    <a:solidFill>
+                      <a:srgbClr val="EFF2FB"/>
+                    </a:solidFill>
+                  </a:tcPr>
+                </a:tc>
+              </a:tr>
+              <a:tr h="384048">
+                <a:tc>
+                  <a:txBody>
+                    <a:bodyPr/>
+                    <a:lstStyle/>
+                    <a:p>
+                      <a:pPr algn="l"/>
+                      <a:r>
+                        <a:rPr sz="1400" b="0">
+                          <a:solidFill>
+                            <a:srgbClr val="21295C"/>
+                          </a:solidFill>
+                          <a:latin typeface="Calibri"/>
+                        </a:rPr>
+                        <a:t>Zilver</a:t>
+                      </a:r>
+                    </a:p>
+                  </a:txBody>
+                  <a:tcPr anchor="ctr">
+                    <a:solidFill>
+                      <a:srgbClr val="FFFFFF"/>
+                    </a:solidFill>
+                  </a:tcPr>
+                </a:tc>
+                <a:tc>
+                  <a:txBody>
+                    <a:bodyPr/>
+                    <a:lstStyle/>
+                    <a:p>
+                      <a:pPr algn="r"/>
+                      <a:r>
+                        <a:rPr sz="1400" b="1">
+                          <a:solidFill>
+                            <a:srgbClr val="21295C"/>
+                          </a:solidFill>
+                          <a:latin typeface="Calibri"/>
+                        </a:rPr>
+                        <a:t>0%</a:t>
+                      </a:r>
+                    </a:p>
+                  </a:txBody>
+                  <a:tcPr anchor="ctr">
+                    <a:solidFill>
+                      <a:srgbClr val="FFFFFF"/>
+                    </a:solidFill>
+                  </a:tcPr>
+                </a:tc>
+              </a:tr>
+              <a:tr h="384048">
+                <a:tc>
+                  <a:txBody>
+                    <a:bodyPr/>
+                    <a:lstStyle/>
+                    <a:p>
+                      <a:pPr algn="l"/>
+                      <a:r>
+                        <a:rPr sz="1400" b="0">
+                          <a:solidFill>
+                            <a:srgbClr val="21295C"/>
+                          </a:solidFill>
+                          <a:latin typeface="Calibri"/>
+                        </a:rPr>
+                        <a:t>Shell</a:t>
+                      </a:r>
+                    </a:p>
+                  </a:txBody>
+                  <a:tcPr anchor="ctr">
+                    <a:solidFill>
+                      <a:srgbClr val="EFF2FB"/>
+                    </a:solidFill>
+                  </a:tcPr>
+                </a:tc>
+                <a:tc>
+                  <a:txBody>
+                    <a:bodyPr/>
+                    <a:lstStyle/>
+                    <a:p>
+                      <a:pPr algn="r"/>
+                      <a:r>
+                        <a:rPr sz="1400" b="1">
+                          <a:solidFill>
+                            <a:srgbClr val="21295C"/>
+                          </a:solidFill>
+                          <a:latin typeface="Calibri"/>
+                        </a:rPr>
+                        <a:t>0%</a:t>
+                      </a:r>
+                    </a:p>
+                  </a:txBody>
+                  <a:tcPr anchor="ctr">
+                    <a:solidFill>
+                      <a:srgbClr val="EFF2FB"/>
+                    </a:solidFill>
+                  </a:tcPr>
+                </a:tc>
+              </a:tr>
+            </a:tbl>
+          </a:graphicData>
+        </a:graphic>
+      </p:graphicFrame>
+      <p:sp>
+        <p:nvSpPr>
+          <p:cNvPr id="13" name="Rectangle 12"/>
+          <p:cNvSpPr/>
+          <p:nvPr/>
+        </p:nvSpPr>
+        <p:spPr>
+          <a:xfrm>
+            <a:off x="6629400" y="4754880"/>
+            <a:ext cx="5212080" cy="548640"/>
+          </a:xfrm>
+          <a:prstGeom prst="rect">
+            <a:avLst/>
+          </a:prstGeom>
+          <a:solidFill>
+            <a:srgbClr val="EFF2FB"/>
+          </a:solidFill>
+          <a:ln>
+            <a:noFill/>
+          </a:ln>
+          <a:effectLst/>
+        </p:spPr>
+        <p:style>
+          <a:lnRef idx="1">
+            <a:schemeClr val="accent1"/>
+          </a:lnRef>
+          <a:fillRef idx="3">
+            <a:schemeClr val="accent1"/>
+          </a:fillRef>
+          <a:effectRef idx="2">
+            <a:schemeClr val="accent1"/>
+          </a:effectRef>
+          <a:fontRef idx="minor">
+            <a:schemeClr val="lt1"/>
+          </a:fontRef>
+        </p:style>
+        <p:txBody>
+          <a:bodyPr rtlCol="0" anchor="ctr"/>
+          <a:lstStyle/>
+          <a:p>
+            <a:pPr algn="ctr"/>
+          </a:p>
+        </p:txBody>
+      </p:sp>
+      <p:sp>
+        <p:nvSpPr>
+          <p:cNvPr id="14" name="TextBox 13"/>
+          <p:cNvSpPr txBox="1"/>
+          <p:nvPr/>
+        </p:nvSpPr>
+        <p:spPr>
+          <a:xfrm>
+            <a:off x="6629400" y="4754880"/>
+            <a:ext cx="5212080" cy="548640"/>
+          </a:xfrm>
+          <a:prstGeom prst="rect">
+            <a:avLst/>
+          </a:prstGeom>
+          <a:noFill/>
+        </p:spPr>
+        <p:txBody>
+          <a:bodyPr wrap="square" anchor="ctr" lIns="0" rIns="0" tIns="0" bIns="0">
+            <a:spAutoFit/>
+          </a:bodyPr>
+          <a:lstStyle/>
+          <a:p>
+            <a:pPr algn="ctr">
+              <a:lnSpc>
+                <a:spcPct val="110000"/>
+              </a:lnSpc>
+              <a:spcAft>
+                <a:spcPts val="200"/>
+              </a:spcAft>
+            </a:pPr>
+            <a:r>
+              <a:rPr sz="1500" b="1">
+                <a:solidFill>
+                  <a:srgbClr val="21295C"/>
+                </a:solidFill>
+                <a:latin typeface="Calibri"/>
+              </a:rPr>
+              <a:t>Rendement 13%   ·   risico 13%   ·   Sharpe 0,78</a:t>
+            </a:r>
+          </a:p>
+        </p:txBody>
+      </p:sp>
+    </p:spTree>
+  </p:cSld>
+  <p:clrMapOvr>
+    <a:masterClrMapping/>
+  </p:clrMapOvr>
+</p:sld>
+</file>
+
+<file path=ppt/slides/slide9.xml><?xml version="1.0" encoding="utf-8"?>
+<p:sld xmlns:a="http://schemas.openxmlformats.org/drawingml/2006/main" xmlns:p="http://schemas.openxmlformats.org/presentationml/2006/main" xmlns:r="http://schemas.openxmlformats.org/officeDocument/2006/relationships">
+  <p:cSld>
+    <p:spTree>
+      <p:nvGrpSpPr>
+        <p:cNvPr id="1" name=""/>
+        <p:cNvGrpSpPr/>
+        <p:nvPr/>
+      </p:nvGrpSpPr>
+      <p:grpSpPr/>
+      <p:sp>
+        <p:nvSpPr>
+          <p:cNvPr id="2" name="Rectangle 1"/>
+          <p:cNvSpPr/>
+          <p:nvPr/>
+        </p:nvSpPr>
+        <p:spPr>
+          <a:xfrm>
+            <a:off x="0" y="0"/>
+            <a:ext cx="12191695" cy="6858000"/>
+          </a:xfrm>
+          <a:prstGeom prst="rect">
+            <a:avLst/>
+          </a:prstGeom>
+          <a:solidFill>
+            <a:srgbClr val="FFFFFF"/>
+          </a:solidFill>
+          <a:ln>
+            <a:noFill/>
+          </a:ln>
+          <a:effectLst/>
+        </p:spPr>
+        <p:style>
+          <a:lnRef idx="1">
+            <a:schemeClr val="accent1"/>
+          </a:lnRef>
+          <a:fillRef idx="3">
+            <a:schemeClr val="accent1"/>
+          </a:fillRef>
+          <a:effectRef idx="2">
+            <a:schemeClr val="accent1"/>
+          </a:effectRef>
+          <a:fontRef idx="minor">
+            <a:schemeClr val="lt1"/>
+          </a:fontRef>
+        </p:style>
+        <p:txBody>
+          <a:bodyPr rtlCol="0" anchor="ctr"/>
+          <a:lstStyle/>
+          <a:p>
+            <a:pPr algn="ctr"/>
+          </a:p>
+        </p:txBody>
+      </p:sp>
+      <p:sp>
+        <p:nvSpPr>
+          <p:cNvPr id="3" name="TextBox 2"/>
+          <p:cNvSpPr txBox="1"/>
+          <p:nvPr/>
+        </p:nvSpPr>
+        <p:spPr>
+          <a:xfrm>
+            <a:off x="822960" y="502920"/>
+            <a:ext cx="10607040" cy="914400"/>
+          </a:xfrm>
+          <a:prstGeom prst="rect">
+            <a:avLst/>
+          </a:prstGeom>
+          <a:noFill/>
+        </p:spPr>
+        <p:txBody>
+          <a:bodyPr wrap="square" anchor="ctr" lIns="0" rIns="0" tIns="0" bIns="0">
+            <a:spAutoFit/>
+          </a:bodyPr>
+          <a:lstStyle/>
+          <a:p>
+            <a:pPr algn="l">
+              <a:lnSpc>
+                <a:spcPct val="110000"/>
+              </a:lnSpc>
+              <a:spcAft>
+                <a:spcPts val="200"/>
+              </a:spcAft>
+            </a:pPr>
+            <a:r>
+              <a:rPr sz="3200" b="1">
+                <a:solidFill>
+                  <a:srgbClr val="1E2761"/>
+                </a:solidFill>
+                <a:latin typeface="Georgia"/>
+              </a:rPr>
+              <a:t>Marktportfolio — hoogste Sharpe-ratio</a:t>
+            </a:r>
+          </a:p>
+        </p:txBody>
+      </p:sp>
+      <p:sp>
+        <p:nvSpPr>
+          <p:cNvPr id="4" name="Rectangle 3"/>
+          <p:cNvSpPr/>
+          <p:nvPr/>
+        </p:nvSpPr>
+        <p:spPr>
+          <a:xfrm>
+            <a:off x="822960" y="1417320"/>
+            <a:ext cx="2194560" cy="54864"/>
+          </a:xfrm>
+          <a:prstGeom prst="rect">
+            <a:avLst/>
+          </a:prstGeom>
+          <a:solidFill>
+            <a:srgbClr val="02C39A"/>
+          </a:solidFill>
+          <a:ln>
+            <a:noFill/>
+          </a:ln>
+          <a:effectLst/>
+        </p:spPr>
+        <p:style>
+          <a:lnRef idx="1">
+            <a:schemeClr val="accent1"/>
+          </a:lnRef>
+          <a:fillRef idx="3">
+            <a:schemeClr val="accent1"/>
+          </a:fillRef>
+          <a:effectRef idx="2">
+            <a:schemeClr val="accent1"/>
+          </a:effectRef>
+          <a:fontRef idx="minor">
+            <a:schemeClr val="lt1"/>
+          </a:fontRef>
+        </p:style>
+        <p:txBody>
+          <a:bodyPr rtlCol="0" anchor="ctr"/>
+          <a:lstStyle/>
+          <a:p>
+            <a:pPr algn="ctr"/>
+          </a:p>
+        </p:txBody>
+      </p:sp>
+      <p:sp>
+        <p:nvSpPr>
+          <p:cNvPr id="5" name="TextBox 4"/>
+          <p:cNvSpPr txBox="1"/>
+          <p:nvPr/>
+        </p:nvSpPr>
+        <p:spPr>
+          <a:xfrm>
+            <a:off x="822960" y="1691640"/>
+            <a:ext cx="5120640" cy="365760"/>
+          </a:xfrm>
+          <a:prstGeom prst="rect">
+            <a:avLst/>
+          </a:prstGeom>
+          <a:noFill/>
+        </p:spPr>
+        <p:txBody>
+          <a:bodyPr wrap="square" anchor="t" lIns="0" rIns="0" tIns="0" bIns="0">
+            <a:spAutoFit/>
+          </a:bodyPr>
+          <a:lstStyle/>
+          <a:p>
+            <a:pPr algn="l">
+              <a:lnSpc>
+                <a:spcPct val="110000"/>
+              </a:lnSpc>
+              <a:spcAft>
+                <a:spcPts val="200"/>
+              </a:spcAft>
+            </a:pPr>
+            <a:r>
+              <a:rPr sz="1500" b="1">
+                <a:solidFill>
+                  <a:srgbClr val="02C39A"/>
+                </a:solidFill>
+                <a:latin typeface="Calibri"/>
+              </a:rPr>
+              <a:t>Belangrijkste gewichten (van 20 variabelen)</a:t>
+            </a:r>
+          </a:p>
+        </p:txBody>
+      </p:sp>
+      <p:graphicFrame>
+        <p:nvGraphicFramePr>
+          <p:cNvPr id="6" name="Table 5"/>
+          <p:cNvGraphicFramePr>
+            <a:graphicFrameLocks noGrp="1"/>
+          </p:cNvGraphicFramePr>
+          <p:nvPr/>
+        </p:nvGraphicFramePr>
+        <p:xfrm>
+          <a:off x="822960" y="2194560"/>
+          <a:ext cx="4937759" cy="3456432"/>
+        </p:xfrm>
+        <a:graphic>
+          <a:graphicData uri="http://schemas.openxmlformats.org/drawingml/2006/table">
+            <a:tbl>
+              <a:tblPr firstRow="1" bandRow="1">
+                <a:tableStyleId>{5C22544A-7EE6-4342-B048-85BDC9FD1C3A}</a:tableStyleId>
+              </a:tblPr>
+              <a:tblGrid>
+                <a:gridCol w="3061411"/>
+                <a:gridCol w="1876348"/>
+              </a:tblGrid>
+              <a:tr h="384048">
+                <a:tc>
+                  <a:txBody>
+                    <a:bodyPr/>
+                    <a:lstStyle/>
+                    <a:p>
+                      <a:pPr algn="l"/>
+                      <a:r>
+                        <a:rPr sz="1400" b="1">
+                          <a:solidFill>
+                            <a:srgbClr val="FFFFFF"/>
+                          </a:solidFill>
+                          <a:latin typeface="Calibri"/>
+                        </a:rPr>
+                        <a:t>Product</a:t>
+                      </a:r>
+                    </a:p>
+                  </a:txBody>
+                  <a:tcPr anchor="ctr">
+                    <a:solidFill>
+                      <a:srgbClr val="1E2761"/>
+                    </a:solidFill>
+                  </a:tcPr>
+                </a:tc>
+                <a:tc>
+                  <a:txBody>
+                    <a:bodyPr/>
+                    <a:lstStyle/>
+                    <a:p>
+                      <a:pPr algn="r"/>
+                      <a:r>
+                        <a:rPr sz="1400" b="1">
+                          <a:solidFill>
+                            <a:srgbClr val="FFFFFF"/>
+                          </a:solidFill>
+                          <a:latin typeface="Calibri"/>
+                        </a:rPr>
+                        <a:t>Gewicht</a:t>
+                      </a:r>
+                    </a:p>
+                  </a:txBody>
+                  <a:tcPr anchor="ctr">
+                    <a:solidFill>
+                      <a:srgbClr val="1E2761"/>
+                    </a:solidFill>
+                  </a:tcPr>
+                </a:tc>
+              </a:tr>
+              <a:tr h="384048">
+                <a:tc>
+                  <a:txBody>
+                    <a:bodyPr/>
+                    <a:lstStyle/>
+                    <a:p>
+                      <a:pPr algn="l"/>
+                      <a:r>
+                        <a:rPr sz="1400" b="0">
+                          <a:solidFill>
+                            <a:srgbClr val="21295C"/>
+                          </a:solidFill>
+                          <a:latin typeface="Calibri"/>
+                        </a:rPr>
+                        <a:t>Coffee</a:t>
+                      </a:r>
+                    </a:p>
+                  </a:txBody>
+                  <a:tcPr anchor="ctr">
+                    <a:solidFill>
+                      <a:srgbClr val="FFFFFF"/>
+                    </a:solidFill>
+                  </a:tcPr>
+                </a:tc>
+                <a:tc>
+                  <a:txBody>
+                    <a:bodyPr/>
+                    <a:lstStyle/>
+                    <a:p>
+                      <a:pPr algn="r"/>
+                      <a:r>
+                        <a:rPr sz="1400" b="1">
+                          <a:solidFill>
+                            <a:srgbClr val="21295C"/>
+                          </a:solidFill>
+                          <a:latin typeface="Calibri"/>
+                        </a:rPr>
+                        <a:t>37,0%</a:t>
+                      </a:r>
+                    </a:p>
+                  </a:txBody>
+                  <a:tcPr anchor="ctr">
+                    <a:solidFill>
+                      <a:srgbClr val="FFFFFF"/>
+                    </a:solidFill>
+                  </a:tcPr>
+                </a:tc>
+              </a:tr>
+              <a:tr h="384048">
+                <a:tc>
+                  <a:txBody>
+                    <a:bodyPr/>
+                    <a:lstStyle/>
+                    <a:p>
+                      <a:pPr algn="l"/>
+                      <a:r>
+                        <a:rPr sz="1400" b="0">
+                          <a:solidFill>
+                            <a:srgbClr val="21295C"/>
+                          </a:solidFill>
+                          <a:latin typeface="Calibri"/>
+                        </a:rPr>
+                        <a:t>Goud</a:t>
+                      </a:r>
+                    </a:p>
+                  </a:txBody>
+                  <a:tcPr anchor="ctr">
+                    <a:solidFill>
+                      <a:srgbClr val="EFF2FB"/>
+                    </a:solidFill>
+                  </a:tcPr>
+                </a:tc>
+                <a:tc>
+                  <a:txBody>
+                    <a:bodyPr/>
+                    <a:lstStyle/>
+                    <a:p>
+                      <a:pPr algn="r"/>
+                      <a:r>
+                        <a:rPr sz="1400" b="1">
+                          <a:solidFill>
+                            <a:srgbClr val="21295C"/>
+                          </a:solidFill>
+                          <a:latin typeface="Calibri"/>
+                        </a:rPr>
+                        <a:t>19,2%</a:t>
+                      </a:r>
+                    </a:p>
+                  </a:txBody>
+                  <a:tcPr anchor="ctr">
+                    <a:solidFill>
+                      <a:srgbClr val="EFF2FB"/>
+                    </a:solidFill>
+                  </a:tcPr>
+                </a:tc>
+              </a:tr>
+              <a:tr h="384048">
+                <a:tc>
+                  <a:txBody>
+                    <a:bodyPr/>
+                    <a:lstStyle/>
+                    <a:p>
+                      <a:pPr algn="l"/>
+                      <a:r>
+                        <a:rPr sz="1400" b="0">
+                          <a:solidFill>
+                            <a:srgbClr val="21295C"/>
+                          </a:solidFill>
+                          <a:latin typeface="Calibri"/>
+                        </a:rPr>
+                        <a:t>Gasoline</a:t>
+                      </a:r>
+                    </a:p>
+                  </a:txBody>
+                  <a:tcPr anchor="ctr">
+                    <a:solidFill>
+                      <a:srgbClr val="FFFFFF"/>
+                    </a:solidFill>
+                  </a:tcPr>
+                </a:tc>
+                <a:tc>
+                  <a:txBody>
+                    <a:bodyPr/>
+                    <a:lstStyle/>
+                    <a:p>
+                      <a:pPr algn="r"/>
+                      <a:r>
+                        <a:rPr sz="1400" b="1">
+                          <a:solidFill>
+                            <a:srgbClr val="21295C"/>
+                          </a:solidFill>
+                          <a:latin typeface="Calibri"/>
+                        </a:rPr>
+                        <a:t>10,5%</a:t>
+                      </a:r>
+                    </a:p>
+                  </a:txBody>
+                  <a:tcPr anchor="ctr">
+                    <a:solidFill>
+                      <a:srgbClr val="FFFFFF"/>
+                    </a:solidFill>
+                  </a:tcPr>
+                </a:tc>
+              </a:tr>
+              <a:tr h="384048">
+                <a:tc>
+                  <a:txBody>
+                    <a:bodyPr/>
+                    <a:lstStyle/>
+                    <a:p>
+                      <a:pPr algn="l"/>
+                      <a:r>
+                        <a:rPr sz="1400" b="0">
+                          <a:solidFill>
+                            <a:srgbClr val="21295C"/>
+                          </a:solidFill>
+                          <a:latin typeface="Calibri"/>
+                        </a:rPr>
+                        <a:t>Copper</a:t>
+                      </a:r>
+                    </a:p>
+                  </a:txBody>
+                  <a:tcPr anchor="ctr">
+                    <a:solidFill>
+                      <a:srgbClr val="EFF2FB"/>
+                    </a:solidFill>
+                  </a:tcPr>
+                </a:tc>
+                <a:tc>
+                  <a:txBody>
+                    <a:bodyPr/>
+                    <a:lstStyle/>
+                    <a:p>
+                      <a:pPr algn="r"/>
+                      <a:r>
+                        <a:rPr sz="1400" b="1">
+                          <a:solidFill>
+                            <a:srgbClr val="21295C"/>
+                          </a:solidFill>
+                          <a:latin typeface="Calibri"/>
+                        </a:rPr>
+                        <a:t>9,3%</a:t>
+                      </a:r>
+                    </a:p>
+                  </a:txBody>
+                  <a:tcPr anchor="ctr">
+                    <a:solidFill>
+                      <a:srgbClr val="EFF2FB"/>
+                    </a:solidFill>
+                  </a:tcPr>
+                </a:tc>
+              </a:tr>
+              <a:tr h="384048">
+                <a:tc>
+                  <a:txBody>
+                    <a:bodyPr/>
+                    <a:lstStyle/>
+                    <a:p>
+                      <a:pPr algn="l"/>
+                      <a:r>
+                        <a:rPr sz="1400" b="0">
+                          <a:solidFill>
+                            <a:srgbClr val="21295C"/>
+                          </a:solidFill>
+                          <a:latin typeface="Calibri"/>
+                        </a:rPr>
+                        <a:t>Broadcom</a:t>
+                      </a:r>
+                    </a:p>
+                  </a:txBody>
+                  <a:tcPr anchor="ctr">
+                    <a:solidFill>
+                      <a:srgbClr val="FFFFFF"/>
+                    </a:solidFill>
+                  </a:tcPr>
+                </a:tc>
+                <a:tc>
+                  <a:txBody>
+                    <a:bodyPr/>
+                    <a:lstStyle/>
+                    <a:p>
+                      <a:pPr algn="r"/>
+                      <a:r>
+                        <a:rPr sz="1400" b="1">
+                          <a:solidFill>
+                            <a:srgbClr val="21295C"/>
+                          </a:solidFill>
+                          <a:latin typeface="Calibri"/>
+                        </a:rPr>
+                        <a:t>6,8%</a:t>
+                      </a:r>
+                    </a:p>
+                  </a:txBody>
+                  <a:tcPr anchor="ctr">
+                    <a:solidFill>
+                      <a:srgbClr val="FFFFFF"/>
+                    </a:solidFill>
+                  </a:tcPr>
+                </a:tc>
+              </a:tr>
+              <a:tr h="384048">
+                <a:tc>
+                  <a:txBody>
+                    <a:bodyPr/>
+                    <a:lstStyle/>
+                    <a:p>
+                      <a:pPr algn="l"/>
+                      <a:r>
+                        <a:rPr sz="1400" b="0">
+                          <a:solidFill>
+                            <a:srgbClr val="21295C"/>
+                          </a:solidFill>
+                          <a:latin typeface="Calibri"/>
+                        </a:rPr>
+                        <a:t>Apple</a:t>
+                      </a:r>
+                    </a:p>
+                  </a:txBody>
+                  <a:tcPr anchor="ctr">
+                    <a:solidFill>
+                      <a:srgbClr val="EFF2FB"/>
+                    </a:solidFill>
+                  </a:tcPr>
+                </a:tc>
+                <a:tc>
+                  <a:txBody>
+                    <a:bodyPr/>
+                    <a:lstStyle/>
+                    <a:p>
+                      <a:pPr algn="r"/>
+                      <a:r>
+                        <a:rPr sz="1400" b="1">
+                          <a:solidFill>
+                            <a:srgbClr val="21295C"/>
+                          </a:solidFill>
+                          <a:latin typeface="Calibri"/>
+                        </a:rPr>
+                        <a:t>6,7%</a:t>
+                      </a:r>
+                    </a:p>
+                  </a:txBody>
+                  <a:tcPr anchor="ctr">
+                    <a:solidFill>
+                      <a:srgbClr val="EFF2FB"/>
+                    </a:solidFill>
+                  </a:tcPr>
+                </a:tc>
+              </a:tr>
+              <a:tr h="384048">
+                <a:tc>
+                  <a:txBody>
+                    <a:bodyPr/>
+                    <a:lstStyle/>
+                    <a:p>
+                      <a:pPr algn="l"/>
+                      <a:r>
+                        <a:rPr sz="1400" b="0">
+                          <a:solidFill>
+                            <a:srgbClr val="21295C"/>
+                          </a:solidFill>
+                          <a:latin typeface="Calibri"/>
+                        </a:rPr>
+                        <a:t>Steel</a:t>
+                      </a:r>
+                    </a:p>
+                  </a:txBody>
+                  <a:tcPr anchor="ctr">
+                    <a:solidFill>
+                      <a:srgbClr val="FFFFFF"/>
+                    </a:solidFill>
+                  </a:tcPr>
+                </a:tc>
+                <a:tc>
+                  <a:txBody>
+                    <a:bodyPr/>
+                    <a:lstStyle/>
+                    <a:p>
+                      <a:pPr algn="r"/>
+                      <a:r>
+                        <a:rPr sz="1400" b="1">
+                          <a:solidFill>
+                            <a:srgbClr val="21295C"/>
+                          </a:solidFill>
+                          <a:latin typeface="Calibri"/>
+                        </a:rPr>
+                        <a:t>5,0%</a:t>
+                      </a:r>
+                    </a:p>
+                  </a:txBody>
+                  <a:tcPr anchor="ctr">
+                    <a:solidFill>
+                      <a:srgbClr val="FFFFFF"/>
+                    </a:solidFill>
+                  </a:tcPr>
+                </a:tc>
+              </a:tr>
+              <a:tr h="384048">
+                <a:tc>
+                  <a:txBody>
+                    <a:bodyPr/>
+                    <a:lstStyle/>
+                    <a:p>
+                      <a:pPr algn="l"/>
+                      <a:r>
+                        <a:rPr sz="1400" b="0">
+                          <a:solidFill>
+                            <a:srgbClr val="21295C"/>
+                          </a:solidFill>
+                          <a:latin typeface="Calibri"/>
+                        </a:rPr>
+                        <a:t>Bitcoin</a:t>
+                      </a:r>
+                    </a:p>
+                  </a:txBody>
+                  <a:tcPr anchor="ctr">
+                    <a:solidFill>
+                      <a:srgbClr val="EFF2FB"/>
+                    </a:solidFill>
+                  </a:tcPr>
+                </a:tc>
+                <a:tc>
+                  <a:txBody>
+                    <a:bodyPr/>
+                    <a:lstStyle/>
+                    <a:p>
+                      <a:pPr algn="r"/>
+                      <a:r>
+                        <a:rPr sz="1400" b="1">
+                          <a:solidFill>
+                            <a:srgbClr val="21295C"/>
+                          </a:solidFill>
+                          <a:latin typeface="Calibri"/>
+                        </a:rPr>
+                        <a:t>4,0%</a:t>
+                      </a:r>
+                    </a:p>
+                  </a:txBody>
+                  <a:tcPr anchor="ctr">
+                    <a:solidFill>
+                      <a:srgbClr val="EFF2FB"/>
+                    </a:solidFill>
+                  </a:tcPr>
+                </a:tc>
+              </a:tr>
+            </a:tbl>
+          </a:graphicData>
+        </a:graphic>
+      </p:graphicFrame>
+      <p:sp>
+        <p:nvSpPr>
+          <p:cNvPr id="7" name="Rectangle 6"/>
+          <p:cNvSpPr/>
+          <p:nvPr/>
+        </p:nvSpPr>
+        <p:spPr>
+          <a:xfrm>
+            <a:off x="6492240" y="2194560"/>
+            <a:ext cx="4846320" cy="3291840"/>
+          </a:xfrm>
+          <a:prstGeom prst="rect">
+            <a:avLst/>
+          </a:prstGeom>
+          <a:solidFill>
+            <a:srgbClr val="1E2761"/>
+          </a:solidFill>
+          <a:ln>
+            <a:noFill/>
+          </a:ln>
+          <a:effectLst/>
+        </p:spPr>
+        <p:style>
+          <a:lnRef idx="1">
+            <a:schemeClr val="accent1"/>
+          </a:lnRef>
+          <a:fillRef idx="3">
+            <a:schemeClr val="accent1"/>
+          </a:fillRef>
+          <a:effectRef idx="2">
+            <a:schemeClr val="accent1"/>
+          </a:effectRef>
+          <a:fontRef idx="minor">
+            <a:schemeClr val="lt1"/>
+          </a:fontRef>
+        </p:style>
+        <p:txBody>
+          <a:bodyPr rtlCol="0" anchor="ctr"/>
+          <a:lstStyle/>
+          <a:p>
+            <a:pPr algn="ctr"/>
+          </a:p>
+        </p:txBody>
+      </p:sp>
+      <p:sp>
+        <p:nvSpPr>
+          <p:cNvPr id="8" name="TextBox 7"/>
+          <p:cNvSpPr txBox="1"/>
+          <p:nvPr/>
+        </p:nvSpPr>
+        <p:spPr>
+          <a:xfrm>
+            <a:off x="6812280" y="2468880"/>
+            <a:ext cx="4206240" cy="2743200"/>
+          </a:xfrm>
+          <a:prstGeom prst="rect">
+            <a:avLst/>
+          </a:prstGeom>
+          <a:noFill/>
+        </p:spPr>
+        <p:txBody>
+          <a:bodyPr wrap="square" anchor="t" lIns="0" rIns="0" tIns="0" bIns="0">
+            <a:spAutoFit/>
+          </a:bodyPr>
+          <a:lstStyle/>
+          <a:p>
+            <a:pPr algn="l">
+              <a:lnSpc>
+                <a:spcPct val="125000"/>
+              </a:lnSpc>
+              <a:spcAft>
+                <a:spcPts val="200"/>
+              </a:spcAft>
+            </a:pPr>
+            <a:r>
+              <a:rPr sz="2000" b="1">
+                <a:solidFill>
+                  <a:srgbClr val="02C39A"/>
+                </a:solidFill>
+                <a:latin typeface="Calibri"/>
+              </a:rPr>
+              <a:t>Resultaat</a:t>
+            </a:r>
+          </a:p>
+          <a:p>
+            <a:pPr algn="l">
+              <a:lnSpc>
+                <a:spcPct val="125000"/>
+              </a:lnSpc>
+              <a:spcAft>
+                <a:spcPts val="200"/>
+              </a:spcAft>
+            </a:pPr>
+            <a:r>
+              <a:rPr sz="600" b="0">
+                <a:solidFill>
+                  <a:srgbClr val="FFFFFF"/>
+                </a:solidFill>
+                <a:latin typeface="Calibri"/>
+              </a:rPr>
+              <a:t/>
+            </a:r>
+          </a:p>
+          <a:p>
+            <a:pPr algn="l">
+              <a:lnSpc>
+                <a:spcPct val="125000"/>
+              </a:lnSpc>
+              <a:spcAft>
+                <a:spcPts val="200"/>
+              </a:spcAft>
+            </a:pPr>
+            <a:r>
+              <a:rPr sz="1800" b="0">
+                <a:solidFill>
+                  <a:srgbClr val="FFFFFF"/>
+                </a:solidFill>
+                <a:latin typeface="Calibri"/>
+              </a:rPr>
+              <a:t>Rendement:   9,1%</a:t>
+            </a:r>
+          </a:p>
+          <a:p>
+            <a:pPr algn="l">
+              <a:lnSpc>
+                <a:spcPct val="125000"/>
+              </a:lnSpc>
+              <a:spcAft>
+                <a:spcPts val="200"/>
+              </a:spcAft>
+            </a:pPr>
+            <a:r>
+              <a:rPr sz="1800" b="0">
+                <a:solidFill>
+                  <a:srgbClr val="FFFFFF"/>
+                </a:solidFill>
+                <a:latin typeface="Calibri"/>
+              </a:rPr>
+              <a:t>Risico (std):   6,0%</a:t>
+            </a:r>
+          </a:p>
+          <a:p>
+            <a:pPr algn="l">
+              <a:lnSpc>
+                <a:spcPct val="125000"/>
+              </a:lnSpc>
+              <a:spcAft>
+                <a:spcPts val="200"/>
+              </a:spcAft>
+            </a:pPr>
+            <a:r>
+              <a:rPr sz="2200" b="1">
+                <a:solidFill>
+                  <a:srgbClr val="FFFFFF"/>
+                </a:solidFill>
+                <a:latin typeface="Calibri"/>
+              </a:rPr>
+              <a:t>Sharpe-ratio:   1,10</a:t>
+            </a:r>
+          </a:p>
+          <a:p>
+            <a:pPr algn="l">
+              <a:lnSpc>
+                <a:spcPct val="125000"/>
+              </a:lnSpc>
+              <a:spcAft>
+                <a:spcPts val="200"/>
+              </a:spcAft>
+            </a:pPr>
+            <a:r>
               <a:rPr sz="1000" b="0">
                 <a:solidFill>
                   <a:srgbClr val="FFFFFF"/>

--- a/Werkplaats2_Groep3_Eindpresentatie.pptx
+++ b/Werkplaats2_Groep3_Eindpresentatie.pptx
@@ -15,16 +15,6 @@
     <p:sldId id="263" r:id="rId14"/>
     <p:sldId id="264" r:id="rId15"/>
     <p:sldId id="265" r:id="rId16"/>
-    <p:sldId id="266" r:id="rId17"/>
-    <p:sldId id="267" r:id="rId18"/>
-    <p:sldId id="268" r:id="rId19"/>
-    <p:sldId id="269" r:id="rId20"/>
-    <p:sldId id="270" r:id="rId21"/>
-    <p:sldId id="271" r:id="rId22"/>
-    <p:sldId id="272" r:id="rId23"/>
-    <p:sldId id="273" r:id="rId24"/>
-    <p:sldId id="274" r:id="rId25"/>
-    <p:sldId id="275" r:id="rId26"/>
   </p:sldIdLst>
   <p:sldSz cx="12191695" cy="6858000" type="screen4x3"/>
   <p:notesSz cx="6858000" cy="9144000"/>
@@ -3572,7 +3562,7 @@
 </p:sld>
 </file>
 
-<file path=ppt/slides/slide11.xml><?xml version="1.0" encoding="utf-8"?>
+<file path=ppt/slides/slide2.xml><?xml version="1.0" encoding="utf-8"?>
 <p:sld xmlns:a="http://schemas.openxmlformats.org/drawingml/2006/main" xmlns:p="http://schemas.openxmlformats.org/presentationml/2006/main" xmlns:r="http://schemas.openxmlformats.org/officeDocument/2006/relationships">
   <p:cSld>
     <p:spTree>
@@ -3592,6 +3582,335 @@
           <a:xfrm>
             <a:off x="0" y="0"/>
             <a:ext cx="12191695" cy="6858000"/>
+          </a:xfrm>
+          <a:prstGeom prst="rect">
+            <a:avLst/>
+          </a:prstGeom>
+          <a:solidFill>
+            <a:srgbClr val="FFFFFF"/>
+          </a:solidFill>
+          <a:ln>
+            <a:noFill/>
+          </a:ln>
+          <a:effectLst/>
+        </p:spPr>
+        <p:style>
+          <a:lnRef idx="1">
+            <a:schemeClr val="accent1"/>
+          </a:lnRef>
+          <a:fillRef idx="3">
+            <a:schemeClr val="accent1"/>
+          </a:fillRef>
+          <a:effectRef idx="2">
+            <a:schemeClr val="accent1"/>
+          </a:effectRef>
+          <a:fontRef idx="minor">
+            <a:schemeClr val="lt1"/>
+          </a:fontRef>
+        </p:style>
+        <p:txBody>
+          <a:bodyPr rtlCol="0" anchor="ctr"/>
+          <a:lstStyle/>
+          <a:p>
+            <a:pPr algn="ctr"/>
+          </a:p>
+        </p:txBody>
+      </p:sp>
+      <p:sp>
+        <p:nvSpPr>
+          <p:cNvPr id="3" name="TextBox 2"/>
+          <p:cNvSpPr txBox="1"/>
+          <p:nvPr/>
+        </p:nvSpPr>
+        <p:spPr>
+          <a:xfrm>
+            <a:off x="822960" y="502920"/>
+            <a:ext cx="10607040" cy="914400"/>
+          </a:xfrm>
+          <a:prstGeom prst="rect">
+            <a:avLst/>
+          </a:prstGeom>
+          <a:noFill/>
+        </p:spPr>
+        <p:txBody>
+          <a:bodyPr wrap="square" anchor="ctr" lIns="0" rIns="0" tIns="0" bIns="0">
+            <a:spAutoFit/>
+          </a:bodyPr>
+          <a:lstStyle/>
+          <a:p>
+            <a:pPr algn="l">
+              <a:lnSpc>
+                <a:spcPct val="110000"/>
+              </a:lnSpc>
+              <a:spcAft>
+                <a:spcPts val="200"/>
+              </a:spcAft>
+            </a:pPr>
+            <a:r>
+              <a:rPr sz="3400" b="1">
+                <a:solidFill>
+                  <a:srgbClr val="1E2761"/>
+                </a:solidFill>
+                <a:latin typeface="Georgia"/>
+              </a:rPr>
+              <a:t>Onze data &amp; aanpak</a:t>
+            </a:r>
+          </a:p>
+        </p:txBody>
+      </p:sp>
+      <p:sp>
+        <p:nvSpPr>
+          <p:cNvPr id="4" name="Rectangle 3"/>
+          <p:cNvSpPr/>
+          <p:nvPr/>
+        </p:nvSpPr>
+        <p:spPr>
+          <a:xfrm>
+            <a:off x="822960" y="1417320"/>
+            <a:ext cx="2194560" cy="54864"/>
+          </a:xfrm>
+          <a:prstGeom prst="rect">
+            <a:avLst/>
+          </a:prstGeom>
+          <a:solidFill>
+            <a:srgbClr val="02C39A"/>
+          </a:solidFill>
+          <a:ln>
+            <a:noFill/>
+          </a:ln>
+          <a:effectLst/>
+        </p:spPr>
+        <p:style>
+          <a:lnRef idx="1">
+            <a:schemeClr val="accent1"/>
+          </a:lnRef>
+          <a:fillRef idx="3">
+            <a:schemeClr val="accent1"/>
+          </a:fillRef>
+          <a:effectRef idx="2">
+            <a:schemeClr val="accent1"/>
+          </a:effectRef>
+          <a:fontRef idx="minor">
+            <a:schemeClr val="lt1"/>
+          </a:fontRef>
+        </p:style>
+        <p:txBody>
+          <a:bodyPr rtlCol="0" anchor="ctr"/>
+          <a:lstStyle/>
+          <a:p>
+            <a:pPr algn="ctr"/>
+          </a:p>
+        </p:txBody>
+      </p:sp>
+      <p:sp>
+        <p:nvSpPr>
+          <p:cNvPr id="5" name="TextBox 4"/>
+          <p:cNvSpPr txBox="1"/>
+          <p:nvPr/>
+        </p:nvSpPr>
+        <p:spPr>
+          <a:xfrm>
+            <a:off x="822960" y="1828800"/>
+            <a:ext cx="10515600" cy="4389120"/>
+          </a:xfrm>
+          <a:prstGeom prst="rect">
+            <a:avLst/>
+          </a:prstGeom>
+          <a:noFill/>
+        </p:spPr>
+        <p:txBody>
+          <a:bodyPr wrap="square" anchor="t" lIns="0" rIns="0" tIns="0" bIns="0">
+            <a:spAutoFit/>
+          </a:bodyPr>
+          <a:lstStyle/>
+          <a:p>
+            <a:pPr algn="l">
+              <a:lnSpc>
+                <a:spcPct val="150000"/>
+              </a:lnSpc>
+              <a:spcAft>
+                <a:spcPts val="200"/>
+              </a:spcAft>
+            </a:pPr>
+            <a:r>
+              <a:rPr sz="1800" b="0">
+                <a:solidFill>
+                  <a:srgbClr val="21295C"/>
+                </a:solidFill>
+                <a:latin typeface="Calibri"/>
+              </a:rPr>
+              <a:t>We verzamelden 20 producten en indicatoren over de periode dec 2015 – mei 2026.</a:t>
+            </a:r>
+          </a:p>
+          <a:p>
+            <a:pPr algn="l">
+              <a:lnSpc>
+                <a:spcPct val="150000"/>
+              </a:lnSpc>
+              <a:spcAft>
+                <a:spcPts val="200"/>
+              </a:spcAft>
+            </a:pPr>
+            <a:r>
+              <a:rPr sz="1600" b="0">
+                <a:solidFill>
+                  <a:srgbClr val="21295C"/>
+                </a:solidFill>
+                <a:latin typeface="Calibri"/>
+              </a:rPr>
+              <a:t>•  Aandelen, crypto en obligaties via Yahoo Finance (Apple, ASML, Broadcom, Shell, Bitcoin).</a:t>
+            </a:r>
+          </a:p>
+          <a:p>
+            <a:pPr algn="l">
+              <a:lnSpc>
+                <a:spcPct val="150000"/>
+              </a:lnSpc>
+              <a:spcAft>
+                <a:spcPts val="200"/>
+              </a:spcAft>
+            </a:pPr>
+            <a:r>
+              <a:rPr sz="1600" b="0">
+                <a:solidFill>
+                  <a:srgbClr val="21295C"/>
+                </a:solidFill>
+                <a:latin typeface="Calibri"/>
+              </a:rPr>
+              <a:t>•  Grondstoffen via Yahoo Finance en FRED (goud, olie, koper, graan, koffie, gas).</a:t>
+            </a:r>
+          </a:p>
+          <a:p>
+            <a:pPr algn="l">
+              <a:lnSpc>
+                <a:spcPct val="150000"/>
+              </a:lnSpc>
+              <a:spcAft>
+                <a:spcPts val="200"/>
+              </a:spcAft>
+            </a:pPr>
+            <a:r>
+              <a:rPr sz="1600" b="0">
+                <a:solidFill>
+                  <a:srgbClr val="21295C"/>
+                </a:solidFill>
+                <a:latin typeface="Calibri"/>
+              </a:rPr>
+              <a:t>•  Macro-economische indicatoren via de FED St. Louis (GDP, inkomen, inflatie, rente, werkloosheid).</a:t>
+            </a:r>
+          </a:p>
+          <a:p>
+            <a:pPr algn="l">
+              <a:lnSpc>
+                <a:spcPct val="150000"/>
+              </a:lnSpc>
+              <a:spcAft>
+                <a:spcPts val="200"/>
+              </a:spcAft>
+            </a:pPr>
+            <a:r>
+              <a:rPr sz="1600" b="0">
+                <a:solidFill>
+                  <a:srgbClr val="21295C"/>
+                </a:solidFill>
+                <a:latin typeface="Calibri"/>
+              </a:rPr>
+              <a:t>Hierop pasten we regressie, tijdreeksanalyse, sentimentanalyse, machine learning en</a:t>
+            </a:r>
+          </a:p>
+          <a:p>
+            <a:pPr algn="l">
+              <a:lnSpc>
+                <a:spcPct val="150000"/>
+              </a:lnSpc>
+              <a:spcAft>
+                <a:spcPts val="200"/>
+              </a:spcAft>
+            </a:pPr>
+            <a:r>
+              <a:rPr sz="1600" b="0">
+                <a:solidFill>
+                  <a:srgbClr val="21295C"/>
+                </a:solidFill>
+                <a:latin typeface="Calibri"/>
+              </a:rPr>
+              <a:t>portfolio-optimalisatie toe om verbanden te onderzoeken en een optimale portefeuille samen te stellen.</a:t>
+            </a:r>
+          </a:p>
+        </p:txBody>
+      </p:sp>
+    </p:spTree>
+  </p:cSld>
+  <p:clrMapOvr>
+    <a:masterClrMapping/>
+  </p:clrMapOvr>
+</p:sld>
+</file>
+
+<file path=ppt/slides/slide3.xml><?xml version="1.0" encoding="utf-8"?>
+<p:sld xmlns:a="http://schemas.openxmlformats.org/drawingml/2006/main" xmlns:p="http://schemas.openxmlformats.org/presentationml/2006/main" xmlns:r="http://schemas.openxmlformats.org/officeDocument/2006/relationships">
+  <p:cSld>
+    <p:spTree>
+      <p:nvGrpSpPr>
+        <p:cNvPr id="1" name=""/>
+        <p:cNvGrpSpPr/>
+        <p:nvPr/>
+      </p:nvGrpSpPr>
+      <p:grpSpPr/>
+      <p:sp>
+        <p:nvSpPr>
+          <p:cNvPr id="2" name="Rectangle 1"/>
+          <p:cNvSpPr/>
+          <p:nvPr/>
+        </p:nvSpPr>
+        <p:spPr>
+          <a:xfrm>
+            <a:off x="0" y="0"/>
+            <a:ext cx="12191695" cy="6858000"/>
+          </a:xfrm>
+          <a:prstGeom prst="rect">
+            <a:avLst/>
+          </a:prstGeom>
+          <a:solidFill>
+            <a:srgbClr val="FFFFFF"/>
+          </a:solidFill>
+          <a:ln>
+            <a:noFill/>
+          </a:ln>
+          <a:effectLst/>
+        </p:spPr>
+        <p:style>
+          <a:lnRef idx="1">
+            <a:schemeClr val="accent1"/>
+          </a:lnRef>
+          <a:fillRef idx="3">
+            <a:schemeClr val="accent1"/>
+          </a:fillRef>
+          <a:effectRef idx="2">
+            <a:schemeClr val="accent1"/>
+          </a:effectRef>
+          <a:fontRef idx="minor">
+            <a:schemeClr val="lt1"/>
+          </a:fontRef>
+        </p:style>
+        <p:txBody>
+          <a:bodyPr rtlCol="0" anchor="ctr"/>
+          <a:lstStyle/>
+          <a:p>
+            <a:pPr algn="ctr"/>
+          </a:p>
+        </p:txBody>
+      </p:sp>
+      <p:sp>
+        <p:nvSpPr>
+          <p:cNvPr id="3" name="Rectangle 2"/>
+          <p:cNvSpPr/>
+          <p:nvPr/>
+        </p:nvSpPr>
+        <p:spPr>
+          <a:xfrm>
+            <a:off x="0" y="0"/>
+            <a:ext cx="3931920" cy="6858000"/>
           </a:xfrm>
           <a:prstGeom prst="rect">
             <a:avLst/>
@@ -3628,14 +3947,14 @@
       </p:sp>
       <p:sp>
         <p:nvSpPr>
-          <p:cNvPr id="3" name="Oval 2"/>
+          <p:cNvPr id="4" name="Oval 3"/>
           <p:cNvSpPr/>
           <p:nvPr/>
         </p:nvSpPr>
         <p:spPr>
           <a:xfrm>
-            <a:off x="822960" y="1280160"/>
-            <a:ext cx="320040" cy="320040"/>
+            <a:off x="548640" y="640080"/>
+            <a:ext cx="256032" cy="256032"/>
           </a:xfrm>
           <a:prstGeom prst="ellipse">
             <a:avLst/>
@@ -3672,14 +3991,14 @@
       </p:sp>
       <p:sp>
         <p:nvSpPr>
-          <p:cNvPr id="4" name="TextBox 3"/>
+          <p:cNvPr id="5" name="TextBox 4"/>
           <p:cNvSpPr txBox="1"/>
           <p:nvPr/>
         </p:nvSpPr>
         <p:spPr>
           <a:xfrm>
-            <a:off x="822960" y="2377440"/>
-            <a:ext cx="10515600" cy="1645920"/>
+            <a:off x="548640" y="1051560"/>
+            <a:ext cx="3017520" cy="548640"/>
           </a:xfrm>
           <a:prstGeom prst="rect">
             <a:avLst/>
@@ -3701,27 +4020,27 @@
               </a:spcAft>
             </a:pPr>
             <a:r>
-              <a:rPr sz="4600" b="1">
-                <a:solidFill>
-                  <a:srgbClr val="FFFFFF"/>
-                </a:solidFill>
-                <a:latin typeface="Georgia"/>
-              </a:rPr>
-              <a:t>Werkplaats 2 — Eindpresentatie</a:t>
-            </a:r>
-          </a:p>
-        </p:txBody>
-      </p:sp>
-      <p:sp>
-        <p:nvSpPr>
-          <p:cNvPr id="5" name="TextBox 4"/>
+              <a:rPr sz="2000" b="1">
+                <a:solidFill>
+                  <a:srgbClr val="02C39A"/>
+                </a:solidFill>
+                <a:latin typeface="Calibri"/>
+              </a:rPr>
+              <a:t>Onderzoeksvraag 1</a:t>
+            </a:r>
+          </a:p>
+        </p:txBody>
+      </p:sp>
+      <p:sp>
+        <p:nvSpPr>
+          <p:cNvPr id="6" name="TextBox 5"/>
           <p:cNvSpPr txBox="1"/>
           <p:nvPr/>
         </p:nvSpPr>
         <p:spPr>
           <a:xfrm>
-            <a:off x="868680" y="4114800"/>
-            <a:ext cx="10515600" cy="914400"/>
+            <a:off x="548640" y="1920240"/>
+            <a:ext cx="3108960" cy="4389120"/>
           </a:xfrm>
           <a:prstGeom prst="rect">
             <a:avLst/>
@@ -3736,20 +4055,317 @@
           <a:p>
             <a:pPr algn="l">
               <a:lnSpc>
-                <a:spcPct val="120000"/>
-              </a:lnSpc>
-              <a:spcAft>
-                <a:spcPts val="200"/>
-              </a:spcAft>
-            </a:pPr>
-            <a:r>
-              <a:rPr sz="2000" b="0">
+                <a:spcPct val="140000"/>
+              </a:lnSpc>
+              <a:spcAft>
+                <a:spcPts val="200"/>
+              </a:spcAft>
+            </a:pPr>
+            <a:r>
+              <a:rPr sz="1500" b="1">
                 <a:solidFill>
                   <a:srgbClr val="CADCFC"/>
                 </a:solidFill>
                 <a:latin typeface="Calibri"/>
               </a:rPr>
-              <a:t>Groep 3  ·  Data-analyse van een beleggingsportfolio en macro-economische data</a:t>
+              <a:t>Stappen vooraf</a:t>
+            </a:r>
+          </a:p>
+          <a:p>
+            <a:pPr algn="l">
+              <a:lnSpc>
+                <a:spcPct val="140000"/>
+              </a:lnSpc>
+              <a:spcAft>
+                <a:spcPts val="200"/>
+              </a:spcAft>
+            </a:pPr>
+            <a:r>
+              <a:rPr sz="1400" b="0">
+                <a:solidFill>
+                  <a:srgbClr val="FFFFFF"/>
+                </a:solidFill>
+                <a:latin typeface="Calibri"/>
+              </a:rPr>
+              <a:t>1.  Relevante data geselecteerd</a:t>
+            </a:r>
+          </a:p>
+          <a:p>
+            <a:pPr algn="l">
+              <a:lnSpc>
+                <a:spcPct val="140000"/>
+              </a:lnSpc>
+              <a:spcAft>
+                <a:spcPts val="200"/>
+              </a:spcAft>
+            </a:pPr>
+            <a:r>
+              <a:rPr sz="1400" b="0">
+                <a:solidFill>
+                  <a:srgbClr val="FFFFFF"/>
+                </a:solidFill>
+                <a:latin typeface="Calibri"/>
+              </a:rPr>
+              <a:t>2.  Correlatie-heatmap gemaakt</a:t>
+            </a:r>
+          </a:p>
+          <a:p>
+            <a:pPr algn="l">
+              <a:lnSpc>
+                <a:spcPct val="140000"/>
+              </a:lnSpc>
+              <a:spcAft>
+                <a:spcPts val="200"/>
+              </a:spcAft>
+            </a:pPr>
+            <a:r>
+              <a:rPr sz="1400" b="0">
+                <a:solidFill>
+                  <a:srgbClr val="FFFFFF"/>
+                </a:solidFill>
+                <a:latin typeface="Calibri"/>
+              </a:rPr>
+              <a:t>3.  Bubble chart (GDP x Income x Coffee)</a:t>
+            </a:r>
+          </a:p>
+          <a:p>
+            <a:pPr algn="l">
+              <a:lnSpc>
+                <a:spcPct val="140000"/>
+              </a:lnSpc>
+              <a:spcAft>
+                <a:spcPts val="200"/>
+              </a:spcAft>
+            </a:pPr>
+            <a:r>
+              <a:rPr sz="1400" b="0">
+                <a:solidFill>
+                  <a:srgbClr val="FFFFFF"/>
+                </a:solidFill>
+                <a:latin typeface="Calibri"/>
+              </a:rPr>
+              <a:t>4.  Meervoudige regressie</a:t>
+            </a:r>
+          </a:p>
+        </p:txBody>
+      </p:sp>
+      <p:sp>
+        <p:nvSpPr>
+          <p:cNvPr id="7" name="TextBox 6"/>
+          <p:cNvSpPr txBox="1"/>
+          <p:nvPr/>
+        </p:nvSpPr>
+        <p:spPr>
+          <a:xfrm>
+            <a:off x="4480560" y="914400"/>
+            <a:ext cx="7132320" cy="1280160"/>
+          </a:xfrm>
+          <a:prstGeom prst="rect">
+            <a:avLst/>
+          </a:prstGeom>
+          <a:noFill/>
+        </p:spPr>
+        <p:txBody>
+          <a:bodyPr wrap="square" anchor="t" lIns="0" rIns="0" tIns="0" bIns="0">
+            <a:spAutoFit/>
+          </a:bodyPr>
+          <a:lstStyle/>
+          <a:p>
+            <a:pPr algn="l">
+              <a:lnSpc>
+                <a:spcPct val="115000"/>
+              </a:lnSpc>
+              <a:spcAft>
+                <a:spcPts val="200"/>
+              </a:spcAft>
+            </a:pPr>
+            <a:r>
+              <a:rPr sz="1300" b="1">
+                <a:solidFill>
+                  <a:srgbClr val="02C39A"/>
+                </a:solidFill>
+                <a:latin typeface="Calibri"/>
+              </a:rPr>
+              <a:t>VRAAG</a:t>
+            </a:r>
+          </a:p>
+          <a:p>
+            <a:pPr algn="l">
+              <a:lnSpc>
+                <a:spcPct val="115000"/>
+              </a:lnSpc>
+              <a:spcAft>
+                <a:spcPts val="200"/>
+              </a:spcAft>
+            </a:pPr>
+            <a:r>
+              <a:rPr sz="1900" b="0">
+                <a:solidFill>
+                  <a:srgbClr val="21295C"/>
+                </a:solidFill>
+                <a:latin typeface="Calibri"/>
+              </a:rPr>
+              <a:t>Wat is het verband tussen GDP, persoonlijk inkomen en de koffieprijs?</a:t>
+            </a:r>
+          </a:p>
+        </p:txBody>
+      </p:sp>
+      <p:sp>
+        <p:nvSpPr>
+          <p:cNvPr id="8" name="TextBox 7"/>
+          <p:cNvSpPr txBox="1"/>
+          <p:nvPr/>
+        </p:nvSpPr>
+        <p:spPr>
+          <a:xfrm>
+            <a:off x="4480560" y="2651760"/>
+            <a:ext cx="7132320" cy="1005840"/>
+          </a:xfrm>
+          <a:prstGeom prst="rect">
+            <a:avLst/>
+          </a:prstGeom>
+          <a:noFill/>
+        </p:spPr>
+        <p:txBody>
+          <a:bodyPr wrap="square" anchor="t" lIns="0" rIns="0" tIns="0" bIns="0">
+            <a:spAutoFit/>
+          </a:bodyPr>
+          <a:lstStyle/>
+          <a:p>
+            <a:pPr algn="l">
+              <a:lnSpc>
+                <a:spcPct val="115000"/>
+              </a:lnSpc>
+              <a:spcAft>
+                <a:spcPts val="200"/>
+              </a:spcAft>
+            </a:pPr>
+            <a:r>
+              <a:rPr sz="1300" b="1">
+                <a:solidFill>
+                  <a:srgbClr val="02C39A"/>
+                </a:solidFill>
+                <a:latin typeface="Calibri"/>
+              </a:rPr>
+              <a:t>RESULTAAT REGRESSIE</a:t>
+            </a:r>
+          </a:p>
+          <a:p>
+            <a:pPr algn="l">
+              <a:lnSpc>
+                <a:spcPct val="115000"/>
+              </a:lnSpc>
+              <a:spcAft>
+                <a:spcPts val="200"/>
+              </a:spcAft>
+            </a:pPr>
+            <a:r>
+              <a:rPr sz="1600" b="0">
+                <a:solidFill>
+                  <a:srgbClr val="21295C"/>
+                </a:solidFill>
+                <a:latin typeface="Calibri"/>
+              </a:rPr>
+              <a:t>GDP +0,0160   ·   Income -0,0064   ·   R² = 0,80   (p &lt; 0,05)</a:t>
+            </a:r>
+          </a:p>
+        </p:txBody>
+      </p:sp>
+      <p:sp>
+        <p:nvSpPr>
+          <p:cNvPr id="9" name="TextBox 8"/>
+          <p:cNvSpPr txBox="1"/>
+          <p:nvPr/>
+        </p:nvSpPr>
+        <p:spPr>
+          <a:xfrm>
+            <a:off x="4480560" y="3931920"/>
+            <a:ext cx="7132320" cy="2377440"/>
+          </a:xfrm>
+          <a:prstGeom prst="rect">
+            <a:avLst/>
+          </a:prstGeom>
+          <a:noFill/>
+        </p:spPr>
+        <p:txBody>
+          <a:bodyPr wrap="square" anchor="t" lIns="0" rIns="0" tIns="0" bIns="0">
+            <a:spAutoFit/>
+          </a:bodyPr>
+          <a:lstStyle/>
+          <a:p>
+            <a:pPr algn="l">
+              <a:lnSpc>
+                <a:spcPct val="125000"/>
+              </a:lnSpc>
+              <a:spcAft>
+                <a:spcPts val="200"/>
+              </a:spcAft>
+            </a:pPr>
+            <a:r>
+              <a:rPr sz="1300" b="1">
+                <a:solidFill>
+                  <a:srgbClr val="02C39A"/>
+                </a:solidFill>
+                <a:latin typeface="Calibri"/>
+              </a:rPr>
+              <a:t>CONCLUSIE</a:t>
+            </a:r>
+          </a:p>
+          <a:p>
+            <a:pPr algn="l">
+              <a:lnSpc>
+                <a:spcPct val="125000"/>
+              </a:lnSpc>
+              <a:spcAft>
+                <a:spcPts val="200"/>
+              </a:spcAft>
+            </a:pPr>
+            <a:r>
+              <a:rPr sz="1600" b="0">
+                <a:solidFill>
+                  <a:srgbClr val="21295C"/>
+                </a:solidFill>
+                <a:latin typeface="Calibri"/>
+              </a:rPr>
+              <a:t>Significant en matige correlatie.</a:t>
+            </a:r>
+          </a:p>
+          <a:p>
+            <a:pPr algn="l">
+              <a:lnSpc>
+                <a:spcPct val="125000"/>
+              </a:lnSpc>
+              <a:spcAft>
+                <a:spcPts val="200"/>
+              </a:spcAft>
+            </a:pPr>
+            <a:r>
+              <a:rPr sz="1600" b="0">
+                <a:solidFill>
+                  <a:srgbClr val="21295C"/>
+                </a:solidFill>
+                <a:latin typeface="Calibri"/>
+              </a:rPr>
+              <a:t>Door onderlinge samenhang van de X-variabelen is geen</a:t>
+            </a:r>
+          </a:p>
+          <a:p>
+            <a:pPr algn="l">
+              <a:lnSpc>
+                <a:spcPct val="125000"/>
+              </a:lnSpc>
+              <a:spcAft>
+                <a:spcPts val="200"/>
+              </a:spcAft>
+            </a:pPr>
+            <a:r>
+              <a:rPr sz="1600" b="0">
+                <a:solidFill>
+                  <a:srgbClr val="21295C"/>
+                </a:solidFill>
+                <a:latin typeface="Calibri"/>
+              </a:rPr>
+              <a:t>zuivere oorzaak-gevolg-conclusie te trekken.</a:t>
             </a:r>
           </a:p>
         </p:txBody>
@@ -3762,7 +4378,7 @@
 </p:sld>
 </file>
 
-<file path=ppt/slides/slide12.xml><?xml version="1.0" encoding="utf-8"?>
+<file path=ppt/slides/slide4.xml><?xml version="1.0" encoding="utf-8"?>
 <p:sld xmlns:a="http://schemas.openxmlformats.org/drawingml/2006/main" xmlns:p="http://schemas.openxmlformats.org/presentationml/2006/main" xmlns:r="http://schemas.openxmlformats.org/officeDocument/2006/relationships">
   <p:cSld>
     <p:spTree>
@@ -3818,58 +4434,60 @@
       </p:sp>
       <p:sp>
         <p:nvSpPr>
-          <p:cNvPr id="3" name="TextBox 2"/>
-          <p:cNvSpPr txBox="1"/>
+          <p:cNvPr id="3" name="Rectangle 2"/>
+          <p:cNvSpPr/>
           <p:nvPr/>
         </p:nvSpPr>
         <p:spPr>
           <a:xfrm>
-            <a:off x="822960" y="502920"/>
-            <a:ext cx="10607040" cy="914400"/>
+            <a:off x="0" y="0"/>
+            <a:ext cx="3931920" cy="6858000"/>
           </a:xfrm>
           <a:prstGeom prst="rect">
             <a:avLst/>
           </a:prstGeom>
-          <a:noFill/>
-        </p:spPr>
-        <p:txBody>
-          <a:bodyPr wrap="square" anchor="ctr" lIns="0" rIns="0" tIns="0" bIns="0">
-            <a:spAutoFit/>
-          </a:bodyPr>
-          <a:lstStyle/>
-          <a:p>
-            <a:pPr algn="l">
-              <a:lnSpc>
-                <a:spcPct val="110000"/>
-              </a:lnSpc>
-              <a:spcAft>
-                <a:spcPts val="200"/>
-              </a:spcAft>
-            </a:pPr>
-            <a:r>
-              <a:rPr sz="3400" b="1">
-                <a:solidFill>
-                  <a:srgbClr val="1E2761"/>
-                </a:solidFill>
-                <a:latin typeface="Georgia"/>
-              </a:rPr>
-              <a:t>Onze data &amp; aanpak</a:t>
-            </a:r>
-          </a:p>
-        </p:txBody>
-      </p:sp>
-      <p:sp>
-        <p:nvSpPr>
-          <p:cNvPr id="4" name="Rectangle 3"/>
+          <a:solidFill>
+            <a:srgbClr val="1E2761"/>
+          </a:solidFill>
+          <a:ln>
+            <a:noFill/>
+          </a:ln>
+          <a:effectLst/>
+        </p:spPr>
+        <p:style>
+          <a:lnRef idx="1">
+            <a:schemeClr val="accent1"/>
+          </a:lnRef>
+          <a:fillRef idx="3">
+            <a:schemeClr val="accent1"/>
+          </a:fillRef>
+          <a:effectRef idx="2">
+            <a:schemeClr val="accent1"/>
+          </a:effectRef>
+          <a:fontRef idx="minor">
+            <a:schemeClr val="lt1"/>
+          </a:fontRef>
+        </p:style>
+        <p:txBody>
+          <a:bodyPr rtlCol="0" anchor="ctr"/>
+          <a:lstStyle/>
+          <a:p>
+            <a:pPr algn="ctr"/>
+          </a:p>
+        </p:txBody>
+      </p:sp>
+      <p:sp>
+        <p:nvSpPr>
+          <p:cNvPr id="4" name="Oval 3"/>
           <p:cNvSpPr/>
           <p:nvPr/>
         </p:nvSpPr>
         <p:spPr>
           <a:xfrm>
-            <a:off x="822960" y="1417320"/>
-            <a:ext cx="2194560" cy="54864"/>
-          </a:xfrm>
-          <a:prstGeom prst="rect">
+            <a:off x="548640" y="640080"/>
+            <a:ext cx="256032" cy="256032"/>
+          </a:xfrm>
+          <a:prstGeom prst="ellipse">
             <a:avLst/>
           </a:prstGeom>
           <a:solidFill>
@@ -3910,8 +4528,8 @@
         </p:nvSpPr>
         <p:spPr>
           <a:xfrm>
-            <a:off x="822960" y="1828800"/>
-            <a:ext cx="10515600" cy="4389120"/>
+            <a:off x="548640" y="1051560"/>
+            <a:ext cx="3017520" cy="548640"/>
           </a:xfrm>
           <a:prstGeom prst="rect">
             <a:avLst/>
@@ -3926,26 +4544,247 @@
           <a:p>
             <a:pPr algn="l">
               <a:lnSpc>
-                <a:spcPct val="150000"/>
-              </a:lnSpc>
-              <a:spcAft>
-                <a:spcPts val="200"/>
-              </a:spcAft>
-            </a:pPr>
-            <a:r>
-              <a:rPr sz="1800" b="0">
+                <a:spcPct val="110000"/>
+              </a:lnSpc>
+              <a:spcAft>
+                <a:spcPts val="200"/>
+              </a:spcAft>
+            </a:pPr>
+            <a:r>
+              <a:rPr sz="2000" b="1">
+                <a:solidFill>
+                  <a:srgbClr val="02C39A"/>
+                </a:solidFill>
+                <a:latin typeface="Calibri"/>
+              </a:rPr>
+              <a:t>Onderzoeksvraag 2</a:t>
+            </a:r>
+          </a:p>
+        </p:txBody>
+      </p:sp>
+      <p:sp>
+        <p:nvSpPr>
+          <p:cNvPr id="6" name="TextBox 5"/>
+          <p:cNvSpPr txBox="1"/>
+          <p:nvPr/>
+        </p:nvSpPr>
+        <p:spPr>
+          <a:xfrm>
+            <a:off x="548640" y="1920240"/>
+            <a:ext cx="3108960" cy="4389120"/>
+          </a:xfrm>
+          <a:prstGeom prst="rect">
+            <a:avLst/>
+          </a:prstGeom>
+          <a:noFill/>
+        </p:spPr>
+        <p:txBody>
+          <a:bodyPr wrap="square" anchor="t" lIns="0" rIns="0" tIns="0" bIns="0">
+            <a:spAutoFit/>
+          </a:bodyPr>
+          <a:lstStyle/>
+          <a:p>
+            <a:pPr algn="l">
+              <a:lnSpc>
+                <a:spcPct val="140000"/>
+              </a:lnSpc>
+              <a:spcAft>
+                <a:spcPts val="200"/>
+              </a:spcAft>
+            </a:pPr>
+            <a:r>
+              <a:rPr sz="1500" b="1">
+                <a:solidFill>
+                  <a:srgbClr val="CADCFC"/>
+                </a:solidFill>
+                <a:latin typeface="Calibri"/>
+              </a:rPr>
+              <a:t>Stappen vooraf</a:t>
+            </a:r>
+          </a:p>
+          <a:p>
+            <a:pPr algn="l">
+              <a:lnSpc>
+                <a:spcPct val="140000"/>
+              </a:lnSpc>
+              <a:spcAft>
+                <a:spcPts val="200"/>
+              </a:spcAft>
+            </a:pPr>
+            <a:r>
+              <a:rPr sz="1400" b="0">
+                <a:solidFill>
+                  <a:srgbClr val="FFFFFF"/>
+                </a:solidFill>
+                <a:latin typeface="Calibri"/>
+              </a:rPr>
+              <a:t>1.  Data geselecteerd</a:t>
+            </a:r>
+          </a:p>
+          <a:p>
+            <a:pPr algn="l">
+              <a:lnSpc>
+                <a:spcPct val="140000"/>
+              </a:lnSpc>
+              <a:spcAft>
+                <a:spcPts val="200"/>
+              </a:spcAft>
+            </a:pPr>
+            <a:r>
+              <a:rPr sz="1400" b="0">
+                <a:solidFill>
+                  <a:srgbClr val="FFFFFF"/>
+                </a:solidFill>
+                <a:latin typeface="Calibri"/>
+              </a:rPr>
+              <a:t>2.  Heatmap bekeken</a:t>
+            </a:r>
+          </a:p>
+          <a:p>
+            <a:pPr algn="l">
+              <a:lnSpc>
+                <a:spcPct val="140000"/>
+              </a:lnSpc>
+              <a:spcAft>
+                <a:spcPts val="200"/>
+              </a:spcAft>
+            </a:pPr>
+            <a:r>
+              <a:rPr sz="1400" b="0">
+                <a:solidFill>
+                  <a:srgbClr val="FFFFFF"/>
+                </a:solidFill>
+                <a:latin typeface="Calibri"/>
+              </a:rPr>
+              <a:t>3.  Bubble chart (Broadcom x Coffee)</a:t>
+            </a:r>
+          </a:p>
+          <a:p>
+            <a:pPr algn="l">
+              <a:lnSpc>
+                <a:spcPct val="140000"/>
+              </a:lnSpc>
+              <a:spcAft>
+                <a:spcPts val="200"/>
+              </a:spcAft>
+            </a:pPr>
+            <a:r>
+              <a:rPr sz="1400" b="0">
+                <a:solidFill>
+                  <a:srgbClr val="FFFFFF"/>
+                </a:solidFill>
+                <a:latin typeface="Calibri"/>
+              </a:rPr>
+              <a:t>4.  Enkelvoudige regressie</a:t>
+            </a:r>
+          </a:p>
+        </p:txBody>
+      </p:sp>
+      <p:sp>
+        <p:nvSpPr>
+          <p:cNvPr id="7" name="TextBox 6"/>
+          <p:cNvSpPr txBox="1"/>
+          <p:nvPr/>
+        </p:nvSpPr>
+        <p:spPr>
+          <a:xfrm>
+            <a:off x="4480560" y="914400"/>
+            <a:ext cx="7132320" cy="1280160"/>
+          </a:xfrm>
+          <a:prstGeom prst="rect">
+            <a:avLst/>
+          </a:prstGeom>
+          <a:noFill/>
+        </p:spPr>
+        <p:txBody>
+          <a:bodyPr wrap="square" anchor="t" lIns="0" rIns="0" tIns="0" bIns="0">
+            <a:spAutoFit/>
+          </a:bodyPr>
+          <a:lstStyle/>
+          <a:p>
+            <a:pPr algn="l">
+              <a:lnSpc>
+                <a:spcPct val="115000"/>
+              </a:lnSpc>
+              <a:spcAft>
+                <a:spcPts val="200"/>
+              </a:spcAft>
+            </a:pPr>
+            <a:r>
+              <a:rPr sz="1300" b="1">
+                <a:solidFill>
+                  <a:srgbClr val="02C39A"/>
+                </a:solidFill>
+                <a:latin typeface="Calibri"/>
+              </a:rPr>
+              <a:t>VRAAG</a:t>
+            </a:r>
+          </a:p>
+          <a:p>
+            <a:pPr algn="l">
+              <a:lnSpc>
+                <a:spcPct val="115000"/>
+              </a:lnSpc>
+              <a:spcAft>
+                <a:spcPts val="200"/>
+              </a:spcAft>
+            </a:pPr>
+            <a:r>
+              <a:rPr sz="1900" b="0">
                 <a:solidFill>
                   <a:srgbClr val="21295C"/>
                 </a:solidFill>
                 <a:latin typeface="Calibri"/>
               </a:rPr>
-              <a:t>We verzamelden 20 producten en indicatoren over de periode dec 2015 – mei 2026.</a:t>
-            </a:r>
-          </a:p>
-          <a:p>
-            <a:pPr algn="l">
-              <a:lnSpc>
-                <a:spcPct val="150000"/>
+              <a:t>Wat is het verband van Broadcom op de koffieprijs?</a:t>
+            </a:r>
+          </a:p>
+        </p:txBody>
+      </p:sp>
+      <p:sp>
+        <p:nvSpPr>
+          <p:cNvPr id="8" name="TextBox 7"/>
+          <p:cNvSpPr txBox="1"/>
+          <p:nvPr/>
+        </p:nvSpPr>
+        <p:spPr>
+          <a:xfrm>
+            <a:off x="4480560" y="2651760"/>
+            <a:ext cx="7132320" cy="1005840"/>
+          </a:xfrm>
+          <a:prstGeom prst="rect">
+            <a:avLst/>
+          </a:prstGeom>
+          <a:noFill/>
+        </p:spPr>
+        <p:txBody>
+          <a:bodyPr wrap="square" anchor="t" lIns="0" rIns="0" tIns="0" bIns="0">
+            <a:spAutoFit/>
+          </a:bodyPr>
+          <a:lstStyle/>
+          <a:p>
+            <a:pPr algn="l">
+              <a:lnSpc>
+                <a:spcPct val="115000"/>
+              </a:lnSpc>
+              <a:spcAft>
+                <a:spcPts val="200"/>
+              </a:spcAft>
+            </a:pPr>
+            <a:r>
+              <a:rPr sz="1300" b="1">
+                <a:solidFill>
+                  <a:srgbClr val="02C39A"/>
+                </a:solidFill>
+                <a:latin typeface="Calibri"/>
+              </a:rPr>
+              <a:t>RESULTAAT REGRESSIE</a:t>
+            </a:r>
+          </a:p>
+          <a:p>
+            <a:pPr algn="l">
+              <a:lnSpc>
+                <a:spcPct val="115000"/>
               </a:lnSpc>
               <a:spcAft>
                 <a:spcPts val="200"/>
@@ -3958,13 +4797,55 @@
                 </a:solidFill>
                 <a:latin typeface="Calibri"/>
               </a:rPr>
-              <a:t>•  Aandelen, crypto en obligaties via Yahoo Finance (Apple, ASML, Broadcom, Shell, Bitcoin).</a:t>
-            </a:r>
-          </a:p>
-          <a:p>
-            <a:pPr algn="l">
-              <a:lnSpc>
-                <a:spcPct val="150000"/>
+              <a:t>Broadcom +0,5205   ·   R² = 0,94   (p &lt; 0,05)</a:t>
+            </a:r>
+          </a:p>
+        </p:txBody>
+      </p:sp>
+      <p:sp>
+        <p:nvSpPr>
+          <p:cNvPr id="9" name="TextBox 8"/>
+          <p:cNvSpPr txBox="1"/>
+          <p:nvPr/>
+        </p:nvSpPr>
+        <p:spPr>
+          <a:xfrm>
+            <a:off x="4480560" y="3931920"/>
+            <a:ext cx="7132320" cy="2377440"/>
+          </a:xfrm>
+          <a:prstGeom prst="rect">
+            <a:avLst/>
+          </a:prstGeom>
+          <a:noFill/>
+        </p:spPr>
+        <p:txBody>
+          <a:bodyPr wrap="square" anchor="t" lIns="0" rIns="0" tIns="0" bIns="0">
+            <a:spAutoFit/>
+          </a:bodyPr>
+          <a:lstStyle/>
+          <a:p>
+            <a:pPr algn="l">
+              <a:lnSpc>
+                <a:spcPct val="125000"/>
+              </a:lnSpc>
+              <a:spcAft>
+                <a:spcPts val="200"/>
+              </a:spcAft>
+            </a:pPr>
+            <a:r>
+              <a:rPr sz="1300" b="1">
+                <a:solidFill>
+                  <a:srgbClr val="02C39A"/>
+                </a:solidFill>
+                <a:latin typeface="Calibri"/>
+              </a:rPr>
+              <a:t>CONCLUSIE</a:t>
+            </a:r>
+          </a:p>
+          <a:p>
+            <a:pPr algn="l">
+              <a:lnSpc>
+                <a:spcPct val="125000"/>
               </a:lnSpc>
               <a:spcAft>
                 <a:spcPts val="200"/>
@@ -3977,13 +4858,13 @@
                 </a:solidFill>
                 <a:latin typeface="Calibri"/>
               </a:rPr>
-              <a:t>•  Grondstoffen via Yahoo Finance en FRED (goud, olie, koper, graan, koffie, gas).</a:t>
-            </a:r>
-          </a:p>
-          <a:p>
-            <a:pPr algn="l">
-              <a:lnSpc>
-                <a:spcPct val="150000"/>
+              <a:t>Statistisch sterk verband, maar inhoudelijk niet logisch.</a:t>
+            </a:r>
+          </a:p>
+          <a:p>
+            <a:pPr algn="l">
+              <a:lnSpc>
+                <a:spcPct val="125000"/>
               </a:lnSpc>
               <a:spcAft>
                 <a:spcPts val="200"/>
@@ -3996,13 +4877,13 @@
                 </a:solidFill>
                 <a:latin typeface="Calibri"/>
               </a:rPr>
-              <a:t>•  Macro-economische indicatoren via de FED St. Louis (GDP, inkomen, inflatie, rente, werkloosheid).</a:t>
-            </a:r>
-          </a:p>
-          <a:p>
-            <a:pPr algn="l">
-              <a:lnSpc>
-                <a:spcPct val="150000"/>
+              <a:t>Waarschijnlijk schijncorrelatie: beide stijgen over de tijd.</a:t>
+            </a:r>
+          </a:p>
+          <a:p>
+            <a:pPr algn="l">
+              <a:lnSpc>
+                <a:spcPct val="125000"/>
               </a:lnSpc>
               <a:spcAft>
                 <a:spcPts val="200"/>
@@ -4015,26 +4896,7 @@
                 </a:solidFill>
                 <a:latin typeface="Calibri"/>
               </a:rPr>
-              <a:t>Hierop pasten we regressie, tijdreeksanalyse, sentimentanalyse, machine learning en</a:t>
-            </a:r>
-          </a:p>
-          <a:p>
-            <a:pPr algn="l">
-              <a:lnSpc>
-                <a:spcPct val="150000"/>
-              </a:lnSpc>
-              <a:spcAft>
-                <a:spcPts val="200"/>
-              </a:spcAft>
-            </a:pPr>
-            <a:r>
-              <a:rPr sz="1600" b="0">
-                <a:solidFill>
-                  <a:srgbClr val="21295C"/>
-                </a:solidFill>
-                <a:latin typeface="Calibri"/>
-              </a:rPr>
-              <a:t>portfolio-optimalisatie toe om verbanden te onderzoeken en een optimale portefeuille samen te stellen.</a:t>
+              <a:t>Geen betekenisvolle conclusie.</a:t>
             </a:r>
           </a:p>
         </p:txBody>
@@ -4047,7 +4909,7 @@
 </p:sld>
 </file>
 
-<file path=ppt/slides/slide13.xml><?xml version="1.0" encoding="utf-8"?>
+<file path=ppt/slides/slide5.xml><?xml version="1.0" encoding="utf-8"?>
 <p:sld xmlns:a="http://schemas.openxmlformats.org/drawingml/2006/main" xmlns:p="http://schemas.openxmlformats.org/presentationml/2006/main" xmlns:r="http://schemas.openxmlformats.org/officeDocument/2006/relationships">
   <p:cSld>
     <p:spTree>
@@ -4226,7 +5088,7 @@
                 </a:solidFill>
                 <a:latin typeface="Calibri"/>
               </a:rPr>
-              <a:t>Onderzoeksvraag 1</a:t>
+              <a:t>Onderzoeksvraag 3</a:t>
             </a:r>
           </a:p>
         </p:txBody>
@@ -4287,7 +5149,7 @@
                 </a:solidFill>
                 <a:latin typeface="Calibri"/>
               </a:rPr>
-              <a:t>1.  Relevante data geselecteerd</a:t>
+              <a:t>1.  Data geselecteerd</a:t>
             </a:r>
           </a:p>
           <a:p>
@@ -4306,7 +5168,7 @@
                 </a:solidFill>
                 <a:latin typeface="Calibri"/>
               </a:rPr>
-              <a:t>2.  Correlatie-heatmap gemaakt</a:t>
+              <a:t>2.  Heatmap bekeken</a:t>
             </a:r>
           </a:p>
           <a:p>
@@ -4325,7 +5187,7 @@
                 </a:solidFill>
                 <a:latin typeface="Calibri"/>
               </a:rPr>
-              <a:t>3.  Bubble chart (GDP x Income x Coffee)</a:t>
+              <a:t>3.  Bubble chart (Copper x ASML)</a:t>
             </a:r>
           </a:p>
           <a:p>
@@ -4344,7 +5206,7 @@
                 </a:solidFill>
                 <a:latin typeface="Calibri"/>
               </a:rPr>
-              <a:t>4.  Meervoudige regressie</a:t>
+              <a:t>4.  Enkelvoudige regressie</a:t>
             </a:r>
           </a:p>
         </p:txBody>
@@ -4405,7 +5267,7 @@
                 </a:solidFill>
                 <a:latin typeface="Calibri"/>
               </a:rPr>
-              <a:t>Wat is het verband tussen GDP, persoonlijk inkomen en de koffieprijs?</a:t>
+              <a:t>Hoeveel invloed heeft de koperprijs op de koers van ASML?</a:t>
             </a:r>
           </a:p>
         </p:txBody>
@@ -4466,7 +5328,7 @@
                 </a:solidFill>
                 <a:latin typeface="Calibri"/>
               </a:rPr>
-              <a:t>GDP +0,0160   ·   Income -0,0064   ·   R² = 0,80   (p &lt; 0,05)</a:t>
+              <a:t>Copper +0,1560   ·   R² = 0,87   (p &lt; 0,05)</a:t>
             </a:r>
           </a:p>
         </p:txBody>
@@ -4527,7 +5389,7 @@
                 </a:solidFill>
                 <a:latin typeface="Calibri"/>
               </a:rPr>
-              <a:t>Significant en matige correlatie.</a:t>
+              <a:t>Significant en sterke correlatie.</a:t>
             </a:r>
           </a:p>
           <a:p>
@@ -4546,7 +5408,7 @@
                 </a:solidFill>
                 <a:latin typeface="Calibri"/>
               </a:rPr>
-              <a:t>Door onderlinge samenhang van de X-variabelen is geen</a:t>
+              <a:t>Logisch: meer vraag naar chips -&gt; ASML stijgt,</a:t>
             </a:r>
           </a:p>
           <a:p>
@@ -4565,7 +5427,7 @@
                 </a:solidFill>
                 <a:latin typeface="Calibri"/>
               </a:rPr>
-              <a:t>zuivere oorzaak-gevolg-conclusie te trekken.</a:t>
+              <a:t>en chips gebruiken veel koper -&gt; koperprijs stijgt mee.</a:t>
             </a:r>
           </a:p>
         </p:txBody>
@@ -4578,7 +5440,7 @@
 </p:sld>
 </file>
 
-<file path=ppt/slides/slide14.xml><?xml version="1.0" encoding="utf-8"?>
+<file path=ppt/slides/slide6.xml><?xml version="1.0" encoding="utf-8"?>
 <p:sld xmlns:a="http://schemas.openxmlformats.org/drawingml/2006/main" xmlns:p="http://schemas.openxmlformats.org/presentationml/2006/main" xmlns:r="http://schemas.openxmlformats.org/officeDocument/2006/relationships">
   <p:cSld>
     <p:spTree>
@@ -4757,7 +5619,7 @@
                 </a:solidFill>
                 <a:latin typeface="Calibri"/>
               </a:rPr>
-              <a:t>Onderzoeksvraag 2</a:t>
+              <a:t>Onderzoeksvraag 4</a:t>
             </a:r>
           </a:p>
         </p:txBody>
@@ -4856,7 +5718,7 @@
                 </a:solidFill>
                 <a:latin typeface="Calibri"/>
               </a:rPr>
-              <a:t>3.  Bubble chart (Broadcom x Coffee)</a:t>
+              <a:t>3.  Bubble chart (Gasoline x Oil x Shell)</a:t>
             </a:r>
           </a:p>
           <a:p>
@@ -4875,7 +5737,7 @@
                 </a:solidFill>
                 <a:latin typeface="Calibri"/>
               </a:rPr>
-              <a:t>4.  Enkelvoudige regressie</a:t>
+              <a:t>4.  Meervoudige regressie</a:t>
             </a:r>
           </a:p>
         </p:txBody>
@@ -4936,7 +5798,7 @@
                 </a:solidFill>
                 <a:latin typeface="Calibri"/>
               </a:rPr>
-              <a:t>Wat is het verband van Broadcom op de koffieprijs?</a:t>
+              <a:t>Waarom lijkt er minder verband tussen benzine, olie en de koers van Shell?</a:t>
             </a:r>
           </a:p>
         </p:txBody>
@@ -4997,7 +5859,7 @@
                 </a:solidFill>
                 <a:latin typeface="Calibri"/>
               </a:rPr>
-              <a:t>Broadcom +0,5205   ·   R² = 0,94   (p &lt; 0,05)</a:t>
+              <a:t>Gasoline +11,6507   ·   Oil +0,0891   ·   R² = 0,36   (p &lt; 0,05)</a:t>
             </a:r>
           </a:p>
         </p:txBody>
@@ -5058,7 +5920,7 @@
                 </a:solidFill>
                 <a:latin typeface="Calibri"/>
               </a:rPr>
-              <a:t>Statistisch sterk verband, maar inhoudelijk niet logisch.</a:t>
+              <a:t>Significant maar slechts matige correlatie.</a:t>
             </a:r>
           </a:p>
           <a:p>
@@ -5077,7 +5939,7 @@
                 </a:solidFill>
                 <a:latin typeface="Calibri"/>
               </a:rPr>
-              <a:t>Waarschijnlijk schijncorrelatie: beide stijgen over de tijd.</a:t>
+              <a:t>Shell reageert niet op de actuele, maar op de verwachte</a:t>
             </a:r>
           </a:p>
           <a:p>
@@ -5096,7 +5958,7 @@
                 </a:solidFill>
                 <a:latin typeface="Calibri"/>
               </a:rPr>
-              <a:t>Geen betekenisvolle conclusie.</a:t>
+              <a:t>langetermijnprijs -&gt; onderzocht met timeshift.</a:t>
             </a:r>
           </a:p>
         </p:txBody>
@@ -5109,7 +5971,7 @@
 </p:sld>
 </file>
 
-<file path=ppt/slides/slide15.xml><?xml version="1.0" encoding="utf-8"?>
+<file path=ppt/slides/slide7.xml><?xml version="1.0" encoding="utf-8"?>
 <p:sld xmlns:a="http://schemas.openxmlformats.org/drawingml/2006/main" xmlns:p="http://schemas.openxmlformats.org/presentationml/2006/main" xmlns:r="http://schemas.openxmlformats.org/officeDocument/2006/relationships">
   <p:cSld>
     <p:spTree>
@@ -5288,7 +6150,7 @@
                 </a:solidFill>
                 <a:latin typeface="Calibri"/>
               </a:rPr>
-              <a:t>Onderzoeksvraag 3</a:t>
+              <a:t>Onderzoeksvraag 5</a:t>
             </a:r>
           </a:p>
         </p:txBody>
@@ -5387,7 +6249,7 @@
                 </a:solidFill>
                 <a:latin typeface="Calibri"/>
               </a:rPr>
-              <a:t>3.  Bubble chart (Copper x ASML)</a:t>
+              <a:t>3.  Bubble chart (4 variabelen)</a:t>
             </a:r>
           </a:p>
           <a:p>
@@ -5406,7 +6268,7 @@
                 </a:solidFill>
                 <a:latin typeface="Calibri"/>
               </a:rPr>
-              <a:t>4.  Enkelvoudige regressie</a:t>
+              <a:t>4.  Regressie + neuraal netwerk</a:t>
             </a:r>
           </a:p>
         </p:txBody>
@@ -5467,7 +6329,7 @@
                 </a:solidFill>
                 <a:latin typeface="Calibri"/>
               </a:rPr>
-              <a:t>Hoeveel invloed heeft de koperprijs op de koers van ASML?</a:t>
+              <a:t>Wat is het verband tussen koffie, koper, goud en de koers van Apple?</a:t>
             </a:r>
           </a:p>
         </p:txBody>
@@ -5528,7 +6390,7 @@
                 </a:solidFill>
                 <a:latin typeface="Calibri"/>
               </a:rPr>
-              <a:t>Copper +0,1560   ·   R² = 0,87   (p &lt; 0,05)</a:t>
+              <a:t>Coffee +0,7351  ·  Copper +0,0236  ·  Gold -0,0097  ·  R² = 0,88</a:t>
             </a:r>
           </a:p>
         </p:txBody>
@@ -5608,7 +6470,7 @@
                 </a:solidFill>
                 <a:latin typeface="Calibri"/>
               </a:rPr>
-              <a:t>Logisch: meer vraag naar chips -&gt; ASML stijgt,</a:t>
+              <a:t>Hoogconjunctuur drijft Apple en koper omhoog;</a:t>
             </a:r>
           </a:p>
           <a:p>
@@ -5627,7 +6489,7 @@
                 </a:solidFill>
                 <a:latin typeface="Calibri"/>
               </a:rPr>
-              <a:t>en chips gebruiken veel koper -&gt; koperprijs stijgt mee.</a:t>
+              <a:t>goud reageert juist zwakker (veilige haven).</a:t>
             </a:r>
           </a:p>
         </p:txBody>
@@ -5640,1069 +6502,7 @@
 </p:sld>
 </file>
 
-<file path=ppt/slides/slide16.xml><?xml version="1.0" encoding="utf-8"?>
-<p:sld xmlns:a="http://schemas.openxmlformats.org/drawingml/2006/main" xmlns:p="http://schemas.openxmlformats.org/presentationml/2006/main" xmlns:r="http://schemas.openxmlformats.org/officeDocument/2006/relationships">
-  <p:cSld>
-    <p:spTree>
-      <p:nvGrpSpPr>
-        <p:cNvPr id="1" name=""/>
-        <p:cNvGrpSpPr/>
-        <p:nvPr/>
-      </p:nvGrpSpPr>
-      <p:grpSpPr/>
-      <p:sp>
-        <p:nvSpPr>
-          <p:cNvPr id="2" name="Rectangle 1"/>
-          <p:cNvSpPr/>
-          <p:nvPr/>
-        </p:nvSpPr>
-        <p:spPr>
-          <a:xfrm>
-            <a:off x="0" y="0"/>
-            <a:ext cx="12191695" cy="6858000"/>
-          </a:xfrm>
-          <a:prstGeom prst="rect">
-            <a:avLst/>
-          </a:prstGeom>
-          <a:solidFill>
-            <a:srgbClr val="FFFFFF"/>
-          </a:solidFill>
-          <a:ln>
-            <a:noFill/>
-          </a:ln>
-          <a:effectLst/>
-        </p:spPr>
-        <p:style>
-          <a:lnRef idx="1">
-            <a:schemeClr val="accent1"/>
-          </a:lnRef>
-          <a:fillRef idx="3">
-            <a:schemeClr val="accent1"/>
-          </a:fillRef>
-          <a:effectRef idx="2">
-            <a:schemeClr val="accent1"/>
-          </a:effectRef>
-          <a:fontRef idx="minor">
-            <a:schemeClr val="lt1"/>
-          </a:fontRef>
-        </p:style>
-        <p:txBody>
-          <a:bodyPr rtlCol="0" anchor="ctr"/>
-          <a:lstStyle/>
-          <a:p>
-            <a:pPr algn="ctr"/>
-          </a:p>
-        </p:txBody>
-      </p:sp>
-      <p:sp>
-        <p:nvSpPr>
-          <p:cNvPr id="3" name="Rectangle 2"/>
-          <p:cNvSpPr/>
-          <p:nvPr/>
-        </p:nvSpPr>
-        <p:spPr>
-          <a:xfrm>
-            <a:off x="0" y="0"/>
-            <a:ext cx="3931920" cy="6858000"/>
-          </a:xfrm>
-          <a:prstGeom prst="rect">
-            <a:avLst/>
-          </a:prstGeom>
-          <a:solidFill>
-            <a:srgbClr val="1E2761"/>
-          </a:solidFill>
-          <a:ln>
-            <a:noFill/>
-          </a:ln>
-          <a:effectLst/>
-        </p:spPr>
-        <p:style>
-          <a:lnRef idx="1">
-            <a:schemeClr val="accent1"/>
-          </a:lnRef>
-          <a:fillRef idx="3">
-            <a:schemeClr val="accent1"/>
-          </a:fillRef>
-          <a:effectRef idx="2">
-            <a:schemeClr val="accent1"/>
-          </a:effectRef>
-          <a:fontRef idx="minor">
-            <a:schemeClr val="lt1"/>
-          </a:fontRef>
-        </p:style>
-        <p:txBody>
-          <a:bodyPr rtlCol="0" anchor="ctr"/>
-          <a:lstStyle/>
-          <a:p>
-            <a:pPr algn="ctr"/>
-          </a:p>
-        </p:txBody>
-      </p:sp>
-      <p:sp>
-        <p:nvSpPr>
-          <p:cNvPr id="4" name="Oval 3"/>
-          <p:cNvSpPr/>
-          <p:nvPr/>
-        </p:nvSpPr>
-        <p:spPr>
-          <a:xfrm>
-            <a:off x="548640" y="640080"/>
-            <a:ext cx="256032" cy="256032"/>
-          </a:xfrm>
-          <a:prstGeom prst="ellipse">
-            <a:avLst/>
-          </a:prstGeom>
-          <a:solidFill>
-            <a:srgbClr val="02C39A"/>
-          </a:solidFill>
-          <a:ln>
-            <a:noFill/>
-          </a:ln>
-          <a:effectLst/>
-        </p:spPr>
-        <p:style>
-          <a:lnRef idx="1">
-            <a:schemeClr val="accent1"/>
-          </a:lnRef>
-          <a:fillRef idx="3">
-            <a:schemeClr val="accent1"/>
-          </a:fillRef>
-          <a:effectRef idx="2">
-            <a:schemeClr val="accent1"/>
-          </a:effectRef>
-          <a:fontRef idx="minor">
-            <a:schemeClr val="lt1"/>
-          </a:fontRef>
-        </p:style>
-        <p:txBody>
-          <a:bodyPr rtlCol="0" anchor="ctr"/>
-          <a:lstStyle/>
-          <a:p>
-            <a:pPr algn="ctr"/>
-          </a:p>
-        </p:txBody>
-      </p:sp>
-      <p:sp>
-        <p:nvSpPr>
-          <p:cNvPr id="5" name="TextBox 4"/>
-          <p:cNvSpPr txBox="1"/>
-          <p:nvPr/>
-        </p:nvSpPr>
-        <p:spPr>
-          <a:xfrm>
-            <a:off x="548640" y="1051560"/>
-            <a:ext cx="3017520" cy="548640"/>
-          </a:xfrm>
-          <a:prstGeom prst="rect">
-            <a:avLst/>
-          </a:prstGeom>
-          <a:noFill/>
-        </p:spPr>
-        <p:txBody>
-          <a:bodyPr wrap="square" anchor="t" lIns="0" rIns="0" tIns="0" bIns="0">
-            <a:spAutoFit/>
-          </a:bodyPr>
-          <a:lstStyle/>
-          <a:p>
-            <a:pPr algn="l">
-              <a:lnSpc>
-                <a:spcPct val="110000"/>
-              </a:lnSpc>
-              <a:spcAft>
-                <a:spcPts val="200"/>
-              </a:spcAft>
-            </a:pPr>
-            <a:r>
-              <a:rPr sz="2000" b="1">
-                <a:solidFill>
-                  <a:srgbClr val="02C39A"/>
-                </a:solidFill>
-                <a:latin typeface="Calibri"/>
-              </a:rPr>
-              <a:t>Onderzoeksvraag 4</a:t>
-            </a:r>
-          </a:p>
-        </p:txBody>
-      </p:sp>
-      <p:sp>
-        <p:nvSpPr>
-          <p:cNvPr id="6" name="TextBox 5"/>
-          <p:cNvSpPr txBox="1"/>
-          <p:nvPr/>
-        </p:nvSpPr>
-        <p:spPr>
-          <a:xfrm>
-            <a:off x="548640" y="1920240"/>
-            <a:ext cx="3108960" cy="4389120"/>
-          </a:xfrm>
-          <a:prstGeom prst="rect">
-            <a:avLst/>
-          </a:prstGeom>
-          <a:noFill/>
-        </p:spPr>
-        <p:txBody>
-          <a:bodyPr wrap="square" anchor="t" lIns="0" rIns="0" tIns="0" bIns="0">
-            <a:spAutoFit/>
-          </a:bodyPr>
-          <a:lstStyle/>
-          <a:p>
-            <a:pPr algn="l">
-              <a:lnSpc>
-                <a:spcPct val="140000"/>
-              </a:lnSpc>
-              <a:spcAft>
-                <a:spcPts val="200"/>
-              </a:spcAft>
-            </a:pPr>
-            <a:r>
-              <a:rPr sz="1500" b="1">
-                <a:solidFill>
-                  <a:srgbClr val="CADCFC"/>
-                </a:solidFill>
-                <a:latin typeface="Calibri"/>
-              </a:rPr>
-              <a:t>Stappen vooraf</a:t>
-            </a:r>
-          </a:p>
-          <a:p>
-            <a:pPr algn="l">
-              <a:lnSpc>
-                <a:spcPct val="140000"/>
-              </a:lnSpc>
-              <a:spcAft>
-                <a:spcPts val="200"/>
-              </a:spcAft>
-            </a:pPr>
-            <a:r>
-              <a:rPr sz="1400" b="0">
-                <a:solidFill>
-                  <a:srgbClr val="FFFFFF"/>
-                </a:solidFill>
-                <a:latin typeface="Calibri"/>
-              </a:rPr>
-              <a:t>1.  Data geselecteerd</a:t>
-            </a:r>
-          </a:p>
-          <a:p>
-            <a:pPr algn="l">
-              <a:lnSpc>
-                <a:spcPct val="140000"/>
-              </a:lnSpc>
-              <a:spcAft>
-                <a:spcPts val="200"/>
-              </a:spcAft>
-            </a:pPr>
-            <a:r>
-              <a:rPr sz="1400" b="0">
-                <a:solidFill>
-                  <a:srgbClr val="FFFFFF"/>
-                </a:solidFill>
-                <a:latin typeface="Calibri"/>
-              </a:rPr>
-              <a:t>2.  Heatmap bekeken</a:t>
-            </a:r>
-          </a:p>
-          <a:p>
-            <a:pPr algn="l">
-              <a:lnSpc>
-                <a:spcPct val="140000"/>
-              </a:lnSpc>
-              <a:spcAft>
-                <a:spcPts val="200"/>
-              </a:spcAft>
-            </a:pPr>
-            <a:r>
-              <a:rPr sz="1400" b="0">
-                <a:solidFill>
-                  <a:srgbClr val="FFFFFF"/>
-                </a:solidFill>
-                <a:latin typeface="Calibri"/>
-              </a:rPr>
-              <a:t>3.  Bubble chart (Gasoline x Oil x Shell)</a:t>
-            </a:r>
-          </a:p>
-          <a:p>
-            <a:pPr algn="l">
-              <a:lnSpc>
-                <a:spcPct val="140000"/>
-              </a:lnSpc>
-              <a:spcAft>
-                <a:spcPts val="200"/>
-              </a:spcAft>
-            </a:pPr>
-            <a:r>
-              <a:rPr sz="1400" b="0">
-                <a:solidFill>
-                  <a:srgbClr val="FFFFFF"/>
-                </a:solidFill>
-                <a:latin typeface="Calibri"/>
-              </a:rPr>
-              <a:t>4.  Meervoudige regressie</a:t>
-            </a:r>
-          </a:p>
-        </p:txBody>
-      </p:sp>
-      <p:sp>
-        <p:nvSpPr>
-          <p:cNvPr id="7" name="TextBox 6"/>
-          <p:cNvSpPr txBox="1"/>
-          <p:nvPr/>
-        </p:nvSpPr>
-        <p:spPr>
-          <a:xfrm>
-            <a:off x="4480560" y="914400"/>
-            <a:ext cx="7132320" cy="1280160"/>
-          </a:xfrm>
-          <a:prstGeom prst="rect">
-            <a:avLst/>
-          </a:prstGeom>
-          <a:noFill/>
-        </p:spPr>
-        <p:txBody>
-          <a:bodyPr wrap="square" anchor="t" lIns="0" rIns="0" tIns="0" bIns="0">
-            <a:spAutoFit/>
-          </a:bodyPr>
-          <a:lstStyle/>
-          <a:p>
-            <a:pPr algn="l">
-              <a:lnSpc>
-                <a:spcPct val="115000"/>
-              </a:lnSpc>
-              <a:spcAft>
-                <a:spcPts val="200"/>
-              </a:spcAft>
-            </a:pPr>
-            <a:r>
-              <a:rPr sz="1300" b="1">
-                <a:solidFill>
-                  <a:srgbClr val="02C39A"/>
-                </a:solidFill>
-                <a:latin typeface="Calibri"/>
-              </a:rPr>
-              <a:t>VRAAG</a:t>
-            </a:r>
-          </a:p>
-          <a:p>
-            <a:pPr algn="l">
-              <a:lnSpc>
-                <a:spcPct val="115000"/>
-              </a:lnSpc>
-              <a:spcAft>
-                <a:spcPts val="200"/>
-              </a:spcAft>
-            </a:pPr>
-            <a:r>
-              <a:rPr sz="1900" b="0">
-                <a:solidFill>
-                  <a:srgbClr val="21295C"/>
-                </a:solidFill>
-                <a:latin typeface="Calibri"/>
-              </a:rPr>
-              <a:t>Waarom lijkt er minder verband tussen benzine, olie en de koers van Shell?</a:t>
-            </a:r>
-          </a:p>
-        </p:txBody>
-      </p:sp>
-      <p:sp>
-        <p:nvSpPr>
-          <p:cNvPr id="8" name="TextBox 7"/>
-          <p:cNvSpPr txBox="1"/>
-          <p:nvPr/>
-        </p:nvSpPr>
-        <p:spPr>
-          <a:xfrm>
-            <a:off x="4480560" y="2651760"/>
-            <a:ext cx="7132320" cy="1005840"/>
-          </a:xfrm>
-          <a:prstGeom prst="rect">
-            <a:avLst/>
-          </a:prstGeom>
-          <a:noFill/>
-        </p:spPr>
-        <p:txBody>
-          <a:bodyPr wrap="square" anchor="t" lIns="0" rIns="0" tIns="0" bIns="0">
-            <a:spAutoFit/>
-          </a:bodyPr>
-          <a:lstStyle/>
-          <a:p>
-            <a:pPr algn="l">
-              <a:lnSpc>
-                <a:spcPct val="115000"/>
-              </a:lnSpc>
-              <a:spcAft>
-                <a:spcPts val="200"/>
-              </a:spcAft>
-            </a:pPr>
-            <a:r>
-              <a:rPr sz="1300" b="1">
-                <a:solidFill>
-                  <a:srgbClr val="02C39A"/>
-                </a:solidFill>
-                <a:latin typeface="Calibri"/>
-              </a:rPr>
-              <a:t>RESULTAAT REGRESSIE</a:t>
-            </a:r>
-          </a:p>
-          <a:p>
-            <a:pPr algn="l">
-              <a:lnSpc>
-                <a:spcPct val="115000"/>
-              </a:lnSpc>
-              <a:spcAft>
-                <a:spcPts val="200"/>
-              </a:spcAft>
-            </a:pPr>
-            <a:r>
-              <a:rPr sz="1600" b="0">
-                <a:solidFill>
-                  <a:srgbClr val="21295C"/>
-                </a:solidFill>
-                <a:latin typeface="Calibri"/>
-              </a:rPr>
-              <a:t>Gasoline +11,6507   ·   Oil +0,0891   ·   R² = 0,36   (p &lt; 0,05)</a:t>
-            </a:r>
-          </a:p>
-        </p:txBody>
-      </p:sp>
-      <p:sp>
-        <p:nvSpPr>
-          <p:cNvPr id="9" name="TextBox 8"/>
-          <p:cNvSpPr txBox="1"/>
-          <p:nvPr/>
-        </p:nvSpPr>
-        <p:spPr>
-          <a:xfrm>
-            <a:off x="4480560" y="3931920"/>
-            <a:ext cx="7132320" cy="2377440"/>
-          </a:xfrm>
-          <a:prstGeom prst="rect">
-            <a:avLst/>
-          </a:prstGeom>
-          <a:noFill/>
-        </p:spPr>
-        <p:txBody>
-          <a:bodyPr wrap="square" anchor="t" lIns="0" rIns="0" tIns="0" bIns="0">
-            <a:spAutoFit/>
-          </a:bodyPr>
-          <a:lstStyle/>
-          <a:p>
-            <a:pPr algn="l">
-              <a:lnSpc>
-                <a:spcPct val="125000"/>
-              </a:lnSpc>
-              <a:spcAft>
-                <a:spcPts val="200"/>
-              </a:spcAft>
-            </a:pPr>
-            <a:r>
-              <a:rPr sz="1300" b="1">
-                <a:solidFill>
-                  <a:srgbClr val="02C39A"/>
-                </a:solidFill>
-                <a:latin typeface="Calibri"/>
-              </a:rPr>
-              <a:t>CONCLUSIE</a:t>
-            </a:r>
-          </a:p>
-          <a:p>
-            <a:pPr algn="l">
-              <a:lnSpc>
-                <a:spcPct val="125000"/>
-              </a:lnSpc>
-              <a:spcAft>
-                <a:spcPts val="200"/>
-              </a:spcAft>
-            </a:pPr>
-            <a:r>
-              <a:rPr sz="1600" b="0">
-                <a:solidFill>
-                  <a:srgbClr val="21295C"/>
-                </a:solidFill>
-                <a:latin typeface="Calibri"/>
-              </a:rPr>
-              <a:t>Significant maar slechts matige correlatie.</a:t>
-            </a:r>
-          </a:p>
-          <a:p>
-            <a:pPr algn="l">
-              <a:lnSpc>
-                <a:spcPct val="125000"/>
-              </a:lnSpc>
-              <a:spcAft>
-                <a:spcPts val="200"/>
-              </a:spcAft>
-            </a:pPr>
-            <a:r>
-              <a:rPr sz="1600" b="0">
-                <a:solidFill>
-                  <a:srgbClr val="21295C"/>
-                </a:solidFill>
-                <a:latin typeface="Calibri"/>
-              </a:rPr>
-              <a:t>Shell reageert niet op de actuele, maar op de verwachte</a:t>
-            </a:r>
-          </a:p>
-          <a:p>
-            <a:pPr algn="l">
-              <a:lnSpc>
-                <a:spcPct val="125000"/>
-              </a:lnSpc>
-              <a:spcAft>
-                <a:spcPts val="200"/>
-              </a:spcAft>
-            </a:pPr>
-            <a:r>
-              <a:rPr sz="1600" b="0">
-                <a:solidFill>
-                  <a:srgbClr val="21295C"/>
-                </a:solidFill>
-                <a:latin typeface="Calibri"/>
-              </a:rPr>
-              <a:t>langetermijnprijs -&gt; onderzocht met timeshift.</a:t>
-            </a:r>
-          </a:p>
-        </p:txBody>
-      </p:sp>
-    </p:spTree>
-  </p:cSld>
-  <p:clrMapOvr>
-    <a:masterClrMapping/>
-  </p:clrMapOvr>
-</p:sld>
-</file>
-
-<file path=ppt/slides/slide17.xml><?xml version="1.0" encoding="utf-8"?>
-<p:sld xmlns:a="http://schemas.openxmlformats.org/drawingml/2006/main" xmlns:p="http://schemas.openxmlformats.org/presentationml/2006/main" xmlns:r="http://schemas.openxmlformats.org/officeDocument/2006/relationships">
-  <p:cSld>
-    <p:spTree>
-      <p:nvGrpSpPr>
-        <p:cNvPr id="1" name=""/>
-        <p:cNvGrpSpPr/>
-        <p:nvPr/>
-      </p:nvGrpSpPr>
-      <p:grpSpPr/>
-      <p:sp>
-        <p:nvSpPr>
-          <p:cNvPr id="2" name="Rectangle 1"/>
-          <p:cNvSpPr/>
-          <p:nvPr/>
-        </p:nvSpPr>
-        <p:spPr>
-          <a:xfrm>
-            <a:off x="0" y="0"/>
-            <a:ext cx="12191695" cy="6858000"/>
-          </a:xfrm>
-          <a:prstGeom prst="rect">
-            <a:avLst/>
-          </a:prstGeom>
-          <a:solidFill>
-            <a:srgbClr val="FFFFFF"/>
-          </a:solidFill>
-          <a:ln>
-            <a:noFill/>
-          </a:ln>
-          <a:effectLst/>
-        </p:spPr>
-        <p:style>
-          <a:lnRef idx="1">
-            <a:schemeClr val="accent1"/>
-          </a:lnRef>
-          <a:fillRef idx="3">
-            <a:schemeClr val="accent1"/>
-          </a:fillRef>
-          <a:effectRef idx="2">
-            <a:schemeClr val="accent1"/>
-          </a:effectRef>
-          <a:fontRef idx="minor">
-            <a:schemeClr val="lt1"/>
-          </a:fontRef>
-        </p:style>
-        <p:txBody>
-          <a:bodyPr rtlCol="0" anchor="ctr"/>
-          <a:lstStyle/>
-          <a:p>
-            <a:pPr algn="ctr"/>
-          </a:p>
-        </p:txBody>
-      </p:sp>
-      <p:sp>
-        <p:nvSpPr>
-          <p:cNvPr id="3" name="Rectangle 2"/>
-          <p:cNvSpPr/>
-          <p:nvPr/>
-        </p:nvSpPr>
-        <p:spPr>
-          <a:xfrm>
-            <a:off x="0" y="0"/>
-            <a:ext cx="3931920" cy="6858000"/>
-          </a:xfrm>
-          <a:prstGeom prst="rect">
-            <a:avLst/>
-          </a:prstGeom>
-          <a:solidFill>
-            <a:srgbClr val="1E2761"/>
-          </a:solidFill>
-          <a:ln>
-            <a:noFill/>
-          </a:ln>
-          <a:effectLst/>
-        </p:spPr>
-        <p:style>
-          <a:lnRef idx="1">
-            <a:schemeClr val="accent1"/>
-          </a:lnRef>
-          <a:fillRef idx="3">
-            <a:schemeClr val="accent1"/>
-          </a:fillRef>
-          <a:effectRef idx="2">
-            <a:schemeClr val="accent1"/>
-          </a:effectRef>
-          <a:fontRef idx="minor">
-            <a:schemeClr val="lt1"/>
-          </a:fontRef>
-        </p:style>
-        <p:txBody>
-          <a:bodyPr rtlCol="0" anchor="ctr"/>
-          <a:lstStyle/>
-          <a:p>
-            <a:pPr algn="ctr"/>
-          </a:p>
-        </p:txBody>
-      </p:sp>
-      <p:sp>
-        <p:nvSpPr>
-          <p:cNvPr id="4" name="Oval 3"/>
-          <p:cNvSpPr/>
-          <p:nvPr/>
-        </p:nvSpPr>
-        <p:spPr>
-          <a:xfrm>
-            <a:off x="548640" y="640080"/>
-            <a:ext cx="256032" cy="256032"/>
-          </a:xfrm>
-          <a:prstGeom prst="ellipse">
-            <a:avLst/>
-          </a:prstGeom>
-          <a:solidFill>
-            <a:srgbClr val="02C39A"/>
-          </a:solidFill>
-          <a:ln>
-            <a:noFill/>
-          </a:ln>
-          <a:effectLst/>
-        </p:spPr>
-        <p:style>
-          <a:lnRef idx="1">
-            <a:schemeClr val="accent1"/>
-          </a:lnRef>
-          <a:fillRef idx="3">
-            <a:schemeClr val="accent1"/>
-          </a:fillRef>
-          <a:effectRef idx="2">
-            <a:schemeClr val="accent1"/>
-          </a:effectRef>
-          <a:fontRef idx="minor">
-            <a:schemeClr val="lt1"/>
-          </a:fontRef>
-        </p:style>
-        <p:txBody>
-          <a:bodyPr rtlCol="0" anchor="ctr"/>
-          <a:lstStyle/>
-          <a:p>
-            <a:pPr algn="ctr"/>
-          </a:p>
-        </p:txBody>
-      </p:sp>
-      <p:sp>
-        <p:nvSpPr>
-          <p:cNvPr id="5" name="TextBox 4"/>
-          <p:cNvSpPr txBox="1"/>
-          <p:nvPr/>
-        </p:nvSpPr>
-        <p:spPr>
-          <a:xfrm>
-            <a:off x="548640" y="1051560"/>
-            <a:ext cx="3017520" cy="548640"/>
-          </a:xfrm>
-          <a:prstGeom prst="rect">
-            <a:avLst/>
-          </a:prstGeom>
-          <a:noFill/>
-        </p:spPr>
-        <p:txBody>
-          <a:bodyPr wrap="square" anchor="t" lIns="0" rIns="0" tIns="0" bIns="0">
-            <a:spAutoFit/>
-          </a:bodyPr>
-          <a:lstStyle/>
-          <a:p>
-            <a:pPr algn="l">
-              <a:lnSpc>
-                <a:spcPct val="110000"/>
-              </a:lnSpc>
-              <a:spcAft>
-                <a:spcPts val="200"/>
-              </a:spcAft>
-            </a:pPr>
-            <a:r>
-              <a:rPr sz="2000" b="1">
-                <a:solidFill>
-                  <a:srgbClr val="02C39A"/>
-                </a:solidFill>
-                <a:latin typeface="Calibri"/>
-              </a:rPr>
-              <a:t>Onderzoeksvraag 5</a:t>
-            </a:r>
-          </a:p>
-        </p:txBody>
-      </p:sp>
-      <p:sp>
-        <p:nvSpPr>
-          <p:cNvPr id="6" name="TextBox 5"/>
-          <p:cNvSpPr txBox="1"/>
-          <p:nvPr/>
-        </p:nvSpPr>
-        <p:spPr>
-          <a:xfrm>
-            <a:off x="548640" y="1920240"/>
-            <a:ext cx="3108960" cy="4389120"/>
-          </a:xfrm>
-          <a:prstGeom prst="rect">
-            <a:avLst/>
-          </a:prstGeom>
-          <a:noFill/>
-        </p:spPr>
-        <p:txBody>
-          <a:bodyPr wrap="square" anchor="t" lIns="0" rIns="0" tIns="0" bIns="0">
-            <a:spAutoFit/>
-          </a:bodyPr>
-          <a:lstStyle/>
-          <a:p>
-            <a:pPr algn="l">
-              <a:lnSpc>
-                <a:spcPct val="140000"/>
-              </a:lnSpc>
-              <a:spcAft>
-                <a:spcPts val="200"/>
-              </a:spcAft>
-            </a:pPr>
-            <a:r>
-              <a:rPr sz="1500" b="1">
-                <a:solidFill>
-                  <a:srgbClr val="CADCFC"/>
-                </a:solidFill>
-                <a:latin typeface="Calibri"/>
-              </a:rPr>
-              <a:t>Stappen vooraf</a:t>
-            </a:r>
-          </a:p>
-          <a:p>
-            <a:pPr algn="l">
-              <a:lnSpc>
-                <a:spcPct val="140000"/>
-              </a:lnSpc>
-              <a:spcAft>
-                <a:spcPts val="200"/>
-              </a:spcAft>
-            </a:pPr>
-            <a:r>
-              <a:rPr sz="1400" b="0">
-                <a:solidFill>
-                  <a:srgbClr val="FFFFFF"/>
-                </a:solidFill>
-                <a:latin typeface="Calibri"/>
-              </a:rPr>
-              <a:t>1.  Data geselecteerd</a:t>
-            </a:r>
-          </a:p>
-          <a:p>
-            <a:pPr algn="l">
-              <a:lnSpc>
-                <a:spcPct val="140000"/>
-              </a:lnSpc>
-              <a:spcAft>
-                <a:spcPts val="200"/>
-              </a:spcAft>
-            </a:pPr>
-            <a:r>
-              <a:rPr sz="1400" b="0">
-                <a:solidFill>
-                  <a:srgbClr val="FFFFFF"/>
-                </a:solidFill>
-                <a:latin typeface="Calibri"/>
-              </a:rPr>
-              <a:t>2.  Heatmap bekeken</a:t>
-            </a:r>
-          </a:p>
-          <a:p>
-            <a:pPr algn="l">
-              <a:lnSpc>
-                <a:spcPct val="140000"/>
-              </a:lnSpc>
-              <a:spcAft>
-                <a:spcPts val="200"/>
-              </a:spcAft>
-            </a:pPr>
-            <a:r>
-              <a:rPr sz="1400" b="0">
-                <a:solidFill>
-                  <a:srgbClr val="FFFFFF"/>
-                </a:solidFill>
-                <a:latin typeface="Calibri"/>
-              </a:rPr>
-              <a:t>3.  Bubble chart (4 variabelen)</a:t>
-            </a:r>
-          </a:p>
-          <a:p>
-            <a:pPr algn="l">
-              <a:lnSpc>
-                <a:spcPct val="140000"/>
-              </a:lnSpc>
-              <a:spcAft>
-                <a:spcPts val="200"/>
-              </a:spcAft>
-            </a:pPr>
-            <a:r>
-              <a:rPr sz="1400" b="0">
-                <a:solidFill>
-                  <a:srgbClr val="FFFFFF"/>
-                </a:solidFill>
-                <a:latin typeface="Calibri"/>
-              </a:rPr>
-              <a:t>4.  Regressie + neuraal netwerk</a:t>
-            </a:r>
-          </a:p>
-        </p:txBody>
-      </p:sp>
-      <p:sp>
-        <p:nvSpPr>
-          <p:cNvPr id="7" name="TextBox 6"/>
-          <p:cNvSpPr txBox="1"/>
-          <p:nvPr/>
-        </p:nvSpPr>
-        <p:spPr>
-          <a:xfrm>
-            <a:off x="4480560" y="914400"/>
-            <a:ext cx="7132320" cy="1280160"/>
-          </a:xfrm>
-          <a:prstGeom prst="rect">
-            <a:avLst/>
-          </a:prstGeom>
-          <a:noFill/>
-        </p:spPr>
-        <p:txBody>
-          <a:bodyPr wrap="square" anchor="t" lIns="0" rIns="0" tIns="0" bIns="0">
-            <a:spAutoFit/>
-          </a:bodyPr>
-          <a:lstStyle/>
-          <a:p>
-            <a:pPr algn="l">
-              <a:lnSpc>
-                <a:spcPct val="115000"/>
-              </a:lnSpc>
-              <a:spcAft>
-                <a:spcPts val="200"/>
-              </a:spcAft>
-            </a:pPr>
-            <a:r>
-              <a:rPr sz="1300" b="1">
-                <a:solidFill>
-                  <a:srgbClr val="02C39A"/>
-                </a:solidFill>
-                <a:latin typeface="Calibri"/>
-              </a:rPr>
-              <a:t>VRAAG</a:t>
-            </a:r>
-          </a:p>
-          <a:p>
-            <a:pPr algn="l">
-              <a:lnSpc>
-                <a:spcPct val="115000"/>
-              </a:lnSpc>
-              <a:spcAft>
-                <a:spcPts val="200"/>
-              </a:spcAft>
-            </a:pPr>
-            <a:r>
-              <a:rPr sz="1900" b="0">
-                <a:solidFill>
-                  <a:srgbClr val="21295C"/>
-                </a:solidFill>
-                <a:latin typeface="Calibri"/>
-              </a:rPr>
-              <a:t>Wat is het verband tussen koffie, koper, goud en de koers van Apple?</a:t>
-            </a:r>
-          </a:p>
-        </p:txBody>
-      </p:sp>
-      <p:sp>
-        <p:nvSpPr>
-          <p:cNvPr id="8" name="TextBox 7"/>
-          <p:cNvSpPr txBox="1"/>
-          <p:nvPr/>
-        </p:nvSpPr>
-        <p:spPr>
-          <a:xfrm>
-            <a:off x="4480560" y="2651760"/>
-            <a:ext cx="7132320" cy="1005840"/>
-          </a:xfrm>
-          <a:prstGeom prst="rect">
-            <a:avLst/>
-          </a:prstGeom>
-          <a:noFill/>
-        </p:spPr>
-        <p:txBody>
-          <a:bodyPr wrap="square" anchor="t" lIns="0" rIns="0" tIns="0" bIns="0">
-            <a:spAutoFit/>
-          </a:bodyPr>
-          <a:lstStyle/>
-          <a:p>
-            <a:pPr algn="l">
-              <a:lnSpc>
-                <a:spcPct val="115000"/>
-              </a:lnSpc>
-              <a:spcAft>
-                <a:spcPts val="200"/>
-              </a:spcAft>
-            </a:pPr>
-            <a:r>
-              <a:rPr sz="1300" b="1">
-                <a:solidFill>
-                  <a:srgbClr val="02C39A"/>
-                </a:solidFill>
-                <a:latin typeface="Calibri"/>
-              </a:rPr>
-              <a:t>RESULTAAT REGRESSIE</a:t>
-            </a:r>
-          </a:p>
-          <a:p>
-            <a:pPr algn="l">
-              <a:lnSpc>
-                <a:spcPct val="115000"/>
-              </a:lnSpc>
-              <a:spcAft>
-                <a:spcPts val="200"/>
-              </a:spcAft>
-            </a:pPr>
-            <a:r>
-              <a:rPr sz="1600" b="0">
-                <a:solidFill>
-                  <a:srgbClr val="21295C"/>
-                </a:solidFill>
-                <a:latin typeface="Calibri"/>
-              </a:rPr>
-              <a:t>Coffee +0,7351  ·  Copper +0,0236  ·  Gold -0,0097  ·  R² = 0,88</a:t>
-            </a:r>
-          </a:p>
-        </p:txBody>
-      </p:sp>
-      <p:sp>
-        <p:nvSpPr>
-          <p:cNvPr id="9" name="TextBox 8"/>
-          <p:cNvSpPr txBox="1"/>
-          <p:nvPr/>
-        </p:nvSpPr>
-        <p:spPr>
-          <a:xfrm>
-            <a:off x="4480560" y="3931920"/>
-            <a:ext cx="7132320" cy="2377440"/>
-          </a:xfrm>
-          <a:prstGeom prst="rect">
-            <a:avLst/>
-          </a:prstGeom>
-          <a:noFill/>
-        </p:spPr>
-        <p:txBody>
-          <a:bodyPr wrap="square" anchor="t" lIns="0" rIns="0" tIns="0" bIns="0">
-            <a:spAutoFit/>
-          </a:bodyPr>
-          <a:lstStyle/>
-          <a:p>
-            <a:pPr algn="l">
-              <a:lnSpc>
-                <a:spcPct val="125000"/>
-              </a:lnSpc>
-              <a:spcAft>
-                <a:spcPts val="200"/>
-              </a:spcAft>
-            </a:pPr>
-            <a:r>
-              <a:rPr sz="1300" b="1">
-                <a:solidFill>
-                  <a:srgbClr val="02C39A"/>
-                </a:solidFill>
-                <a:latin typeface="Calibri"/>
-              </a:rPr>
-              <a:t>CONCLUSIE</a:t>
-            </a:r>
-          </a:p>
-          <a:p>
-            <a:pPr algn="l">
-              <a:lnSpc>
-                <a:spcPct val="125000"/>
-              </a:lnSpc>
-              <a:spcAft>
-                <a:spcPts val="200"/>
-              </a:spcAft>
-            </a:pPr>
-            <a:r>
-              <a:rPr sz="1600" b="0">
-                <a:solidFill>
-                  <a:srgbClr val="21295C"/>
-                </a:solidFill>
-                <a:latin typeface="Calibri"/>
-              </a:rPr>
-              <a:t>Significant en sterke correlatie.</a:t>
-            </a:r>
-          </a:p>
-          <a:p>
-            <a:pPr algn="l">
-              <a:lnSpc>
-                <a:spcPct val="125000"/>
-              </a:lnSpc>
-              <a:spcAft>
-                <a:spcPts val="200"/>
-              </a:spcAft>
-            </a:pPr>
-            <a:r>
-              <a:rPr sz="1600" b="0">
-                <a:solidFill>
-                  <a:srgbClr val="21295C"/>
-                </a:solidFill>
-                <a:latin typeface="Calibri"/>
-              </a:rPr>
-              <a:t>Hoogconjunctuur drijft Apple en koper omhoog;</a:t>
-            </a:r>
-          </a:p>
-          <a:p>
-            <a:pPr algn="l">
-              <a:lnSpc>
-                <a:spcPct val="125000"/>
-              </a:lnSpc>
-              <a:spcAft>
-                <a:spcPts val="200"/>
-              </a:spcAft>
-            </a:pPr>
-            <a:r>
-              <a:rPr sz="1600" b="0">
-                <a:solidFill>
-                  <a:srgbClr val="21295C"/>
-                </a:solidFill>
-                <a:latin typeface="Calibri"/>
-              </a:rPr>
-              <a:t>goud reageert juist zwakker (veilige haven).</a:t>
-            </a:r>
-          </a:p>
-        </p:txBody>
-      </p:sp>
-    </p:spTree>
-  </p:cSld>
-  <p:clrMapOvr>
-    <a:masterClrMapping/>
-  </p:clrMapOvr>
-</p:sld>
-</file>
-
-<file path=ppt/slides/slide18.xml><?xml version="1.0" encoding="utf-8"?>
+<file path=ppt/slides/slide8.xml><?xml version="1.0" encoding="utf-8"?>
 <p:sld xmlns:a="http://schemas.openxmlformats.org/drawingml/2006/main" xmlns:p="http://schemas.openxmlformats.org/presentationml/2006/main" xmlns:r="http://schemas.openxmlformats.org/officeDocument/2006/relationships">
   <p:cSld>
     <p:spTree>
@@ -7726,7 +7526,7 @@
 </p:sld>
 </file>
 
-<file path=ppt/slides/slide19.xml><?xml version="1.0" encoding="utf-8"?>
+<file path=ppt/slides/slide9.xml><?xml version="1.0" encoding="utf-8"?>
 <p:sld xmlns:a="http://schemas.openxmlformats.org/drawingml/2006/main" xmlns:p="http://schemas.openxmlformats.org/presentationml/2006/main" xmlns:r="http://schemas.openxmlformats.org/officeDocument/2006/relationships">
   <p:cSld>
     <p:spTree>
@@ -8536,5122 +8336,6 @@
               </a:spcAft>
             </a:pPr>
             <a:r>
-              <a:rPr sz="1400" b="0">
-                <a:solidFill>
-                  <a:srgbClr val="CADCFC"/>
-                </a:solidFill>
-                <a:latin typeface="Calibri"/>
-              </a:rPr>
-              <a:t>Macro-indicatoren krijgen ~0%:</a:t>
-            </a:r>
-          </a:p>
-          <a:p>
-            <a:pPr algn="l">
-              <a:lnSpc>
-                <a:spcPct val="125000"/>
-              </a:lnSpc>
-              <a:spcAft>
-                <a:spcPts val="200"/>
-              </a:spcAft>
-            </a:pPr>
-            <a:r>
-              <a:rPr sz="1400" b="0">
-                <a:solidFill>
-                  <a:srgbClr val="CADCFC"/>
-                </a:solidFill>
-                <a:latin typeface="Calibri"/>
-              </a:rPr>
-              <a:t>ze voegen geen rendement per</a:t>
-            </a:r>
-          </a:p>
-          <a:p>
-            <a:pPr algn="l">
-              <a:lnSpc>
-                <a:spcPct val="125000"/>
-              </a:lnSpc>
-              <a:spcAft>
-                <a:spcPts val="200"/>
-              </a:spcAft>
-            </a:pPr>
-            <a:r>
-              <a:rPr sz="1400" b="0">
-                <a:solidFill>
-                  <a:srgbClr val="CADCFC"/>
-                </a:solidFill>
-                <a:latin typeface="Calibri"/>
-              </a:rPr>
-              <a:t>eenheid risico toe.</a:t>
-            </a:r>
-          </a:p>
-        </p:txBody>
-      </p:sp>
-    </p:spTree>
-  </p:cSld>
-  <p:clrMapOvr>
-    <a:masterClrMapping/>
-  </p:clrMapOvr>
-</p:sld>
-</file>
-
-<file path=ppt/slides/slide2.xml><?xml version="1.0" encoding="utf-8"?>
-<p:sld xmlns:a="http://schemas.openxmlformats.org/drawingml/2006/main" xmlns:p="http://schemas.openxmlformats.org/presentationml/2006/main" xmlns:r="http://schemas.openxmlformats.org/officeDocument/2006/relationships">
-  <p:cSld>
-    <p:spTree>
-      <p:nvGrpSpPr>
-        <p:cNvPr id="1" name=""/>
-        <p:cNvGrpSpPr/>
-        <p:nvPr/>
-      </p:nvGrpSpPr>
-      <p:grpSpPr/>
-      <p:sp>
-        <p:nvSpPr>
-          <p:cNvPr id="2" name="Rectangle 1"/>
-          <p:cNvSpPr/>
-          <p:nvPr/>
-        </p:nvSpPr>
-        <p:spPr>
-          <a:xfrm>
-            <a:off x="0" y="0"/>
-            <a:ext cx="12191695" cy="6858000"/>
-          </a:xfrm>
-          <a:prstGeom prst="rect">
-            <a:avLst/>
-          </a:prstGeom>
-          <a:solidFill>
-            <a:srgbClr val="FFFFFF"/>
-          </a:solidFill>
-          <a:ln>
-            <a:noFill/>
-          </a:ln>
-          <a:effectLst/>
-        </p:spPr>
-        <p:style>
-          <a:lnRef idx="1">
-            <a:schemeClr val="accent1"/>
-          </a:lnRef>
-          <a:fillRef idx="3">
-            <a:schemeClr val="accent1"/>
-          </a:fillRef>
-          <a:effectRef idx="2">
-            <a:schemeClr val="accent1"/>
-          </a:effectRef>
-          <a:fontRef idx="minor">
-            <a:schemeClr val="lt1"/>
-          </a:fontRef>
-        </p:style>
-        <p:txBody>
-          <a:bodyPr rtlCol="0" anchor="ctr"/>
-          <a:lstStyle/>
-          <a:p>
-            <a:pPr algn="ctr"/>
-          </a:p>
-        </p:txBody>
-      </p:sp>
-      <p:sp>
-        <p:nvSpPr>
-          <p:cNvPr id="3" name="TextBox 2"/>
-          <p:cNvSpPr txBox="1"/>
-          <p:nvPr/>
-        </p:nvSpPr>
-        <p:spPr>
-          <a:xfrm>
-            <a:off x="822960" y="502920"/>
-            <a:ext cx="10607040" cy="914400"/>
-          </a:xfrm>
-          <a:prstGeom prst="rect">
-            <a:avLst/>
-          </a:prstGeom>
-          <a:noFill/>
-        </p:spPr>
-        <p:txBody>
-          <a:bodyPr wrap="square" anchor="ctr" lIns="0" rIns="0" tIns="0" bIns="0">
-            <a:spAutoFit/>
-          </a:bodyPr>
-          <a:lstStyle/>
-          <a:p>
-            <a:pPr algn="l">
-              <a:lnSpc>
-                <a:spcPct val="110000"/>
-              </a:lnSpc>
-              <a:spcAft>
-                <a:spcPts val="200"/>
-              </a:spcAft>
-            </a:pPr>
-            <a:r>
-              <a:rPr sz="3400" b="1">
-                <a:solidFill>
-                  <a:srgbClr val="1E2761"/>
-                </a:solidFill>
-                <a:latin typeface="Georgia"/>
-              </a:rPr>
-              <a:t>Onze data &amp; aanpak</a:t>
-            </a:r>
-          </a:p>
-        </p:txBody>
-      </p:sp>
-      <p:sp>
-        <p:nvSpPr>
-          <p:cNvPr id="4" name="Rectangle 3"/>
-          <p:cNvSpPr/>
-          <p:nvPr/>
-        </p:nvSpPr>
-        <p:spPr>
-          <a:xfrm>
-            <a:off x="822960" y="1417320"/>
-            <a:ext cx="2194560" cy="54864"/>
-          </a:xfrm>
-          <a:prstGeom prst="rect">
-            <a:avLst/>
-          </a:prstGeom>
-          <a:solidFill>
-            <a:srgbClr val="02C39A"/>
-          </a:solidFill>
-          <a:ln>
-            <a:noFill/>
-          </a:ln>
-          <a:effectLst/>
-        </p:spPr>
-        <p:style>
-          <a:lnRef idx="1">
-            <a:schemeClr val="accent1"/>
-          </a:lnRef>
-          <a:fillRef idx="3">
-            <a:schemeClr val="accent1"/>
-          </a:fillRef>
-          <a:effectRef idx="2">
-            <a:schemeClr val="accent1"/>
-          </a:effectRef>
-          <a:fontRef idx="minor">
-            <a:schemeClr val="lt1"/>
-          </a:fontRef>
-        </p:style>
-        <p:txBody>
-          <a:bodyPr rtlCol="0" anchor="ctr"/>
-          <a:lstStyle/>
-          <a:p>
-            <a:pPr algn="ctr"/>
-          </a:p>
-        </p:txBody>
-      </p:sp>
-      <p:sp>
-        <p:nvSpPr>
-          <p:cNvPr id="5" name="TextBox 4"/>
-          <p:cNvSpPr txBox="1"/>
-          <p:nvPr/>
-        </p:nvSpPr>
-        <p:spPr>
-          <a:xfrm>
-            <a:off x="822960" y="1828800"/>
-            <a:ext cx="10515600" cy="4389120"/>
-          </a:xfrm>
-          <a:prstGeom prst="rect">
-            <a:avLst/>
-          </a:prstGeom>
-          <a:noFill/>
-        </p:spPr>
-        <p:txBody>
-          <a:bodyPr wrap="square" anchor="t" lIns="0" rIns="0" tIns="0" bIns="0">
-            <a:spAutoFit/>
-          </a:bodyPr>
-          <a:lstStyle/>
-          <a:p>
-            <a:pPr algn="l">
-              <a:lnSpc>
-                <a:spcPct val="150000"/>
-              </a:lnSpc>
-              <a:spcAft>
-                <a:spcPts val="200"/>
-              </a:spcAft>
-            </a:pPr>
-            <a:r>
-              <a:rPr sz="1800" b="0">
-                <a:solidFill>
-                  <a:srgbClr val="21295C"/>
-                </a:solidFill>
-                <a:latin typeface="Calibri"/>
-              </a:rPr>
-              <a:t>We verzamelden 20 producten en indicatoren over de periode dec 2015 – mei 2026.</a:t>
-            </a:r>
-          </a:p>
-          <a:p>
-            <a:pPr algn="l">
-              <a:lnSpc>
-                <a:spcPct val="150000"/>
-              </a:lnSpc>
-              <a:spcAft>
-                <a:spcPts val="200"/>
-              </a:spcAft>
-            </a:pPr>
-            <a:r>
-              <a:rPr sz="1600" b="0">
-                <a:solidFill>
-                  <a:srgbClr val="21295C"/>
-                </a:solidFill>
-                <a:latin typeface="Calibri"/>
-              </a:rPr>
-              <a:t>•  Aandelen, crypto en obligaties via Yahoo Finance (Apple, ASML, Broadcom, Shell, Bitcoin).</a:t>
-            </a:r>
-          </a:p>
-          <a:p>
-            <a:pPr algn="l">
-              <a:lnSpc>
-                <a:spcPct val="150000"/>
-              </a:lnSpc>
-              <a:spcAft>
-                <a:spcPts val="200"/>
-              </a:spcAft>
-            </a:pPr>
-            <a:r>
-              <a:rPr sz="1600" b="0">
-                <a:solidFill>
-                  <a:srgbClr val="21295C"/>
-                </a:solidFill>
-                <a:latin typeface="Calibri"/>
-              </a:rPr>
-              <a:t>•  Grondstoffen via Yahoo Finance en FRED (goud, olie, koper, graan, koffie, gas).</a:t>
-            </a:r>
-          </a:p>
-          <a:p>
-            <a:pPr algn="l">
-              <a:lnSpc>
-                <a:spcPct val="150000"/>
-              </a:lnSpc>
-              <a:spcAft>
-                <a:spcPts val="200"/>
-              </a:spcAft>
-            </a:pPr>
-            <a:r>
-              <a:rPr sz="1600" b="0">
-                <a:solidFill>
-                  <a:srgbClr val="21295C"/>
-                </a:solidFill>
-                <a:latin typeface="Calibri"/>
-              </a:rPr>
-              <a:t>•  Macro-economische indicatoren via de FED St. Louis (GDP, inkomen, inflatie, rente, werkloosheid).</a:t>
-            </a:r>
-          </a:p>
-          <a:p>
-            <a:pPr algn="l">
-              <a:lnSpc>
-                <a:spcPct val="150000"/>
-              </a:lnSpc>
-              <a:spcAft>
-                <a:spcPts val="200"/>
-              </a:spcAft>
-            </a:pPr>
-            <a:r>
-              <a:rPr sz="1600" b="0">
-                <a:solidFill>
-                  <a:srgbClr val="21295C"/>
-                </a:solidFill>
-                <a:latin typeface="Calibri"/>
-              </a:rPr>
-              <a:t>Hierop pasten we regressie, tijdreeksanalyse, sentimentanalyse, machine learning en</a:t>
-            </a:r>
-          </a:p>
-          <a:p>
-            <a:pPr algn="l">
-              <a:lnSpc>
-                <a:spcPct val="150000"/>
-              </a:lnSpc>
-              <a:spcAft>
-                <a:spcPts val="200"/>
-              </a:spcAft>
-            </a:pPr>
-            <a:r>
-              <a:rPr sz="1600" b="0">
-                <a:solidFill>
-                  <a:srgbClr val="21295C"/>
-                </a:solidFill>
-                <a:latin typeface="Calibri"/>
-              </a:rPr>
-              <a:t>portfolio-optimalisatie toe om verbanden te onderzoeken en een optimale portefeuille samen te stellen.</a:t>
-            </a:r>
-          </a:p>
-        </p:txBody>
-      </p:sp>
-    </p:spTree>
-  </p:cSld>
-  <p:clrMapOvr>
-    <a:masterClrMapping/>
-  </p:clrMapOvr>
-</p:sld>
-</file>
-
-<file path=ppt/slides/slide20.xml><?xml version="1.0" encoding="utf-8"?>
-<p:sld xmlns:a="http://schemas.openxmlformats.org/drawingml/2006/main" xmlns:p="http://schemas.openxmlformats.org/presentationml/2006/main" xmlns:r="http://schemas.openxmlformats.org/officeDocument/2006/relationships">
-  <p:cSld>
-    <p:spTree>
-      <p:nvGrpSpPr>
-        <p:cNvPr id="1" name=""/>
-        <p:cNvGrpSpPr/>
-        <p:nvPr/>
-      </p:nvGrpSpPr>
-      <p:grpSpPr/>
-      <p:sp>
-        <p:nvSpPr>
-          <p:cNvPr id="2" name="Rectangle 1"/>
-          <p:cNvSpPr/>
-          <p:nvPr/>
-        </p:nvSpPr>
-        <p:spPr>
-          <a:xfrm>
-            <a:off x="0" y="0"/>
-            <a:ext cx="12191695" cy="6858000"/>
-          </a:xfrm>
-          <a:prstGeom prst="rect">
-            <a:avLst/>
-          </a:prstGeom>
-          <a:solidFill>
-            <a:srgbClr val="1E2761"/>
-          </a:solidFill>
-          <a:ln>
-            <a:noFill/>
-          </a:ln>
-          <a:effectLst/>
-        </p:spPr>
-        <p:style>
-          <a:lnRef idx="1">
-            <a:schemeClr val="accent1"/>
-          </a:lnRef>
-          <a:fillRef idx="3">
-            <a:schemeClr val="accent1"/>
-          </a:fillRef>
-          <a:effectRef idx="2">
-            <a:schemeClr val="accent1"/>
-          </a:effectRef>
-          <a:fontRef idx="minor">
-            <a:schemeClr val="lt1"/>
-          </a:fontRef>
-        </p:style>
-        <p:txBody>
-          <a:bodyPr rtlCol="0" anchor="ctr"/>
-          <a:lstStyle/>
-          <a:p>
-            <a:pPr algn="ctr"/>
-          </a:p>
-        </p:txBody>
-      </p:sp>
-      <p:sp>
-        <p:nvSpPr>
-          <p:cNvPr id="3" name="Oval 2"/>
-          <p:cNvSpPr/>
-          <p:nvPr/>
-        </p:nvSpPr>
-        <p:spPr>
-          <a:xfrm>
-            <a:off x="822960" y="822960"/>
-            <a:ext cx="274320" cy="274320"/>
-          </a:xfrm>
-          <a:prstGeom prst="ellipse">
-            <a:avLst/>
-          </a:prstGeom>
-          <a:solidFill>
-            <a:srgbClr val="02C39A"/>
-          </a:solidFill>
-          <a:ln>
-            <a:noFill/>
-          </a:ln>
-          <a:effectLst/>
-        </p:spPr>
-        <p:style>
-          <a:lnRef idx="1">
-            <a:schemeClr val="accent1"/>
-          </a:lnRef>
-          <a:fillRef idx="3">
-            <a:schemeClr val="accent1"/>
-          </a:fillRef>
-          <a:effectRef idx="2">
-            <a:schemeClr val="accent1"/>
-          </a:effectRef>
-          <a:fontRef idx="minor">
-            <a:schemeClr val="lt1"/>
-          </a:fontRef>
-        </p:style>
-        <p:txBody>
-          <a:bodyPr rtlCol="0" anchor="ctr"/>
-          <a:lstStyle/>
-          <a:p>
-            <a:pPr algn="ctr"/>
-          </a:p>
-        </p:txBody>
-      </p:sp>
-      <p:sp>
-        <p:nvSpPr>
-          <p:cNvPr id="4" name="TextBox 3"/>
-          <p:cNvSpPr txBox="1"/>
-          <p:nvPr/>
-        </p:nvSpPr>
-        <p:spPr>
-          <a:xfrm>
-            <a:off x="822960" y="1280160"/>
-            <a:ext cx="10515600" cy="914400"/>
-          </a:xfrm>
-          <a:prstGeom prst="rect">
-            <a:avLst/>
-          </a:prstGeom>
-          <a:noFill/>
-        </p:spPr>
-        <p:txBody>
-          <a:bodyPr wrap="square" anchor="t" lIns="0" rIns="0" tIns="0" bIns="0">
-            <a:spAutoFit/>
-          </a:bodyPr>
-          <a:lstStyle/>
-          <a:p>
-            <a:pPr algn="l">
-              <a:lnSpc>
-                <a:spcPct val="110000"/>
-              </a:lnSpc>
-              <a:spcAft>
-                <a:spcPts val="200"/>
-              </a:spcAft>
-            </a:pPr>
-            <a:r>
-              <a:rPr sz="4400" b="1">
-                <a:solidFill>
-                  <a:srgbClr val="FFFFFF"/>
-                </a:solidFill>
-                <a:latin typeface="Georgia"/>
-              </a:rPr>
-              <a:t>Eindconclusie</a:t>
-            </a:r>
-          </a:p>
-        </p:txBody>
-      </p:sp>
-      <p:sp>
-        <p:nvSpPr>
-          <p:cNvPr id="5" name="TextBox 4"/>
-          <p:cNvSpPr txBox="1"/>
-          <p:nvPr/>
-        </p:nvSpPr>
-        <p:spPr>
-          <a:xfrm>
-            <a:off x="822960" y="2651760"/>
-            <a:ext cx="10607040" cy="3657600"/>
-          </a:xfrm>
-          <a:prstGeom prst="rect">
-            <a:avLst/>
-          </a:prstGeom>
-          <a:noFill/>
-        </p:spPr>
-        <p:txBody>
-          <a:bodyPr wrap="square" anchor="t" lIns="0" rIns="0" tIns="0" bIns="0">
-            <a:spAutoFit/>
-          </a:bodyPr>
-          <a:lstStyle/>
-          <a:p>
-            <a:pPr algn="l">
-              <a:lnSpc>
-                <a:spcPct val="150000"/>
-              </a:lnSpc>
-              <a:spcAft>
-                <a:spcPts val="200"/>
-              </a:spcAft>
-            </a:pPr>
-            <a:r>
-              <a:rPr sz="1800" b="0">
-                <a:solidFill>
-                  <a:srgbClr val="CADCFC"/>
-                </a:solidFill>
-                <a:latin typeface="Calibri"/>
-              </a:rPr>
-              <a:t>Met regressie, tijdreeks- en sentimentanalyse vonden we duidelijke, vaak significante</a:t>
-            </a:r>
-          </a:p>
-          <a:p>
-            <a:pPr algn="l">
-              <a:lnSpc>
-                <a:spcPct val="150000"/>
-              </a:lnSpc>
-              <a:spcAft>
-                <a:spcPts val="200"/>
-              </a:spcAft>
-            </a:pPr>
-            <a:r>
-              <a:rPr sz="1800" b="0">
-                <a:solidFill>
-                  <a:srgbClr val="CADCFC"/>
-                </a:solidFill>
-                <a:latin typeface="Calibri"/>
-              </a:rPr>
-              <a:t>verbanden tussen macro-economische factoren en de koersen in onze portfolio.</a:t>
-            </a:r>
-          </a:p>
-          <a:p>
-            <a:pPr algn="l">
-              <a:lnSpc>
-                <a:spcPct val="150000"/>
-              </a:lnSpc>
-              <a:spcAft>
-                <a:spcPts val="200"/>
-              </a:spcAft>
-            </a:pPr>
-            <a:r>
-              <a:rPr sz="1800" b="0">
-                <a:solidFill>
-                  <a:srgbClr val="CADCFC"/>
-                </a:solidFill>
-                <a:latin typeface="Calibri"/>
-              </a:rPr>
-              <a:t>Het neurale netwerk voorspelt de Apple-koers sterk (R² ≈ 0,98), terwijl nieuws-sentiment</a:t>
-            </a:r>
-          </a:p>
-          <a:p>
-            <a:pPr algn="l">
-              <a:lnSpc>
-                <a:spcPct val="150000"/>
-              </a:lnSpc>
-              <a:spcAft>
-                <a:spcPts val="200"/>
-              </a:spcAft>
-            </a:pPr>
-            <a:r>
-              <a:rPr sz="1800" b="0">
-                <a:solidFill>
-                  <a:srgbClr val="CADCFC"/>
-                </a:solidFill>
-                <a:latin typeface="Calibri"/>
-              </a:rPr>
-              <a:t>geen significant koerseffect liet zien.</a:t>
-            </a:r>
-          </a:p>
-          <a:p>
-            <a:pPr algn="l">
-              <a:lnSpc>
-                <a:spcPct val="150000"/>
-              </a:lnSpc>
-              <a:spcAft>
-                <a:spcPts val="200"/>
-              </a:spcAft>
-            </a:pPr>
-            <a:r>
-              <a:rPr sz="1800" b="0">
-                <a:solidFill>
-                  <a:srgbClr val="CADCFC"/>
-                </a:solidFill>
-                <a:latin typeface="Calibri"/>
-              </a:rPr>
-              <a:t>De Markowitz-optimalisatie leverde een marktportfolio op met de hoogste Sharpe-ratio (1,10):</a:t>
-            </a:r>
-          </a:p>
-          <a:p>
-            <a:pPr algn="l">
-              <a:lnSpc>
-                <a:spcPct val="150000"/>
-              </a:lnSpc>
-              <a:spcAft>
-                <a:spcPts val="200"/>
-              </a:spcAft>
-            </a:pPr>
-            <a:r>
-              <a:rPr sz="1800" b="0">
-                <a:solidFill>
-                  <a:srgbClr val="CADCFC"/>
-                </a:solidFill>
-                <a:latin typeface="Calibri"/>
-              </a:rPr>
-              <a:t>het beste rendement per eenheid risico binnen onze dataset.</a:t>
-            </a:r>
-          </a:p>
-        </p:txBody>
-      </p:sp>
-    </p:spTree>
-  </p:cSld>
-  <p:clrMapOvr>
-    <a:masterClrMapping/>
-  </p:clrMapOvr>
-</p:sld>
-</file>
-
-<file path=ppt/slides/slide3.xml><?xml version="1.0" encoding="utf-8"?>
-<p:sld xmlns:a="http://schemas.openxmlformats.org/drawingml/2006/main" xmlns:p="http://schemas.openxmlformats.org/presentationml/2006/main" xmlns:r="http://schemas.openxmlformats.org/officeDocument/2006/relationships">
-  <p:cSld>
-    <p:spTree>
-      <p:nvGrpSpPr>
-        <p:cNvPr id="1" name=""/>
-        <p:cNvGrpSpPr/>
-        <p:nvPr/>
-      </p:nvGrpSpPr>
-      <p:grpSpPr/>
-      <p:sp>
-        <p:nvSpPr>
-          <p:cNvPr id="2" name="Rectangle 1"/>
-          <p:cNvSpPr/>
-          <p:nvPr/>
-        </p:nvSpPr>
-        <p:spPr>
-          <a:xfrm>
-            <a:off x="0" y="0"/>
-            <a:ext cx="12191695" cy="6858000"/>
-          </a:xfrm>
-          <a:prstGeom prst="rect">
-            <a:avLst/>
-          </a:prstGeom>
-          <a:solidFill>
-            <a:srgbClr val="FFFFFF"/>
-          </a:solidFill>
-          <a:ln>
-            <a:noFill/>
-          </a:ln>
-          <a:effectLst/>
-        </p:spPr>
-        <p:style>
-          <a:lnRef idx="1">
-            <a:schemeClr val="accent1"/>
-          </a:lnRef>
-          <a:fillRef idx="3">
-            <a:schemeClr val="accent1"/>
-          </a:fillRef>
-          <a:effectRef idx="2">
-            <a:schemeClr val="accent1"/>
-          </a:effectRef>
-          <a:fontRef idx="minor">
-            <a:schemeClr val="lt1"/>
-          </a:fontRef>
-        </p:style>
-        <p:txBody>
-          <a:bodyPr rtlCol="0" anchor="ctr"/>
-          <a:lstStyle/>
-          <a:p>
-            <a:pPr algn="ctr"/>
-          </a:p>
-        </p:txBody>
-      </p:sp>
-      <p:sp>
-        <p:nvSpPr>
-          <p:cNvPr id="3" name="Rectangle 2"/>
-          <p:cNvSpPr/>
-          <p:nvPr/>
-        </p:nvSpPr>
-        <p:spPr>
-          <a:xfrm>
-            <a:off x="0" y="0"/>
-            <a:ext cx="3931920" cy="6858000"/>
-          </a:xfrm>
-          <a:prstGeom prst="rect">
-            <a:avLst/>
-          </a:prstGeom>
-          <a:solidFill>
-            <a:srgbClr val="1E2761"/>
-          </a:solidFill>
-          <a:ln>
-            <a:noFill/>
-          </a:ln>
-          <a:effectLst/>
-        </p:spPr>
-        <p:style>
-          <a:lnRef idx="1">
-            <a:schemeClr val="accent1"/>
-          </a:lnRef>
-          <a:fillRef idx="3">
-            <a:schemeClr val="accent1"/>
-          </a:fillRef>
-          <a:effectRef idx="2">
-            <a:schemeClr val="accent1"/>
-          </a:effectRef>
-          <a:fontRef idx="minor">
-            <a:schemeClr val="lt1"/>
-          </a:fontRef>
-        </p:style>
-        <p:txBody>
-          <a:bodyPr rtlCol="0" anchor="ctr"/>
-          <a:lstStyle/>
-          <a:p>
-            <a:pPr algn="ctr"/>
-          </a:p>
-        </p:txBody>
-      </p:sp>
-      <p:sp>
-        <p:nvSpPr>
-          <p:cNvPr id="4" name="Oval 3"/>
-          <p:cNvSpPr/>
-          <p:nvPr/>
-        </p:nvSpPr>
-        <p:spPr>
-          <a:xfrm>
-            <a:off x="548640" y="640080"/>
-            <a:ext cx="256032" cy="256032"/>
-          </a:xfrm>
-          <a:prstGeom prst="ellipse">
-            <a:avLst/>
-          </a:prstGeom>
-          <a:solidFill>
-            <a:srgbClr val="02C39A"/>
-          </a:solidFill>
-          <a:ln>
-            <a:noFill/>
-          </a:ln>
-          <a:effectLst/>
-        </p:spPr>
-        <p:style>
-          <a:lnRef idx="1">
-            <a:schemeClr val="accent1"/>
-          </a:lnRef>
-          <a:fillRef idx="3">
-            <a:schemeClr val="accent1"/>
-          </a:fillRef>
-          <a:effectRef idx="2">
-            <a:schemeClr val="accent1"/>
-          </a:effectRef>
-          <a:fontRef idx="minor">
-            <a:schemeClr val="lt1"/>
-          </a:fontRef>
-        </p:style>
-        <p:txBody>
-          <a:bodyPr rtlCol="0" anchor="ctr"/>
-          <a:lstStyle/>
-          <a:p>
-            <a:pPr algn="ctr"/>
-          </a:p>
-        </p:txBody>
-      </p:sp>
-      <p:sp>
-        <p:nvSpPr>
-          <p:cNvPr id="5" name="TextBox 4"/>
-          <p:cNvSpPr txBox="1"/>
-          <p:nvPr/>
-        </p:nvSpPr>
-        <p:spPr>
-          <a:xfrm>
-            <a:off x="548640" y="1051560"/>
-            <a:ext cx="3017520" cy="548640"/>
-          </a:xfrm>
-          <a:prstGeom prst="rect">
-            <a:avLst/>
-          </a:prstGeom>
-          <a:noFill/>
-        </p:spPr>
-        <p:txBody>
-          <a:bodyPr wrap="square" anchor="t" lIns="0" rIns="0" tIns="0" bIns="0">
-            <a:spAutoFit/>
-          </a:bodyPr>
-          <a:lstStyle/>
-          <a:p>
-            <a:pPr algn="l">
-              <a:lnSpc>
-                <a:spcPct val="110000"/>
-              </a:lnSpc>
-              <a:spcAft>
-                <a:spcPts val="200"/>
-              </a:spcAft>
-            </a:pPr>
-            <a:r>
-              <a:rPr sz="2000" b="1">
-                <a:solidFill>
-                  <a:srgbClr val="02C39A"/>
-                </a:solidFill>
-                <a:latin typeface="Calibri"/>
-              </a:rPr>
-              <a:t>Onderzoeksvraag 1</a:t>
-            </a:r>
-          </a:p>
-        </p:txBody>
-      </p:sp>
-      <p:sp>
-        <p:nvSpPr>
-          <p:cNvPr id="6" name="TextBox 5"/>
-          <p:cNvSpPr txBox="1"/>
-          <p:nvPr/>
-        </p:nvSpPr>
-        <p:spPr>
-          <a:xfrm>
-            <a:off x="548640" y="1920240"/>
-            <a:ext cx="3108960" cy="4389120"/>
-          </a:xfrm>
-          <a:prstGeom prst="rect">
-            <a:avLst/>
-          </a:prstGeom>
-          <a:noFill/>
-        </p:spPr>
-        <p:txBody>
-          <a:bodyPr wrap="square" anchor="t" lIns="0" rIns="0" tIns="0" bIns="0">
-            <a:spAutoFit/>
-          </a:bodyPr>
-          <a:lstStyle/>
-          <a:p>
-            <a:pPr algn="l">
-              <a:lnSpc>
-                <a:spcPct val="140000"/>
-              </a:lnSpc>
-              <a:spcAft>
-                <a:spcPts val="200"/>
-              </a:spcAft>
-            </a:pPr>
-            <a:r>
-              <a:rPr sz="1500" b="1">
-                <a:solidFill>
-                  <a:srgbClr val="CADCFC"/>
-                </a:solidFill>
-                <a:latin typeface="Calibri"/>
-              </a:rPr>
-              <a:t>Stappen vooraf</a:t>
-            </a:r>
-          </a:p>
-          <a:p>
-            <a:pPr algn="l">
-              <a:lnSpc>
-                <a:spcPct val="140000"/>
-              </a:lnSpc>
-              <a:spcAft>
-                <a:spcPts val="200"/>
-              </a:spcAft>
-            </a:pPr>
-            <a:r>
-              <a:rPr sz="1400" b="0">
-                <a:solidFill>
-                  <a:srgbClr val="FFFFFF"/>
-                </a:solidFill>
-                <a:latin typeface="Calibri"/>
-              </a:rPr>
-              <a:t>1.  Relevante data geselecteerd</a:t>
-            </a:r>
-          </a:p>
-          <a:p>
-            <a:pPr algn="l">
-              <a:lnSpc>
-                <a:spcPct val="140000"/>
-              </a:lnSpc>
-              <a:spcAft>
-                <a:spcPts val="200"/>
-              </a:spcAft>
-            </a:pPr>
-            <a:r>
-              <a:rPr sz="1400" b="0">
-                <a:solidFill>
-                  <a:srgbClr val="FFFFFF"/>
-                </a:solidFill>
-                <a:latin typeface="Calibri"/>
-              </a:rPr>
-              <a:t>2.  Correlatie-heatmap gemaakt</a:t>
-            </a:r>
-          </a:p>
-          <a:p>
-            <a:pPr algn="l">
-              <a:lnSpc>
-                <a:spcPct val="140000"/>
-              </a:lnSpc>
-              <a:spcAft>
-                <a:spcPts val="200"/>
-              </a:spcAft>
-            </a:pPr>
-            <a:r>
-              <a:rPr sz="1400" b="0">
-                <a:solidFill>
-                  <a:srgbClr val="FFFFFF"/>
-                </a:solidFill>
-                <a:latin typeface="Calibri"/>
-              </a:rPr>
-              <a:t>3.  Bubble chart (GDP x Income x Coffee)</a:t>
-            </a:r>
-          </a:p>
-          <a:p>
-            <a:pPr algn="l">
-              <a:lnSpc>
-                <a:spcPct val="140000"/>
-              </a:lnSpc>
-              <a:spcAft>
-                <a:spcPts val="200"/>
-              </a:spcAft>
-            </a:pPr>
-            <a:r>
-              <a:rPr sz="1400" b="0">
-                <a:solidFill>
-                  <a:srgbClr val="FFFFFF"/>
-                </a:solidFill>
-                <a:latin typeface="Calibri"/>
-              </a:rPr>
-              <a:t>4.  Meervoudige regressie</a:t>
-            </a:r>
-          </a:p>
-        </p:txBody>
-      </p:sp>
-      <p:sp>
-        <p:nvSpPr>
-          <p:cNvPr id="7" name="TextBox 6"/>
-          <p:cNvSpPr txBox="1"/>
-          <p:nvPr/>
-        </p:nvSpPr>
-        <p:spPr>
-          <a:xfrm>
-            <a:off x="4480560" y="914400"/>
-            <a:ext cx="7132320" cy="1280160"/>
-          </a:xfrm>
-          <a:prstGeom prst="rect">
-            <a:avLst/>
-          </a:prstGeom>
-          <a:noFill/>
-        </p:spPr>
-        <p:txBody>
-          <a:bodyPr wrap="square" anchor="t" lIns="0" rIns="0" tIns="0" bIns="0">
-            <a:spAutoFit/>
-          </a:bodyPr>
-          <a:lstStyle/>
-          <a:p>
-            <a:pPr algn="l">
-              <a:lnSpc>
-                <a:spcPct val="115000"/>
-              </a:lnSpc>
-              <a:spcAft>
-                <a:spcPts val="200"/>
-              </a:spcAft>
-            </a:pPr>
-            <a:r>
-              <a:rPr sz="1300" b="1">
-                <a:solidFill>
-                  <a:srgbClr val="02C39A"/>
-                </a:solidFill>
-                <a:latin typeface="Calibri"/>
-              </a:rPr>
-              <a:t>VRAAG</a:t>
-            </a:r>
-          </a:p>
-          <a:p>
-            <a:pPr algn="l">
-              <a:lnSpc>
-                <a:spcPct val="115000"/>
-              </a:lnSpc>
-              <a:spcAft>
-                <a:spcPts val="200"/>
-              </a:spcAft>
-            </a:pPr>
-            <a:r>
-              <a:rPr sz="1900" b="0">
-                <a:solidFill>
-                  <a:srgbClr val="21295C"/>
-                </a:solidFill>
-                <a:latin typeface="Calibri"/>
-              </a:rPr>
-              <a:t>Wat is het verband tussen GDP, persoonlijk inkomen en de koffieprijs?</a:t>
-            </a:r>
-          </a:p>
-        </p:txBody>
-      </p:sp>
-      <p:sp>
-        <p:nvSpPr>
-          <p:cNvPr id="8" name="TextBox 7"/>
-          <p:cNvSpPr txBox="1"/>
-          <p:nvPr/>
-        </p:nvSpPr>
-        <p:spPr>
-          <a:xfrm>
-            <a:off x="4480560" y="2651760"/>
-            <a:ext cx="7132320" cy="1005840"/>
-          </a:xfrm>
-          <a:prstGeom prst="rect">
-            <a:avLst/>
-          </a:prstGeom>
-          <a:noFill/>
-        </p:spPr>
-        <p:txBody>
-          <a:bodyPr wrap="square" anchor="t" lIns="0" rIns="0" tIns="0" bIns="0">
-            <a:spAutoFit/>
-          </a:bodyPr>
-          <a:lstStyle/>
-          <a:p>
-            <a:pPr algn="l">
-              <a:lnSpc>
-                <a:spcPct val="115000"/>
-              </a:lnSpc>
-              <a:spcAft>
-                <a:spcPts val="200"/>
-              </a:spcAft>
-            </a:pPr>
-            <a:r>
-              <a:rPr sz="1300" b="1">
-                <a:solidFill>
-                  <a:srgbClr val="02C39A"/>
-                </a:solidFill>
-                <a:latin typeface="Calibri"/>
-              </a:rPr>
-              <a:t>RESULTAAT REGRESSIE</a:t>
-            </a:r>
-          </a:p>
-          <a:p>
-            <a:pPr algn="l">
-              <a:lnSpc>
-                <a:spcPct val="115000"/>
-              </a:lnSpc>
-              <a:spcAft>
-                <a:spcPts val="200"/>
-              </a:spcAft>
-            </a:pPr>
-            <a:r>
-              <a:rPr sz="1600" b="0">
-                <a:solidFill>
-                  <a:srgbClr val="21295C"/>
-                </a:solidFill>
-                <a:latin typeface="Calibri"/>
-              </a:rPr>
-              <a:t>GDP +0,0160   ·   Income -0,0064   ·   R² = 0,80   (p &lt; 0,05)</a:t>
-            </a:r>
-          </a:p>
-        </p:txBody>
-      </p:sp>
-      <p:sp>
-        <p:nvSpPr>
-          <p:cNvPr id="9" name="TextBox 8"/>
-          <p:cNvSpPr txBox="1"/>
-          <p:nvPr/>
-        </p:nvSpPr>
-        <p:spPr>
-          <a:xfrm>
-            <a:off x="4480560" y="3931920"/>
-            <a:ext cx="7132320" cy="2377440"/>
-          </a:xfrm>
-          <a:prstGeom prst="rect">
-            <a:avLst/>
-          </a:prstGeom>
-          <a:noFill/>
-        </p:spPr>
-        <p:txBody>
-          <a:bodyPr wrap="square" anchor="t" lIns="0" rIns="0" tIns="0" bIns="0">
-            <a:spAutoFit/>
-          </a:bodyPr>
-          <a:lstStyle/>
-          <a:p>
-            <a:pPr algn="l">
-              <a:lnSpc>
-                <a:spcPct val="125000"/>
-              </a:lnSpc>
-              <a:spcAft>
-                <a:spcPts val="200"/>
-              </a:spcAft>
-            </a:pPr>
-            <a:r>
-              <a:rPr sz="1300" b="1">
-                <a:solidFill>
-                  <a:srgbClr val="02C39A"/>
-                </a:solidFill>
-                <a:latin typeface="Calibri"/>
-              </a:rPr>
-              <a:t>CONCLUSIE</a:t>
-            </a:r>
-          </a:p>
-          <a:p>
-            <a:pPr algn="l">
-              <a:lnSpc>
-                <a:spcPct val="125000"/>
-              </a:lnSpc>
-              <a:spcAft>
-                <a:spcPts val="200"/>
-              </a:spcAft>
-            </a:pPr>
-            <a:r>
-              <a:rPr sz="1600" b="0">
-                <a:solidFill>
-                  <a:srgbClr val="21295C"/>
-                </a:solidFill>
-                <a:latin typeface="Calibri"/>
-              </a:rPr>
-              <a:t>Significant en matige correlatie.</a:t>
-            </a:r>
-          </a:p>
-          <a:p>
-            <a:pPr algn="l">
-              <a:lnSpc>
-                <a:spcPct val="125000"/>
-              </a:lnSpc>
-              <a:spcAft>
-                <a:spcPts val="200"/>
-              </a:spcAft>
-            </a:pPr>
-            <a:r>
-              <a:rPr sz="1600" b="0">
-                <a:solidFill>
-                  <a:srgbClr val="21295C"/>
-                </a:solidFill>
-                <a:latin typeface="Calibri"/>
-              </a:rPr>
-              <a:t>Door onderlinge samenhang van de X-variabelen is geen</a:t>
-            </a:r>
-          </a:p>
-          <a:p>
-            <a:pPr algn="l">
-              <a:lnSpc>
-                <a:spcPct val="125000"/>
-              </a:lnSpc>
-              <a:spcAft>
-                <a:spcPts val="200"/>
-              </a:spcAft>
-            </a:pPr>
-            <a:r>
-              <a:rPr sz="1600" b="0">
-                <a:solidFill>
-                  <a:srgbClr val="21295C"/>
-                </a:solidFill>
-                <a:latin typeface="Calibri"/>
-              </a:rPr>
-              <a:t>zuivere oorzaak-gevolg-conclusie te trekken.</a:t>
-            </a:r>
-          </a:p>
-        </p:txBody>
-      </p:sp>
-    </p:spTree>
-  </p:cSld>
-  <p:clrMapOvr>
-    <a:masterClrMapping/>
-  </p:clrMapOvr>
-</p:sld>
-</file>
-
-<file path=ppt/slides/slide4.xml><?xml version="1.0" encoding="utf-8"?>
-<p:sld xmlns:a="http://schemas.openxmlformats.org/drawingml/2006/main" xmlns:p="http://schemas.openxmlformats.org/presentationml/2006/main" xmlns:r="http://schemas.openxmlformats.org/officeDocument/2006/relationships">
-  <p:cSld>
-    <p:spTree>
-      <p:nvGrpSpPr>
-        <p:cNvPr id="1" name=""/>
-        <p:cNvGrpSpPr/>
-        <p:nvPr/>
-      </p:nvGrpSpPr>
-      <p:grpSpPr/>
-      <p:sp>
-        <p:nvSpPr>
-          <p:cNvPr id="2" name="Rectangle 1"/>
-          <p:cNvSpPr/>
-          <p:nvPr/>
-        </p:nvSpPr>
-        <p:spPr>
-          <a:xfrm>
-            <a:off x="0" y="0"/>
-            <a:ext cx="12191695" cy="6858000"/>
-          </a:xfrm>
-          <a:prstGeom prst="rect">
-            <a:avLst/>
-          </a:prstGeom>
-          <a:solidFill>
-            <a:srgbClr val="FFFFFF"/>
-          </a:solidFill>
-          <a:ln>
-            <a:noFill/>
-          </a:ln>
-          <a:effectLst/>
-        </p:spPr>
-        <p:style>
-          <a:lnRef idx="1">
-            <a:schemeClr val="accent1"/>
-          </a:lnRef>
-          <a:fillRef idx="3">
-            <a:schemeClr val="accent1"/>
-          </a:fillRef>
-          <a:effectRef idx="2">
-            <a:schemeClr val="accent1"/>
-          </a:effectRef>
-          <a:fontRef idx="minor">
-            <a:schemeClr val="lt1"/>
-          </a:fontRef>
-        </p:style>
-        <p:txBody>
-          <a:bodyPr rtlCol="0" anchor="ctr"/>
-          <a:lstStyle/>
-          <a:p>
-            <a:pPr algn="ctr"/>
-          </a:p>
-        </p:txBody>
-      </p:sp>
-      <p:sp>
-        <p:nvSpPr>
-          <p:cNvPr id="3" name="Rectangle 2"/>
-          <p:cNvSpPr/>
-          <p:nvPr/>
-        </p:nvSpPr>
-        <p:spPr>
-          <a:xfrm>
-            <a:off x="0" y="0"/>
-            <a:ext cx="3931920" cy="6858000"/>
-          </a:xfrm>
-          <a:prstGeom prst="rect">
-            <a:avLst/>
-          </a:prstGeom>
-          <a:solidFill>
-            <a:srgbClr val="1E2761"/>
-          </a:solidFill>
-          <a:ln>
-            <a:noFill/>
-          </a:ln>
-          <a:effectLst/>
-        </p:spPr>
-        <p:style>
-          <a:lnRef idx="1">
-            <a:schemeClr val="accent1"/>
-          </a:lnRef>
-          <a:fillRef idx="3">
-            <a:schemeClr val="accent1"/>
-          </a:fillRef>
-          <a:effectRef idx="2">
-            <a:schemeClr val="accent1"/>
-          </a:effectRef>
-          <a:fontRef idx="minor">
-            <a:schemeClr val="lt1"/>
-          </a:fontRef>
-        </p:style>
-        <p:txBody>
-          <a:bodyPr rtlCol="0" anchor="ctr"/>
-          <a:lstStyle/>
-          <a:p>
-            <a:pPr algn="ctr"/>
-          </a:p>
-        </p:txBody>
-      </p:sp>
-      <p:sp>
-        <p:nvSpPr>
-          <p:cNvPr id="4" name="Oval 3"/>
-          <p:cNvSpPr/>
-          <p:nvPr/>
-        </p:nvSpPr>
-        <p:spPr>
-          <a:xfrm>
-            <a:off x="548640" y="640080"/>
-            <a:ext cx="256032" cy="256032"/>
-          </a:xfrm>
-          <a:prstGeom prst="ellipse">
-            <a:avLst/>
-          </a:prstGeom>
-          <a:solidFill>
-            <a:srgbClr val="02C39A"/>
-          </a:solidFill>
-          <a:ln>
-            <a:noFill/>
-          </a:ln>
-          <a:effectLst/>
-        </p:spPr>
-        <p:style>
-          <a:lnRef idx="1">
-            <a:schemeClr val="accent1"/>
-          </a:lnRef>
-          <a:fillRef idx="3">
-            <a:schemeClr val="accent1"/>
-          </a:fillRef>
-          <a:effectRef idx="2">
-            <a:schemeClr val="accent1"/>
-          </a:effectRef>
-          <a:fontRef idx="minor">
-            <a:schemeClr val="lt1"/>
-          </a:fontRef>
-        </p:style>
-        <p:txBody>
-          <a:bodyPr rtlCol="0" anchor="ctr"/>
-          <a:lstStyle/>
-          <a:p>
-            <a:pPr algn="ctr"/>
-          </a:p>
-        </p:txBody>
-      </p:sp>
-      <p:sp>
-        <p:nvSpPr>
-          <p:cNvPr id="5" name="TextBox 4"/>
-          <p:cNvSpPr txBox="1"/>
-          <p:nvPr/>
-        </p:nvSpPr>
-        <p:spPr>
-          <a:xfrm>
-            <a:off x="548640" y="1051560"/>
-            <a:ext cx="3017520" cy="548640"/>
-          </a:xfrm>
-          <a:prstGeom prst="rect">
-            <a:avLst/>
-          </a:prstGeom>
-          <a:noFill/>
-        </p:spPr>
-        <p:txBody>
-          <a:bodyPr wrap="square" anchor="t" lIns="0" rIns="0" tIns="0" bIns="0">
-            <a:spAutoFit/>
-          </a:bodyPr>
-          <a:lstStyle/>
-          <a:p>
-            <a:pPr algn="l">
-              <a:lnSpc>
-                <a:spcPct val="110000"/>
-              </a:lnSpc>
-              <a:spcAft>
-                <a:spcPts val="200"/>
-              </a:spcAft>
-            </a:pPr>
-            <a:r>
-              <a:rPr sz="2000" b="1">
-                <a:solidFill>
-                  <a:srgbClr val="02C39A"/>
-                </a:solidFill>
-                <a:latin typeface="Calibri"/>
-              </a:rPr>
-              <a:t>Onderzoeksvraag 2</a:t>
-            </a:r>
-          </a:p>
-        </p:txBody>
-      </p:sp>
-      <p:sp>
-        <p:nvSpPr>
-          <p:cNvPr id="6" name="TextBox 5"/>
-          <p:cNvSpPr txBox="1"/>
-          <p:nvPr/>
-        </p:nvSpPr>
-        <p:spPr>
-          <a:xfrm>
-            <a:off x="548640" y="1920240"/>
-            <a:ext cx="3108960" cy="4389120"/>
-          </a:xfrm>
-          <a:prstGeom prst="rect">
-            <a:avLst/>
-          </a:prstGeom>
-          <a:noFill/>
-        </p:spPr>
-        <p:txBody>
-          <a:bodyPr wrap="square" anchor="t" lIns="0" rIns="0" tIns="0" bIns="0">
-            <a:spAutoFit/>
-          </a:bodyPr>
-          <a:lstStyle/>
-          <a:p>
-            <a:pPr algn="l">
-              <a:lnSpc>
-                <a:spcPct val="140000"/>
-              </a:lnSpc>
-              <a:spcAft>
-                <a:spcPts val="200"/>
-              </a:spcAft>
-            </a:pPr>
-            <a:r>
-              <a:rPr sz="1500" b="1">
-                <a:solidFill>
-                  <a:srgbClr val="CADCFC"/>
-                </a:solidFill>
-                <a:latin typeface="Calibri"/>
-              </a:rPr>
-              <a:t>Stappen vooraf</a:t>
-            </a:r>
-          </a:p>
-          <a:p>
-            <a:pPr algn="l">
-              <a:lnSpc>
-                <a:spcPct val="140000"/>
-              </a:lnSpc>
-              <a:spcAft>
-                <a:spcPts val="200"/>
-              </a:spcAft>
-            </a:pPr>
-            <a:r>
-              <a:rPr sz="1400" b="0">
-                <a:solidFill>
-                  <a:srgbClr val="FFFFFF"/>
-                </a:solidFill>
-                <a:latin typeface="Calibri"/>
-              </a:rPr>
-              <a:t>1.  Data geselecteerd</a:t>
-            </a:r>
-          </a:p>
-          <a:p>
-            <a:pPr algn="l">
-              <a:lnSpc>
-                <a:spcPct val="140000"/>
-              </a:lnSpc>
-              <a:spcAft>
-                <a:spcPts val="200"/>
-              </a:spcAft>
-            </a:pPr>
-            <a:r>
-              <a:rPr sz="1400" b="0">
-                <a:solidFill>
-                  <a:srgbClr val="FFFFFF"/>
-                </a:solidFill>
-                <a:latin typeface="Calibri"/>
-              </a:rPr>
-              <a:t>2.  Heatmap bekeken</a:t>
-            </a:r>
-          </a:p>
-          <a:p>
-            <a:pPr algn="l">
-              <a:lnSpc>
-                <a:spcPct val="140000"/>
-              </a:lnSpc>
-              <a:spcAft>
-                <a:spcPts val="200"/>
-              </a:spcAft>
-            </a:pPr>
-            <a:r>
-              <a:rPr sz="1400" b="0">
-                <a:solidFill>
-                  <a:srgbClr val="FFFFFF"/>
-                </a:solidFill>
-                <a:latin typeface="Calibri"/>
-              </a:rPr>
-              <a:t>3.  Bubble chart (Broadcom x Coffee)</a:t>
-            </a:r>
-          </a:p>
-          <a:p>
-            <a:pPr algn="l">
-              <a:lnSpc>
-                <a:spcPct val="140000"/>
-              </a:lnSpc>
-              <a:spcAft>
-                <a:spcPts val="200"/>
-              </a:spcAft>
-            </a:pPr>
-            <a:r>
-              <a:rPr sz="1400" b="0">
-                <a:solidFill>
-                  <a:srgbClr val="FFFFFF"/>
-                </a:solidFill>
-                <a:latin typeface="Calibri"/>
-              </a:rPr>
-              <a:t>4.  Enkelvoudige regressie</a:t>
-            </a:r>
-          </a:p>
-        </p:txBody>
-      </p:sp>
-      <p:sp>
-        <p:nvSpPr>
-          <p:cNvPr id="7" name="TextBox 6"/>
-          <p:cNvSpPr txBox="1"/>
-          <p:nvPr/>
-        </p:nvSpPr>
-        <p:spPr>
-          <a:xfrm>
-            <a:off x="4480560" y="914400"/>
-            <a:ext cx="7132320" cy="1280160"/>
-          </a:xfrm>
-          <a:prstGeom prst="rect">
-            <a:avLst/>
-          </a:prstGeom>
-          <a:noFill/>
-        </p:spPr>
-        <p:txBody>
-          <a:bodyPr wrap="square" anchor="t" lIns="0" rIns="0" tIns="0" bIns="0">
-            <a:spAutoFit/>
-          </a:bodyPr>
-          <a:lstStyle/>
-          <a:p>
-            <a:pPr algn="l">
-              <a:lnSpc>
-                <a:spcPct val="115000"/>
-              </a:lnSpc>
-              <a:spcAft>
-                <a:spcPts val="200"/>
-              </a:spcAft>
-            </a:pPr>
-            <a:r>
-              <a:rPr sz="1300" b="1">
-                <a:solidFill>
-                  <a:srgbClr val="02C39A"/>
-                </a:solidFill>
-                <a:latin typeface="Calibri"/>
-              </a:rPr>
-              <a:t>VRAAG</a:t>
-            </a:r>
-          </a:p>
-          <a:p>
-            <a:pPr algn="l">
-              <a:lnSpc>
-                <a:spcPct val="115000"/>
-              </a:lnSpc>
-              <a:spcAft>
-                <a:spcPts val="200"/>
-              </a:spcAft>
-            </a:pPr>
-            <a:r>
-              <a:rPr sz="1900" b="0">
-                <a:solidFill>
-                  <a:srgbClr val="21295C"/>
-                </a:solidFill>
-                <a:latin typeface="Calibri"/>
-              </a:rPr>
-              <a:t>Wat is het verband van Broadcom op de koffieprijs?</a:t>
-            </a:r>
-          </a:p>
-        </p:txBody>
-      </p:sp>
-      <p:sp>
-        <p:nvSpPr>
-          <p:cNvPr id="8" name="TextBox 7"/>
-          <p:cNvSpPr txBox="1"/>
-          <p:nvPr/>
-        </p:nvSpPr>
-        <p:spPr>
-          <a:xfrm>
-            <a:off x="4480560" y="2651760"/>
-            <a:ext cx="7132320" cy="1005840"/>
-          </a:xfrm>
-          <a:prstGeom prst="rect">
-            <a:avLst/>
-          </a:prstGeom>
-          <a:noFill/>
-        </p:spPr>
-        <p:txBody>
-          <a:bodyPr wrap="square" anchor="t" lIns="0" rIns="0" tIns="0" bIns="0">
-            <a:spAutoFit/>
-          </a:bodyPr>
-          <a:lstStyle/>
-          <a:p>
-            <a:pPr algn="l">
-              <a:lnSpc>
-                <a:spcPct val="115000"/>
-              </a:lnSpc>
-              <a:spcAft>
-                <a:spcPts val="200"/>
-              </a:spcAft>
-            </a:pPr>
-            <a:r>
-              <a:rPr sz="1300" b="1">
-                <a:solidFill>
-                  <a:srgbClr val="02C39A"/>
-                </a:solidFill>
-                <a:latin typeface="Calibri"/>
-              </a:rPr>
-              <a:t>RESULTAAT REGRESSIE</a:t>
-            </a:r>
-          </a:p>
-          <a:p>
-            <a:pPr algn="l">
-              <a:lnSpc>
-                <a:spcPct val="115000"/>
-              </a:lnSpc>
-              <a:spcAft>
-                <a:spcPts val="200"/>
-              </a:spcAft>
-            </a:pPr>
-            <a:r>
-              <a:rPr sz="1600" b="0">
-                <a:solidFill>
-                  <a:srgbClr val="21295C"/>
-                </a:solidFill>
-                <a:latin typeface="Calibri"/>
-              </a:rPr>
-              <a:t>Broadcom +0,5205   ·   R² = 0,94   (p &lt; 0,05)</a:t>
-            </a:r>
-          </a:p>
-        </p:txBody>
-      </p:sp>
-      <p:sp>
-        <p:nvSpPr>
-          <p:cNvPr id="9" name="TextBox 8"/>
-          <p:cNvSpPr txBox="1"/>
-          <p:nvPr/>
-        </p:nvSpPr>
-        <p:spPr>
-          <a:xfrm>
-            <a:off x="4480560" y="3931920"/>
-            <a:ext cx="7132320" cy="2377440"/>
-          </a:xfrm>
-          <a:prstGeom prst="rect">
-            <a:avLst/>
-          </a:prstGeom>
-          <a:noFill/>
-        </p:spPr>
-        <p:txBody>
-          <a:bodyPr wrap="square" anchor="t" lIns="0" rIns="0" tIns="0" bIns="0">
-            <a:spAutoFit/>
-          </a:bodyPr>
-          <a:lstStyle/>
-          <a:p>
-            <a:pPr algn="l">
-              <a:lnSpc>
-                <a:spcPct val="125000"/>
-              </a:lnSpc>
-              <a:spcAft>
-                <a:spcPts val="200"/>
-              </a:spcAft>
-            </a:pPr>
-            <a:r>
-              <a:rPr sz="1300" b="1">
-                <a:solidFill>
-                  <a:srgbClr val="02C39A"/>
-                </a:solidFill>
-                <a:latin typeface="Calibri"/>
-              </a:rPr>
-              <a:t>CONCLUSIE</a:t>
-            </a:r>
-          </a:p>
-          <a:p>
-            <a:pPr algn="l">
-              <a:lnSpc>
-                <a:spcPct val="125000"/>
-              </a:lnSpc>
-              <a:spcAft>
-                <a:spcPts val="200"/>
-              </a:spcAft>
-            </a:pPr>
-            <a:r>
-              <a:rPr sz="1600" b="0">
-                <a:solidFill>
-                  <a:srgbClr val="21295C"/>
-                </a:solidFill>
-                <a:latin typeface="Calibri"/>
-              </a:rPr>
-              <a:t>Statistisch sterk verband, maar inhoudelijk niet logisch.</a:t>
-            </a:r>
-          </a:p>
-          <a:p>
-            <a:pPr algn="l">
-              <a:lnSpc>
-                <a:spcPct val="125000"/>
-              </a:lnSpc>
-              <a:spcAft>
-                <a:spcPts val="200"/>
-              </a:spcAft>
-            </a:pPr>
-            <a:r>
-              <a:rPr sz="1600" b="0">
-                <a:solidFill>
-                  <a:srgbClr val="21295C"/>
-                </a:solidFill>
-                <a:latin typeface="Calibri"/>
-              </a:rPr>
-              <a:t>Waarschijnlijk schijncorrelatie: beide stijgen over de tijd.</a:t>
-            </a:r>
-          </a:p>
-          <a:p>
-            <a:pPr algn="l">
-              <a:lnSpc>
-                <a:spcPct val="125000"/>
-              </a:lnSpc>
-              <a:spcAft>
-                <a:spcPts val="200"/>
-              </a:spcAft>
-            </a:pPr>
-            <a:r>
-              <a:rPr sz="1600" b="0">
-                <a:solidFill>
-                  <a:srgbClr val="21295C"/>
-                </a:solidFill>
-                <a:latin typeface="Calibri"/>
-              </a:rPr>
-              <a:t>Geen betekenisvolle conclusie.</a:t>
-            </a:r>
-          </a:p>
-        </p:txBody>
-      </p:sp>
-    </p:spTree>
-  </p:cSld>
-  <p:clrMapOvr>
-    <a:masterClrMapping/>
-  </p:clrMapOvr>
-</p:sld>
-</file>
-
-<file path=ppt/slides/slide5.xml><?xml version="1.0" encoding="utf-8"?>
-<p:sld xmlns:a="http://schemas.openxmlformats.org/drawingml/2006/main" xmlns:p="http://schemas.openxmlformats.org/presentationml/2006/main" xmlns:r="http://schemas.openxmlformats.org/officeDocument/2006/relationships">
-  <p:cSld>
-    <p:spTree>
-      <p:nvGrpSpPr>
-        <p:cNvPr id="1" name=""/>
-        <p:cNvGrpSpPr/>
-        <p:nvPr/>
-      </p:nvGrpSpPr>
-      <p:grpSpPr/>
-      <p:sp>
-        <p:nvSpPr>
-          <p:cNvPr id="2" name="Rectangle 1"/>
-          <p:cNvSpPr/>
-          <p:nvPr/>
-        </p:nvSpPr>
-        <p:spPr>
-          <a:xfrm>
-            <a:off x="0" y="0"/>
-            <a:ext cx="12191695" cy="6858000"/>
-          </a:xfrm>
-          <a:prstGeom prst="rect">
-            <a:avLst/>
-          </a:prstGeom>
-          <a:solidFill>
-            <a:srgbClr val="FFFFFF"/>
-          </a:solidFill>
-          <a:ln>
-            <a:noFill/>
-          </a:ln>
-          <a:effectLst/>
-        </p:spPr>
-        <p:style>
-          <a:lnRef idx="1">
-            <a:schemeClr val="accent1"/>
-          </a:lnRef>
-          <a:fillRef idx="3">
-            <a:schemeClr val="accent1"/>
-          </a:fillRef>
-          <a:effectRef idx="2">
-            <a:schemeClr val="accent1"/>
-          </a:effectRef>
-          <a:fontRef idx="minor">
-            <a:schemeClr val="lt1"/>
-          </a:fontRef>
-        </p:style>
-        <p:txBody>
-          <a:bodyPr rtlCol="0" anchor="ctr"/>
-          <a:lstStyle/>
-          <a:p>
-            <a:pPr algn="ctr"/>
-          </a:p>
-        </p:txBody>
-      </p:sp>
-      <p:sp>
-        <p:nvSpPr>
-          <p:cNvPr id="3" name="Rectangle 2"/>
-          <p:cNvSpPr/>
-          <p:nvPr/>
-        </p:nvSpPr>
-        <p:spPr>
-          <a:xfrm>
-            <a:off x="0" y="0"/>
-            <a:ext cx="3931920" cy="6858000"/>
-          </a:xfrm>
-          <a:prstGeom prst="rect">
-            <a:avLst/>
-          </a:prstGeom>
-          <a:solidFill>
-            <a:srgbClr val="1E2761"/>
-          </a:solidFill>
-          <a:ln>
-            <a:noFill/>
-          </a:ln>
-          <a:effectLst/>
-        </p:spPr>
-        <p:style>
-          <a:lnRef idx="1">
-            <a:schemeClr val="accent1"/>
-          </a:lnRef>
-          <a:fillRef idx="3">
-            <a:schemeClr val="accent1"/>
-          </a:fillRef>
-          <a:effectRef idx="2">
-            <a:schemeClr val="accent1"/>
-          </a:effectRef>
-          <a:fontRef idx="minor">
-            <a:schemeClr val="lt1"/>
-          </a:fontRef>
-        </p:style>
-        <p:txBody>
-          <a:bodyPr rtlCol="0" anchor="ctr"/>
-          <a:lstStyle/>
-          <a:p>
-            <a:pPr algn="ctr"/>
-          </a:p>
-        </p:txBody>
-      </p:sp>
-      <p:sp>
-        <p:nvSpPr>
-          <p:cNvPr id="4" name="Oval 3"/>
-          <p:cNvSpPr/>
-          <p:nvPr/>
-        </p:nvSpPr>
-        <p:spPr>
-          <a:xfrm>
-            <a:off x="548640" y="640080"/>
-            <a:ext cx="256032" cy="256032"/>
-          </a:xfrm>
-          <a:prstGeom prst="ellipse">
-            <a:avLst/>
-          </a:prstGeom>
-          <a:solidFill>
-            <a:srgbClr val="02C39A"/>
-          </a:solidFill>
-          <a:ln>
-            <a:noFill/>
-          </a:ln>
-          <a:effectLst/>
-        </p:spPr>
-        <p:style>
-          <a:lnRef idx="1">
-            <a:schemeClr val="accent1"/>
-          </a:lnRef>
-          <a:fillRef idx="3">
-            <a:schemeClr val="accent1"/>
-          </a:fillRef>
-          <a:effectRef idx="2">
-            <a:schemeClr val="accent1"/>
-          </a:effectRef>
-          <a:fontRef idx="minor">
-            <a:schemeClr val="lt1"/>
-          </a:fontRef>
-        </p:style>
-        <p:txBody>
-          <a:bodyPr rtlCol="0" anchor="ctr"/>
-          <a:lstStyle/>
-          <a:p>
-            <a:pPr algn="ctr"/>
-          </a:p>
-        </p:txBody>
-      </p:sp>
-      <p:sp>
-        <p:nvSpPr>
-          <p:cNvPr id="5" name="TextBox 4"/>
-          <p:cNvSpPr txBox="1"/>
-          <p:nvPr/>
-        </p:nvSpPr>
-        <p:spPr>
-          <a:xfrm>
-            <a:off x="548640" y="1051560"/>
-            <a:ext cx="3017520" cy="548640"/>
-          </a:xfrm>
-          <a:prstGeom prst="rect">
-            <a:avLst/>
-          </a:prstGeom>
-          <a:noFill/>
-        </p:spPr>
-        <p:txBody>
-          <a:bodyPr wrap="square" anchor="t" lIns="0" rIns="0" tIns="0" bIns="0">
-            <a:spAutoFit/>
-          </a:bodyPr>
-          <a:lstStyle/>
-          <a:p>
-            <a:pPr algn="l">
-              <a:lnSpc>
-                <a:spcPct val="110000"/>
-              </a:lnSpc>
-              <a:spcAft>
-                <a:spcPts val="200"/>
-              </a:spcAft>
-            </a:pPr>
-            <a:r>
-              <a:rPr sz="2000" b="1">
-                <a:solidFill>
-                  <a:srgbClr val="02C39A"/>
-                </a:solidFill>
-                <a:latin typeface="Calibri"/>
-              </a:rPr>
-              <a:t>Onderzoeksvraag 3</a:t>
-            </a:r>
-          </a:p>
-        </p:txBody>
-      </p:sp>
-      <p:sp>
-        <p:nvSpPr>
-          <p:cNvPr id="6" name="TextBox 5"/>
-          <p:cNvSpPr txBox="1"/>
-          <p:nvPr/>
-        </p:nvSpPr>
-        <p:spPr>
-          <a:xfrm>
-            <a:off x="548640" y="1920240"/>
-            <a:ext cx="3108960" cy="4389120"/>
-          </a:xfrm>
-          <a:prstGeom prst="rect">
-            <a:avLst/>
-          </a:prstGeom>
-          <a:noFill/>
-        </p:spPr>
-        <p:txBody>
-          <a:bodyPr wrap="square" anchor="t" lIns="0" rIns="0" tIns="0" bIns="0">
-            <a:spAutoFit/>
-          </a:bodyPr>
-          <a:lstStyle/>
-          <a:p>
-            <a:pPr algn="l">
-              <a:lnSpc>
-                <a:spcPct val="140000"/>
-              </a:lnSpc>
-              <a:spcAft>
-                <a:spcPts val="200"/>
-              </a:spcAft>
-            </a:pPr>
-            <a:r>
-              <a:rPr sz="1500" b="1">
-                <a:solidFill>
-                  <a:srgbClr val="CADCFC"/>
-                </a:solidFill>
-                <a:latin typeface="Calibri"/>
-              </a:rPr>
-              <a:t>Stappen vooraf</a:t>
-            </a:r>
-          </a:p>
-          <a:p>
-            <a:pPr algn="l">
-              <a:lnSpc>
-                <a:spcPct val="140000"/>
-              </a:lnSpc>
-              <a:spcAft>
-                <a:spcPts val="200"/>
-              </a:spcAft>
-            </a:pPr>
-            <a:r>
-              <a:rPr sz="1400" b="0">
-                <a:solidFill>
-                  <a:srgbClr val="FFFFFF"/>
-                </a:solidFill>
-                <a:latin typeface="Calibri"/>
-              </a:rPr>
-              <a:t>1.  Data geselecteerd</a:t>
-            </a:r>
-          </a:p>
-          <a:p>
-            <a:pPr algn="l">
-              <a:lnSpc>
-                <a:spcPct val="140000"/>
-              </a:lnSpc>
-              <a:spcAft>
-                <a:spcPts val="200"/>
-              </a:spcAft>
-            </a:pPr>
-            <a:r>
-              <a:rPr sz="1400" b="0">
-                <a:solidFill>
-                  <a:srgbClr val="FFFFFF"/>
-                </a:solidFill>
-                <a:latin typeface="Calibri"/>
-              </a:rPr>
-              <a:t>2.  Heatmap bekeken</a:t>
-            </a:r>
-          </a:p>
-          <a:p>
-            <a:pPr algn="l">
-              <a:lnSpc>
-                <a:spcPct val="140000"/>
-              </a:lnSpc>
-              <a:spcAft>
-                <a:spcPts val="200"/>
-              </a:spcAft>
-            </a:pPr>
-            <a:r>
-              <a:rPr sz="1400" b="0">
-                <a:solidFill>
-                  <a:srgbClr val="FFFFFF"/>
-                </a:solidFill>
-                <a:latin typeface="Calibri"/>
-              </a:rPr>
-              <a:t>3.  Bubble chart (Copper x ASML)</a:t>
-            </a:r>
-          </a:p>
-          <a:p>
-            <a:pPr algn="l">
-              <a:lnSpc>
-                <a:spcPct val="140000"/>
-              </a:lnSpc>
-              <a:spcAft>
-                <a:spcPts val="200"/>
-              </a:spcAft>
-            </a:pPr>
-            <a:r>
-              <a:rPr sz="1400" b="0">
-                <a:solidFill>
-                  <a:srgbClr val="FFFFFF"/>
-                </a:solidFill>
-                <a:latin typeface="Calibri"/>
-              </a:rPr>
-              <a:t>4.  Enkelvoudige regressie</a:t>
-            </a:r>
-          </a:p>
-        </p:txBody>
-      </p:sp>
-      <p:sp>
-        <p:nvSpPr>
-          <p:cNvPr id="7" name="TextBox 6"/>
-          <p:cNvSpPr txBox="1"/>
-          <p:nvPr/>
-        </p:nvSpPr>
-        <p:spPr>
-          <a:xfrm>
-            <a:off x="4480560" y="914400"/>
-            <a:ext cx="7132320" cy="1280160"/>
-          </a:xfrm>
-          <a:prstGeom prst="rect">
-            <a:avLst/>
-          </a:prstGeom>
-          <a:noFill/>
-        </p:spPr>
-        <p:txBody>
-          <a:bodyPr wrap="square" anchor="t" lIns="0" rIns="0" tIns="0" bIns="0">
-            <a:spAutoFit/>
-          </a:bodyPr>
-          <a:lstStyle/>
-          <a:p>
-            <a:pPr algn="l">
-              <a:lnSpc>
-                <a:spcPct val="115000"/>
-              </a:lnSpc>
-              <a:spcAft>
-                <a:spcPts val="200"/>
-              </a:spcAft>
-            </a:pPr>
-            <a:r>
-              <a:rPr sz="1300" b="1">
-                <a:solidFill>
-                  <a:srgbClr val="02C39A"/>
-                </a:solidFill>
-                <a:latin typeface="Calibri"/>
-              </a:rPr>
-              <a:t>VRAAG</a:t>
-            </a:r>
-          </a:p>
-          <a:p>
-            <a:pPr algn="l">
-              <a:lnSpc>
-                <a:spcPct val="115000"/>
-              </a:lnSpc>
-              <a:spcAft>
-                <a:spcPts val="200"/>
-              </a:spcAft>
-            </a:pPr>
-            <a:r>
-              <a:rPr sz="1900" b="0">
-                <a:solidFill>
-                  <a:srgbClr val="21295C"/>
-                </a:solidFill>
-                <a:latin typeface="Calibri"/>
-              </a:rPr>
-              <a:t>Hoeveel invloed heeft de koperprijs op de koers van ASML?</a:t>
-            </a:r>
-          </a:p>
-        </p:txBody>
-      </p:sp>
-      <p:sp>
-        <p:nvSpPr>
-          <p:cNvPr id="8" name="TextBox 7"/>
-          <p:cNvSpPr txBox="1"/>
-          <p:nvPr/>
-        </p:nvSpPr>
-        <p:spPr>
-          <a:xfrm>
-            <a:off x="4480560" y="2651760"/>
-            <a:ext cx="7132320" cy="1005840"/>
-          </a:xfrm>
-          <a:prstGeom prst="rect">
-            <a:avLst/>
-          </a:prstGeom>
-          <a:noFill/>
-        </p:spPr>
-        <p:txBody>
-          <a:bodyPr wrap="square" anchor="t" lIns="0" rIns="0" tIns="0" bIns="0">
-            <a:spAutoFit/>
-          </a:bodyPr>
-          <a:lstStyle/>
-          <a:p>
-            <a:pPr algn="l">
-              <a:lnSpc>
-                <a:spcPct val="115000"/>
-              </a:lnSpc>
-              <a:spcAft>
-                <a:spcPts val="200"/>
-              </a:spcAft>
-            </a:pPr>
-            <a:r>
-              <a:rPr sz="1300" b="1">
-                <a:solidFill>
-                  <a:srgbClr val="02C39A"/>
-                </a:solidFill>
-                <a:latin typeface="Calibri"/>
-              </a:rPr>
-              <a:t>RESULTAAT REGRESSIE</a:t>
-            </a:r>
-          </a:p>
-          <a:p>
-            <a:pPr algn="l">
-              <a:lnSpc>
-                <a:spcPct val="115000"/>
-              </a:lnSpc>
-              <a:spcAft>
-                <a:spcPts val="200"/>
-              </a:spcAft>
-            </a:pPr>
-            <a:r>
-              <a:rPr sz="1600" b="0">
-                <a:solidFill>
-                  <a:srgbClr val="21295C"/>
-                </a:solidFill>
-                <a:latin typeface="Calibri"/>
-              </a:rPr>
-              <a:t>Copper +0,1560   ·   R² = 0,87   (p &lt; 0,05)</a:t>
-            </a:r>
-          </a:p>
-        </p:txBody>
-      </p:sp>
-      <p:sp>
-        <p:nvSpPr>
-          <p:cNvPr id="9" name="TextBox 8"/>
-          <p:cNvSpPr txBox="1"/>
-          <p:nvPr/>
-        </p:nvSpPr>
-        <p:spPr>
-          <a:xfrm>
-            <a:off x="4480560" y="3931920"/>
-            <a:ext cx="7132320" cy="2377440"/>
-          </a:xfrm>
-          <a:prstGeom prst="rect">
-            <a:avLst/>
-          </a:prstGeom>
-          <a:noFill/>
-        </p:spPr>
-        <p:txBody>
-          <a:bodyPr wrap="square" anchor="t" lIns="0" rIns="0" tIns="0" bIns="0">
-            <a:spAutoFit/>
-          </a:bodyPr>
-          <a:lstStyle/>
-          <a:p>
-            <a:pPr algn="l">
-              <a:lnSpc>
-                <a:spcPct val="125000"/>
-              </a:lnSpc>
-              <a:spcAft>
-                <a:spcPts val="200"/>
-              </a:spcAft>
-            </a:pPr>
-            <a:r>
-              <a:rPr sz="1300" b="1">
-                <a:solidFill>
-                  <a:srgbClr val="02C39A"/>
-                </a:solidFill>
-                <a:latin typeface="Calibri"/>
-              </a:rPr>
-              <a:t>CONCLUSIE</a:t>
-            </a:r>
-          </a:p>
-          <a:p>
-            <a:pPr algn="l">
-              <a:lnSpc>
-                <a:spcPct val="125000"/>
-              </a:lnSpc>
-              <a:spcAft>
-                <a:spcPts val="200"/>
-              </a:spcAft>
-            </a:pPr>
-            <a:r>
-              <a:rPr sz="1600" b="0">
-                <a:solidFill>
-                  <a:srgbClr val="21295C"/>
-                </a:solidFill>
-                <a:latin typeface="Calibri"/>
-              </a:rPr>
-              <a:t>Significant en sterke correlatie.</a:t>
-            </a:r>
-          </a:p>
-          <a:p>
-            <a:pPr algn="l">
-              <a:lnSpc>
-                <a:spcPct val="125000"/>
-              </a:lnSpc>
-              <a:spcAft>
-                <a:spcPts val="200"/>
-              </a:spcAft>
-            </a:pPr>
-            <a:r>
-              <a:rPr sz="1600" b="0">
-                <a:solidFill>
-                  <a:srgbClr val="21295C"/>
-                </a:solidFill>
-                <a:latin typeface="Calibri"/>
-              </a:rPr>
-              <a:t>Logisch: meer vraag naar chips -&gt; ASML stijgt,</a:t>
-            </a:r>
-          </a:p>
-          <a:p>
-            <a:pPr algn="l">
-              <a:lnSpc>
-                <a:spcPct val="125000"/>
-              </a:lnSpc>
-              <a:spcAft>
-                <a:spcPts val="200"/>
-              </a:spcAft>
-            </a:pPr>
-            <a:r>
-              <a:rPr sz="1600" b="0">
-                <a:solidFill>
-                  <a:srgbClr val="21295C"/>
-                </a:solidFill>
-                <a:latin typeface="Calibri"/>
-              </a:rPr>
-              <a:t>en chips gebruiken veel koper -&gt; koperprijs stijgt mee.</a:t>
-            </a:r>
-          </a:p>
-        </p:txBody>
-      </p:sp>
-    </p:spTree>
-  </p:cSld>
-  <p:clrMapOvr>
-    <a:masterClrMapping/>
-  </p:clrMapOvr>
-</p:sld>
-</file>
-
-<file path=ppt/slides/slide6.xml><?xml version="1.0" encoding="utf-8"?>
-<p:sld xmlns:a="http://schemas.openxmlformats.org/drawingml/2006/main" xmlns:p="http://schemas.openxmlformats.org/presentationml/2006/main" xmlns:r="http://schemas.openxmlformats.org/officeDocument/2006/relationships">
-  <p:cSld>
-    <p:spTree>
-      <p:nvGrpSpPr>
-        <p:cNvPr id="1" name=""/>
-        <p:cNvGrpSpPr/>
-        <p:nvPr/>
-      </p:nvGrpSpPr>
-      <p:grpSpPr/>
-      <p:sp>
-        <p:nvSpPr>
-          <p:cNvPr id="2" name="Rectangle 1"/>
-          <p:cNvSpPr/>
-          <p:nvPr/>
-        </p:nvSpPr>
-        <p:spPr>
-          <a:xfrm>
-            <a:off x="0" y="0"/>
-            <a:ext cx="12191695" cy="6858000"/>
-          </a:xfrm>
-          <a:prstGeom prst="rect">
-            <a:avLst/>
-          </a:prstGeom>
-          <a:solidFill>
-            <a:srgbClr val="FFFFFF"/>
-          </a:solidFill>
-          <a:ln>
-            <a:noFill/>
-          </a:ln>
-          <a:effectLst/>
-        </p:spPr>
-        <p:style>
-          <a:lnRef idx="1">
-            <a:schemeClr val="accent1"/>
-          </a:lnRef>
-          <a:fillRef idx="3">
-            <a:schemeClr val="accent1"/>
-          </a:fillRef>
-          <a:effectRef idx="2">
-            <a:schemeClr val="accent1"/>
-          </a:effectRef>
-          <a:fontRef idx="minor">
-            <a:schemeClr val="lt1"/>
-          </a:fontRef>
-        </p:style>
-        <p:txBody>
-          <a:bodyPr rtlCol="0" anchor="ctr"/>
-          <a:lstStyle/>
-          <a:p>
-            <a:pPr algn="ctr"/>
-          </a:p>
-        </p:txBody>
-      </p:sp>
-      <p:sp>
-        <p:nvSpPr>
-          <p:cNvPr id="3" name="Rectangle 2"/>
-          <p:cNvSpPr/>
-          <p:nvPr/>
-        </p:nvSpPr>
-        <p:spPr>
-          <a:xfrm>
-            <a:off x="0" y="0"/>
-            <a:ext cx="3931920" cy="6858000"/>
-          </a:xfrm>
-          <a:prstGeom prst="rect">
-            <a:avLst/>
-          </a:prstGeom>
-          <a:solidFill>
-            <a:srgbClr val="1E2761"/>
-          </a:solidFill>
-          <a:ln>
-            <a:noFill/>
-          </a:ln>
-          <a:effectLst/>
-        </p:spPr>
-        <p:style>
-          <a:lnRef idx="1">
-            <a:schemeClr val="accent1"/>
-          </a:lnRef>
-          <a:fillRef idx="3">
-            <a:schemeClr val="accent1"/>
-          </a:fillRef>
-          <a:effectRef idx="2">
-            <a:schemeClr val="accent1"/>
-          </a:effectRef>
-          <a:fontRef idx="minor">
-            <a:schemeClr val="lt1"/>
-          </a:fontRef>
-        </p:style>
-        <p:txBody>
-          <a:bodyPr rtlCol="0" anchor="ctr"/>
-          <a:lstStyle/>
-          <a:p>
-            <a:pPr algn="ctr"/>
-          </a:p>
-        </p:txBody>
-      </p:sp>
-      <p:sp>
-        <p:nvSpPr>
-          <p:cNvPr id="4" name="Oval 3"/>
-          <p:cNvSpPr/>
-          <p:nvPr/>
-        </p:nvSpPr>
-        <p:spPr>
-          <a:xfrm>
-            <a:off x="548640" y="640080"/>
-            <a:ext cx="256032" cy="256032"/>
-          </a:xfrm>
-          <a:prstGeom prst="ellipse">
-            <a:avLst/>
-          </a:prstGeom>
-          <a:solidFill>
-            <a:srgbClr val="02C39A"/>
-          </a:solidFill>
-          <a:ln>
-            <a:noFill/>
-          </a:ln>
-          <a:effectLst/>
-        </p:spPr>
-        <p:style>
-          <a:lnRef idx="1">
-            <a:schemeClr val="accent1"/>
-          </a:lnRef>
-          <a:fillRef idx="3">
-            <a:schemeClr val="accent1"/>
-          </a:fillRef>
-          <a:effectRef idx="2">
-            <a:schemeClr val="accent1"/>
-          </a:effectRef>
-          <a:fontRef idx="minor">
-            <a:schemeClr val="lt1"/>
-          </a:fontRef>
-        </p:style>
-        <p:txBody>
-          <a:bodyPr rtlCol="0" anchor="ctr"/>
-          <a:lstStyle/>
-          <a:p>
-            <a:pPr algn="ctr"/>
-          </a:p>
-        </p:txBody>
-      </p:sp>
-      <p:sp>
-        <p:nvSpPr>
-          <p:cNvPr id="5" name="TextBox 4"/>
-          <p:cNvSpPr txBox="1"/>
-          <p:nvPr/>
-        </p:nvSpPr>
-        <p:spPr>
-          <a:xfrm>
-            <a:off x="548640" y="1051560"/>
-            <a:ext cx="3017520" cy="548640"/>
-          </a:xfrm>
-          <a:prstGeom prst="rect">
-            <a:avLst/>
-          </a:prstGeom>
-          <a:noFill/>
-        </p:spPr>
-        <p:txBody>
-          <a:bodyPr wrap="square" anchor="t" lIns="0" rIns="0" tIns="0" bIns="0">
-            <a:spAutoFit/>
-          </a:bodyPr>
-          <a:lstStyle/>
-          <a:p>
-            <a:pPr algn="l">
-              <a:lnSpc>
-                <a:spcPct val="110000"/>
-              </a:lnSpc>
-              <a:spcAft>
-                <a:spcPts val="200"/>
-              </a:spcAft>
-            </a:pPr>
-            <a:r>
-              <a:rPr sz="2000" b="1">
-                <a:solidFill>
-                  <a:srgbClr val="02C39A"/>
-                </a:solidFill>
-                <a:latin typeface="Calibri"/>
-              </a:rPr>
-              <a:t>Onderzoeksvraag 4</a:t>
-            </a:r>
-          </a:p>
-        </p:txBody>
-      </p:sp>
-      <p:sp>
-        <p:nvSpPr>
-          <p:cNvPr id="6" name="TextBox 5"/>
-          <p:cNvSpPr txBox="1"/>
-          <p:nvPr/>
-        </p:nvSpPr>
-        <p:spPr>
-          <a:xfrm>
-            <a:off x="548640" y="1920240"/>
-            <a:ext cx="3108960" cy="4389120"/>
-          </a:xfrm>
-          <a:prstGeom prst="rect">
-            <a:avLst/>
-          </a:prstGeom>
-          <a:noFill/>
-        </p:spPr>
-        <p:txBody>
-          <a:bodyPr wrap="square" anchor="t" lIns="0" rIns="0" tIns="0" bIns="0">
-            <a:spAutoFit/>
-          </a:bodyPr>
-          <a:lstStyle/>
-          <a:p>
-            <a:pPr algn="l">
-              <a:lnSpc>
-                <a:spcPct val="140000"/>
-              </a:lnSpc>
-              <a:spcAft>
-                <a:spcPts val="200"/>
-              </a:spcAft>
-            </a:pPr>
-            <a:r>
-              <a:rPr sz="1500" b="1">
-                <a:solidFill>
-                  <a:srgbClr val="CADCFC"/>
-                </a:solidFill>
-                <a:latin typeface="Calibri"/>
-              </a:rPr>
-              <a:t>Stappen vooraf</a:t>
-            </a:r>
-          </a:p>
-          <a:p>
-            <a:pPr algn="l">
-              <a:lnSpc>
-                <a:spcPct val="140000"/>
-              </a:lnSpc>
-              <a:spcAft>
-                <a:spcPts val="200"/>
-              </a:spcAft>
-            </a:pPr>
-            <a:r>
-              <a:rPr sz="1400" b="0">
-                <a:solidFill>
-                  <a:srgbClr val="FFFFFF"/>
-                </a:solidFill>
-                <a:latin typeface="Calibri"/>
-              </a:rPr>
-              <a:t>1.  Data geselecteerd</a:t>
-            </a:r>
-          </a:p>
-          <a:p>
-            <a:pPr algn="l">
-              <a:lnSpc>
-                <a:spcPct val="140000"/>
-              </a:lnSpc>
-              <a:spcAft>
-                <a:spcPts val="200"/>
-              </a:spcAft>
-            </a:pPr>
-            <a:r>
-              <a:rPr sz="1400" b="0">
-                <a:solidFill>
-                  <a:srgbClr val="FFFFFF"/>
-                </a:solidFill>
-                <a:latin typeface="Calibri"/>
-              </a:rPr>
-              <a:t>2.  Heatmap bekeken</a:t>
-            </a:r>
-          </a:p>
-          <a:p>
-            <a:pPr algn="l">
-              <a:lnSpc>
-                <a:spcPct val="140000"/>
-              </a:lnSpc>
-              <a:spcAft>
-                <a:spcPts val="200"/>
-              </a:spcAft>
-            </a:pPr>
-            <a:r>
-              <a:rPr sz="1400" b="0">
-                <a:solidFill>
-                  <a:srgbClr val="FFFFFF"/>
-                </a:solidFill>
-                <a:latin typeface="Calibri"/>
-              </a:rPr>
-              <a:t>3.  Bubble chart (Gasoline x Oil x Shell)</a:t>
-            </a:r>
-          </a:p>
-          <a:p>
-            <a:pPr algn="l">
-              <a:lnSpc>
-                <a:spcPct val="140000"/>
-              </a:lnSpc>
-              <a:spcAft>
-                <a:spcPts val="200"/>
-              </a:spcAft>
-            </a:pPr>
-            <a:r>
-              <a:rPr sz="1400" b="0">
-                <a:solidFill>
-                  <a:srgbClr val="FFFFFF"/>
-                </a:solidFill>
-                <a:latin typeface="Calibri"/>
-              </a:rPr>
-              <a:t>4.  Meervoudige regressie</a:t>
-            </a:r>
-          </a:p>
-        </p:txBody>
-      </p:sp>
-      <p:sp>
-        <p:nvSpPr>
-          <p:cNvPr id="7" name="TextBox 6"/>
-          <p:cNvSpPr txBox="1"/>
-          <p:nvPr/>
-        </p:nvSpPr>
-        <p:spPr>
-          <a:xfrm>
-            <a:off x="4480560" y="914400"/>
-            <a:ext cx="7132320" cy="1280160"/>
-          </a:xfrm>
-          <a:prstGeom prst="rect">
-            <a:avLst/>
-          </a:prstGeom>
-          <a:noFill/>
-        </p:spPr>
-        <p:txBody>
-          <a:bodyPr wrap="square" anchor="t" lIns="0" rIns="0" tIns="0" bIns="0">
-            <a:spAutoFit/>
-          </a:bodyPr>
-          <a:lstStyle/>
-          <a:p>
-            <a:pPr algn="l">
-              <a:lnSpc>
-                <a:spcPct val="115000"/>
-              </a:lnSpc>
-              <a:spcAft>
-                <a:spcPts val="200"/>
-              </a:spcAft>
-            </a:pPr>
-            <a:r>
-              <a:rPr sz="1300" b="1">
-                <a:solidFill>
-                  <a:srgbClr val="02C39A"/>
-                </a:solidFill>
-                <a:latin typeface="Calibri"/>
-              </a:rPr>
-              <a:t>VRAAG</a:t>
-            </a:r>
-          </a:p>
-          <a:p>
-            <a:pPr algn="l">
-              <a:lnSpc>
-                <a:spcPct val="115000"/>
-              </a:lnSpc>
-              <a:spcAft>
-                <a:spcPts val="200"/>
-              </a:spcAft>
-            </a:pPr>
-            <a:r>
-              <a:rPr sz="1900" b="0">
-                <a:solidFill>
-                  <a:srgbClr val="21295C"/>
-                </a:solidFill>
-                <a:latin typeface="Calibri"/>
-              </a:rPr>
-              <a:t>Waarom lijkt er minder verband tussen benzine, olie en de koers van Shell?</a:t>
-            </a:r>
-          </a:p>
-        </p:txBody>
-      </p:sp>
-      <p:sp>
-        <p:nvSpPr>
-          <p:cNvPr id="8" name="TextBox 7"/>
-          <p:cNvSpPr txBox="1"/>
-          <p:nvPr/>
-        </p:nvSpPr>
-        <p:spPr>
-          <a:xfrm>
-            <a:off x="4480560" y="2651760"/>
-            <a:ext cx="7132320" cy="1005840"/>
-          </a:xfrm>
-          <a:prstGeom prst="rect">
-            <a:avLst/>
-          </a:prstGeom>
-          <a:noFill/>
-        </p:spPr>
-        <p:txBody>
-          <a:bodyPr wrap="square" anchor="t" lIns="0" rIns="0" tIns="0" bIns="0">
-            <a:spAutoFit/>
-          </a:bodyPr>
-          <a:lstStyle/>
-          <a:p>
-            <a:pPr algn="l">
-              <a:lnSpc>
-                <a:spcPct val="115000"/>
-              </a:lnSpc>
-              <a:spcAft>
-                <a:spcPts val="200"/>
-              </a:spcAft>
-            </a:pPr>
-            <a:r>
-              <a:rPr sz="1300" b="1">
-                <a:solidFill>
-                  <a:srgbClr val="02C39A"/>
-                </a:solidFill>
-                <a:latin typeface="Calibri"/>
-              </a:rPr>
-              <a:t>RESULTAAT REGRESSIE</a:t>
-            </a:r>
-          </a:p>
-          <a:p>
-            <a:pPr algn="l">
-              <a:lnSpc>
-                <a:spcPct val="115000"/>
-              </a:lnSpc>
-              <a:spcAft>
-                <a:spcPts val="200"/>
-              </a:spcAft>
-            </a:pPr>
-            <a:r>
-              <a:rPr sz="1600" b="0">
-                <a:solidFill>
-                  <a:srgbClr val="21295C"/>
-                </a:solidFill>
-                <a:latin typeface="Calibri"/>
-              </a:rPr>
-              <a:t>Gasoline +11,6507   ·   Oil +0,0891   ·   R² = 0,36   (p &lt; 0,05)</a:t>
-            </a:r>
-          </a:p>
-        </p:txBody>
-      </p:sp>
-      <p:sp>
-        <p:nvSpPr>
-          <p:cNvPr id="9" name="TextBox 8"/>
-          <p:cNvSpPr txBox="1"/>
-          <p:nvPr/>
-        </p:nvSpPr>
-        <p:spPr>
-          <a:xfrm>
-            <a:off x="4480560" y="3931920"/>
-            <a:ext cx="7132320" cy="2377440"/>
-          </a:xfrm>
-          <a:prstGeom prst="rect">
-            <a:avLst/>
-          </a:prstGeom>
-          <a:noFill/>
-        </p:spPr>
-        <p:txBody>
-          <a:bodyPr wrap="square" anchor="t" lIns="0" rIns="0" tIns="0" bIns="0">
-            <a:spAutoFit/>
-          </a:bodyPr>
-          <a:lstStyle/>
-          <a:p>
-            <a:pPr algn="l">
-              <a:lnSpc>
-                <a:spcPct val="125000"/>
-              </a:lnSpc>
-              <a:spcAft>
-                <a:spcPts val="200"/>
-              </a:spcAft>
-            </a:pPr>
-            <a:r>
-              <a:rPr sz="1300" b="1">
-                <a:solidFill>
-                  <a:srgbClr val="02C39A"/>
-                </a:solidFill>
-                <a:latin typeface="Calibri"/>
-              </a:rPr>
-              <a:t>CONCLUSIE</a:t>
-            </a:r>
-          </a:p>
-          <a:p>
-            <a:pPr algn="l">
-              <a:lnSpc>
-                <a:spcPct val="125000"/>
-              </a:lnSpc>
-              <a:spcAft>
-                <a:spcPts val="200"/>
-              </a:spcAft>
-            </a:pPr>
-            <a:r>
-              <a:rPr sz="1600" b="0">
-                <a:solidFill>
-                  <a:srgbClr val="21295C"/>
-                </a:solidFill>
-                <a:latin typeface="Calibri"/>
-              </a:rPr>
-              <a:t>Significant maar slechts matige correlatie.</a:t>
-            </a:r>
-          </a:p>
-          <a:p>
-            <a:pPr algn="l">
-              <a:lnSpc>
-                <a:spcPct val="125000"/>
-              </a:lnSpc>
-              <a:spcAft>
-                <a:spcPts val="200"/>
-              </a:spcAft>
-            </a:pPr>
-            <a:r>
-              <a:rPr sz="1600" b="0">
-                <a:solidFill>
-                  <a:srgbClr val="21295C"/>
-                </a:solidFill>
-                <a:latin typeface="Calibri"/>
-              </a:rPr>
-              <a:t>Shell reageert niet op de actuele, maar op de verwachte</a:t>
-            </a:r>
-          </a:p>
-          <a:p>
-            <a:pPr algn="l">
-              <a:lnSpc>
-                <a:spcPct val="125000"/>
-              </a:lnSpc>
-              <a:spcAft>
-                <a:spcPts val="200"/>
-              </a:spcAft>
-            </a:pPr>
-            <a:r>
-              <a:rPr sz="1600" b="0">
-                <a:solidFill>
-                  <a:srgbClr val="21295C"/>
-                </a:solidFill>
-                <a:latin typeface="Calibri"/>
-              </a:rPr>
-              <a:t>langetermijnprijs -&gt; onderzocht met timeshift.</a:t>
-            </a:r>
-          </a:p>
-        </p:txBody>
-      </p:sp>
-    </p:spTree>
-  </p:cSld>
-  <p:clrMapOvr>
-    <a:masterClrMapping/>
-  </p:clrMapOvr>
-</p:sld>
-</file>
-
-<file path=ppt/slides/slide7.xml><?xml version="1.0" encoding="utf-8"?>
-<p:sld xmlns:a="http://schemas.openxmlformats.org/drawingml/2006/main" xmlns:p="http://schemas.openxmlformats.org/presentationml/2006/main" xmlns:r="http://schemas.openxmlformats.org/officeDocument/2006/relationships">
-  <p:cSld>
-    <p:spTree>
-      <p:nvGrpSpPr>
-        <p:cNvPr id="1" name=""/>
-        <p:cNvGrpSpPr/>
-        <p:nvPr/>
-      </p:nvGrpSpPr>
-      <p:grpSpPr/>
-      <p:sp>
-        <p:nvSpPr>
-          <p:cNvPr id="2" name="Rectangle 1"/>
-          <p:cNvSpPr/>
-          <p:nvPr/>
-        </p:nvSpPr>
-        <p:spPr>
-          <a:xfrm>
-            <a:off x="0" y="0"/>
-            <a:ext cx="12191695" cy="6858000"/>
-          </a:xfrm>
-          <a:prstGeom prst="rect">
-            <a:avLst/>
-          </a:prstGeom>
-          <a:solidFill>
-            <a:srgbClr val="FFFFFF"/>
-          </a:solidFill>
-          <a:ln>
-            <a:noFill/>
-          </a:ln>
-          <a:effectLst/>
-        </p:spPr>
-        <p:style>
-          <a:lnRef idx="1">
-            <a:schemeClr val="accent1"/>
-          </a:lnRef>
-          <a:fillRef idx="3">
-            <a:schemeClr val="accent1"/>
-          </a:fillRef>
-          <a:effectRef idx="2">
-            <a:schemeClr val="accent1"/>
-          </a:effectRef>
-          <a:fontRef idx="minor">
-            <a:schemeClr val="lt1"/>
-          </a:fontRef>
-        </p:style>
-        <p:txBody>
-          <a:bodyPr rtlCol="0" anchor="ctr"/>
-          <a:lstStyle/>
-          <a:p>
-            <a:pPr algn="ctr"/>
-          </a:p>
-        </p:txBody>
-      </p:sp>
-      <p:sp>
-        <p:nvSpPr>
-          <p:cNvPr id="3" name="Rectangle 2"/>
-          <p:cNvSpPr/>
-          <p:nvPr/>
-        </p:nvSpPr>
-        <p:spPr>
-          <a:xfrm>
-            <a:off x="0" y="0"/>
-            <a:ext cx="3931920" cy="6858000"/>
-          </a:xfrm>
-          <a:prstGeom prst="rect">
-            <a:avLst/>
-          </a:prstGeom>
-          <a:solidFill>
-            <a:srgbClr val="1E2761"/>
-          </a:solidFill>
-          <a:ln>
-            <a:noFill/>
-          </a:ln>
-          <a:effectLst/>
-        </p:spPr>
-        <p:style>
-          <a:lnRef idx="1">
-            <a:schemeClr val="accent1"/>
-          </a:lnRef>
-          <a:fillRef idx="3">
-            <a:schemeClr val="accent1"/>
-          </a:fillRef>
-          <a:effectRef idx="2">
-            <a:schemeClr val="accent1"/>
-          </a:effectRef>
-          <a:fontRef idx="minor">
-            <a:schemeClr val="lt1"/>
-          </a:fontRef>
-        </p:style>
-        <p:txBody>
-          <a:bodyPr rtlCol="0" anchor="ctr"/>
-          <a:lstStyle/>
-          <a:p>
-            <a:pPr algn="ctr"/>
-          </a:p>
-        </p:txBody>
-      </p:sp>
-      <p:sp>
-        <p:nvSpPr>
-          <p:cNvPr id="4" name="Oval 3"/>
-          <p:cNvSpPr/>
-          <p:nvPr/>
-        </p:nvSpPr>
-        <p:spPr>
-          <a:xfrm>
-            <a:off x="548640" y="640080"/>
-            <a:ext cx="256032" cy="256032"/>
-          </a:xfrm>
-          <a:prstGeom prst="ellipse">
-            <a:avLst/>
-          </a:prstGeom>
-          <a:solidFill>
-            <a:srgbClr val="02C39A"/>
-          </a:solidFill>
-          <a:ln>
-            <a:noFill/>
-          </a:ln>
-          <a:effectLst/>
-        </p:spPr>
-        <p:style>
-          <a:lnRef idx="1">
-            <a:schemeClr val="accent1"/>
-          </a:lnRef>
-          <a:fillRef idx="3">
-            <a:schemeClr val="accent1"/>
-          </a:fillRef>
-          <a:effectRef idx="2">
-            <a:schemeClr val="accent1"/>
-          </a:effectRef>
-          <a:fontRef idx="minor">
-            <a:schemeClr val="lt1"/>
-          </a:fontRef>
-        </p:style>
-        <p:txBody>
-          <a:bodyPr rtlCol="0" anchor="ctr"/>
-          <a:lstStyle/>
-          <a:p>
-            <a:pPr algn="ctr"/>
-          </a:p>
-        </p:txBody>
-      </p:sp>
-      <p:sp>
-        <p:nvSpPr>
-          <p:cNvPr id="5" name="TextBox 4"/>
-          <p:cNvSpPr txBox="1"/>
-          <p:nvPr/>
-        </p:nvSpPr>
-        <p:spPr>
-          <a:xfrm>
-            <a:off x="548640" y="1051560"/>
-            <a:ext cx="3017520" cy="548640"/>
-          </a:xfrm>
-          <a:prstGeom prst="rect">
-            <a:avLst/>
-          </a:prstGeom>
-          <a:noFill/>
-        </p:spPr>
-        <p:txBody>
-          <a:bodyPr wrap="square" anchor="t" lIns="0" rIns="0" tIns="0" bIns="0">
-            <a:spAutoFit/>
-          </a:bodyPr>
-          <a:lstStyle/>
-          <a:p>
-            <a:pPr algn="l">
-              <a:lnSpc>
-                <a:spcPct val="110000"/>
-              </a:lnSpc>
-              <a:spcAft>
-                <a:spcPts val="200"/>
-              </a:spcAft>
-            </a:pPr>
-            <a:r>
-              <a:rPr sz="2000" b="1">
-                <a:solidFill>
-                  <a:srgbClr val="02C39A"/>
-                </a:solidFill>
-                <a:latin typeface="Calibri"/>
-              </a:rPr>
-              <a:t>Onderzoeksvraag 5</a:t>
-            </a:r>
-          </a:p>
-        </p:txBody>
-      </p:sp>
-      <p:sp>
-        <p:nvSpPr>
-          <p:cNvPr id="6" name="TextBox 5"/>
-          <p:cNvSpPr txBox="1"/>
-          <p:nvPr/>
-        </p:nvSpPr>
-        <p:spPr>
-          <a:xfrm>
-            <a:off x="548640" y="1920240"/>
-            <a:ext cx="3108960" cy="4389120"/>
-          </a:xfrm>
-          <a:prstGeom prst="rect">
-            <a:avLst/>
-          </a:prstGeom>
-          <a:noFill/>
-        </p:spPr>
-        <p:txBody>
-          <a:bodyPr wrap="square" anchor="t" lIns="0" rIns="0" tIns="0" bIns="0">
-            <a:spAutoFit/>
-          </a:bodyPr>
-          <a:lstStyle/>
-          <a:p>
-            <a:pPr algn="l">
-              <a:lnSpc>
-                <a:spcPct val="140000"/>
-              </a:lnSpc>
-              <a:spcAft>
-                <a:spcPts val="200"/>
-              </a:spcAft>
-            </a:pPr>
-            <a:r>
-              <a:rPr sz="1500" b="1">
-                <a:solidFill>
-                  <a:srgbClr val="CADCFC"/>
-                </a:solidFill>
-                <a:latin typeface="Calibri"/>
-              </a:rPr>
-              <a:t>Stappen vooraf</a:t>
-            </a:r>
-          </a:p>
-          <a:p>
-            <a:pPr algn="l">
-              <a:lnSpc>
-                <a:spcPct val="140000"/>
-              </a:lnSpc>
-              <a:spcAft>
-                <a:spcPts val="200"/>
-              </a:spcAft>
-            </a:pPr>
-            <a:r>
-              <a:rPr sz="1400" b="0">
-                <a:solidFill>
-                  <a:srgbClr val="FFFFFF"/>
-                </a:solidFill>
-                <a:latin typeface="Calibri"/>
-              </a:rPr>
-              <a:t>1.  Data geselecteerd</a:t>
-            </a:r>
-          </a:p>
-          <a:p>
-            <a:pPr algn="l">
-              <a:lnSpc>
-                <a:spcPct val="140000"/>
-              </a:lnSpc>
-              <a:spcAft>
-                <a:spcPts val="200"/>
-              </a:spcAft>
-            </a:pPr>
-            <a:r>
-              <a:rPr sz="1400" b="0">
-                <a:solidFill>
-                  <a:srgbClr val="FFFFFF"/>
-                </a:solidFill>
-                <a:latin typeface="Calibri"/>
-              </a:rPr>
-              <a:t>2.  Heatmap bekeken</a:t>
-            </a:r>
-          </a:p>
-          <a:p>
-            <a:pPr algn="l">
-              <a:lnSpc>
-                <a:spcPct val="140000"/>
-              </a:lnSpc>
-              <a:spcAft>
-                <a:spcPts val="200"/>
-              </a:spcAft>
-            </a:pPr>
-            <a:r>
-              <a:rPr sz="1400" b="0">
-                <a:solidFill>
-                  <a:srgbClr val="FFFFFF"/>
-                </a:solidFill>
-                <a:latin typeface="Calibri"/>
-              </a:rPr>
-              <a:t>3.  Bubble chart (4 variabelen)</a:t>
-            </a:r>
-          </a:p>
-          <a:p>
-            <a:pPr algn="l">
-              <a:lnSpc>
-                <a:spcPct val="140000"/>
-              </a:lnSpc>
-              <a:spcAft>
-                <a:spcPts val="200"/>
-              </a:spcAft>
-            </a:pPr>
-            <a:r>
-              <a:rPr sz="1400" b="0">
-                <a:solidFill>
-                  <a:srgbClr val="FFFFFF"/>
-                </a:solidFill>
-                <a:latin typeface="Calibri"/>
-              </a:rPr>
-              <a:t>4.  Regressie + neuraal netwerk</a:t>
-            </a:r>
-          </a:p>
-        </p:txBody>
-      </p:sp>
-      <p:sp>
-        <p:nvSpPr>
-          <p:cNvPr id="7" name="TextBox 6"/>
-          <p:cNvSpPr txBox="1"/>
-          <p:nvPr/>
-        </p:nvSpPr>
-        <p:spPr>
-          <a:xfrm>
-            <a:off x="4480560" y="914400"/>
-            <a:ext cx="7132320" cy="1280160"/>
-          </a:xfrm>
-          <a:prstGeom prst="rect">
-            <a:avLst/>
-          </a:prstGeom>
-          <a:noFill/>
-        </p:spPr>
-        <p:txBody>
-          <a:bodyPr wrap="square" anchor="t" lIns="0" rIns="0" tIns="0" bIns="0">
-            <a:spAutoFit/>
-          </a:bodyPr>
-          <a:lstStyle/>
-          <a:p>
-            <a:pPr algn="l">
-              <a:lnSpc>
-                <a:spcPct val="115000"/>
-              </a:lnSpc>
-              <a:spcAft>
-                <a:spcPts val="200"/>
-              </a:spcAft>
-            </a:pPr>
-            <a:r>
-              <a:rPr sz="1300" b="1">
-                <a:solidFill>
-                  <a:srgbClr val="02C39A"/>
-                </a:solidFill>
-                <a:latin typeface="Calibri"/>
-              </a:rPr>
-              <a:t>VRAAG</a:t>
-            </a:r>
-          </a:p>
-          <a:p>
-            <a:pPr algn="l">
-              <a:lnSpc>
-                <a:spcPct val="115000"/>
-              </a:lnSpc>
-              <a:spcAft>
-                <a:spcPts val="200"/>
-              </a:spcAft>
-            </a:pPr>
-            <a:r>
-              <a:rPr sz="1900" b="0">
-                <a:solidFill>
-                  <a:srgbClr val="21295C"/>
-                </a:solidFill>
-                <a:latin typeface="Calibri"/>
-              </a:rPr>
-              <a:t>Wat is het verband tussen koffie, koper, goud en de koers van Apple?</a:t>
-            </a:r>
-          </a:p>
-        </p:txBody>
-      </p:sp>
-      <p:sp>
-        <p:nvSpPr>
-          <p:cNvPr id="8" name="TextBox 7"/>
-          <p:cNvSpPr txBox="1"/>
-          <p:nvPr/>
-        </p:nvSpPr>
-        <p:spPr>
-          <a:xfrm>
-            <a:off x="4480560" y="2651760"/>
-            <a:ext cx="7132320" cy="1005840"/>
-          </a:xfrm>
-          <a:prstGeom prst="rect">
-            <a:avLst/>
-          </a:prstGeom>
-          <a:noFill/>
-        </p:spPr>
-        <p:txBody>
-          <a:bodyPr wrap="square" anchor="t" lIns="0" rIns="0" tIns="0" bIns="0">
-            <a:spAutoFit/>
-          </a:bodyPr>
-          <a:lstStyle/>
-          <a:p>
-            <a:pPr algn="l">
-              <a:lnSpc>
-                <a:spcPct val="115000"/>
-              </a:lnSpc>
-              <a:spcAft>
-                <a:spcPts val="200"/>
-              </a:spcAft>
-            </a:pPr>
-            <a:r>
-              <a:rPr sz="1300" b="1">
-                <a:solidFill>
-                  <a:srgbClr val="02C39A"/>
-                </a:solidFill>
-                <a:latin typeface="Calibri"/>
-              </a:rPr>
-              <a:t>RESULTAAT REGRESSIE</a:t>
-            </a:r>
-          </a:p>
-          <a:p>
-            <a:pPr algn="l">
-              <a:lnSpc>
-                <a:spcPct val="115000"/>
-              </a:lnSpc>
-              <a:spcAft>
-                <a:spcPts val="200"/>
-              </a:spcAft>
-            </a:pPr>
-            <a:r>
-              <a:rPr sz="1600" b="0">
-                <a:solidFill>
-                  <a:srgbClr val="21295C"/>
-                </a:solidFill>
-                <a:latin typeface="Calibri"/>
-              </a:rPr>
-              <a:t>Coffee +0,7351  ·  Copper +0,0236  ·  Gold -0,0097  ·  R² = 0,88</a:t>
-            </a:r>
-          </a:p>
-        </p:txBody>
-      </p:sp>
-      <p:sp>
-        <p:nvSpPr>
-          <p:cNvPr id="9" name="TextBox 8"/>
-          <p:cNvSpPr txBox="1"/>
-          <p:nvPr/>
-        </p:nvSpPr>
-        <p:spPr>
-          <a:xfrm>
-            <a:off x="4480560" y="3931920"/>
-            <a:ext cx="7132320" cy="2377440"/>
-          </a:xfrm>
-          <a:prstGeom prst="rect">
-            <a:avLst/>
-          </a:prstGeom>
-          <a:noFill/>
-        </p:spPr>
-        <p:txBody>
-          <a:bodyPr wrap="square" anchor="t" lIns="0" rIns="0" tIns="0" bIns="0">
-            <a:spAutoFit/>
-          </a:bodyPr>
-          <a:lstStyle/>
-          <a:p>
-            <a:pPr algn="l">
-              <a:lnSpc>
-                <a:spcPct val="125000"/>
-              </a:lnSpc>
-              <a:spcAft>
-                <a:spcPts val="200"/>
-              </a:spcAft>
-            </a:pPr>
-            <a:r>
-              <a:rPr sz="1300" b="1">
-                <a:solidFill>
-                  <a:srgbClr val="02C39A"/>
-                </a:solidFill>
-                <a:latin typeface="Calibri"/>
-              </a:rPr>
-              <a:t>CONCLUSIE</a:t>
-            </a:r>
-          </a:p>
-          <a:p>
-            <a:pPr algn="l">
-              <a:lnSpc>
-                <a:spcPct val="125000"/>
-              </a:lnSpc>
-              <a:spcAft>
-                <a:spcPts val="200"/>
-              </a:spcAft>
-            </a:pPr>
-            <a:r>
-              <a:rPr sz="1600" b="0">
-                <a:solidFill>
-                  <a:srgbClr val="21295C"/>
-                </a:solidFill>
-                <a:latin typeface="Calibri"/>
-              </a:rPr>
-              <a:t>Significant en sterke correlatie.</a:t>
-            </a:r>
-          </a:p>
-          <a:p>
-            <a:pPr algn="l">
-              <a:lnSpc>
-                <a:spcPct val="125000"/>
-              </a:lnSpc>
-              <a:spcAft>
-                <a:spcPts val="200"/>
-              </a:spcAft>
-            </a:pPr>
-            <a:r>
-              <a:rPr sz="1600" b="0">
-                <a:solidFill>
-                  <a:srgbClr val="21295C"/>
-                </a:solidFill>
-                <a:latin typeface="Calibri"/>
-              </a:rPr>
-              <a:t>Hoogconjunctuur drijft Apple en koper omhoog;</a:t>
-            </a:r>
-          </a:p>
-          <a:p>
-            <a:pPr algn="l">
-              <a:lnSpc>
-                <a:spcPct val="125000"/>
-              </a:lnSpc>
-              <a:spcAft>
-                <a:spcPts val="200"/>
-              </a:spcAft>
-            </a:pPr>
-            <a:r>
-              <a:rPr sz="1600" b="0">
-                <a:solidFill>
-                  <a:srgbClr val="21295C"/>
-                </a:solidFill>
-                <a:latin typeface="Calibri"/>
-              </a:rPr>
-              <a:t>goud reageert juist zwakker (veilige haven).</a:t>
-            </a:r>
-          </a:p>
-        </p:txBody>
-      </p:sp>
-    </p:spTree>
-  </p:cSld>
-  <p:clrMapOvr>
-    <a:masterClrMapping/>
-  </p:clrMapOvr>
-</p:sld>
-</file>
-
-<file path=ppt/slides/slide8.xml><?xml version="1.0" encoding="utf-8"?>
-<p:sld xmlns:a="http://schemas.openxmlformats.org/drawingml/2006/main" xmlns:p="http://schemas.openxmlformats.org/presentationml/2006/main" xmlns:r="http://schemas.openxmlformats.org/officeDocument/2006/relationships">
-  <p:cSld>
-    <p:spTree>
-      <p:nvGrpSpPr>
-        <p:cNvPr id="1" name=""/>
-        <p:cNvGrpSpPr/>
-        <p:nvPr/>
-      </p:nvGrpSpPr>
-      <p:grpSpPr/>
-      <p:sp>
-        <p:nvSpPr>
-          <p:cNvPr id="2" name="Rectangle 1"/>
-          <p:cNvSpPr/>
-          <p:nvPr/>
-        </p:nvSpPr>
-        <p:spPr>
-          <a:xfrm>
-            <a:off x="0" y="0"/>
-            <a:ext cx="12191695" cy="6858000"/>
-          </a:xfrm>
-          <a:prstGeom prst="rect">
-            <a:avLst/>
-          </a:prstGeom>
-          <a:solidFill>
-            <a:srgbClr val="FFFFFF"/>
-          </a:solidFill>
-          <a:ln>
-            <a:noFill/>
-          </a:ln>
-          <a:effectLst/>
-        </p:spPr>
-        <p:style>
-          <a:lnRef idx="1">
-            <a:schemeClr val="accent1"/>
-          </a:lnRef>
-          <a:fillRef idx="3">
-            <a:schemeClr val="accent1"/>
-          </a:fillRef>
-          <a:effectRef idx="2">
-            <a:schemeClr val="accent1"/>
-          </a:effectRef>
-          <a:fontRef idx="minor">
-            <a:schemeClr val="lt1"/>
-          </a:fontRef>
-        </p:style>
-        <p:txBody>
-          <a:bodyPr rtlCol="0" anchor="ctr"/>
-          <a:lstStyle/>
-          <a:p>
-            <a:pPr algn="ctr"/>
-          </a:p>
-        </p:txBody>
-      </p:sp>
-      <p:sp>
-        <p:nvSpPr>
-          <p:cNvPr id="3" name="TextBox 2"/>
-          <p:cNvSpPr txBox="1"/>
-          <p:nvPr/>
-        </p:nvSpPr>
-        <p:spPr>
-          <a:xfrm>
-            <a:off x="822960" y="502920"/>
-            <a:ext cx="10607040" cy="914400"/>
-          </a:xfrm>
-          <a:prstGeom prst="rect">
-            <a:avLst/>
-          </a:prstGeom>
-          <a:noFill/>
-        </p:spPr>
-        <p:txBody>
-          <a:bodyPr wrap="square" anchor="ctr" lIns="0" rIns="0" tIns="0" bIns="0">
-            <a:spAutoFit/>
-          </a:bodyPr>
-          <a:lstStyle/>
-          <a:p>
-            <a:pPr algn="l">
-              <a:lnSpc>
-                <a:spcPct val="110000"/>
-              </a:lnSpc>
-              <a:spcAft>
-                <a:spcPts val="200"/>
-              </a:spcAft>
-            </a:pPr>
-            <a:r>
-              <a:rPr sz="3200" b="1">
-                <a:solidFill>
-                  <a:srgbClr val="1E2761"/>
-                </a:solidFill>
-                <a:latin typeface="Georgia"/>
-              </a:rPr>
-              <a:t>Twee beleggersprofielen (max. Sharpe-ratio)</a:t>
-            </a:r>
-          </a:p>
-        </p:txBody>
-      </p:sp>
-      <p:sp>
-        <p:nvSpPr>
-          <p:cNvPr id="4" name="Rectangle 3"/>
-          <p:cNvSpPr/>
-          <p:nvPr/>
-        </p:nvSpPr>
-        <p:spPr>
-          <a:xfrm>
-            <a:off x="822960" y="1417320"/>
-            <a:ext cx="2194560" cy="54864"/>
-          </a:xfrm>
-          <a:prstGeom prst="rect">
-            <a:avLst/>
-          </a:prstGeom>
-          <a:solidFill>
-            <a:srgbClr val="02C39A"/>
-          </a:solidFill>
-          <a:ln>
-            <a:noFill/>
-          </a:ln>
-          <a:effectLst/>
-        </p:spPr>
-        <p:style>
-          <a:lnRef idx="1">
-            <a:schemeClr val="accent1"/>
-          </a:lnRef>
-          <a:fillRef idx="3">
-            <a:schemeClr val="accent1"/>
-          </a:fillRef>
-          <a:effectRef idx="2">
-            <a:schemeClr val="accent1"/>
-          </a:effectRef>
-          <a:fontRef idx="minor">
-            <a:schemeClr val="lt1"/>
-          </a:fontRef>
-        </p:style>
-        <p:txBody>
-          <a:bodyPr rtlCol="0" anchor="ctr"/>
-          <a:lstStyle/>
-          <a:p>
-            <a:pPr algn="ctr"/>
-          </a:p>
-        </p:txBody>
-      </p:sp>
-      <p:sp>
-        <p:nvSpPr>
-          <p:cNvPr id="5" name="Rectangle 4"/>
-          <p:cNvSpPr/>
-          <p:nvPr/>
-        </p:nvSpPr>
-        <p:spPr>
-          <a:xfrm>
-            <a:off x="822960" y="1783080"/>
-            <a:ext cx="5212080" cy="594360"/>
-          </a:xfrm>
-          <a:prstGeom prst="rect">
-            <a:avLst/>
-          </a:prstGeom>
-          <a:solidFill>
-            <a:srgbClr val="1E2761"/>
-          </a:solidFill>
-          <a:ln>
-            <a:noFill/>
-          </a:ln>
-          <a:effectLst/>
-        </p:spPr>
-        <p:style>
-          <a:lnRef idx="1">
-            <a:schemeClr val="accent1"/>
-          </a:lnRef>
-          <a:fillRef idx="3">
-            <a:schemeClr val="accent1"/>
-          </a:fillRef>
-          <a:effectRef idx="2">
-            <a:schemeClr val="accent1"/>
-          </a:effectRef>
-          <a:fontRef idx="minor">
-            <a:schemeClr val="lt1"/>
-          </a:fontRef>
-        </p:style>
-        <p:txBody>
-          <a:bodyPr rtlCol="0" anchor="ctr"/>
-          <a:lstStyle/>
-          <a:p>
-            <a:pPr algn="ctr"/>
-          </a:p>
-        </p:txBody>
-      </p:sp>
-      <p:sp>
-        <p:nvSpPr>
-          <p:cNvPr id="6" name="TextBox 5"/>
-          <p:cNvSpPr txBox="1"/>
-          <p:nvPr/>
-        </p:nvSpPr>
-        <p:spPr>
-          <a:xfrm>
-            <a:off x="822960" y="1783080"/>
-            <a:ext cx="5212080" cy="594360"/>
-          </a:xfrm>
-          <a:prstGeom prst="rect">
-            <a:avLst/>
-          </a:prstGeom>
-          <a:noFill/>
-        </p:spPr>
-        <p:txBody>
-          <a:bodyPr wrap="square" anchor="ctr" lIns="0" rIns="0" tIns="0" bIns="0">
-            <a:spAutoFit/>
-          </a:bodyPr>
-          <a:lstStyle/>
-          <a:p>
-            <a:pPr algn="ctr">
-              <a:lnSpc>
-                <a:spcPct val="110000"/>
-              </a:lnSpc>
-              <a:spcAft>
-                <a:spcPts val="200"/>
-              </a:spcAft>
-            </a:pPr>
-            <a:r>
-              <a:rPr sz="1800" b="1">
-                <a:solidFill>
-                  <a:srgbClr val="FFFFFF"/>
-                </a:solidFill>
-                <a:latin typeface="Calibri"/>
-              </a:rPr>
-              <a:t>Jonge student (dynamisch)</a:t>
-            </a:r>
-          </a:p>
-        </p:txBody>
-      </p:sp>
-      <p:graphicFrame>
-        <p:nvGraphicFramePr>
-          <p:cNvPr id="7" name="Table 6"/>
-          <p:cNvGraphicFramePr>
-            <a:graphicFrameLocks noGrp="1"/>
-          </p:cNvGraphicFramePr>
-          <p:nvPr/>
-        </p:nvGraphicFramePr>
-        <p:xfrm>
-          <a:off x="822960" y="2606040"/>
-          <a:ext cx="5212079" cy="1920240"/>
-        </p:xfrm>
-        <a:graphic>
-          <a:graphicData uri="http://schemas.openxmlformats.org/drawingml/2006/table">
-            <a:tbl>
-              <a:tblPr firstRow="1" bandRow="1">
-                <a:tableStyleId>{5C22544A-7EE6-4342-B048-85BDC9FD1C3A}</a:tableStyleId>
-              </a:tblPr>
-              <a:tblGrid>
-                <a:gridCol w="3231489"/>
-                <a:gridCol w="1980590"/>
-              </a:tblGrid>
-              <a:tr h="384048">
-                <a:tc>
-                  <a:txBody>
-                    <a:bodyPr/>
-                    <a:lstStyle/>
-                    <a:p>
-                      <a:pPr algn="l"/>
-                      <a:r>
-                        <a:rPr sz="1400" b="1">
-                          <a:solidFill>
-                            <a:srgbClr val="FFFFFF"/>
-                          </a:solidFill>
-                          <a:latin typeface="Calibri"/>
-                        </a:rPr>
-                        <a:t>Product</a:t>
-                      </a:r>
-                    </a:p>
-                  </a:txBody>
-                  <a:tcPr anchor="ctr">
-                    <a:solidFill>
-                      <a:srgbClr val="1E2761"/>
-                    </a:solidFill>
-                  </a:tcPr>
-                </a:tc>
-                <a:tc>
-                  <a:txBody>
-                    <a:bodyPr/>
-                    <a:lstStyle/>
-                    <a:p>
-                      <a:pPr algn="r"/>
-                      <a:r>
-                        <a:rPr sz="1400" b="1">
-                          <a:solidFill>
-                            <a:srgbClr val="FFFFFF"/>
-                          </a:solidFill>
-                          <a:latin typeface="Calibri"/>
-                        </a:rPr>
-                        <a:t>Gewicht</a:t>
-                      </a:r>
-                    </a:p>
-                  </a:txBody>
-                  <a:tcPr anchor="ctr">
-                    <a:solidFill>
-                      <a:srgbClr val="1E2761"/>
-                    </a:solidFill>
-                  </a:tcPr>
-                </a:tc>
-              </a:tr>
-              <a:tr h="384048">
-                <a:tc>
-                  <a:txBody>
-                    <a:bodyPr/>
-                    <a:lstStyle/>
-                    <a:p>
-                      <a:pPr algn="l"/>
-                      <a:r>
-                        <a:rPr sz="1400" b="0">
-                          <a:solidFill>
-                            <a:srgbClr val="21295C"/>
-                          </a:solidFill>
-                          <a:latin typeface="Calibri"/>
-                        </a:rPr>
-                        <a:t>Broadcom</a:t>
-                      </a:r>
-                    </a:p>
-                  </a:txBody>
-                  <a:tcPr anchor="ctr">
-                    <a:solidFill>
-                      <a:srgbClr val="FFFFFF"/>
-                    </a:solidFill>
-                  </a:tcPr>
-                </a:tc>
-                <a:tc>
-                  <a:txBody>
-                    <a:bodyPr/>
-                    <a:lstStyle/>
-                    <a:p>
-                      <a:pPr algn="r"/>
-                      <a:r>
-                        <a:rPr sz="1400" b="1">
-                          <a:solidFill>
-                            <a:srgbClr val="21295C"/>
-                          </a:solidFill>
-                          <a:latin typeface="Calibri"/>
-                        </a:rPr>
-                        <a:t>37,5%</a:t>
-                      </a:r>
-                    </a:p>
-                  </a:txBody>
-                  <a:tcPr anchor="ctr">
-                    <a:solidFill>
-                      <a:srgbClr val="FFFFFF"/>
-                    </a:solidFill>
-                  </a:tcPr>
-                </a:tc>
-              </a:tr>
-              <a:tr h="384048">
-                <a:tc>
-                  <a:txBody>
-                    <a:bodyPr/>
-                    <a:lstStyle/>
-                    <a:p>
-                      <a:pPr algn="l"/>
-                      <a:r>
-                        <a:rPr sz="1400" b="0">
-                          <a:solidFill>
-                            <a:srgbClr val="21295C"/>
-                          </a:solidFill>
-                          <a:latin typeface="Calibri"/>
-                        </a:rPr>
-                        <a:t>Bitcoin</a:t>
-                      </a:r>
-                    </a:p>
-                  </a:txBody>
-                  <a:tcPr anchor="ctr">
-                    <a:solidFill>
-                      <a:srgbClr val="EFF2FB"/>
-                    </a:solidFill>
-                  </a:tcPr>
-                </a:tc>
-                <a:tc>
-                  <a:txBody>
-                    <a:bodyPr/>
-                    <a:lstStyle/>
-                    <a:p>
-                      <a:pPr algn="r"/>
-                      <a:r>
-                        <a:rPr sz="1400" b="1">
-                          <a:solidFill>
-                            <a:srgbClr val="21295C"/>
-                          </a:solidFill>
-                          <a:latin typeface="Calibri"/>
-                        </a:rPr>
-                        <a:t>23,5%</a:t>
-                      </a:r>
-                    </a:p>
-                  </a:txBody>
-                  <a:tcPr anchor="ctr">
-                    <a:solidFill>
-                      <a:srgbClr val="EFF2FB"/>
-                    </a:solidFill>
-                  </a:tcPr>
-                </a:tc>
-              </a:tr>
-              <a:tr h="384048">
-                <a:tc>
-                  <a:txBody>
-                    <a:bodyPr/>
-                    <a:lstStyle/>
-                    <a:p>
-                      <a:pPr algn="l"/>
-                      <a:r>
-                        <a:rPr sz="1400" b="0">
-                          <a:solidFill>
-                            <a:srgbClr val="21295C"/>
-                          </a:solidFill>
-                          <a:latin typeface="Calibri"/>
-                        </a:rPr>
-                        <a:t>Apple</a:t>
-                      </a:r>
-                    </a:p>
-                  </a:txBody>
-                  <a:tcPr anchor="ctr">
-                    <a:solidFill>
-                      <a:srgbClr val="FFFFFF"/>
-                    </a:solidFill>
-                  </a:tcPr>
-                </a:tc>
-                <a:tc>
-                  <a:txBody>
-                    <a:bodyPr/>
-                    <a:lstStyle/>
-                    <a:p>
-                      <a:pPr algn="r"/>
-                      <a:r>
-                        <a:rPr sz="1400" b="1">
-                          <a:solidFill>
-                            <a:srgbClr val="21295C"/>
-                          </a:solidFill>
-                          <a:latin typeface="Calibri"/>
-                        </a:rPr>
-                        <a:t>36,0%</a:t>
-                      </a:r>
-                    </a:p>
-                  </a:txBody>
-                  <a:tcPr anchor="ctr">
-                    <a:solidFill>
-                      <a:srgbClr val="FFFFFF"/>
-                    </a:solidFill>
-                  </a:tcPr>
-                </a:tc>
-              </a:tr>
-              <a:tr h="384048">
-                <a:tc>
-                  <a:txBody>
-                    <a:bodyPr/>
-                    <a:lstStyle/>
-                    <a:p>
-                      <a:pPr algn="l"/>
-                      <a:r>
-                        <a:rPr sz="1400" b="0">
-                          <a:solidFill>
-                            <a:srgbClr val="21295C"/>
-                          </a:solidFill>
-                          <a:latin typeface="Calibri"/>
-                        </a:rPr>
-                        <a:t>ASML</a:t>
-                      </a:r>
-                    </a:p>
-                  </a:txBody>
-                  <a:tcPr anchor="ctr">
-                    <a:solidFill>
-                      <a:srgbClr val="EFF2FB"/>
-                    </a:solidFill>
-                  </a:tcPr>
-                </a:tc>
-                <a:tc>
-                  <a:txBody>
-                    <a:bodyPr/>
-                    <a:lstStyle/>
-                    <a:p>
-                      <a:pPr algn="r"/>
-                      <a:r>
-                        <a:rPr sz="1400" b="1">
-                          <a:solidFill>
-                            <a:srgbClr val="21295C"/>
-                          </a:solidFill>
-                          <a:latin typeface="Calibri"/>
-                        </a:rPr>
-                        <a:t>3,0%</a:t>
-                      </a:r>
-                    </a:p>
-                  </a:txBody>
-                  <a:tcPr anchor="ctr">
-                    <a:solidFill>
-                      <a:srgbClr val="EFF2FB"/>
-                    </a:solidFill>
-                  </a:tcPr>
-                </a:tc>
-              </a:tr>
-            </a:tbl>
-          </a:graphicData>
-        </a:graphic>
-      </p:graphicFrame>
-      <p:sp>
-        <p:nvSpPr>
-          <p:cNvPr id="8" name="Rectangle 7"/>
-          <p:cNvSpPr/>
-          <p:nvPr/>
-        </p:nvSpPr>
-        <p:spPr>
-          <a:xfrm>
-            <a:off x="822960" y="4754880"/>
-            <a:ext cx="5212080" cy="548640"/>
-          </a:xfrm>
-          <a:prstGeom prst="rect">
-            <a:avLst/>
-          </a:prstGeom>
-          <a:solidFill>
-            <a:srgbClr val="EFF2FB"/>
-          </a:solidFill>
-          <a:ln>
-            <a:noFill/>
-          </a:ln>
-          <a:effectLst/>
-        </p:spPr>
-        <p:style>
-          <a:lnRef idx="1">
-            <a:schemeClr val="accent1"/>
-          </a:lnRef>
-          <a:fillRef idx="3">
-            <a:schemeClr val="accent1"/>
-          </a:fillRef>
-          <a:effectRef idx="2">
-            <a:schemeClr val="accent1"/>
-          </a:effectRef>
-          <a:fontRef idx="minor">
-            <a:schemeClr val="lt1"/>
-          </a:fontRef>
-        </p:style>
-        <p:txBody>
-          <a:bodyPr rtlCol="0" anchor="ctr"/>
-          <a:lstStyle/>
-          <a:p>
-            <a:pPr algn="ctr"/>
-          </a:p>
-        </p:txBody>
-      </p:sp>
-      <p:sp>
-        <p:nvSpPr>
-          <p:cNvPr id="9" name="TextBox 8"/>
-          <p:cNvSpPr txBox="1"/>
-          <p:nvPr/>
-        </p:nvSpPr>
-        <p:spPr>
-          <a:xfrm>
-            <a:off x="822960" y="4754880"/>
-            <a:ext cx="5212080" cy="548640"/>
-          </a:xfrm>
-          <a:prstGeom prst="rect">
-            <a:avLst/>
-          </a:prstGeom>
-          <a:noFill/>
-        </p:spPr>
-        <p:txBody>
-          <a:bodyPr wrap="square" anchor="ctr" lIns="0" rIns="0" tIns="0" bIns="0">
-            <a:spAutoFit/>
-          </a:bodyPr>
-          <a:lstStyle/>
-          <a:p>
-            <a:pPr algn="ctr">
-              <a:lnSpc>
-                <a:spcPct val="110000"/>
-              </a:lnSpc>
-              <a:spcAft>
-                <a:spcPts val="200"/>
-              </a:spcAft>
-            </a:pPr>
-            <a:r>
-              <a:rPr sz="1500" b="1">
-                <a:solidFill>
-                  <a:srgbClr val="21295C"/>
-                </a:solidFill>
-                <a:latin typeface="Calibri"/>
-              </a:rPr>
-              <a:t>Rendement 24%   ·   risico 25%   ·   Sharpe 0,85</a:t>
-            </a:r>
-          </a:p>
-        </p:txBody>
-      </p:sp>
-      <p:sp>
-        <p:nvSpPr>
-          <p:cNvPr id="10" name="Rectangle 9"/>
-          <p:cNvSpPr/>
-          <p:nvPr/>
-        </p:nvSpPr>
-        <p:spPr>
-          <a:xfrm>
-            <a:off x="6629400" y="1783080"/>
-            <a:ext cx="5212080" cy="594360"/>
-          </a:xfrm>
-          <a:prstGeom prst="rect">
-            <a:avLst/>
-          </a:prstGeom>
-          <a:solidFill>
-            <a:srgbClr val="1E2761"/>
-          </a:solidFill>
-          <a:ln>
-            <a:noFill/>
-          </a:ln>
-          <a:effectLst/>
-        </p:spPr>
-        <p:style>
-          <a:lnRef idx="1">
-            <a:schemeClr val="accent1"/>
-          </a:lnRef>
-          <a:fillRef idx="3">
-            <a:schemeClr val="accent1"/>
-          </a:fillRef>
-          <a:effectRef idx="2">
-            <a:schemeClr val="accent1"/>
-          </a:effectRef>
-          <a:fontRef idx="minor">
-            <a:schemeClr val="lt1"/>
-          </a:fontRef>
-        </p:style>
-        <p:txBody>
-          <a:bodyPr rtlCol="0" anchor="ctr"/>
-          <a:lstStyle/>
-          <a:p>
-            <a:pPr algn="ctr"/>
-          </a:p>
-        </p:txBody>
-      </p:sp>
-      <p:sp>
-        <p:nvSpPr>
-          <p:cNvPr id="11" name="TextBox 10"/>
-          <p:cNvSpPr txBox="1"/>
-          <p:nvPr/>
-        </p:nvSpPr>
-        <p:spPr>
-          <a:xfrm>
-            <a:off x="6629400" y="1783080"/>
-            <a:ext cx="5212080" cy="594360"/>
-          </a:xfrm>
-          <a:prstGeom prst="rect">
-            <a:avLst/>
-          </a:prstGeom>
-          <a:noFill/>
-        </p:spPr>
-        <p:txBody>
-          <a:bodyPr wrap="square" anchor="ctr" lIns="0" rIns="0" tIns="0" bIns="0">
-            <a:spAutoFit/>
-          </a:bodyPr>
-          <a:lstStyle/>
-          <a:p>
-            <a:pPr algn="ctr">
-              <a:lnSpc>
-                <a:spcPct val="110000"/>
-              </a:lnSpc>
-              <a:spcAft>
-                <a:spcPts val="200"/>
-              </a:spcAft>
-            </a:pPr>
-            <a:r>
-              <a:rPr sz="1800" b="1">
-                <a:solidFill>
-                  <a:srgbClr val="FFFFFF"/>
-                </a:solidFill>
-                <a:latin typeface="Calibri"/>
-              </a:rPr>
-              <a:t>Oude docent (defensief)</a:t>
-            </a:r>
-          </a:p>
-        </p:txBody>
-      </p:sp>
-      <p:graphicFrame>
-        <p:nvGraphicFramePr>
-          <p:cNvPr id="12" name="Table 11"/>
-          <p:cNvGraphicFramePr>
-            <a:graphicFrameLocks noGrp="1"/>
-          </p:cNvGraphicFramePr>
-          <p:nvPr/>
-        </p:nvGraphicFramePr>
-        <p:xfrm>
-          <a:off x="6629400" y="2606040"/>
-          <a:ext cx="5212079" cy="1920240"/>
-        </p:xfrm>
-        <a:graphic>
-          <a:graphicData uri="http://schemas.openxmlformats.org/drawingml/2006/table">
-            <a:tbl>
-              <a:tblPr firstRow="1" bandRow="1">
-                <a:tableStyleId>{5C22544A-7EE6-4342-B048-85BDC9FD1C3A}</a:tableStyleId>
-              </a:tblPr>
-              <a:tblGrid>
-                <a:gridCol w="3231489"/>
-                <a:gridCol w="1980590"/>
-              </a:tblGrid>
-              <a:tr h="384048">
-                <a:tc>
-                  <a:txBody>
-                    <a:bodyPr/>
-                    <a:lstStyle/>
-                    <a:p>
-                      <a:pPr algn="l"/>
-                      <a:r>
-                        <a:rPr sz="1400" b="1">
-                          <a:solidFill>
-                            <a:srgbClr val="FFFFFF"/>
-                          </a:solidFill>
-                          <a:latin typeface="Calibri"/>
-                        </a:rPr>
-                        <a:t>Product</a:t>
-                      </a:r>
-                    </a:p>
-                  </a:txBody>
-                  <a:tcPr anchor="ctr">
-                    <a:solidFill>
-                      <a:srgbClr val="1E2761"/>
-                    </a:solidFill>
-                  </a:tcPr>
-                </a:tc>
-                <a:tc>
-                  <a:txBody>
-                    <a:bodyPr/>
-                    <a:lstStyle/>
-                    <a:p>
-                      <a:pPr algn="r"/>
-                      <a:r>
-                        <a:rPr sz="1400" b="1">
-                          <a:solidFill>
-                            <a:srgbClr val="FFFFFF"/>
-                          </a:solidFill>
-                          <a:latin typeface="Calibri"/>
-                        </a:rPr>
-                        <a:t>Gewicht</a:t>
-                      </a:r>
-                    </a:p>
-                  </a:txBody>
-                  <a:tcPr anchor="ctr">
-                    <a:solidFill>
-                      <a:srgbClr val="1E2761"/>
-                    </a:solidFill>
-                  </a:tcPr>
-                </a:tc>
-              </a:tr>
-              <a:tr h="384048">
-                <a:tc>
-                  <a:txBody>
-                    <a:bodyPr/>
-                    <a:lstStyle/>
-                    <a:p>
-                      <a:pPr algn="l"/>
-                      <a:r>
-                        <a:rPr sz="1400" b="0">
-                          <a:solidFill>
-                            <a:srgbClr val="21295C"/>
-                          </a:solidFill>
-                          <a:latin typeface="Calibri"/>
-                        </a:rPr>
-                        <a:t>Goud</a:t>
-                      </a:r>
-                    </a:p>
-                  </a:txBody>
-                  <a:tcPr anchor="ctr">
-                    <a:solidFill>
-                      <a:srgbClr val="FFFFFF"/>
-                    </a:solidFill>
-                  </a:tcPr>
-                </a:tc>
-                <a:tc>
-                  <a:txBody>
-                    <a:bodyPr/>
-                    <a:lstStyle/>
-                    <a:p>
-                      <a:pPr algn="r"/>
-                      <a:r>
-                        <a:rPr sz="1400" b="1">
-                          <a:solidFill>
-                            <a:srgbClr val="21295C"/>
-                          </a:solidFill>
-                          <a:latin typeface="Calibri"/>
-                        </a:rPr>
-                        <a:t>59,5%</a:t>
-                      </a:r>
-                    </a:p>
-                  </a:txBody>
-                  <a:tcPr anchor="ctr">
-                    <a:solidFill>
-                      <a:srgbClr val="FFFFFF"/>
-                    </a:solidFill>
-                  </a:tcPr>
-                </a:tc>
-              </a:tr>
-              <a:tr h="384048">
-                <a:tc>
-                  <a:txBody>
-                    <a:bodyPr/>
-                    <a:lstStyle/>
-                    <a:p>
-                      <a:pPr algn="l"/>
-                      <a:r>
-                        <a:rPr sz="1400" b="0">
-                          <a:solidFill>
-                            <a:srgbClr val="21295C"/>
-                          </a:solidFill>
-                          <a:latin typeface="Calibri"/>
-                        </a:rPr>
-                        <a:t>Apple</a:t>
-                      </a:r>
-                    </a:p>
-                  </a:txBody>
-                  <a:tcPr anchor="ctr">
-                    <a:solidFill>
-                      <a:srgbClr val="EFF2FB"/>
-                    </a:solidFill>
-                  </a:tcPr>
-                </a:tc>
-                <a:tc>
-                  <a:txBody>
-                    <a:bodyPr/>
-                    <a:lstStyle/>
-                    <a:p>
-                      <a:pPr algn="r"/>
-                      <a:r>
-                        <a:rPr sz="1400" b="1">
-                          <a:solidFill>
-                            <a:srgbClr val="21295C"/>
-                          </a:solidFill>
-                          <a:latin typeface="Calibri"/>
-                        </a:rPr>
-                        <a:t>40,5%</a:t>
-                      </a:r>
-                    </a:p>
-                  </a:txBody>
-                  <a:tcPr anchor="ctr">
-                    <a:solidFill>
-                      <a:srgbClr val="EFF2FB"/>
-                    </a:solidFill>
-                  </a:tcPr>
-                </a:tc>
-              </a:tr>
-              <a:tr h="384048">
-                <a:tc>
-                  <a:txBody>
-                    <a:bodyPr/>
-                    <a:lstStyle/>
-                    <a:p>
-                      <a:pPr algn="l"/>
-                      <a:r>
-                        <a:rPr sz="1400" b="0">
-                          <a:solidFill>
-                            <a:srgbClr val="21295C"/>
-                          </a:solidFill>
-                          <a:latin typeface="Calibri"/>
-                        </a:rPr>
-                        <a:t>Zilver</a:t>
-                      </a:r>
-                    </a:p>
-                  </a:txBody>
-                  <a:tcPr anchor="ctr">
-                    <a:solidFill>
-                      <a:srgbClr val="FFFFFF"/>
-                    </a:solidFill>
-                  </a:tcPr>
-                </a:tc>
-                <a:tc>
-                  <a:txBody>
-                    <a:bodyPr/>
-                    <a:lstStyle/>
-                    <a:p>
-                      <a:pPr algn="r"/>
-                      <a:r>
-                        <a:rPr sz="1400" b="1">
-                          <a:solidFill>
-                            <a:srgbClr val="21295C"/>
-                          </a:solidFill>
-                          <a:latin typeface="Calibri"/>
-                        </a:rPr>
-                        <a:t>0%</a:t>
-                      </a:r>
-                    </a:p>
-                  </a:txBody>
-                  <a:tcPr anchor="ctr">
-                    <a:solidFill>
-                      <a:srgbClr val="FFFFFF"/>
-                    </a:solidFill>
-                  </a:tcPr>
-                </a:tc>
-              </a:tr>
-              <a:tr h="384048">
-                <a:tc>
-                  <a:txBody>
-                    <a:bodyPr/>
-                    <a:lstStyle/>
-                    <a:p>
-                      <a:pPr algn="l"/>
-                      <a:r>
-                        <a:rPr sz="1400" b="0">
-                          <a:solidFill>
-                            <a:srgbClr val="21295C"/>
-                          </a:solidFill>
-                          <a:latin typeface="Calibri"/>
-                        </a:rPr>
-                        <a:t>Shell</a:t>
-                      </a:r>
-                    </a:p>
-                  </a:txBody>
-                  <a:tcPr anchor="ctr">
-                    <a:solidFill>
-                      <a:srgbClr val="EFF2FB"/>
-                    </a:solidFill>
-                  </a:tcPr>
-                </a:tc>
-                <a:tc>
-                  <a:txBody>
-                    <a:bodyPr/>
-                    <a:lstStyle/>
-                    <a:p>
-                      <a:pPr algn="r"/>
-                      <a:r>
-                        <a:rPr sz="1400" b="1">
-                          <a:solidFill>
-                            <a:srgbClr val="21295C"/>
-                          </a:solidFill>
-                          <a:latin typeface="Calibri"/>
-                        </a:rPr>
-                        <a:t>0%</a:t>
-                      </a:r>
-                    </a:p>
-                  </a:txBody>
-                  <a:tcPr anchor="ctr">
-                    <a:solidFill>
-                      <a:srgbClr val="EFF2FB"/>
-                    </a:solidFill>
-                  </a:tcPr>
-                </a:tc>
-              </a:tr>
-            </a:tbl>
-          </a:graphicData>
-        </a:graphic>
-      </p:graphicFrame>
-      <p:sp>
-        <p:nvSpPr>
-          <p:cNvPr id="13" name="Rectangle 12"/>
-          <p:cNvSpPr/>
-          <p:nvPr/>
-        </p:nvSpPr>
-        <p:spPr>
-          <a:xfrm>
-            <a:off x="6629400" y="4754880"/>
-            <a:ext cx="5212080" cy="548640"/>
-          </a:xfrm>
-          <a:prstGeom prst="rect">
-            <a:avLst/>
-          </a:prstGeom>
-          <a:solidFill>
-            <a:srgbClr val="EFF2FB"/>
-          </a:solidFill>
-          <a:ln>
-            <a:noFill/>
-          </a:ln>
-          <a:effectLst/>
-        </p:spPr>
-        <p:style>
-          <a:lnRef idx="1">
-            <a:schemeClr val="accent1"/>
-          </a:lnRef>
-          <a:fillRef idx="3">
-            <a:schemeClr val="accent1"/>
-          </a:fillRef>
-          <a:effectRef idx="2">
-            <a:schemeClr val="accent1"/>
-          </a:effectRef>
-          <a:fontRef idx="minor">
-            <a:schemeClr val="lt1"/>
-          </a:fontRef>
-        </p:style>
-        <p:txBody>
-          <a:bodyPr rtlCol="0" anchor="ctr"/>
-          <a:lstStyle/>
-          <a:p>
-            <a:pPr algn="ctr"/>
-          </a:p>
-        </p:txBody>
-      </p:sp>
-      <p:sp>
-        <p:nvSpPr>
-          <p:cNvPr id="14" name="TextBox 13"/>
-          <p:cNvSpPr txBox="1"/>
-          <p:nvPr/>
-        </p:nvSpPr>
-        <p:spPr>
-          <a:xfrm>
-            <a:off x="6629400" y="4754880"/>
-            <a:ext cx="5212080" cy="548640"/>
-          </a:xfrm>
-          <a:prstGeom prst="rect">
-            <a:avLst/>
-          </a:prstGeom>
-          <a:noFill/>
-        </p:spPr>
-        <p:txBody>
-          <a:bodyPr wrap="square" anchor="ctr" lIns="0" rIns="0" tIns="0" bIns="0">
-            <a:spAutoFit/>
-          </a:bodyPr>
-          <a:lstStyle/>
-          <a:p>
-            <a:pPr algn="ctr">
-              <a:lnSpc>
-                <a:spcPct val="110000"/>
-              </a:lnSpc>
-              <a:spcAft>
-                <a:spcPts val="200"/>
-              </a:spcAft>
-            </a:pPr>
-            <a:r>
-              <a:rPr sz="1500" b="1">
-                <a:solidFill>
-                  <a:srgbClr val="21295C"/>
-                </a:solidFill>
-                <a:latin typeface="Calibri"/>
-              </a:rPr>
-              <a:t>Rendement 13%   ·   risico 13%   ·   Sharpe 0,78</a:t>
-            </a:r>
-          </a:p>
-        </p:txBody>
-      </p:sp>
-    </p:spTree>
-  </p:cSld>
-  <p:clrMapOvr>
-    <a:masterClrMapping/>
-  </p:clrMapOvr>
-</p:sld>
-</file>
-
-<file path=ppt/slides/slide9.xml><?xml version="1.0" encoding="utf-8"?>
-<p:sld xmlns:a="http://schemas.openxmlformats.org/drawingml/2006/main" xmlns:p="http://schemas.openxmlformats.org/presentationml/2006/main" xmlns:r="http://schemas.openxmlformats.org/officeDocument/2006/relationships">
-  <p:cSld>
-    <p:spTree>
-      <p:nvGrpSpPr>
-        <p:cNvPr id="1" name=""/>
-        <p:cNvGrpSpPr/>
-        <p:nvPr/>
-      </p:nvGrpSpPr>
-      <p:grpSpPr/>
-      <p:sp>
-        <p:nvSpPr>
-          <p:cNvPr id="2" name="Rectangle 1"/>
-          <p:cNvSpPr/>
-          <p:nvPr/>
-        </p:nvSpPr>
-        <p:spPr>
-          <a:xfrm>
-            <a:off x="0" y="0"/>
-            <a:ext cx="12191695" cy="6858000"/>
-          </a:xfrm>
-          <a:prstGeom prst="rect">
-            <a:avLst/>
-          </a:prstGeom>
-          <a:solidFill>
-            <a:srgbClr val="FFFFFF"/>
-          </a:solidFill>
-          <a:ln>
-            <a:noFill/>
-          </a:ln>
-          <a:effectLst/>
-        </p:spPr>
-        <p:style>
-          <a:lnRef idx="1">
-            <a:schemeClr val="accent1"/>
-          </a:lnRef>
-          <a:fillRef idx="3">
-            <a:schemeClr val="accent1"/>
-          </a:fillRef>
-          <a:effectRef idx="2">
-            <a:schemeClr val="accent1"/>
-          </a:effectRef>
-          <a:fontRef idx="minor">
-            <a:schemeClr val="lt1"/>
-          </a:fontRef>
-        </p:style>
-        <p:txBody>
-          <a:bodyPr rtlCol="0" anchor="ctr"/>
-          <a:lstStyle/>
-          <a:p>
-            <a:pPr algn="ctr"/>
-          </a:p>
-        </p:txBody>
-      </p:sp>
-      <p:sp>
-        <p:nvSpPr>
-          <p:cNvPr id="3" name="TextBox 2"/>
-          <p:cNvSpPr txBox="1"/>
-          <p:nvPr/>
-        </p:nvSpPr>
-        <p:spPr>
-          <a:xfrm>
-            <a:off x="822960" y="502920"/>
-            <a:ext cx="10607040" cy="914400"/>
-          </a:xfrm>
-          <a:prstGeom prst="rect">
-            <a:avLst/>
-          </a:prstGeom>
-          <a:noFill/>
-        </p:spPr>
-        <p:txBody>
-          <a:bodyPr wrap="square" anchor="ctr" lIns="0" rIns="0" tIns="0" bIns="0">
-            <a:spAutoFit/>
-          </a:bodyPr>
-          <a:lstStyle/>
-          <a:p>
-            <a:pPr algn="l">
-              <a:lnSpc>
-                <a:spcPct val="110000"/>
-              </a:lnSpc>
-              <a:spcAft>
-                <a:spcPts val="200"/>
-              </a:spcAft>
-            </a:pPr>
-            <a:r>
-              <a:rPr sz="3200" b="1">
-                <a:solidFill>
-                  <a:srgbClr val="1E2761"/>
-                </a:solidFill>
-                <a:latin typeface="Georgia"/>
-              </a:rPr>
-              <a:t>Marktportfolio — hoogste Sharpe-ratio</a:t>
-            </a:r>
-          </a:p>
-        </p:txBody>
-      </p:sp>
-      <p:sp>
-        <p:nvSpPr>
-          <p:cNvPr id="4" name="Rectangle 3"/>
-          <p:cNvSpPr/>
-          <p:nvPr/>
-        </p:nvSpPr>
-        <p:spPr>
-          <a:xfrm>
-            <a:off x="822960" y="1417320"/>
-            <a:ext cx="2194560" cy="54864"/>
-          </a:xfrm>
-          <a:prstGeom prst="rect">
-            <a:avLst/>
-          </a:prstGeom>
-          <a:solidFill>
-            <a:srgbClr val="02C39A"/>
-          </a:solidFill>
-          <a:ln>
-            <a:noFill/>
-          </a:ln>
-          <a:effectLst/>
-        </p:spPr>
-        <p:style>
-          <a:lnRef idx="1">
-            <a:schemeClr val="accent1"/>
-          </a:lnRef>
-          <a:fillRef idx="3">
-            <a:schemeClr val="accent1"/>
-          </a:fillRef>
-          <a:effectRef idx="2">
-            <a:schemeClr val="accent1"/>
-          </a:effectRef>
-          <a:fontRef idx="minor">
-            <a:schemeClr val="lt1"/>
-          </a:fontRef>
-        </p:style>
-        <p:txBody>
-          <a:bodyPr rtlCol="0" anchor="ctr"/>
-          <a:lstStyle/>
-          <a:p>
-            <a:pPr algn="ctr"/>
-          </a:p>
-        </p:txBody>
-      </p:sp>
-      <p:sp>
-        <p:nvSpPr>
-          <p:cNvPr id="5" name="TextBox 4"/>
-          <p:cNvSpPr txBox="1"/>
-          <p:nvPr/>
-        </p:nvSpPr>
-        <p:spPr>
-          <a:xfrm>
-            <a:off x="822960" y="1691640"/>
-            <a:ext cx="5120640" cy="365760"/>
-          </a:xfrm>
-          <a:prstGeom prst="rect">
-            <a:avLst/>
-          </a:prstGeom>
-          <a:noFill/>
-        </p:spPr>
-        <p:txBody>
-          <a:bodyPr wrap="square" anchor="t" lIns="0" rIns="0" tIns="0" bIns="0">
-            <a:spAutoFit/>
-          </a:bodyPr>
-          <a:lstStyle/>
-          <a:p>
-            <a:pPr algn="l">
-              <a:lnSpc>
-                <a:spcPct val="110000"/>
-              </a:lnSpc>
-              <a:spcAft>
-                <a:spcPts val="200"/>
-              </a:spcAft>
-            </a:pPr>
-            <a:r>
-              <a:rPr sz="1500" b="1">
-                <a:solidFill>
-                  <a:srgbClr val="02C39A"/>
-                </a:solidFill>
-                <a:latin typeface="Calibri"/>
-              </a:rPr>
-              <a:t>Belangrijkste gewichten (van 20 variabelen)</a:t>
-            </a:r>
-          </a:p>
-        </p:txBody>
-      </p:sp>
-      <p:graphicFrame>
-        <p:nvGraphicFramePr>
-          <p:cNvPr id="6" name="Table 5"/>
-          <p:cNvGraphicFramePr>
-            <a:graphicFrameLocks noGrp="1"/>
-          </p:cNvGraphicFramePr>
-          <p:nvPr/>
-        </p:nvGraphicFramePr>
-        <p:xfrm>
-          <a:off x="822960" y="2194560"/>
-          <a:ext cx="4937759" cy="3456432"/>
-        </p:xfrm>
-        <a:graphic>
-          <a:graphicData uri="http://schemas.openxmlformats.org/drawingml/2006/table">
-            <a:tbl>
-              <a:tblPr firstRow="1" bandRow="1">
-                <a:tableStyleId>{5C22544A-7EE6-4342-B048-85BDC9FD1C3A}</a:tableStyleId>
-              </a:tblPr>
-              <a:tblGrid>
-                <a:gridCol w="3061411"/>
-                <a:gridCol w="1876348"/>
-              </a:tblGrid>
-              <a:tr h="384048">
-                <a:tc>
-                  <a:txBody>
-                    <a:bodyPr/>
-                    <a:lstStyle/>
-                    <a:p>
-                      <a:pPr algn="l"/>
-                      <a:r>
-                        <a:rPr sz="1400" b="1">
-                          <a:solidFill>
-                            <a:srgbClr val="FFFFFF"/>
-                          </a:solidFill>
-                          <a:latin typeface="Calibri"/>
-                        </a:rPr>
-                        <a:t>Product</a:t>
-                      </a:r>
-                    </a:p>
-                  </a:txBody>
-                  <a:tcPr anchor="ctr">
-                    <a:solidFill>
-                      <a:srgbClr val="1E2761"/>
-                    </a:solidFill>
-                  </a:tcPr>
-                </a:tc>
-                <a:tc>
-                  <a:txBody>
-                    <a:bodyPr/>
-                    <a:lstStyle/>
-                    <a:p>
-                      <a:pPr algn="r"/>
-                      <a:r>
-                        <a:rPr sz="1400" b="1">
-                          <a:solidFill>
-                            <a:srgbClr val="FFFFFF"/>
-                          </a:solidFill>
-                          <a:latin typeface="Calibri"/>
-                        </a:rPr>
-                        <a:t>Gewicht</a:t>
-                      </a:r>
-                    </a:p>
-                  </a:txBody>
-                  <a:tcPr anchor="ctr">
-                    <a:solidFill>
-                      <a:srgbClr val="1E2761"/>
-                    </a:solidFill>
-                  </a:tcPr>
-                </a:tc>
-              </a:tr>
-              <a:tr h="384048">
-                <a:tc>
-                  <a:txBody>
-                    <a:bodyPr/>
-                    <a:lstStyle/>
-                    <a:p>
-                      <a:pPr algn="l"/>
-                      <a:r>
-                        <a:rPr sz="1400" b="0">
-                          <a:solidFill>
-                            <a:srgbClr val="21295C"/>
-                          </a:solidFill>
-                          <a:latin typeface="Calibri"/>
-                        </a:rPr>
-                        <a:t>Coffee</a:t>
-                      </a:r>
-                    </a:p>
-                  </a:txBody>
-                  <a:tcPr anchor="ctr">
-                    <a:solidFill>
-                      <a:srgbClr val="FFFFFF"/>
-                    </a:solidFill>
-                  </a:tcPr>
-                </a:tc>
-                <a:tc>
-                  <a:txBody>
-                    <a:bodyPr/>
-                    <a:lstStyle/>
-                    <a:p>
-                      <a:pPr algn="r"/>
-                      <a:r>
-                        <a:rPr sz="1400" b="1">
-                          <a:solidFill>
-                            <a:srgbClr val="21295C"/>
-                          </a:solidFill>
-                          <a:latin typeface="Calibri"/>
-                        </a:rPr>
-                        <a:t>37,0%</a:t>
-                      </a:r>
-                    </a:p>
-                  </a:txBody>
-                  <a:tcPr anchor="ctr">
-                    <a:solidFill>
-                      <a:srgbClr val="FFFFFF"/>
-                    </a:solidFill>
-                  </a:tcPr>
-                </a:tc>
-              </a:tr>
-              <a:tr h="384048">
-                <a:tc>
-                  <a:txBody>
-                    <a:bodyPr/>
-                    <a:lstStyle/>
-                    <a:p>
-                      <a:pPr algn="l"/>
-                      <a:r>
-                        <a:rPr sz="1400" b="0">
-                          <a:solidFill>
-                            <a:srgbClr val="21295C"/>
-                          </a:solidFill>
-                          <a:latin typeface="Calibri"/>
-                        </a:rPr>
-                        <a:t>Goud</a:t>
-                      </a:r>
-                    </a:p>
-                  </a:txBody>
-                  <a:tcPr anchor="ctr">
-                    <a:solidFill>
-                      <a:srgbClr val="EFF2FB"/>
-                    </a:solidFill>
-                  </a:tcPr>
-                </a:tc>
-                <a:tc>
-                  <a:txBody>
-                    <a:bodyPr/>
-                    <a:lstStyle/>
-                    <a:p>
-                      <a:pPr algn="r"/>
-                      <a:r>
-                        <a:rPr sz="1400" b="1">
-                          <a:solidFill>
-                            <a:srgbClr val="21295C"/>
-                          </a:solidFill>
-                          <a:latin typeface="Calibri"/>
-                        </a:rPr>
-                        <a:t>19,2%</a:t>
-                      </a:r>
-                    </a:p>
-                  </a:txBody>
-                  <a:tcPr anchor="ctr">
-                    <a:solidFill>
-                      <a:srgbClr val="EFF2FB"/>
-                    </a:solidFill>
-                  </a:tcPr>
-                </a:tc>
-              </a:tr>
-              <a:tr h="384048">
-                <a:tc>
-                  <a:txBody>
-                    <a:bodyPr/>
-                    <a:lstStyle/>
-                    <a:p>
-                      <a:pPr algn="l"/>
-                      <a:r>
-                        <a:rPr sz="1400" b="0">
-                          <a:solidFill>
-                            <a:srgbClr val="21295C"/>
-                          </a:solidFill>
-                          <a:latin typeface="Calibri"/>
-                        </a:rPr>
-                        <a:t>Gasoline</a:t>
-                      </a:r>
-                    </a:p>
-                  </a:txBody>
-                  <a:tcPr anchor="ctr">
-                    <a:solidFill>
-                      <a:srgbClr val="FFFFFF"/>
-                    </a:solidFill>
-                  </a:tcPr>
-                </a:tc>
-                <a:tc>
-                  <a:txBody>
-                    <a:bodyPr/>
-                    <a:lstStyle/>
-                    <a:p>
-                      <a:pPr algn="r"/>
-                      <a:r>
-                        <a:rPr sz="1400" b="1">
-                          <a:solidFill>
-                            <a:srgbClr val="21295C"/>
-                          </a:solidFill>
-                          <a:latin typeface="Calibri"/>
-                        </a:rPr>
-                        <a:t>10,5%</a:t>
-                      </a:r>
-                    </a:p>
-                  </a:txBody>
-                  <a:tcPr anchor="ctr">
-                    <a:solidFill>
-                      <a:srgbClr val="FFFFFF"/>
-                    </a:solidFill>
-                  </a:tcPr>
-                </a:tc>
-              </a:tr>
-              <a:tr h="384048">
-                <a:tc>
-                  <a:txBody>
-                    <a:bodyPr/>
-                    <a:lstStyle/>
-                    <a:p>
-                      <a:pPr algn="l"/>
-                      <a:r>
-                        <a:rPr sz="1400" b="0">
-                          <a:solidFill>
-                            <a:srgbClr val="21295C"/>
-                          </a:solidFill>
-                          <a:latin typeface="Calibri"/>
-                        </a:rPr>
-                        <a:t>Copper</a:t>
-                      </a:r>
-                    </a:p>
-                  </a:txBody>
-                  <a:tcPr anchor="ctr">
-                    <a:solidFill>
-                      <a:srgbClr val="EFF2FB"/>
-                    </a:solidFill>
-                  </a:tcPr>
-                </a:tc>
-                <a:tc>
-                  <a:txBody>
-                    <a:bodyPr/>
-                    <a:lstStyle/>
-                    <a:p>
-                      <a:pPr algn="r"/>
-                      <a:r>
-                        <a:rPr sz="1400" b="1">
-                          <a:solidFill>
-                            <a:srgbClr val="21295C"/>
-                          </a:solidFill>
-                          <a:latin typeface="Calibri"/>
-                        </a:rPr>
-                        <a:t>9,3%</a:t>
-                      </a:r>
-                    </a:p>
-                  </a:txBody>
-                  <a:tcPr anchor="ctr">
-                    <a:solidFill>
-                      <a:srgbClr val="EFF2FB"/>
-                    </a:solidFill>
-                  </a:tcPr>
-                </a:tc>
-              </a:tr>
-              <a:tr h="384048">
-                <a:tc>
-                  <a:txBody>
-                    <a:bodyPr/>
-                    <a:lstStyle/>
-                    <a:p>
-                      <a:pPr algn="l"/>
-                      <a:r>
-                        <a:rPr sz="1400" b="0">
-                          <a:solidFill>
-                            <a:srgbClr val="21295C"/>
-                          </a:solidFill>
-                          <a:latin typeface="Calibri"/>
-                        </a:rPr>
-                        <a:t>Broadcom</a:t>
-                      </a:r>
-                    </a:p>
-                  </a:txBody>
-                  <a:tcPr anchor="ctr">
-                    <a:solidFill>
-                      <a:srgbClr val="FFFFFF"/>
-                    </a:solidFill>
-                  </a:tcPr>
-                </a:tc>
-                <a:tc>
-                  <a:txBody>
-                    <a:bodyPr/>
-                    <a:lstStyle/>
-                    <a:p>
-                      <a:pPr algn="r"/>
-                      <a:r>
-                        <a:rPr sz="1400" b="1">
-                          <a:solidFill>
-                            <a:srgbClr val="21295C"/>
-                          </a:solidFill>
-                          <a:latin typeface="Calibri"/>
-                        </a:rPr>
-                        <a:t>6,8%</a:t>
-                      </a:r>
-                    </a:p>
-                  </a:txBody>
-                  <a:tcPr anchor="ctr">
-                    <a:solidFill>
-                      <a:srgbClr val="FFFFFF"/>
-                    </a:solidFill>
-                  </a:tcPr>
-                </a:tc>
-              </a:tr>
-              <a:tr h="384048">
-                <a:tc>
-                  <a:txBody>
-                    <a:bodyPr/>
-                    <a:lstStyle/>
-                    <a:p>
-                      <a:pPr algn="l"/>
-                      <a:r>
-                        <a:rPr sz="1400" b="0">
-                          <a:solidFill>
-                            <a:srgbClr val="21295C"/>
-                          </a:solidFill>
-                          <a:latin typeface="Calibri"/>
-                        </a:rPr>
-                        <a:t>Apple</a:t>
-                      </a:r>
-                    </a:p>
-                  </a:txBody>
-                  <a:tcPr anchor="ctr">
-                    <a:solidFill>
-                      <a:srgbClr val="EFF2FB"/>
-                    </a:solidFill>
-                  </a:tcPr>
-                </a:tc>
-                <a:tc>
-                  <a:txBody>
-                    <a:bodyPr/>
-                    <a:lstStyle/>
-                    <a:p>
-                      <a:pPr algn="r"/>
-                      <a:r>
-                        <a:rPr sz="1400" b="1">
-                          <a:solidFill>
-                            <a:srgbClr val="21295C"/>
-                          </a:solidFill>
-                          <a:latin typeface="Calibri"/>
-                        </a:rPr>
-                        <a:t>6,7%</a:t>
-                      </a:r>
-                    </a:p>
-                  </a:txBody>
-                  <a:tcPr anchor="ctr">
-                    <a:solidFill>
-                      <a:srgbClr val="EFF2FB"/>
-                    </a:solidFill>
-                  </a:tcPr>
-                </a:tc>
-              </a:tr>
-              <a:tr h="384048">
-                <a:tc>
-                  <a:txBody>
-                    <a:bodyPr/>
-                    <a:lstStyle/>
-                    <a:p>
-                      <a:pPr algn="l"/>
-                      <a:r>
-                        <a:rPr sz="1400" b="0">
-                          <a:solidFill>
-                            <a:srgbClr val="21295C"/>
-                          </a:solidFill>
-                          <a:latin typeface="Calibri"/>
-                        </a:rPr>
-                        <a:t>Steel</a:t>
-                      </a:r>
-                    </a:p>
-                  </a:txBody>
-                  <a:tcPr anchor="ctr">
-                    <a:solidFill>
-                      <a:srgbClr val="FFFFFF"/>
-                    </a:solidFill>
-                  </a:tcPr>
-                </a:tc>
-                <a:tc>
-                  <a:txBody>
-                    <a:bodyPr/>
-                    <a:lstStyle/>
-                    <a:p>
-                      <a:pPr algn="r"/>
-                      <a:r>
-                        <a:rPr sz="1400" b="1">
-                          <a:solidFill>
-                            <a:srgbClr val="21295C"/>
-                          </a:solidFill>
-                          <a:latin typeface="Calibri"/>
-                        </a:rPr>
-                        <a:t>5,0%</a:t>
-                      </a:r>
-                    </a:p>
-                  </a:txBody>
-                  <a:tcPr anchor="ctr">
-                    <a:solidFill>
-                      <a:srgbClr val="FFFFFF"/>
-                    </a:solidFill>
-                  </a:tcPr>
-                </a:tc>
-              </a:tr>
-              <a:tr h="384048">
-                <a:tc>
-                  <a:txBody>
-                    <a:bodyPr/>
-                    <a:lstStyle/>
-                    <a:p>
-                      <a:pPr algn="l"/>
-                      <a:r>
-                        <a:rPr sz="1400" b="0">
-                          <a:solidFill>
-                            <a:srgbClr val="21295C"/>
-                          </a:solidFill>
-                          <a:latin typeface="Calibri"/>
-                        </a:rPr>
-                        <a:t>Bitcoin</a:t>
-                      </a:r>
-                    </a:p>
-                  </a:txBody>
-                  <a:tcPr anchor="ctr">
-                    <a:solidFill>
-                      <a:srgbClr val="EFF2FB"/>
-                    </a:solidFill>
-                  </a:tcPr>
-                </a:tc>
-                <a:tc>
-                  <a:txBody>
-                    <a:bodyPr/>
-                    <a:lstStyle/>
-                    <a:p>
-                      <a:pPr algn="r"/>
-                      <a:r>
-                        <a:rPr sz="1400" b="1">
-                          <a:solidFill>
-                            <a:srgbClr val="21295C"/>
-                          </a:solidFill>
-                          <a:latin typeface="Calibri"/>
-                        </a:rPr>
-                        <a:t>4,0%</a:t>
-                      </a:r>
-                    </a:p>
-                  </a:txBody>
-                  <a:tcPr anchor="ctr">
-                    <a:solidFill>
-                      <a:srgbClr val="EFF2FB"/>
-                    </a:solidFill>
-                  </a:tcPr>
-                </a:tc>
-              </a:tr>
-            </a:tbl>
-          </a:graphicData>
-        </a:graphic>
-      </p:graphicFrame>
-      <p:sp>
-        <p:nvSpPr>
-          <p:cNvPr id="7" name="Rectangle 6"/>
-          <p:cNvSpPr/>
-          <p:nvPr/>
-        </p:nvSpPr>
-        <p:spPr>
-          <a:xfrm>
-            <a:off x="6492240" y="2194560"/>
-            <a:ext cx="4846320" cy="3291840"/>
-          </a:xfrm>
-          <a:prstGeom prst="rect">
-            <a:avLst/>
-          </a:prstGeom>
-          <a:solidFill>
-            <a:srgbClr val="1E2761"/>
-          </a:solidFill>
-          <a:ln>
-            <a:noFill/>
-          </a:ln>
-          <a:effectLst/>
-        </p:spPr>
-        <p:style>
-          <a:lnRef idx="1">
-            <a:schemeClr val="accent1"/>
-          </a:lnRef>
-          <a:fillRef idx="3">
-            <a:schemeClr val="accent1"/>
-          </a:fillRef>
-          <a:effectRef idx="2">
-            <a:schemeClr val="accent1"/>
-          </a:effectRef>
-          <a:fontRef idx="minor">
-            <a:schemeClr val="lt1"/>
-          </a:fontRef>
-        </p:style>
-        <p:txBody>
-          <a:bodyPr rtlCol="0" anchor="ctr"/>
-          <a:lstStyle/>
-          <a:p>
-            <a:pPr algn="ctr"/>
-          </a:p>
-        </p:txBody>
-      </p:sp>
-      <p:sp>
-        <p:nvSpPr>
-          <p:cNvPr id="8" name="TextBox 7"/>
-          <p:cNvSpPr txBox="1"/>
-          <p:nvPr/>
-        </p:nvSpPr>
-        <p:spPr>
-          <a:xfrm>
-            <a:off x="6812280" y="2468880"/>
-            <a:ext cx="4206240" cy="2743200"/>
-          </a:xfrm>
-          <a:prstGeom prst="rect">
-            <a:avLst/>
-          </a:prstGeom>
-          <a:noFill/>
-        </p:spPr>
-        <p:txBody>
-          <a:bodyPr wrap="square" anchor="t" lIns="0" rIns="0" tIns="0" bIns="0">
-            <a:spAutoFit/>
-          </a:bodyPr>
-          <a:lstStyle/>
-          <a:p>
-            <a:pPr algn="l">
-              <a:lnSpc>
-                <a:spcPct val="125000"/>
-              </a:lnSpc>
-              <a:spcAft>
-                <a:spcPts val="200"/>
-              </a:spcAft>
-            </a:pPr>
-            <a:r>
-              <a:rPr sz="2000" b="1">
-                <a:solidFill>
-                  <a:srgbClr val="02C39A"/>
-                </a:solidFill>
-                <a:latin typeface="Calibri"/>
-              </a:rPr>
-              <a:t>Resultaat</a:t>
-            </a:r>
-          </a:p>
-          <a:p>
-            <a:pPr algn="l">
-              <a:lnSpc>
-                <a:spcPct val="125000"/>
-              </a:lnSpc>
-              <a:spcAft>
-                <a:spcPts val="200"/>
-              </a:spcAft>
-            </a:pPr>
-            <a:r>
-              <a:rPr sz="600" b="0">
-                <a:solidFill>
-                  <a:srgbClr val="FFFFFF"/>
-                </a:solidFill>
-                <a:latin typeface="Calibri"/>
-              </a:rPr>
-              <a:t/>
-            </a:r>
-          </a:p>
-          <a:p>
-            <a:pPr algn="l">
-              <a:lnSpc>
-                <a:spcPct val="125000"/>
-              </a:lnSpc>
-              <a:spcAft>
-                <a:spcPts val="200"/>
-              </a:spcAft>
-            </a:pPr>
-            <a:r>
-              <a:rPr sz="1800" b="0">
-                <a:solidFill>
-                  <a:srgbClr val="FFFFFF"/>
-                </a:solidFill>
-                <a:latin typeface="Calibri"/>
-              </a:rPr>
-              <a:t>Rendement:   9,1%</a:t>
-            </a:r>
-          </a:p>
-          <a:p>
-            <a:pPr algn="l">
-              <a:lnSpc>
-                <a:spcPct val="125000"/>
-              </a:lnSpc>
-              <a:spcAft>
-                <a:spcPts val="200"/>
-              </a:spcAft>
-            </a:pPr>
-            <a:r>
-              <a:rPr sz="1800" b="0">
-                <a:solidFill>
-                  <a:srgbClr val="FFFFFF"/>
-                </a:solidFill>
-                <a:latin typeface="Calibri"/>
-              </a:rPr>
-              <a:t>Risico (std):   6,0%</a:t>
-            </a:r>
-          </a:p>
-          <a:p>
-            <a:pPr algn="l">
-              <a:lnSpc>
-                <a:spcPct val="125000"/>
-              </a:lnSpc>
-              <a:spcAft>
-                <a:spcPts val="200"/>
-              </a:spcAft>
-            </a:pPr>
-            <a:r>
-              <a:rPr sz="2200" b="1">
-                <a:solidFill>
-                  <a:srgbClr val="FFFFFF"/>
-                </a:solidFill>
-                <a:latin typeface="Calibri"/>
-              </a:rPr>
-              <a:t>Sharpe-ratio:   1,10</a:t>
-            </a:r>
-          </a:p>
-          <a:p>
-            <a:pPr algn="l">
-              <a:lnSpc>
-                <a:spcPct val="125000"/>
-              </a:lnSpc>
-              <a:spcAft>
-                <a:spcPts val="200"/>
-              </a:spcAft>
-            </a:pPr>
-            <a:r>
               <a:rPr sz="1000" b="0">
                 <a:solidFill>
                   <a:srgbClr val="FFFFFF"/>
